--- a/matome/9-phrases/9-phrases-matome.pptx
+++ b/matome/9-phrases/9-phrases-matome.pptx
@@ -447,7 +447,7 @@
       </p:grpSpPr>
       <p:sp>
         <p:nvSpPr>
-          <p:cNvPr id="2" name="Shape 0"/>
+          <p:cNvPr id="2" name=""/>
           <p:cNvSpPr/>
           <p:nvPr/>
         </p:nvSpPr>
@@ -469,7 +469,7 @@
       </p:sp>
       <p:sp>
         <p:nvSpPr>
-          <p:cNvPr id="3" name="Text 1"/>
+          <p:cNvPr id="3" name=""/>
           <p:cNvSpPr txBox="1"/>
           <p:nvPr/>
         </p:nvSpPr>
@@ -488,7 +488,7 @@
           <a:bodyPr wrap="square" lIns="0" tIns="0" rIns="0" bIns="0" anchor="ctr"/>
           <a:lstStyle/>
           <a:p>
-            <a:pPr algn="l"/>
+            <a:pPr/>
             <a:r>
               <a:rPr sz="1350" b="1">
                 <a:solidFill>
@@ -504,7 +504,7 @@
       </p:sp>
       <p:sp>
         <p:nvSpPr>
-          <p:cNvPr id="4" name="Text 2"/>
+          <p:cNvPr id="4" name=""/>
           <p:cNvSpPr txBox="1"/>
           <p:nvPr/>
         </p:nvSpPr>
@@ -523,7 +523,7 @@
           <a:bodyPr wrap="square" lIns="0" tIns="0" rIns="0" bIns="0" anchor="ctr"/>
           <a:lstStyle/>
           <a:p>
-            <a:pPr algn="l"/>
+            <a:pPr/>
             <a:r>
               <a:rPr sz="4950" b="1">
                 <a:solidFill>
@@ -539,7 +539,7 @@
       </p:sp>
       <p:sp>
         <p:nvSpPr>
-          <p:cNvPr id="5" name="Text 3"/>
+          <p:cNvPr id="5" name=""/>
           <p:cNvSpPr txBox="1"/>
           <p:nvPr/>
         </p:nvSpPr>
@@ -558,7 +558,7 @@
           <a:bodyPr wrap="square" lIns="0" tIns="0" rIns="0" bIns="0" anchor="ctr"/>
           <a:lstStyle/>
           <a:p>
-            <a:pPr algn="l"/>
+            <a:pPr/>
             <a:r>
               <a:rPr sz="9300" b="1">
                 <a:solidFill>
@@ -569,7 +569,7 @@
               </a:rPr>
               <a:t>9</a:t>
             </a:r>
-            <a:pPr algn="l"/>
+            <a:pPr/>
             <a:r>
               <a:rPr sz="4950" b="1">
                 <a:solidFill>
@@ -585,7 +585,7 @@
       </p:sp>
       <p:sp>
         <p:nvSpPr>
-          <p:cNvPr id="6" name="Text 4"/>
+          <p:cNvPr id="6" name=""/>
           <p:cNvSpPr txBox="1"/>
           <p:nvPr/>
         </p:nvSpPr>
@@ -604,7 +604,7 @@
           <a:bodyPr wrap="square" lIns="0" tIns="0" rIns="0" bIns="0" anchor="ctr"/>
           <a:lstStyle/>
           <a:p>
-            <a:pPr algn="l"/>
+            <a:pPr/>
             <a:r>
               <a:rPr sz="4950" b="1">
                 <a:solidFill>
@@ -623,7 +623,7 @@
       </p:sp>
       <p:sp>
         <p:nvSpPr>
-          <p:cNvPr id="7" name="Text 5"/>
+          <p:cNvPr id="7" name=""/>
           <p:cNvSpPr txBox="1"/>
           <p:nvPr/>
         </p:nvSpPr>
@@ -642,7 +642,7 @@
           <a:bodyPr wrap="square" lIns="0" tIns="0" rIns="0" bIns="0" anchor="ctr"/>
           <a:lstStyle/>
           <a:p>
-            <a:pPr algn="l"/>
+            <a:pPr/>
             <a:r>
               <a:rPr sz="1600" b="1">
                 <a:solidFill>
@@ -658,7 +658,7 @@
       </p:sp>
       <p:sp>
         <p:nvSpPr>
-          <p:cNvPr id="8" name="Text 6"/>
+          <p:cNvPr id="8" name=""/>
           <p:cNvSpPr txBox="1"/>
           <p:nvPr/>
         </p:nvSpPr>
@@ -677,7 +677,7 @@
           <a:bodyPr wrap="square" lIns="0" tIns="0" rIns="0" bIns="0" anchor="ctr"/>
           <a:lstStyle/>
           <a:p>
-            <a:pPr algn="l"/>
+            <a:pPr/>
             <a:r>
               <a:rPr sz="1600" b="1">
                 <a:solidFill>
@@ -693,7 +693,7 @@
       </p:sp>
       <p:sp>
         <p:nvSpPr>
-          <p:cNvPr id="9" name="Shape 7"/>
+          <p:cNvPr id="9" name=""/>
           <p:cNvSpPr/>
           <p:nvPr/>
         </p:nvSpPr>
@@ -713,7 +713,7 @@
       </p:sp>
       <p:sp>
         <p:nvSpPr>
-          <p:cNvPr id="10" name="Text 8"/>
+          <p:cNvPr id="10" name=""/>
           <p:cNvSpPr txBox="1"/>
           <p:nvPr/>
         </p:nvSpPr>
@@ -732,7 +732,7 @@
           <a:bodyPr wrap="square" lIns="0" tIns="0" rIns="0" bIns="0" anchor="ctr"/>
           <a:lstStyle/>
           <a:p>
-            <a:pPr algn="l"/>
+            <a:pPr/>
             <a:r>
               <a:rPr sz="1150" b="1">
                 <a:solidFill>
@@ -748,7 +748,7 @@
       </p:sp>
       <p:sp>
         <p:nvSpPr>
-          <p:cNvPr id="11" name="Shape 9"/>
+          <p:cNvPr id="11" name=""/>
           <p:cNvSpPr/>
           <p:nvPr/>
         </p:nvSpPr>
@@ -772,7 +772,7 @@
       </p:sp>
       <p:sp>
         <p:nvSpPr>
-          <p:cNvPr id="12" name="Text 10"/>
+          <p:cNvPr id="12" name=""/>
           <p:cNvSpPr txBox="1"/>
           <p:nvPr/>
         </p:nvSpPr>
@@ -791,7 +791,7 @@
           <a:bodyPr wrap="square" lIns="0" tIns="0" rIns="0" bIns="0" anchor="ctr"/>
           <a:lstStyle/>
           <a:p>
-            <a:pPr algn="l"/>
+            <a:pPr/>
             <a:r>
               <a:rPr sz="1650" b="1">
                 <a:solidFill>
@@ -807,7 +807,7 @@
       </p:sp>
       <p:sp>
         <p:nvSpPr>
-          <p:cNvPr id="13" name="Text 11"/>
+          <p:cNvPr id="13" name=""/>
           <p:cNvSpPr txBox="1"/>
           <p:nvPr/>
         </p:nvSpPr>
@@ -826,7 +826,7 @@
           <a:bodyPr wrap="square" lIns="0" tIns="0" rIns="0" bIns="0" anchor="ctr"/>
           <a:lstStyle/>
           <a:p>
-            <a:pPr algn="l"/>
+            <a:pPr/>
             <a:r>
               <a:rPr sz="1300" b="1">
                 <a:solidFill>
@@ -842,7 +842,7 @@
       </p:sp>
       <p:sp>
         <p:nvSpPr>
-          <p:cNvPr id="14" name="Shape 12"/>
+          <p:cNvPr id="14" name=""/>
           <p:cNvSpPr/>
           <p:nvPr/>
         </p:nvSpPr>
@@ -866,7 +866,7 @@
       </p:sp>
       <p:sp>
         <p:nvSpPr>
-          <p:cNvPr id="15" name="Text 13"/>
+          <p:cNvPr id="15" name=""/>
           <p:cNvSpPr txBox="1"/>
           <p:nvPr/>
         </p:nvSpPr>
@@ -885,7 +885,7 @@
           <a:bodyPr wrap="square" lIns="0" tIns="0" rIns="0" bIns="0" anchor="ctr"/>
           <a:lstStyle/>
           <a:p>
-            <a:pPr algn="l"/>
+            <a:pPr/>
             <a:r>
               <a:rPr sz="1650" b="1">
                 <a:solidFill>
@@ -901,7 +901,7 @@
       </p:sp>
       <p:sp>
         <p:nvSpPr>
-          <p:cNvPr id="16" name="Text 14"/>
+          <p:cNvPr id="16" name=""/>
           <p:cNvSpPr txBox="1"/>
           <p:nvPr/>
         </p:nvSpPr>
@@ -920,7 +920,7 @@
           <a:bodyPr wrap="square" lIns="0" tIns="0" rIns="0" bIns="0" anchor="ctr"/>
           <a:lstStyle/>
           <a:p>
-            <a:pPr algn="l"/>
+            <a:pPr/>
             <a:r>
               <a:rPr sz="1300" b="1">
                 <a:solidFill>
@@ -936,7 +936,7 @@
       </p:sp>
       <p:sp>
         <p:nvSpPr>
-          <p:cNvPr id="17" name="Shape 15"/>
+          <p:cNvPr id="17" name=""/>
           <p:cNvSpPr/>
           <p:nvPr/>
         </p:nvSpPr>
@@ -960,7 +960,7 @@
       </p:sp>
       <p:sp>
         <p:nvSpPr>
-          <p:cNvPr id="18" name="Text 16"/>
+          <p:cNvPr id="18" name=""/>
           <p:cNvSpPr txBox="1"/>
           <p:nvPr/>
         </p:nvSpPr>
@@ -979,7 +979,7 @@
           <a:bodyPr wrap="square" lIns="0" tIns="0" rIns="0" bIns="0" anchor="ctr"/>
           <a:lstStyle/>
           <a:p>
-            <a:pPr algn="l"/>
+            <a:pPr/>
             <a:r>
               <a:rPr sz="1650" b="1">
                 <a:solidFill>
@@ -995,7 +995,7 @@
       </p:sp>
       <p:sp>
         <p:nvSpPr>
-          <p:cNvPr id="19" name="Text 17"/>
+          <p:cNvPr id="19" name=""/>
           <p:cNvSpPr txBox="1"/>
           <p:nvPr/>
         </p:nvSpPr>
@@ -1014,7 +1014,7 @@
           <a:bodyPr wrap="square" lIns="0" tIns="0" rIns="0" bIns="0" anchor="ctr"/>
           <a:lstStyle/>
           <a:p>
-            <a:pPr algn="l"/>
+            <a:pPr/>
             <a:r>
               <a:rPr sz="1300" b="1">
                 <a:solidFill>
@@ -1030,7 +1030,7 @@
       </p:sp>
       <p:sp>
         <p:nvSpPr>
-          <p:cNvPr id="20" name="Shape 18"/>
+          <p:cNvPr id="20" name=""/>
           <p:cNvSpPr/>
           <p:nvPr/>
         </p:nvSpPr>
@@ -1054,7 +1054,7 @@
       </p:sp>
       <p:sp>
         <p:nvSpPr>
-          <p:cNvPr id="21" name="Text 19"/>
+          <p:cNvPr id="21" name=""/>
           <p:cNvSpPr txBox="1"/>
           <p:nvPr/>
         </p:nvSpPr>
@@ -1073,7 +1073,7 @@
           <a:bodyPr wrap="square" lIns="0" tIns="0" rIns="0" bIns="0" anchor="ctr"/>
           <a:lstStyle/>
           <a:p>
-            <a:pPr algn="l"/>
+            <a:pPr/>
             <a:r>
               <a:rPr sz="1650" b="1">
                 <a:solidFill>
@@ -1089,7 +1089,7 @@
       </p:sp>
       <p:sp>
         <p:nvSpPr>
-          <p:cNvPr id="22" name="Text 20"/>
+          <p:cNvPr id="22" name=""/>
           <p:cNvSpPr txBox="1"/>
           <p:nvPr/>
         </p:nvSpPr>
@@ -1108,7 +1108,7 @@
           <a:bodyPr wrap="square" lIns="0" tIns="0" rIns="0" bIns="0" anchor="ctr"/>
           <a:lstStyle/>
           <a:p>
-            <a:pPr algn="l"/>
+            <a:pPr/>
             <a:r>
               <a:rPr sz="1300" b="1">
                 <a:solidFill>
@@ -1124,7 +1124,7 @@
       </p:sp>
       <p:sp>
         <p:nvSpPr>
-          <p:cNvPr id="23" name="Shape 21"/>
+          <p:cNvPr id="23" name=""/>
           <p:cNvSpPr/>
           <p:nvPr/>
         </p:nvSpPr>
@@ -1148,7 +1148,7 @@
       </p:sp>
       <p:sp>
         <p:nvSpPr>
-          <p:cNvPr id="24" name="Text 22"/>
+          <p:cNvPr id="24" name=""/>
           <p:cNvSpPr txBox="1"/>
           <p:nvPr/>
         </p:nvSpPr>
@@ -1167,7 +1167,7 @@
           <a:bodyPr wrap="square" lIns="0" tIns="0" rIns="0" bIns="0" anchor="ctr"/>
           <a:lstStyle/>
           <a:p>
-            <a:pPr algn="l"/>
+            <a:pPr/>
             <a:r>
               <a:rPr sz="1650" b="1">
                 <a:solidFill>
@@ -1183,7 +1183,7 @@
       </p:sp>
       <p:sp>
         <p:nvSpPr>
-          <p:cNvPr id="25" name="Text 23"/>
+          <p:cNvPr id="25" name=""/>
           <p:cNvSpPr txBox="1"/>
           <p:nvPr/>
         </p:nvSpPr>
@@ -1202,7 +1202,7 @@
           <a:bodyPr wrap="square" lIns="0" tIns="0" rIns="0" bIns="0" anchor="ctr"/>
           <a:lstStyle/>
           <a:p>
-            <a:pPr algn="l"/>
+            <a:pPr/>
             <a:r>
               <a:rPr sz="1300" b="1">
                 <a:solidFill>
@@ -1218,7 +1218,7 @@
       </p:sp>
       <p:sp>
         <p:nvSpPr>
-          <p:cNvPr id="26" name="Shape 24"/>
+          <p:cNvPr id="26" name=""/>
           <p:cNvSpPr/>
           <p:nvPr/>
         </p:nvSpPr>
@@ -1242,7 +1242,7 @@
       </p:sp>
       <p:sp>
         <p:nvSpPr>
-          <p:cNvPr id="27" name="Text 25"/>
+          <p:cNvPr id="27" name=""/>
           <p:cNvSpPr txBox="1"/>
           <p:nvPr/>
         </p:nvSpPr>
@@ -1261,7 +1261,7 @@
           <a:bodyPr wrap="square" lIns="0" tIns="0" rIns="0" bIns="0" anchor="ctr"/>
           <a:lstStyle/>
           <a:p>
-            <a:pPr algn="l"/>
+            <a:pPr/>
             <a:r>
               <a:rPr sz="1650" b="1">
                 <a:solidFill>
@@ -1277,7 +1277,7 @@
       </p:sp>
       <p:sp>
         <p:nvSpPr>
-          <p:cNvPr id="28" name="Text 26"/>
+          <p:cNvPr id="28" name=""/>
           <p:cNvSpPr txBox="1"/>
           <p:nvPr/>
         </p:nvSpPr>
@@ -1296,7 +1296,7 @@
           <a:bodyPr wrap="square" lIns="0" tIns="0" rIns="0" bIns="0" anchor="ctr"/>
           <a:lstStyle/>
           <a:p>
-            <a:pPr algn="l"/>
+            <a:pPr/>
             <a:r>
               <a:rPr sz="1300" b="1">
                 <a:solidFill>
@@ -1312,7 +1312,7 @@
       </p:sp>
       <p:sp>
         <p:nvSpPr>
-          <p:cNvPr id="29" name="Shape 27"/>
+          <p:cNvPr id="29" name=""/>
           <p:cNvSpPr/>
           <p:nvPr/>
         </p:nvSpPr>
@@ -1336,7 +1336,7 @@
       </p:sp>
       <p:sp>
         <p:nvSpPr>
-          <p:cNvPr id="30" name="Text 28"/>
+          <p:cNvPr id="30" name=""/>
           <p:cNvSpPr txBox="1"/>
           <p:nvPr/>
         </p:nvSpPr>
@@ -1355,7 +1355,7 @@
           <a:bodyPr wrap="square" lIns="0" tIns="0" rIns="0" bIns="0" anchor="ctr"/>
           <a:lstStyle/>
           <a:p>
-            <a:pPr algn="l"/>
+            <a:pPr/>
             <a:r>
               <a:rPr sz="1650" b="1">
                 <a:solidFill>
@@ -1371,7 +1371,7 @@
       </p:sp>
       <p:sp>
         <p:nvSpPr>
-          <p:cNvPr id="31" name="Text 29"/>
+          <p:cNvPr id="31" name=""/>
           <p:cNvSpPr txBox="1"/>
           <p:nvPr/>
         </p:nvSpPr>
@@ -1390,7 +1390,7 @@
           <a:bodyPr wrap="square" lIns="0" tIns="0" rIns="0" bIns="0" anchor="ctr"/>
           <a:lstStyle/>
           <a:p>
-            <a:pPr algn="l"/>
+            <a:pPr/>
             <a:r>
               <a:rPr sz="1300" b="1">
                 <a:solidFill>
@@ -1406,7 +1406,7 @@
       </p:sp>
       <p:sp>
         <p:nvSpPr>
-          <p:cNvPr id="32" name="Shape 30"/>
+          <p:cNvPr id="32" name=""/>
           <p:cNvSpPr/>
           <p:nvPr/>
         </p:nvSpPr>
@@ -1430,7 +1430,7 @@
       </p:sp>
       <p:sp>
         <p:nvSpPr>
-          <p:cNvPr id="33" name="Text 31"/>
+          <p:cNvPr id="33" name=""/>
           <p:cNvSpPr txBox="1"/>
           <p:nvPr/>
         </p:nvSpPr>
@@ -1449,7 +1449,7 @@
           <a:bodyPr wrap="square" lIns="0" tIns="0" rIns="0" bIns="0" anchor="ctr"/>
           <a:lstStyle/>
           <a:p>
-            <a:pPr algn="l"/>
+            <a:pPr/>
             <a:r>
               <a:rPr sz="1650" b="1">
                 <a:solidFill>
@@ -1465,7 +1465,7 @@
       </p:sp>
       <p:sp>
         <p:nvSpPr>
-          <p:cNvPr id="34" name="Text 32"/>
+          <p:cNvPr id="34" name=""/>
           <p:cNvSpPr txBox="1"/>
           <p:nvPr/>
         </p:nvSpPr>
@@ -1484,7 +1484,7 @@
           <a:bodyPr wrap="square" lIns="0" tIns="0" rIns="0" bIns="0" anchor="ctr"/>
           <a:lstStyle/>
           <a:p>
-            <a:pPr algn="l"/>
+            <a:pPr/>
             <a:r>
               <a:rPr sz="1300" b="1">
                 <a:solidFill>
@@ -1500,7 +1500,7 @@
       </p:sp>
       <p:sp>
         <p:nvSpPr>
-          <p:cNvPr id="35" name="Shape 33"/>
+          <p:cNvPr id="35" name=""/>
           <p:cNvSpPr/>
           <p:nvPr/>
         </p:nvSpPr>
@@ -1524,7 +1524,7 @@
       </p:sp>
       <p:sp>
         <p:nvSpPr>
-          <p:cNvPr id="36" name="Text 34"/>
+          <p:cNvPr id="36" name=""/>
           <p:cNvSpPr txBox="1"/>
           <p:nvPr/>
         </p:nvSpPr>
@@ -1543,7 +1543,7 @@
           <a:bodyPr wrap="square" lIns="0" tIns="0" rIns="0" bIns="0" anchor="ctr"/>
           <a:lstStyle/>
           <a:p>
-            <a:pPr algn="l"/>
+            <a:pPr/>
             <a:r>
               <a:rPr sz="1650" b="1">
                 <a:solidFill>
@@ -1559,7 +1559,7 @@
       </p:sp>
       <p:sp>
         <p:nvSpPr>
-          <p:cNvPr id="37" name="Text 35"/>
+          <p:cNvPr id="37" name=""/>
           <p:cNvSpPr txBox="1"/>
           <p:nvPr/>
         </p:nvSpPr>
@@ -1578,7 +1578,7 @@
           <a:bodyPr wrap="square" lIns="0" tIns="0" rIns="0" bIns="0" anchor="ctr"/>
           <a:lstStyle/>
           <a:p>
-            <a:pPr algn="l"/>
+            <a:pPr/>
             <a:r>
               <a:rPr sz="1300" b="1">
                 <a:solidFill>
@@ -1626,7 +1626,7 @@
       </p:grpSpPr>
       <p:sp>
         <p:nvSpPr>
-          <p:cNvPr id="2" name="Text 0"/>
+          <p:cNvPr id="2" name=""/>
           <p:cNvSpPr txBox="1"/>
           <p:nvPr/>
         </p:nvSpPr>
@@ -1645,7 +1645,7 @@
           <a:bodyPr wrap="square" lIns="0" tIns="0" rIns="0" bIns="0" anchor="ctr"/>
           <a:lstStyle/>
           <a:p>
-            <a:pPr algn="l"/>
+            <a:pPr/>
             <a:r>
               <a:rPr sz="1150" b="1">
                 <a:solidFill>
@@ -1661,7 +1661,7 @@
       </p:sp>
       <p:sp>
         <p:nvSpPr>
-          <p:cNvPr id="3" name="Shape 1"/>
+          <p:cNvPr id="3" name=""/>
           <p:cNvSpPr/>
           <p:nvPr/>
         </p:nvSpPr>
@@ -1681,7 +1681,7 @@
       </p:sp>
       <p:sp>
         <p:nvSpPr>
-          <p:cNvPr id="4" name="Shape 2"/>
+          <p:cNvPr id="4" name=""/>
           <p:cNvSpPr/>
           <p:nvPr/>
         </p:nvSpPr>
@@ -1701,7 +1701,7 @@
       </p:sp>
       <p:sp>
         <p:nvSpPr>
-          <p:cNvPr id="5" name="Shape 3"/>
+          <p:cNvPr id="5" name=""/>
           <p:cNvSpPr/>
           <p:nvPr/>
         </p:nvSpPr>
@@ -1721,7 +1721,7 @@
       </p:sp>
       <p:sp>
         <p:nvSpPr>
-          <p:cNvPr id="6" name="Shape 4"/>
+          <p:cNvPr id="6" name=""/>
           <p:cNvSpPr/>
           <p:nvPr/>
         </p:nvSpPr>
@@ -1741,7 +1741,7 @@
       </p:sp>
       <p:sp>
         <p:nvSpPr>
-          <p:cNvPr id="7" name="Shape 5"/>
+          <p:cNvPr id="7" name=""/>
           <p:cNvSpPr/>
           <p:nvPr/>
         </p:nvSpPr>
@@ -1761,7 +1761,7 @@
       </p:sp>
       <p:sp>
         <p:nvSpPr>
-          <p:cNvPr id="8" name="Shape 6"/>
+          <p:cNvPr id="8" name=""/>
           <p:cNvSpPr/>
           <p:nvPr/>
         </p:nvSpPr>
@@ -1781,7 +1781,7 @@
       </p:sp>
       <p:sp>
         <p:nvSpPr>
-          <p:cNvPr id="9" name="Shape 7"/>
+          <p:cNvPr id="9" name=""/>
           <p:cNvSpPr/>
           <p:nvPr/>
         </p:nvSpPr>
@@ -1801,7 +1801,7 @@
       </p:sp>
       <p:sp>
         <p:nvSpPr>
-          <p:cNvPr id="10" name="Shape 8"/>
+          <p:cNvPr id="10" name=""/>
           <p:cNvSpPr/>
           <p:nvPr/>
         </p:nvSpPr>
@@ -1821,7 +1821,7 @@
       </p:sp>
       <p:sp>
         <p:nvSpPr>
-          <p:cNvPr id="11" name="Shape 9"/>
+          <p:cNvPr id="11" name=""/>
           <p:cNvSpPr/>
           <p:nvPr/>
         </p:nvSpPr>
@@ -1843,7 +1843,7 @@
       </p:sp>
       <p:sp>
         <p:nvSpPr>
-          <p:cNvPr id="12" name="Text 10"/>
+          <p:cNvPr id="12" name=""/>
           <p:cNvSpPr txBox="1"/>
           <p:nvPr/>
         </p:nvSpPr>
@@ -1862,7 +1862,7 @@
           <a:bodyPr wrap="square" lIns="0" tIns="0" rIns="0" bIns="0" anchor="ctr"/>
           <a:lstStyle/>
           <a:p>
-            <a:pPr algn="l"/>
+            <a:pPr/>
             <a:r>
               <a:rPr sz="8100" b="1">
                 <a:solidFill>
@@ -1878,7 +1878,7 @@
       </p:sp>
       <p:sp>
         <p:nvSpPr>
-          <p:cNvPr id="13" name="Text 11"/>
+          <p:cNvPr id="13" name=""/>
           <p:cNvSpPr txBox="1"/>
           <p:nvPr/>
         </p:nvSpPr>
@@ -1897,7 +1897,7 @@
           <a:bodyPr wrap="square" lIns="0" tIns="0" rIns="0" bIns="0" anchor="ctr"/>
           <a:lstStyle/>
           <a:p>
-            <a:pPr algn="l"/>
+            <a:pPr/>
             <a:r>
               <a:rPr sz="4050" b="1">
                 <a:solidFill>
@@ -1908,7 +1908,7 @@
               </a:rPr>
               <a:t>I'm trying to </a:t>
             </a:r>
-            <a:pPr algn="l"/>
+            <a:pPr/>
             <a:r>
               <a:rPr sz="4050" b="1">
                 <a:solidFill>
@@ -1924,7 +1924,7 @@
       </p:sp>
       <p:sp>
         <p:nvSpPr>
-          <p:cNvPr id="14" name="Text 12"/>
+          <p:cNvPr id="14" name=""/>
           <p:cNvSpPr txBox="1"/>
           <p:nvPr/>
         </p:nvSpPr>
@@ -1943,7 +1943,7 @@
           <a:bodyPr wrap="square" lIns="0" tIns="0" rIns="0" bIns="0" anchor="ctr"/>
           <a:lstStyle/>
           <a:p>
-            <a:pPr algn="l"/>
+            <a:pPr/>
             <a:r>
               <a:rPr sz="2100" b="1">
                 <a:solidFill>
@@ -1959,7 +1959,7 @@
       </p:sp>
       <p:sp>
         <p:nvSpPr>
-          <p:cNvPr id="15" name="Shape 13"/>
+          <p:cNvPr id="15" name=""/>
           <p:cNvSpPr/>
           <p:nvPr/>
         </p:nvSpPr>
@@ -1981,7 +1981,7 @@
       </p:sp>
       <p:sp>
         <p:nvSpPr>
-          <p:cNvPr id="16" name="Text 14"/>
+          <p:cNvPr id="16" name=""/>
           <p:cNvSpPr txBox="1"/>
           <p:nvPr/>
         </p:nvSpPr>
@@ -2000,7 +2000,7 @@
           <a:bodyPr wrap="square" lIns="0" tIns="0" rIns="0" bIns="0" anchor="ctr"/>
           <a:lstStyle/>
           <a:p>
-            <a:pPr algn="l"/>
+            <a:pPr/>
             <a:r>
               <a:rPr sz="1300" b="1">
                 <a:solidFill>
@@ -2016,7 +2016,7 @@
       </p:sp>
       <p:sp>
         <p:nvSpPr>
-          <p:cNvPr id="17" name="Text 15"/>
+          <p:cNvPr id="17" name=""/>
           <p:cNvSpPr txBox="1"/>
           <p:nvPr/>
         </p:nvSpPr>
@@ -2035,7 +2035,7 @@
           <a:bodyPr wrap="square" lIns="0" tIns="0" rIns="0" bIns="0" anchor="ctr"/>
           <a:lstStyle/>
           <a:p>
-            <a:pPr algn="l"/>
+            <a:pPr/>
             <a:r>
               <a:rPr sz="1150" b="1">
                 <a:solidFill>
@@ -2051,7 +2051,7 @@
       </p:sp>
       <p:sp>
         <p:nvSpPr>
-          <p:cNvPr id="18" name="Shape 16"/>
+          <p:cNvPr id="18" name=""/>
           <p:cNvSpPr/>
           <p:nvPr/>
         </p:nvSpPr>
@@ -2074,7 +2074,7 @@
       </p:sp>
       <p:sp>
         <p:nvSpPr>
-          <p:cNvPr id="19" name="Shape 17"/>
+          <p:cNvPr id="19" name=""/>
           <p:cNvSpPr/>
           <p:nvPr/>
         </p:nvSpPr>
@@ -2103,7 +2103,7 @@
       </p:sp>
       <p:sp>
         <p:nvSpPr>
-          <p:cNvPr id="20" name="Shape 18"/>
+          <p:cNvPr id="20" name=""/>
           <p:cNvSpPr/>
           <p:nvPr/>
         </p:nvSpPr>
@@ -2123,7 +2123,7 @@
       </p:sp>
       <p:sp>
         <p:nvSpPr>
-          <p:cNvPr id="21" name="Text 19"/>
+          <p:cNvPr id="21" name=""/>
           <p:cNvSpPr txBox="1"/>
           <p:nvPr/>
         </p:nvSpPr>
@@ -2158,7 +2158,7 @@
       </p:sp>
       <p:sp>
         <p:nvSpPr>
-          <p:cNvPr id="22" name="Text 20"/>
+          <p:cNvPr id="22" name=""/>
           <p:cNvSpPr txBox="1"/>
           <p:nvPr/>
         </p:nvSpPr>
@@ -2177,7 +2177,7 @@
           <a:bodyPr wrap="square" lIns="0" tIns="0" rIns="0" bIns="0" anchor="ctr"/>
           <a:lstStyle/>
           <a:p>
-            <a:pPr algn="l"/>
+            <a:pPr/>
             <a:r>
               <a:rPr sz="2350" b="1">
                 <a:solidFill>
@@ -2191,7 +2191,7 @@
               </a:rPr>
               <a:t>I'm trying to</a:t>
             </a:r>
-            <a:pPr algn="l"/>
+            <a:pPr/>
             <a:r>
               <a:rPr sz="2350" b="1">
                 <a:solidFill>
@@ -2202,7 +2202,7 @@
               </a:rPr>
               <a:t> </a:t>
             </a:r>
-            <a:pPr algn="l"/>
+            <a:pPr/>
             <a:r>
               <a:rPr sz="2350" b="1">
                 <a:solidFill>
@@ -2213,7 +2213,7 @@
               </a:rPr>
               <a:t>learn</a:t>
             </a:r>
-            <a:pPr algn="l"/>
+            <a:pPr/>
             <a:r>
               <a:rPr sz="2350" b="1">
                 <a:solidFill>
@@ -2229,7 +2229,7 @@
       </p:sp>
       <p:sp>
         <p:nvSpPr>
-          <p:cNvPr id="23" name="Text 21"/>
+          <p:cNvPr id="23" name=""/>
           <p:cNvSpPr txBox="1"/>
           <p:nvPr/>
         </p:nvSpPr>
@@ -2248,7 +2248,7 @@
           <a:bodyPr wrap="square" lIns="0" tIns="0" rIns="0" bIns="0" anchor="ctr"/>
           <a:lstStyle/>
           <a:p>
-            <a:pPr algn="l"/>
+            <a:pPr/>
             <a:r>
               <a:rPr sz="1650" b="1">
                 <a:solidFill>
@@ -2264,7 +2264,7 @@
       </p:sp>
       <p:sp>
         <p:nvSpPr>
-          <p:cNvPr id="24" name="Shape 22"/>
+          <p:cNvPr id="24" name=""/>
           <p:cNvSpPr/>
           <p:nvPr/>
         </p:nvSpPr>
@@ -2293,7 +2293,7 @@
       </p:sp>
       <p:sp>
         <p:nvSpPr>
-          <p:cNvPr id="25" name="Shape 23"/>
+          <p:cNvPr id="25" name=""/>
           <p:cNvSpPr/>
           <p:nvPr/>
         </p:nvSpPr>
@@ -2313,7 +2313,7 @@
       </p:sp>
       <p:sp>
         <p:nvSpPr>
-          <p:cNvPr id="26" name="Text 24"/>
+          <p:cNvPr id="26" name=""/>
           <p:cNvSpPr txBox="1"/>
           <p:nvPr/>
         </p:nvSpPr>
@@ -2348,7 +2348,7 @@
       </p:sp>
       <p:sp>
         <p:nvSpPr>
-          <p:cNvPr id="27" name="Text 25"/>
+          <p:cNvPr id="27" name=""/>
           <p:cNvSpPr txBox="1"/>
           <p:nvPr/>
         </p:nvSpPr>
@@ -2367,7 +2367,7 @@
           <a:bodyPr wrap="square" lIns="0" tIns="0" rIns="0" bIns="0" anchor="ctr"/>
           <a:lstStyle/>
           <a:p>
-            <a:pPr algn="l"/>
+            <a:pPr/>
             <a:r>
               <a:rPr sz="2350" b="1">
                 <a:solidFill>
@@ -2381,7 +2381,7 @@
               </a:rPr>
               <a:t>I'm trying to</a:t>
             </a:r>
-            <a:pPr algn="l"/>
+            <a:pPr/>
             <a:r>
               <a:rPr sz="2350" b="1">
                 <a:solidFill>
@@ -2392,7 +2392,7 @@
               </a:rPr>
               <a:t> </a:t>
             </a:r>
-            <a:pPr algn="l"/>
+            <a:pPr/>
             <a:r>
               <a:rPr sz="2350" b="1">
                 <a:solidFill>
@@ -2403,7 +2403,7 @@
               </a:rPr>
               <a:t>save</a:t>
             </a:r>
-            <a:pPr algn="l"/>
+            <a:pPr/>
             <a:r>
               <a:rPr sz="2350" b="1">
                 <a:solidFill>
@@ -2419,7 +2419,7 @@
       </p:sp>
       <p:sp>
         <p:nvSpPr>
-          <p:cNvPr id="28" name="Text 26"/>
+          <p:cNvPr id="28" name=""/>
           <p:cNvSpPr txBox="1"/>
           <p:nvPr/>
         </p:nvSpPr>
@@ -2438,7 +2438,7 @@
           <a:bodyPr wrap="square" lIns="0" tIns="0" rIns="0" bIns="0" anchor="ctr"/>
           <a:lstStyle/>
           <a:p>
-            <a:pPr algn="l"/>
+            <a:pPr/>
             <a:r>
               <a:rPr sz="1650" b="1">
                 <a:solidFill>
@@ -2454,7 +2454,7 @@
       </p:sp>
       <p:sp>
         <p:nvSpPr>
-          <p:cNvPr id="29" name="Shape 27"/>
+          <p:cNvPr id="29" name=""/>
           <p:cNvSpPr/>
           <p:nvPr/>
         </p:nvSpPr>
@@ -2481,7 +2481,7 @@
       </p:sp>
       <p:sp>
         <p:nvSpPr>
-          <p:cNvPr id="30" name="Text 28"/>
+          <p:cNvPr id="30" name=""/>
           <p:cNvSpPr txBox="1"/>
           <p:nvPr/>
         </p:nvSpPr>
@@ -2500,7 +2500,7 @@
           <a:bodyPr wrap="square" lIns="0" tIns="0" rIns="0" bIns="0" anchor="ctr"/>
           <a:lstStyle/>
           <a:p>
-            <a:pPr algn="l"/>
+            <a:pPr/>
             <a:r>
               <a:rPr sz="1150" b="1">
                 <a:solidFill>
@@ -2516,7 +2516,7 @@
       </p:sp>
       <p:sp>
         <p:nvSpPr>
-          <p:cNvPr id="31" name="Shape 29"/>
+          <p:cNvPr id="31" name=""/>
           <p:cNvSpPr/>
           <p:nvPr/>
         </p:nvSpPr>
@@ -2545,7 +2545,7 @@
       </p:sp>
       <p:sp>
         <p:nvSpPr>
-          <p:cNvPr id="32" name="Shape 30"/>
+          <p:cNvPr id="32" name=""/>
           <p:cNvSpPr/>
           <p:nvPr/>
         </p:nvSpPr>
@@ -2565,7 +2565,7 @@
       </p:sp>
       <p:sp>
         <p:nvSpPr>
-          <p:cNvPr id="33" name="Text 31"/>
+          <p:cNvPr id="33" name=""/>
           <p:cNvSpPr txBox="1"/>
           <p:nvPr/>
         </p:nvSpPr>
@@ -2600,7 +2600,7 @@
       </p:sp>
       <p:sp>
         <p:nvSpPr>
-          <p:cNvPr id="34" name="Text 32"/>
+          <p:cNvPr id="34" name=""/>
           <p:cNvSpPr txBox="1"/>
           <p:nvPr/>
         </p:nvSpPr>
@@ -2619,7 +2619,7 @@
           <a:bodyPr wrap="square" lIns="0" tIns="0" rIns="0" bIns="0" anchor="ctr"/>
           <a:lstStyle/>
           <a:p>
-            <a:pPr algn="l"/>
+            <a:pPr/>
             <a:r>
               <a:rPr sz="2350" b="1">
                 <a:solidFill>
@@ -2633,7 +2633,7 @@
               </a:rPr>
               <a:t>I'm trying to</a:t>
             </a:r>
-            <a:pPr algn="l"/>
+            <a:pPr/>
             <a:r>
               <a:rPr sz="2350" b="1">
                 <a:solidFill>
@@ -2644,7 +2644,7 @@
               </a:rPr>
               <a:t> </a:t>
             </a:r>
-            <a:pPr algn="l"/>
+            <a:pPr/>
             <a:r>
               <a:rPr sz="2350" b="1">
                 <a:solidFill>
@@ -2655,7 +2655,7 @@
               </a:rPr>
               <a:t>figure</a:t>
             </a:r>
-            <a:pPr algn="l"/>
+            <a:pPr/>
             <a:r>
               <a:rPr sz="2350" b="1">
                 <a:solidFill>
@@ -2671,7 +2671,7 @@
       </p:sp>
       <p:sp>
         <p:nvSpPr>
-          <p:cNvPr id="35" name="Text 33"/>
+          <p:cNvPr id="35" name=""/>
           <p:cNvSpPr txBox="1"/>
           <p:nvPr/>
         </p:nvSpPr>
@@ -2690,7 +2690,7 @@
           <a:bodyPr wrap="square" lIns="0" tIns="0" rIns="0" bIns="0" anchor="ctr"/>
           <a:lstStyle/>
           <a:p>
-            <a:pPr algn="l"/>
+            <a:pPr/>
             <a:r>
               <a:rPr sz="1650" b="1">
                 <a:solidFill>
@@ -2738,7 +2738,7 @@
       </p:grpSpPr>
       <p:sp>
         <p:nvSpPr>
-          <p:cNvPr id="2" name="Text 0"/>
+          <p:cNvPr id="2" name=""/>
           <p:cNvSpPr txBox="1"/>
           <p:nvPr/>
         </p:nvSpPr>
@@ -2757,7 +2757,7 @@
           <a:bodyPr wrap="square" lIns="0" tIns="0" rIns="0" bIns="0" anchor="ctr"/>
           <a:lstStyle/>
           <a:p>
-            <a:pPr algn="l"/>
+            <a:pPr/>
             <a:r>
               <a:rPr sz="1150" b="1">
                 <a:solidFill>
@@ -2773,7 +2773,7 @@
       </p:sp>
       <p:sp>
         <p:nvSpPr>
-          <p:cNvPr id="3" name="Text 1"/>
+          <p:cNvPr id="3" name=""/>
           <p:cNvSpPr txBox="1"/>
           <p:nvPr/>
         </p:nvSpPr>
@@ -2792,7 +2792,7 @@
           <a:bodyPr wrap="square" lIns="0" tIns="0" rIns="0" bIns="0" anchor="ctr"/>
           <a:lstStyle/>
           <a:p>
-            <a:pPr algn="l"/>
+            <a:pPr/>
             <a:r>
               <a:rPr sz="1150" b="1">
                 <a:solidFill>
@@ -2808,7 +2808,7 @@
       </p:sp>
       <p:sp>
         <p:nvSpPr>
-          <p:cNvPr id="4" name="Text 2"/>
+          <p:cNvPr id="4" name=""/>
           <p:cNvSpPr txBox="1"/>
           <p:nvPr/>
         </p:nvSpPr>
@@ -2827,7 +2827,7 @@
           <a:bodyPr wrap="square" lIns="0" tIns="0" rIns="0" bIns="0" anchor="ctr"/>
           <a:lstStyle/>
           <a:p>
-            <a:pPr algn="l"/>
+            <a:pPr/>
             <a:r>
               <a:rPr sz="3000" b="1">
                 <a:solidFill>
@@ -2843,7 +2843,7 @@
       </p:sp>
       <p:sp>
         <p:nvSpPr>
-          <p:cNvPr id="5" name="Text 3"/>
+          <p:cNvPr id="5" name=""/>
           <p:cNvSpPr txBox="1"/>
           <p:nvPr/>
         </p:nvSpPr>
@@ -2862,7 +2862,7 @@
           <a:bodyPr wrap="square" lIns="0" tIns="0" rIns="0" bIns="0" anchor="ctr"/>
           <a:lstStyle/>
           <a:p>
-            <a:pPr algn="l"/>
+            <a:pPr/>
             <a:r>
               <a:rPr sz="1350" b="1">
                 <a:solidFill>
@@ -2878,7 +2878,7 @@
       </p:sp>
       <p:sp>
         <p:nvSpPr>
-          <p:cNvPr id="6" name="Shape 4"/>
+          <p:cNvPr id="6" name=""/>
           <p:cNvSpPr/>
           <p:nvPr/>
         </p:nvSpPr>
@@ -2907,7 +2907,7 @@
       </p:sp>
       <p:sp>
         <p:nvSpPr>
-          <p:cNvPr id="7" name="Text 5"/>
+          <p:cNvPr id="7" name=""/>
           <p:cNvSpPr txBox="1"/>
           <p:nvPr/>
         </p:nvSpPr>
@@ -2926,7 +2926,7 @@
           <a:bodyPr wrap="square" lIns="0" tIns="0" rIns="0" bIns="0" anchor="ctr"/>
           <a:lstStyle/>
           <a:p>
-            <a:pPr algn="l"/>
+            <a:pPr/>
             <a:r>
               <a:rPr sz="1650" b="1">
                 <a:solidFill>
@@ -2942,7 +2942,7 @@
       </p:sp>
       <p:sp>
         <p:nvSpPr>
-          <p:cNvPr id="8" name="Text 6"/>
+          <p:cNvPr id="8" name=""/>
           <p:cNvSpPr txBox="1"/>
           <p:nvPr/>
         </p:nvSpPr>
@@ -2961,7 +2961,7 @@
           <a:bodyPr wrap="square" lIns="0" tIns="0" rIns="0" bIns="0" anchor="ctr"/>
           <a:lstStyle/>
           <a:p>
-            <a:pPr algn="l"/>
+            <a:pPr/>
             <a:r>
               <a:rPr sz="1900" b="1">
                 <a:solidFill>
@@ -2977,7 +2977,7 @@
       </p:sp>
       <p:sp>
         <p:nvSpPr>
-          <p:cNvPr id="9" name="Text 7"/>
+          <p:cNvPr id="9" name=""/>
           <p:cNvSpPr txBox="1"/>
           <p:nvPr/>
         </p:nvSpPr>
@@ -2996,7 +2996,7 @@
           <a:bodyPr wrap="square" lIns="0" tIns="0" rIns="0" bIns="0" anchor="ctr"/>
           <a:lstStyle/>
           <a:p>
-            <a:pPr algn="l"/>
+            <a:pPr/>
             <a:r>
               <a:rPr sz="1350" b="1">
                 <a:solidFill>
@@ -3012,7 +3012,7 @@
       </p:sp>
       <p:sp>
         <p:nvSpPr>
-          <p:cNvPr id="10" name="Shape 8"/>
+          <p:cNvPr id="10" name=""/>
           <p:cNvSpPr/>
           <p:nvPr/>
         </p:nvSpPr>
@@ -3035,7 +3035,7 @@
       </p:sp>
       <p:sp>
         <p:nvSpPr>
-          <p:cNvPr id="11" name="Text 9"/>
+          <p:cNvPr id="11" name=""/>
           <p:cNvSpPr txBox="1"/>
           <p:nvPr/>
         </p:nvSpPr>
@@ -3054,7 +3054,7 @@
           <a:bodyPr wrap="square" lIns="0" tIns="0" rIns="0" bIns="0" anchor="ctr"/>
           <a:lstStyle/>
           <a:p>
-            <a:pPr algn="l"/>
+            <a:pPr/>
             <a:r>
               <a:rPr sz="1300" b="1">
                 <a:solidFill>
@@ -3070,7 +3070,7 @@
       </p:sp>
       <p:sp>
         <p:nvSpPr>
-          <p:cNvPr id="12" name="Text 10"/>
+          <p:cNvPr id="12" name=""/>
           <p:cNvSpPr txBox="1"/>
           <p:nvPr/>
         </p:nvSpPr>
@@ -3089,7 +3089,7 @@
           <a:bodyPr wrap="square" lIns="0" tIns="0" rIns="0" bIns="0" anchor="ctr"/>
           <a:lstStyle/>
           <a:p>
-            <a:pPr algn="l"/>
+            <a:pPr/>
             <a:r>
               <a:rPr sz="1050" b="1">
                 <a:solidFill>
@@ -3105,7 +3105,7 @@
       </p:sp>
       <p:sp>
         <p:nvSpPr>
-          <p:cNvPr id="13" name="Shape 11"/>
+          <p:cNvPr id="13" name=""/>
           <p:cNvSpPr/>
           <p:nvPr/>
         </p:nvSpPr>
@@ -3134,7 +3134,7 @@
       </p:sp>
       <p:sp>
         <p:nvSpPr>
-          <p:cNvPr id="14" name="Text 12"/>
+          <p:cNvPr id="14" name=""/>
           <p:cNvSpPr txBox="1"/>
           <p:nvPr/>
         </p:nvSpPr>
@@ -3153,7 +3153,7 @@
           <a:bodyPr wrap="square" lIns="0" tIns="0" rIns="0" bIns="0" anchor="ctr"/>
           <a:lstStyle/>
           <a:p>
-            <a:pPr algn="l"/>
+            <a:pPr/>
             <a:r>
               <a:rPr sz="1650" b="1">
                 <a:solidFill>
@@ -3169,7 +3169,7 @@
       </p:sp>
       <p:sp>
         <p:nvSpPr>
-          <p:cNvPr id="15" name="Text 13"/>
+          <p:cNvPr id="15" name=""/>
           <p:cNvSpPr txBox="1"/>
           <p:nvPr/>
         </p:nvSpPr>
@@ -3188,7 +3188,7 @@
           <a:bodyPr wrap="square" lIns="0" tIns="0" rIns="0" bIns="0" anchor="ctr"/>
           <a:lstStyle/>
           <a:p>
-            <a:pPr algn="l"/>
+            <a:pPr/>
             <a:r>
               <a:rPr sz="1900" b="1">
                 <a:solidFill>
@@ -3204,7 +3204,7 @@
       </p:sp>
       <p:sp>
         <p:nvSpPr>
-          <p:cNvPr id="16" name="Text 14"/>
+          <p:cNvPr id="16" name=""/>
           <p:cNvSpPr txBox="1"/>
           <p:nvPr/>
         </p:nvSpPr>
@@ -3223,7 +3223,7 @@
           <a:bodyPr wrap="square" lIns="0" tIns="0" rIns="0" bIns="0" anchor="ctr"/>
           <a:lstStyle/>
           <a:p>
-            <a:pPr algn="l"/>
+            <a:pPr/>
             <a:r>
               <a:rPr sz="1350" b="1">
                 <a:solidFill>
@@ -3239,7 +3239,7 @@
       </p:sp>
       <p:sp>
         <p:nvSpPr>
-          <p:cNvPr id="17" name="Shape 15"/>
+          <p:cNvPr id="17" name=""/>
           <p:cNvSpPr/>
           <p:nvPr/>
         </p:nvSpPr>
@@ -3262,7 +3262,7 @@
       </p:sp>
       <p:sp>
         <p:nvSpPr>
-          <p:cNvPr id="18" name="Text 16"/>
+          <p:cNvPr id="18" name=""/>
           <p:cNvSpPr txBox="1"/>
           <p:nvPr/>
         </p:nvSpPr>
@@ -3281,7 +3281,7 @@
           <a:bodyPr wrap="square" lIns="0" tIns="0" rIns="0" bIns="0" anchor="ctr"/>
           <a:lstStyle/>
           <a:p>
-            <a:pPr algn="l"/>
+            <a:pPr/>
             <a:r>
               <a:rPr sz="1300" b="1">
                 <a:solidFill>
@@ -3297,7 +3297,7 @@
       </p:sp>
       <p:sp>
         <p:nvSpPr>
-          <p:cNvPr id="19" name="Text 17"/>
+          <p:cNvPr id="19" name=""/>
           <p:cNvSpPr txBox="1"/>
           <p:nvPr/>
         </p:nvSpPr>
@@ -3316,7 +3316,7 @@
           <a:bodyPr wrap="square" lIns="0" tIns="0" rIns="0" bIns="0" anchor="ctr"/>
           <a:lstStyle/>
           <a:p>
-            <a:pPr algn="l"/>
+            <a:pPr/>
             <a:r>
               <a:rPr sz="1050" b="1">
                 <a:solidFill>
@@ -3332,7 +3332,7 @@
       </p:sp>
       <p:sp>
         <p:nvSpPr>
-          <p:cNvPr id="20" name="Shape 18"/>
+          <p:cNvPr id="20" name=""/>
           <p:cNvSpPr/>
           <p:nvPr/>
         </p:nvSpPr>
@@ -3361,7 +3361,7 @@
       </p:sp>
       <p:sp>
         <p:nvSpPr>
-          <p:cNvPr id="21" name="Text 19"/>
+          <p:cNvPr id="21" name=""/>
           <p:cNvSpPr txBox="1"/>
           <p:nvPr/>
         </p:nvSpPr>
@@ -3380,7 +3380,7 @@
           <a:bodyPr wrap="square" lIns="0" tIns="0" rIns="0" bIns="0" anchor="ctr"/>
           <a:lstStyle/>
           <a:p>
-            <a:pPr algn="l"/>
+            <a:pPr/>
             <a:r>
               <a:rPr sz="1650" b="1">
                 <a:solidFill>
@@ -3396,7 +3396,7 @@
       </p:sp>
       <p:sp>
         <p:nvSpPr>
-          <p:cNvPr id="22" name="Text 20"/>
+          <p:cNvPr id="22" name=""/>
           <p:cNvSpPr txBox="1"/>
           <p:nvPr/>
         </p:nvSpPr>
@@ -3415,7 +3415,7 @@
           <a:bodyPr wrap="square" lIns="0" tIns="0" rIns="0" bIns="0" anchor="ctr"/>
           <a:lstStyle/>
           <a:p>
-            <a:pPr algn="l"/>
+            <a:pPr/>
             <a:r>
               <a:rPr sz="1900" b="1">
                 <a:solidFill>
@@ -3431,7 +3431,7 @@
       </p:sp>
       <p:sp>
         <p:nvSpPr>
-          <p:cNvPr id="23" name="Text 21"/>
+          <p:cNvPr id="23" name=""/>
           <p:cNvSpPr txBox="1"/>
           <p:nvPr/>
         </p:nvSpPr>
@@ -3450,7 +3450,7 @@
           <a:bodyPr wrap="square" lIns="0" tIns="0" rIns="0" bIns="0" anchor="ctr"/>
           <a:lstStyle/>
           <a:p>
-            <a:pPr algn="l"/>
+            <a:pPr/>
             <a:r>
               <a:rPr sz="1350" b="1">
                 <a:solidFill>
@@ -3466,7 +3466,7 @@
       </p:sp>
       <p:sp>
         <p:nvSpPr>
-          <p:cNvPr id="24" name="Shape 22"/>
+          <p:cNvPr id="24" name=""/>
           <p:cNvSpPr/>
           <p:nvPr/>
         </p:nvSpPr>
@@ -3489,7 +3489,7 @@
       </p:sp>
       <p:sp>
         <p:nvSpPr>
-          <p:cNvPr id="25" name="Text 23"/>
+          <p:cNvPr id="25" name=""/>
           <p:cNvSpPr txBox="1"/>
           <p:nvPr/>
         </p:nvSpPr>
@@ -3508,7 +3508,7 @@
           <a:bodyPr wrap="square" lIns="0" tIns="0" rIns="0" bIns="0" anchor="ctr"/>
           <a:lstStyle/>
           <a:p>
-            <a:pPr algn="l"/>
+            <a:pPr/>
             <a:r>
               <a:rPr sz="1300" b="1">
                 <a:solidFill>
@@ -3524,7 +3524,7 @@
       </p:sp>
       <p:sp>
         <p:nvSpPr>
-          <p:cNvPr id="26" name="Text 24"/>
+          <p:cNvPr id="26" name=""/>
           <p:cNvSpPr txBox="1"/>
           <p:nvPr/>
         </p:nvSpPr>
@@ -3543,7 +3543,7 @@
           <a:bodyPr wrap="square" lIns="0" tIns="0" rIns="0" bIns="0" anchor="ctr"/>
           <a:lstStyle/>
           <a:p>
-            <a:pPr algn="l"/>
+            <a:pPr/>
             <a:r>
               <a:rPr sz="1050" b="1">
                 <a:solidFill>
@@ -3559,7 +3559,7 @@
       </p:sp>
       <p:sp>
         <p:nvSpPr>
-          <p:cNvPr id="27" name="Shape 25"/>
+          <p:cNvPr id="27" name=""/>
           <p:cNvSpPr/>
           <p:nvPr/>
         </p:nvSpPr>
@@ -3588,7 +3588,7 @@
       </p:sp>
       <p:sp>
         <p:nvSpPr>
-          <p:cNvPr id="28" name="Text 26"/>
+          <p:cNvPr id="28" name=""/>
           <p:cNvSpPr txBox="1"/>
           <p:nvPr/>
         </p:nvSpPr>
@@ -3607,7 +3607,7 @@
           <a:bodyPr wrap="square" lIns="0" tIns="0" rIns="0" bIns="0" anchor="ctr"/>
           <a:lstStyle/>
           <a:p>
-            <a:pPr algn="l"/>
+            <a:pPr/>
             <a:r>
               <a:rPr sz="1650" b="1">
                 <a:solidFill>
@@ -3623,7 +3623,7 @@
       </p:sp>
       <p:sp>
         <p:nvSpPr>
-          <p:cNvPr id="29" name="Text 27"/>
+          <p:cNvPr id="29" name=""/>
           <p:cNvSpPr txBox="1"/>
           <p:nvPr/>
         </p:nvSpPr>
@@ -3642,7 +3642,7 @@
           <a:bodyPr wrap="square" lIns="0" tIns="0" rIns="0" bIns="0" anchor="ctr"/>
           <a:lstStyle/>
           <a:p>
-            <a:pPr algn="l"/>
+            <a:pPr/>
             <a:r>
               <a:rPr sz="1900" b="1">
                 <a:solidFill>
@@ -3658,7 +3658,7 @@
       </p:sp>
       <p:sp>
         <p:nvSpPr>
-          <p:cNvPr id="30" name="Text 28"/>
+          <p:cNvPr id="30" name=""/>
           <p:cNvSpPr txBox="1"/>
           <p:nvPr/>
         </p:nvSpPr>
@@ -3677,7 +3677,7 @@
           <a:bodyPr wrap="square" lIns="0" tIns="0" rIns="0" bIns="0" anchor="ctr"/>
           <a:lstStyle/>
           <a:p>
-            <a:pPr algn="l"/>
+            <a:pPr/>
             <a:r>
               <a:rPr sz="1350" b="1">
                 <a:solidFill>
@@ -3693,7 +3693,7 @@
       </p:sp>
       <p:sp>
         <p:nvSpPr>
-          <p:cNvPr id="31" name="Shape 29"/>
+          <p:cNvPr id="31" name=""/>
           <p:cNvSpPr/>
           <p:nvPr/>
         </p:nvSpPr>
@@ -3716,7 +3716,7 @@
       </p:sp>
       <p:sp>
         <p:nvSpPr>
-          <p:cNvPr id="32" name="Text 30"/>
+          <p:cNvPr id="32" name=""/>
           <p:cNvSpPr txBox="1"/>
           <p:nvPr/>
         </p:nvSpPr>
@@ -3735,7 +3735,7 @@
           <a:bodyPr wrap="square" lIns="0" tIns="0" rIns="0" bIns="0" anchor="ctr"/>
           <a:lstStyle/>
           <a:p>
-            <a:pPr algn="l"/>
+            <a:pPr/>
             <a:r>
               <a:rPr sz="1300" b="1">
                 <a:solidFill>
@@ -3751,7 +3751,7 @@
       </p:sp>
       <p:sp>
         <p:nvSpPr>
-          <p:cNvPr id="33" name="Text 31"/>
+          <p:cNvPr id="33" name=""/>
           <p:cNvSpPr txBox="1"/>
           <p:nvPr/>
         </p:nvSpPr>
@@ -3770,7 +3770,7 @@
           <a:bodyPr wrap="square" lIns="0" tIns="0" rIns="0" bIns="0" anchor="ctr"/>
           <a:lstStyle/>
           <a:p>
-            <a:pPr algn="l"/>
+            <a:pPr/>
             <a:r>
               <a:rPr sz="1050" b="1">
                 <a:solidFill>
@@ -3786,7 +3786,7 @@
       </p:sp>
       <p:sp>
         <p:nvSpPr>
-          <p:cNvPr id="34" name="Shape 32"/>
+          <p:cNvPr id="34" name=""/>
           <p:cNvSpPr/>
           <p:nvPr/>
         </p:nvSpPr>
@@ -3815,7 +3815,7 @@
       </p:sp>
       <p:sp>
         <p:nvSpPr>
-          <p:cNvPr id="35" name="Text 33"/>
+          <p:cNvPr id="35" name=""/>
           <p:cNvSpPr txBox="1"/>
           <p:nvPr/>
         </p:nvSpPr>
@@ -3834,7 +3834,7 @@
           <a:bodyPr wrap="square" lIns="0" tIns="0" rIns="0" bIns="0" anchor="ctr"/>
           <a:lstStyle/>
           <a:p>
-            <a:pPr algn="l"/>
+            <a:pPr/>
             <a:r>
               <a:rPr sz="1650" b="1">
                 <a:solidFill>
@@ -3850,7 +3850,7 @@
       </p:sp>
       <p:sp>
         <p:nvSpPr>
-          <p:cNvPr id="36" name="Text 34"/>
+          <p:cNvPr id="36" name=""/>
           <p:cNvSpPr txBox="1"/>
           <p:nvPr/>
         </p:nvSpPr>
@@ -3869,7 +3869,7 @@
           <a:bodyPr wrap="square" lIns="0" tIns="0" rIns="0" bIns="0" anchor="ctr"/>
           <a:lstStyle/>
           <a:p>
-            <a:pPr algn="l"/>
+            <a:pPr/>
             <a:r>
               <a:rPr sz="1900" b="1">
                 <a:solidFill>
@@ -3885,7 +3885,7 @@
       </p:sp>
       <p:sp>
         <p:nvSpPr>
-          <p:cNvPr id="37" name="Text 35"/>
+          <p:cNvPr id="37" name=""/>
           <p:cNvSpPr txBox="1"/>
           <p:nvPr/>
         </p:nvSpPr>
@@ -3904,7 +3904,7 @@
           <a:bodyPr wrap="square" lIns="0" tIns="0" rIns="0" bIns="0" anchor="ctr"/>
           <a:lstStyle/>
           <a:p>
-            <a:pPr algn="l"/>
+            <a:pPr/>
             <a:r>
               <a:rPr sz="1350" b="1">
                 <a:solidFill>
@@ -3920,7 +3920,7 @@
       </p:sp>
       <p:sp>
         <p:nvSpPr>
-          <p:cNvPr id="38" name="Shape 36"/>
+          <p:cNvPr id="38" name=""/>
           <p:cNvSpPr/>
           <p:nvPr/>
         </p:nvSpPr>
@@ -3943,7 +3943,7 @@
       </p:sp>
       <p:sp>
         <p:nvSpPr>
-          <p:cNvPr id="39" name="Text 37"/>
+          <p:cNvPr id="39" name=""/>
           <p:cNvSpPr txBox="1"/>
           <p:nvPr/>
         </p:nvSpPr>
@@ -3962,7 +3962,7 @@
           <a:bodyPr wrap="square" lIns="0" tIns="0" rIns="0" bIns="0" anchor="ctr"/>
           <a:lstStyle/>
           <a:p>
-            <a:pPr algn="l"/>
+            <a:pPr/>
             <a:r>
               <a:rPr sz="1300" b="1">
                 <a:solidFill>
@@ -3978,7 +3978,7 @@
       </p:sp>
       <p:sp>
         <p:nvSpPr>
-          <p:cNvPr id="40" name="Text 38"/>
+          <p:cNvPr id="40" name=""/>
           <p:cNvSpPr txBox="1"/>
           <p:nvPr/>
         </p:nvSpPr>
@@ -3997,7 +3997,7 @@
           <a:bodyPr wrap="square" lIns="0" tIns="0" rIns="0" bIns="0" anchor="ctr"/>
           <a:lstStyle/>
           <a:p>
-            <a:pPr algn="l"/>
+            <a:pPr/>
             <a:r>
               <a:rPr sz="1050" b="1">
                 <a:solidFill>
@@ -4013,7 +4013,7 @@
       </p:sp>
       <p:sp>
         <p:nvSpPr>
-          <p:cNvPr id="41" name="Shape 39"/>
+          <p:cNvPr id="41" name=""/>
           <p:cNvSpPr/>
           <p:nvPr/>
         </p:nvSpPr>
@@ -4042,7 +4042,7 @@
       </p:sp>
       <p:sp>
         <p:nvSpPr>
-          <p:cNvPr id="42" name="Text 40"/>
+          <p:cNvPr id="42" name=""/>
           <p:cNvSpPr txBox="1"/>
           <p:nvPr/>
         </p:nvSpPr>
@@ -4061,7 +4061,7 @@
           <a:bodyPr wrap="square" lIns="0" tIns="0" rIns="0" bIns="0" anchor="ctr"/>
           <a:lstStyle/>
           <a:p>
-            <a:pPr algn="l"/>
+            <a:pPr/>
             <a:r>
               <a:rPr sz="1650" b="1">
                 <a:solidFill>
@@ -4077,7 +4077,7 @@
       </p:sp>
       <p:sp>
         <p:nvSpPr>
-          <p:cNvPr id="43" name="Text 41"/>
+          <p:cNvPr id="43" name=""/>
           <p:cNvSpPr txBox="1"/>
           <p:nvPr/>
         </p:nvSpPr>
@@ -4096,7 +4096,7 @@
           <a:bodyPr wrap="square" lIns="0" tIns="0" rIns="0" bIns="0" anchor="ctr"/>
           <a:lstStyle/>
           <a:p>
-            <a:pPr algn="l"/>
+            <a:pPr/>
             <a:r>
               <a:rPr sz="1900" b="1">
                 <a:solidFill>
@@ -4112,7 +4112,7 @@
       </p:sp>
       <p:sp>
         <p:nvSpPr>
-          <p:cNvPr id="44" name="Text 42"/>
+          <p:cNvPr id="44" name=""/>
           <p:cNvSpPr txBox="1"/>
           <p:nvPr/>
         </p:nvSpPr>
@@ -4131,7 +4131,7 @@
           <a:bodyPr wrap="square" lIns="0" tIns="0" rIns="0" bIns="0" anchor="ctr"/>
           <a:lstStyle/>
           <a:p>
-            <a:pPr algn="l"/>
+            <a:pPr/>
             <a:r>
               <a:rPr sz="1350" b="1">
                 <a:solidFill>
@@ -4147,7 +4147,7 @@
       </p:sp>
       <p:sp>
         <p:nvSpPr>
-          <p:cNvPr id="45" name="Shape 43"/>
+          <p:cNvPr id="45" name=""/>
           <p:cNvSpPr/>
           <p:nvPr/>
         </p:nvSpPr>
@@ -4170,7 +4170,7 @@
       </p:sp>
       <p:sp>
         <p:nvSpPr>
-          <p:cNvPr id="46" name="Text 44"/>
+          <p:cNvPr id="46" name=""/>
           <p:cNvSpPr txBox="1"/>
           <p:nvPr/>
         </p:nvSpPr>
@@ -4189,7 +4189,7 @@
           <a:bodyPr wrap="square" lIns="0" tIns="0" rIns="0" bIns="0" anchor="ctr"/>
           <a:lstStyle/>
           <a:p>
-            <a:pPr algn="l"/>
+            <a:pPr/>
             <a:r>
               <a:rPr sz="1300" b="1">
                 <a:solidFill>
@@ -4205,7 +4205,7 @@
       </p:sp>
       <p:sp>
         <p:nvSpPr>
-          <p:cNvPr id="47" name="Text 45"/>
+          <p:cNvPr id="47" name=""/>
           <p:cNvSpPr txBox="1"/>
           <p:nvPr/>
         </p:nvSpPr>
@@ -4224,7 +4224,7 @@
           <a:bodyPr wrap="square" lIns="0" tIns="0" rIns="0" bIns="0" anchor="ctr"/>
           <a:lstStyle/>
           <a:p>
-            <a:pPr algn="l"/>
+            <a:pPr/>
             <a:r>
               <a:rPr sz="1050" b="1">
                 <a:solidFill>
@@ -4240,7 +4240,7 @@
       </p:sp>
       <p:sp>
         <p:nvSpPr>
-          <p:cNvPr id="48" name="Shape 46"/>
+          <p:cNvPr id="48" name=""/>
           <p:cNvSpPr/>
           <p:nvPr/>
         </p:nvSpPr>
@@ -4269,7 +4269,7 @@
       </p:sp>
       <p:sp>
         <p:nvSpPr>
-          <p:cNvPr id="49" name="Text 47"/>
+          <p:cNvPr id="49" name=""/>
           <p:cNvSpPr txBox="1"/>
           <p:nvPr/>
         </p:nvSpPr>
@@ -4288,7 +4288,7 @@
           <a:bodyPr wrap="square" lIns="0" tIns="0" rIns="0" bIns="0" anchor="ctr"/>
           <a:lstStyle/>
           <a:p>
-            <a:pPr algn="l"/>
+            <a:pPr/>
             <a:r>
               <a:rPr sz="1650" b="1">
                 <a:solidFill>
@@ -4304,7 +4304,7 @@
       </p:sp>
       <p:sp>
         <p:nvSpPr>
-          <p:cNvPr id="50" name="Text 48"/>
+          <p:cNvPr id="50" name=""/>
           <p:cNvSpPr txBox="1"/>
           <p:nvPr/>
         </p:nvSpPr>
@@ -4323,7 +4323,7 @@
           <a:bodyPr wrap="square" lIns="0" tIns="0" rIns="0" bIns="0" anchor="ctr"/>
           <a:lstStyle/>
           <a:p>
-            <a:pPr algn="l"/>
+            <a:pPr/>
             <a:r>
               <a:rPr sz="1900" b="1">
                 <a:solidFill>
@@ -4339,7 +4339,7 @@
       </p:sp>
       <p:sp>
         <p:nvSpPr>
-          <p:cNvPr id="51" name="Text 49"/>
+          <p:cNvPr id="51" name=""/>
           <p:cNvSpPr txBox="1"/>
           <p:nvPr/>
         </p:nvSpPr>
@@ -4358,7 +4358,7 @@
           <a:bodyPr wrap="square" lIns="0" tIns="0" rIns="0" bIns="0" anchor="ctr"/>
           <a:lstStyle/>
           <a:p>
-            <a:pPr algn="l"/>
+            <a:pPr/>
             <a:r>
               <a:rPr sz="1350" b="1">
                 <a:solidFill>
@@ -4374,7 +4374,7 @@
       </p:sp>
       <p:sp>
         <p:nvSpPr>
-          <p:cNvPr id="52" name="Shape 50"/>
+          <p:cNvPr id="52" name=""/>
           <p:cNvSpPr/>
           <p:nvPr/>
         </p:nvSpPr>
@@ -4397,7 +4397,7 @@
       </p:sp>
       <p:sp>
         <p:nvSpPr>
-          <p:cNvPr id="53" name="Text 51"/>
+          <p:cNvPr id="53" name=""/>
           <p:cNvSpPr txBox="1"/>
           <p:nvPr/>
         </p:nvSpPr>
@@ -4416,7 +4416,7 @@
           <a:bodyPr wrap="square" lIns="0" tIns="0" rIns="0" bIns="0" anchor="ctr"/>
           <a:lstStyle/>
           <a:p>
-            <a:pPr algn="l"/>
+            <a:pPr/>
             <a:r>
               <a:rPr sz="1300" b="1">
                 <a:solidFill>
@@ -4432,7 +4432,7 @@
       </p:sp>
       <p:sp>
         <p:nvSpPr>
-          <p:cNvPr id="54" name="Text 52"/>
+          <p:cNvPr id="54" name=""/>
           <p:cNvSpPr txBox="1"/>
           <p:nvPr/>
         </p:nvSpPr>
@@ -4451,7 +4451,7 @@
           <a:bodyPr wrap="square" lIns="0" tIns="0" rIns="0" bIns="0" anchor="ctr"/>
           <a:lstStyle/>
           <a:p>
-            <a:pPr algn="l"/>
+            <a:pPr/>
             <a:r>
               <a:rPr sz="1050" b="1">
                 <a:solidFill>
@@ -4467,7 +4467,7 @@
       </p:sp>
       <p:sp>
         <p:nvSpPr>
-          <p:cNvPr id="55" name="Shape 53"/>
+          <p:cNvPr id="55" name=""/>
           <p:cNvSpPr/>
           <p:nvPr/>
         </p:nvSpPr>
@@ -4496,7 +4496,7 @@
       </p:sp>
       <p:sp>
         <p:nvSpPr>
-          <p:cNvPr id="56" name="Text 54"/>
+          <p:cNvPr id="56" name=""/>
           <p:cNvSpPr txBox="1"/>
           <p:nvPr/>
         </p:nvSpPr>
@@ -4515,7 +4515,7 @@
           <a:bodyPr wrap="square" lIns="0" tIns="0" rIns="0" bIns="0" anchor="ctr"/>
           <a:lstStyle/>
           <a:p>
-            <a:pPr algn="l"/>
+            <a:pPr/>
             <a:r>
               <a:rPr sz="1650" b="1">
                 <a:solidFill>
@@ -4531,7 +4531,7 @@
       </p:sp>
       <p:sp>
         <p:nvSpPr>
-          <p:cNvPr id="57" name="Text 55"/>
+          <p:cNvPr id="57" name=""/>
           <p:cNvSpPr txBox="1"/>
           <p:nvPr/>
         </p:nvSpPr>
@@ -4550,7 +4550,7 @@
           <a:bodyPr wrap="square" lIns="0" tIns="0" rIns="0" bIns="0" anchor="ctr"/>
           <a:lstStyle/>
           <a:p>
-            <a:pPr algn="l"/>
+            <a:pPr/>
             <a:r>
               <a:rPr sz="1900" b="1">
                 <a:solidFill>
@@ -4566,7 +4566,7 @@
       </p:sp>
       <p:sp>
         <p:nvSpPr>
-          <p:cNvPr id="58" name="Text 56"/>
+          <p:cNvPr id="58" name=""/>
           <p:cNvSpPr txBox="1"/>
           <p:nvPr/>
         </p:nvSpPr>
@@ -4585,7 +4585,7 @@
           <a:bodyPr wrap="square" lIns="0" tIns="0" rIns="0" bIns="0" anchor="ctr"/>
           <a:lstStyle/>
           <a:p>
-            <a:pPr algn="l"/>
+            <a:pPr/>
             <a:r>
               <a:rPr sz="1350" b="1">
                 <a:solidFill>
@@ -4601,7 +4601,7 @@
       </p:sp>
       <p:sp>
         <p:nvSpPr>
-          <p:cNvPr id="59" name="Shape 57"/>
+          <p:cNvPr id="59" name=""/>
           <p:cNvSpPr/>
           <p:nvPr/>
         </p:nvSpPr>
@@ -4624,7 +4624,7 @@
       </p:sp>
       <p:sp>
         <p:nvSpPr>
-          <p:cNvPr id="60" name="Text 58"/>
+          <p:cNvPr id="60" name=""/>
           <p:cNvSpPr txBox="1"/>
           <p:nvPr/>
         </p:nvSpPr>
@@ -4643,7 +4643,7 @@
           <a:bodyPr wrap="square" lIns="0" tIns="0" rIns="0" bIns="0" anchor="ctr"/>
           <a:lstStyle/>
           <a:p>
-            <a:pPr algn="l"/>
+            <a:pPr/>
             <a:r>
               <a:rPr sz="1300" b="1">
                 <a:solidFill>
@@ -4659,7 +4659,7 @@
       </p:sp>
       <p:sp>
         <p:nvSpPr>
-          <p:cNvPr id="61" name="Text 59"/>
+          <p:cNvPr id="61" name=""/>
           <p:cNvSpPr txBox="1"/>
           <p:nvPr/>
         </p:nvSpPr>
@@ -4678,7 +4678,7 @@
           <a:bodyPr wrap="square" lIns="0" tIns="0" rIns="0" bIns="0" anchor="ctr"/>
           <a:lstStyle/>
           <a:p>
-            <a:pPr algn="l"/>
+            <a:pPr/>
             <a:r>
               <a:rPr sz="1050" b="1">
                 <a:solidFill>
@@ -4694,7 +4694,7 @@
       </p:sp>
       <p:sp>
         <p:nvSpPr>
-          <p:cNvPr id="62" name="Shape 60"/>
+          <p:cNvPr id="62" name=""/>
           <p:cNvSpPr/>
           <p:nvPr/>
         </p:nvSpPr>
@@ -4723,7 +4723,7 @@
       </p:sp>
       <p:sp>
         <p:nvSpPr>
-          <p:cNvPr id="63" name="Text 61"/>
+          <p:cNvPr id="63" name=""/>
           <p:cNvSpPr txBox="1"/>
           <p:nvPr/>
         </p:nvSpPr>
@@ -4742,7 +4742,7 @@
           <a:bodyPr wrap="square" lIns="0" tIns="0" rIns="0" bIns="0" anchor="ctr"/>
           <a:lstStyle/>
           <a:p>
-            <a:pPr algn="l"/>
+            <a:pPr/>
             <a:r>
               <a:rPr sz="1650" b="1">
                 <a:solidFill>
@@ -4758,7 +4758,7 @@
       </p:sp>
       <p:sp>
         <p:nvSpPr>
-          <p:cNvPr id="64" name="Text 62"/>
+          <p:cNvPr id="64" name=""/>
           <p:cNvSpPr txBox="1"/>
           <p:nvPr/>
         </p:nvSpPr>
@@ -4777,7 +4777,7 @@
           <a:bodyPr wrap="square" lIns="0" tIns="0" rIns="0" bIns="0" anchor="ctr"/>
           <a:lstStyle/>
           <a:p>
-            <a:pPr algn="l"/>
+            <a:pPr/>
             <a:r>
               <a:rPr sz="1900" b="1">
                 <a:solidFill>
@@ -4793,7 +4793,7 @@
       </p:sp>
       <p:sp>
         <p:nvSpPr>
-          <p:cNvPr id="65" name="Text 63"/>
+          <p:cNvPr id="65" name=""/>
           <p:cNvSpPr txBox="1"/>
           <p:nvPr/>
         </p:nvSpPr>
@@ -4812,7 +4812,7 @@
           <a:bodyPr wrap="square" lIns="0" tIns="0" rIns="0" bIns="0" anchor="ctr"/>
           <a:lstStyle/>
           <a:p>
-            <a:pPr algn="l"/>
+            <a:pPr/>
             <a:r>
               <a:rPr sz="1350" b="1">
                 <a:solidFill>
@@ -4828,7 +4828,7 @@
       </p:sp>
       <p:sp>
         <p:nvSpPr>
-          <p:cNvPr id="66" name="Shape 64"/>
+          <p:cNvPr id="66" name=""/>
           <p:cNvSpPr/>
           <p:nvPr/>
         </p:nvSpPr>
@@ -4851,7 +4851,7 @@
       </p:sp>
       <p:sp>
         <p:nvSpPr>
-          <p:cNvPr id="67" name="Text 65"/>
+          <p:cNvPr id="67" name=""/>
           <p:cNvSpPr txBox="1"/>
           <p:nvPr/>
         </p:nvSpPr>
@@ -4870,7 +4870,7 @@
           <a:bodyPr wrap="square" lIns="0" tIns="0" rIns="0" bIns="0" anchor="ctr"/>
           <a:lstStyle/>
           <a:p>
-            <a:pPr algn="l"/>
+            <a:pPr/>
             <a:r>
               <a:rPr sz="1300" b="1">
                 <a:solidFill>
@@ -4886,7 +4886,7 @@
       </p:sp>
       <p:sp>
         <p:nvSpPr>
-          <p:cNvPr id="68" name="Text 66"/>
+          <p:cNvPr id="68" name=""/>
           <p:cNvSpPr txBox="1"/>
           <p:nvPr/>
         </p:nvSpPr>
@@ -4905,7 +4905,7 @@
           <a:bodyPr wrap="square" lIns="0" tIns="0" rIns="0" bIns="0" anchor="ctr"/>
           <a:lstStyle/>
           <a:p>
-            <a:pPr algn="l"/>
+            <a:pPr/>
             <a:r>
               <a:rPr sz="1050" b="1">
                 <a:solidFill>
@@ -4953,7 +4953,7 @@
       </p:grpSpPr>
       <p:sp>
         <p:nvSpPr>
-          <p:cNvPr id="2" name="Text 0"/>
+          <p:cNvPr id="2" name=""/>
           <p:cNvSpPr txBox="1"/>
           <p:nvPr/>
         </p:nvSpPr>
@@ -4972,7 +4972,7 @@
           <a:bodyPr wrap="square" lIns="0" tIns="0" rIns="0" bIns="0" anchor="ctr"/>
           <a:lstStyle/>
           <a:p>
-            <a:pPr algn="l"/>
+            <a:pPr/>
             <a:r>
               <a:rPr sz="1150" b="1">
                 <a:solidFill>
@@ -4988,7 +4988,7 @@
       </p:sp>
       <p:sp>
         <p:nvSpPr>
-          <p:cNvPr id="3" name="Shape 1"/>
+          <p:cNvPr id="3" name=""/>
           <p:cNvSpPr/>
           <p:nvPr/>
         </p:nvSpPr>
@@ -5010,7 +5010,7 @@
       </p:sp>
       <p:sp>
         <p:nvSpPr>
-          <p:cNvPr id="4" name="Shape 2"/>
+          <p:cNvPr id="4" name=""/>
           <p:cNvSpPr/>
           <p:nvPr/>
         </p:nvSpPr>
@@ -5030,7 +5030,7 @@
       </p:sp>
       <p:sp>
         <p:nvSpPr>
-          <p:cNvPr id="5" name="Shape 3"/>
+          <p:cNvPr id="5" name=""/>
           <p:cNvSpPr/>
           <p:nvPr/>
         </p:nvSpPr>
@@ -5050,7 +5050,7 @@
       </p:sp>
       <p:sp>
         <p:nvSpPr>
-          <p:cNvPr id="6" name="Shape 4"/>
+          <p:cNvPr id="6" name=""/>
           <p:cNvSpPr/>
           <p:nvPr/>
         </p:nvSpPr>
@@ -5070,7 +5070,7 @@
       </p:sp>
       <p:sp>
         <p:nvSpPr>
-          <p:cNvPr id="7" name="Shape 5"/>
+          <p:cNvPr id="7" name=""/>
           <p:cNvSpPr/>
           <p:nvPr/>
         </p:nvSpPr>
@@ -5090,7 +5090,7 @@
       </p:sp>
       <p:sp>
         <p:nvSpPr>
-          <p:cNvPr id="8" name="Shape 6"/>
+          <p:cNvPr id="8" name=""/>
           <p:cNvSpPr/>
           <p:nvPr/>
         </p:nvSpPr>
@@ -5110,7 +5110,7 @@
       </p:sp>
       <p:sp>
         <p:nvSpPr>
-          <p:cNvPr id="9" name="Shape 7"/>
+          <p:cNvPr id="9" name=""/>
           <p:cNvSpPr/>
           <p:nvPr/>
         </p:nvSpPr>
@@ -5130,7 +5130,7 @@
       </p:sp>
       <p:sp>
         <p:nvSpPr>
-          <p:cNvPr id="10" name="Shape 8"/>
+          <p:cNvPr id="10" name=""/>
           <p:cNvSpPr/>
           <p:nvPr/>
         </p:nvSpPr>
@@ -5150,7 +5150,7 @@
       </p:sp>
       <p:sp>
         <p:nvSpPr>
-          <p:cNvPr id="11" name="Shape 9"/>
+          <p:cNvPr id="11" name=""/>
           <p:cNvSpPr/>
           <p:nvPr/>
         </p:nvSpPr>
@@ -5170,7 +5170,7 @@
       </p:sp>
       <p:sp>
         <p:nvSpPr>
-          <p:cNvPr id="12" name="Text 10"/>
+          <p:cNvPr id="12" name=""/>
           <p:cNvSpPr txBox="1"/>
           <p:nvPr/>
         </p:nvSpPr>
@@ -5189,7 +5189,7 @@
           <a:bodyPr wrap="square" lIns="0" tIns="0" rIns="0" bIns="0" anchor="ctr"/>
           <a:lstStyle/>
           <a:p>
-            <a:pPr algn="l"/>
+            <a:pPr/>
             <a:r>
               <a:rPr sz="8100" b="1">
                 <a:solidFill>
@@ -5205,7 +5205,7 @@
       </p:sp>
       <p:sp>
         <p:nvSpPr>
-          <p:cNvPr id="13" name="Text 11"/>
+          <p:cNvPr id="13" name=""/>
           <p:cNvSpPr txBox="1"/>
           <p:nvPr/>
         </p:nvSpPr>
@@ -5224,7 +5224,7 @@
           <a:bodyPr wrap="square" lIns="0" tIns="0" rIns="0" bIns="0" anchor="ctr"/>
           <a:lstStyle/>
           <a:p>
-            <a:pPr algn="l"/>
+            <a:pPr/>
             <a:r>
               <a:rPr sz="4050" b="1">
                 <a:solidFill>
@@ -5235,7 +5235,7 @@
               </a:rPr>
               <a:t>I feel like </a:t>
             </a:r>
-            <a:pPr algn="l"/>
+            <a:pPr/>
             <a:r>
               <a:rPr sz="4050" b="1">
                 <a:solidFill>
@@ -5251,7 +5251,7 @@
       </p:sp>
       <p:sp>
         <p:nvSpPr>
-          <p:cNvPr id="14" name="Text 12"/>
+          <p:cNvPr id="14" name=""/>
           <p:cNvSpPr txBox="1"/>
           <p:nvPr/>
         </p:nvSpPr>
@@ -5270,7 +5270,7 @@
           <a:bodyPr wrap="square" lIns="0" tIns="0" rIns="0" bIns="0" anchor="ctr"/>
           <a:lstStyle/>
           <a:p>
-            <a:pPr algn="l"/>
+            <a:pPr/>
             <a:r>
               <a:rPr sz="2100" b="1">
                 <a:solidFill>
@@ -5286,7 +5286,7 @@
       </p:sp>
       <p:sp>
         <p:nvSpPr>
-          <p:cNvPr id="15" name="Shape 13"/>
+          <p:cNvPr id="15" name=""/>
           <p:cNvSpPr/>
           <p:nvPr/>
         </p:nvSpPr>
@@ -5308,7 +5308,7 @@
       </p:sp>
       <p:sp>
         <p:nvSpPr>
-          <p:cNvPr id="16" name="Text 14"/>
+          <p:cNvPr id="16" name=""/>
           <p:cNvSpPr txBox="1"/>
           <p:nvPr/>
         </p:nvSpPr>
@@ -5327,7 +5327,7 @@
           <a:bodyPr wrap="square" lIns="0" tIns="0" rIns="0" bIns="0" anchor="ctr"/>
           <a:lstStyle/>
           <a:p>
-            <a:pPr algn="l"/>
+            <a:pPr/>
             <a:r>
               <a:rPr sz="1300" b="1">
                 <a:solidFill>
@@ -5343,7 +5343,7 @@
       </p:sp>
       <p:sp>
         <p:nvSpPr>
-          <p:cNvPr id="17" name="Shape 15"/>
+          <p:cNvPr id="17" name=""/>
           <p:cNvSpPr/>
           <p:nvPr/>
         </p:nvSpPr>
@@ -5365,7 +5365,7 @@
       </p:sp>
       <p:sp>
         <p:nvSpPr>
-          <p:cNvPr id="18" name="Text 16"/>
+          <p:cNvPr id="18" name=""/>
           <p:cNvSpPr txBox="1"/>
           <p:nvPr/>
         </p:nvSpPr>
@@ -5384,7 +5384,7 @@
           <a:bodyPr wrap="square" lIns="0" tIns="0" rIns="0" bIns="0" anchor="ctr"/>
           <a:lstStyle/>
           <a:p>
-            <a:pPr algn="l"/>
+            <a:pPr/>
             <a:r>
               <a:rPr sz="1050" b="1">
                 <a:solidFill>
@@ -5400,7 +5400,7 @@
       </p:sp>
       <p:sp>
         <p:nvSpPr>
-          <p:cNvPr id="19" name="Text 17"/>
+          <p:cNvPr id="19" name=""/>
           <p:cNvSpPr txBox="1"/>
           <p:nvPr/>
         </p:nvSpPr>
@@ -5419,7 +5419,7 @@
           <a:bodyPr wrap="square" lIns="0" tIns="0" rIns="0" bIns="0" anchor="ctr"/>
           <a:lstStyle/>
           <a:p>
-            <a:pPr algn="l"/>
+            <a:pPr/>
             <a:r>
               <a:rPr sz="1900" b="1">
                 <a:solidFill>
@@ -5435,7 +5435,7 @@
       </p:sp>
       <p:sp>
         <p:nvSpPr>
-          <p:cNvPr id="20" name="Text 18"/>
+          <p:cNvPr id="20" name=""/>
           <p:cNvSpPr txBox="1"/>
           <p:nvPr/>
         </p:nvSpPr>
@@ -5454,7 +5454,7 @@
           <a:bodyPr wrap="square" lIns="0" tIns="0" rIns="0" bIns="0" anchor="ctr"/>
           <a:lstStyle/>
           <a:p>
-            <a:pPr algn="l"/>
+            <a:pPr/>
             <a:r>
               <a:rPr sz="1500" b="1">
                 <a:solidFill>
@@ -5470,7 +5470,7 @@
       </p:sp>
       <p:sp>
         <p:nvSpPr>
-          <p:cNvPr id="21" name="Text 19"/>
+          <p:cNvPr id="21" name=""/>
           <p:cNvSpPr txBox="1"/>
           <p:nvPr/>
         </p:nvSpPr>
@@ -5489,7 +5489,7 @@
           <a:bodyPr wrap="square" lIns="0" tIns="0" rIns="0" bIns="0" anchor="ctr"/>
           <a:lstStyle/>
           <a:p>
-            <a:pPr algn="l"/>
+            <a:pPr/>
             <a:r>
               <a:rPr sz="1150" b="1">
                 <a:solidFill>
@@ -5505,7 +5505,7 @@
       </p:sp>
       <p:sp>
         <p:nvSpPr>
-          <p:cNvPr id="22" name="Shape 20"/>
+          <p:cNvPr id="22" name=""/>
           <p:cNvSpPr/>
           <p:nvPr/>
         </p:nvSpPr>
@@ -5528,7 +5528,7 @@
       </p:sp>
       <p:sp>
         <p:nvSpPr>
-          <p:cNvPr id="23" name="Shape 21"/>
+          <p:cNvPr id="23" name=""/>
           <p:cNvSpPr/>
           <p:nvPr/>
         </p:nvSpPr>
@@ -5557,7 +5557,7 @@
       </p:sp>
       <p:sp>
         <p:nvSpPr>
-          <p:cNvPr id="24" name="Shape 22"/>
+          <p:cNvPr id="24" name=""/>
           <p:cNvSpPr/>
           <p:nvPr/>
         </p:nvSpPr>
@@ -5577,7 +5577,7 @@
       </p:sp>
       <p:sp>
         <p:nvSpPr>
-          <p:cNvPr id="25" name="Text 23"/>
+          <p:cNvPr id="25" name=""/>
           <p:cNvSpPr txBox="1"/>
           <p:nvPr/>
         </p:nvSpPr>
@@ -5612,7 +5612,7 @@
       </p:sp>
       <p:sp>
         <p:nvSpPr>
-          <p:cNvPr id="26" name="Text 24"/>
+          <p:cNvPr id="26" name=""/>
           <p:cNvSpPr txBox="1"/>
           <p:nvPr/>
         </p:nvSpPr>
@@ -5631,7 +5631,7 @@
           <a:bodyPr wrap="square" lIns="0" tIns="0" rIns="0" bIns="0" anchor="ctr"/>
           <a:lstStyle/>
           <a:p>
-            <a:pPr algn="l"/>
+            <a:pPr/>
             <a:r>
               <a:rPr sz="2350" b="1">
                 <a:solidFill>
@@ -5645,7 +5645,7 @@
               </a:rPr>
               <a:t>I feel like</a:t>
             </a:r>
-            <a:pPr algn="l"/>
+            <a:pPr/>
             <a:r>
               <a:rPr sz="2350" b="1">
                 <a:solidFill>
@@ -5656,7 +5656,7 @@
               </a:rPr>
               <a:t> </a:t>
             </a:r>
-            <a:pPr algn="l"/>
+            <a:pPr/>
             <a:r>
               <a:rPr sz="2350" b="1">
                 <a:solidFill>
@@ -5667,7 +5667,7 @@
               </a:rPr>
               <a:t>eating</a:t>
             </a:r>
-            <a:pPr algn="l"/>
+            <a:pPr/>
             <a:r>
               <a:rPr sz="2350" b="1">
                 <a:solidFill>
@@ -5683,7 +5683,7 @@
       </p:sp>
       <p:sp>
         <p:nvSpPr>
-          <p:cNvPr id="27" name="Text 25"/>
+          <p:cNvPr id="27" name=""/>
           <p:cNvSpPr txBox="1"/>
           <p:nvPr/>
         </p:nvSpPr>
@@ -5702,7 +5702,7 @@
           <a:bodyPr wrap="square" lIns="0" tIns="0" rIns="0" bIns="0" anchor="ctr"/>
           <a:lstStyle/>
           <a:p>
-            <a:pPr algn="l"/>
+            <a:pPr/>
             <a:r>
               <a:rPr sz="1650" b="1">
                 <a:solidFill>
@@ -5718,7 +5718,7 @@
       </p:sp>
       <p:sp>
         <p:nvSpPr>
-          <p:cNvPr id="28" name="Shape 26"/>
+          <p:cNvPr id="28" name=""/>
           <p:cNvSpPr/>
           <p:nvPr/>
         </p:nvSpPr>
@@ -5747,7 +5747,7 @@
       </p:sp>
       <p:sp>
         <p:nvSpPr>
-          <p:cNvPr id="29" name="Shape 27"/>
+          <p:cNvPr id="29" name=""/>
           <p:cNvSpPr/>
           <p:nvPr/>
         </p:nvSpPr>
@@ -5767,7 +5767,7 @@
       </p:sp>
       <p:sp>
         <p:nvSpPr>
-          <p:cNvPr id="30" name="Text 28"/>
+          <p:cNvPr id="30" name=""/>
           <p:cNvSpPr txBox="1"/>
           <p:nvPr/>
         </p:nvSpPr>
@@ -5802,7 +5802,7 @@
       </p:sp>
       <p:sp>
         <p:nvSpPr>
-          <p:cNvPr id="31" name="Text 29"/>
+          <p:cNvPr id="31" name=""/>
           <p:cNvSpPr txBox="1"/>
           <p:nvPr/>
         </p:nvSpPr>
@@ -5821,7 +5821,7 @@
           <a:bodyPr wrap="square" lIns="0" tIns="0" rIns="0" bIns="0" anchor="ctr"/>
           <a:lstStyle/>
           <a:p>
-            <a:pPr algn="l"/>
+            <a:pPr/>
             <a:r>
               <a:rPr sz="2350" b="1">
                 <a:solidFill>
@@ -5835,7 +5835,7 @@
               </a:rPr>
               <a:t>I don't feel like</a:t>
             </a:r>
-            <a:pPr algn="l"/>
+            <a:pPr/>
             <a:r>
               <a:rPr sz="2350" b="1">
                 <a:solidFill>
@@ -5846,7 +5846,7 @@
               </a:rPr>
               <a:t> </a:t>
             </a:r>
-            <a:pPr algn="l"/>
+            <a:pPr/>
             <a:r>
               <a:rPr sz="2350" b="1">
                 <a:solidFill>
@@ -5857,7 +5857,7 @@
               </a:rPr>
               <a:t>going</a:t>
             </a:r>
-            <a:pPr algn="l"/>
+            <a:pPr/>
             <a:r>
               <a:rPr sz="2350" b="1">
                 <a:solidFill>
@@ -5873,7 +5873,7 @@
       </p:sp>
       <p:sp>
         <p:nvSpPr>
-          <p:cNvPr id="32" name="Text 30"/>
+          <p:cNvPr id="32" name=""/>
           <p:cNvSpPr txBox="1"/>
           <p:nvPr/>
         </p:nvSpPr>
@@ -5892,7 +5892,7 @@
           <a:bodyPr wrap="square" lIns="0" tIns="0" rIns="0" bIns="0" anchor="ctr"/>
           <a:lstStyle/>
           <a:p>
-            <a:pPr algn="l"/>
+            <a:pPr/>
             <a:r>
               <a:rPr sz="1650" b="1">
                 <a:solidFill>
@@ -5908,7 +5908,7 @@
       </p:sp>
       <p:sp>
         <p:nvSpPr>
-          <p:cNvPr id="33" name="Shape 31"/>
+          <p:cNvPr id="33" name=""/>
           <p:cNvSpPr/>
           <p:nvPr/>
         </p:nvSpPr>
@@ -5937,7 +5937,7 @@
       </p:sp>
       <p:sp>
         <p:nvSpPr>
-          <p:cNvPr id="34" name="Shape 32"/>
+          <p:cNvPr id="34" name=""/>
           <p:cNvSpPr/>
           <p:nvPr/>
         </p:nvSpPr>
@@ -5957,7 +5957,7 @@
       </p:sp>
       <p:sp>
         <p:nvSpPr>
-          <p:cNvPr id="35" name="Text 33"/>
+          <p:cNvPr id="35" name=""/>
           <p:cNvSpPr txBox="1"/>
           <p:nvPr/>
         </p:nvSpPr>
@@ -5992,7 +5992,7 @@
       </p:sp>
       <p:sp>
         <p:nvSpPr>
-          <p:cNvPr id="36" name="Text 34"/>
+          <p:cNvPr id="36" name=""/>
           <p:cNvSpPr txBox="1"/>
           <p:nvPr/>
         </p:nvSpPr>
@@ -6011,7 +6011,7 @@
           <a:bodyPr wrap="square" lIns="0" tIns="0" rIns="0" bIns="0" anchor="ctr"/>
           <a:lstStyle/>
           <a:p>
-            <a:pPr algn="l"/>
+            <a:pPr/>
             <a:r>
               <a:rPr sz="2350" b="1">
                 <a:solidFill>
@@ -6025,7 +6025,7 @@
               </a:rPr>
               <a:t>I feel like</a:t>
             </a:r>
-            <a:pPr algn="l"/>
+            <a:pPr/>
             <a:r>
               <a:rPr sz="2350" b="1">
                 <a:solidFill>
@@ -6036,7 +6036,7 @@
               </a:rPr>
               <a:t> </a:t>
             </a:r>
-            <a:pPr algn="l"/>
+            <a:pPr/>
             <a:r>
               <a:rPr sz="2350" b="1">
                 <a:solidFill>
@@ -6047,7 +6047,7 @@
               </a:rPr>
               <a:t>watching</a:t>
             </a:r>
-            <a:pPr algn="l"/>
+            <a:pPr/>
             <a:r>
               <a:rPr sz="2350" b="1">
                 <a:solidFill>
@@ -6063,7 +6063,7 @@
       </p:sp>
       <p:sp>
         <p:nvSpPr>
-          <p:cNvPr id="37" name="Text 35"/>
+          <p:cNvPr id="37" name=""/>
           <p:cNvSpPr txBox="1"/>
           <p:nvPr/>
         </p:nvSpPr>
@@ -6082,7 +6082,7 @@
           <a:bodyPr wrap="square" lIns="0" tIns="0" rIns="0" bIns="0" anchor="ctr"/>
           <a:lstStyle/>
           <a:p>
-            <a:pPr algn="l"/>
+            <a:pPr/>
             <a:r>
               <a:rPr sz="1650" b="1">
                 <a:solidFill>
@@ -6130,7 +6130,7 @@
       </p:grpSpPr>
       <p:sp>
         <p:nvSpPr>
-          <p:cNvPr id="2" name="Text 0"/>
+          <p:cNvPr id="2" name=""/>
           <p:cNvSpPr txBox="1"/>
           <p:nvPr/>
         </p:nvSpPr>
@@ -6149,7 +6149,7 @@
           <a:bodyPr wrap="square" lIns="0" tIns="0" rIns="0" bIns="0" anchor="ctr"/>
           <a:lstStyle/>
           <a:p>
-            <a:pPr algn="l"/>
+            <a:pPr/>
             <a:r>
               <a:rPr sz="1150" b="1">
                 <a:solidFill>
@@ -6165,7 +6165,7 @@
       </p:sp>
       <p:sp>
         <p:nvSpPr>
-          <p:cNvPr id="3" name="Shape 1"/>
+          <p:cNvPr id="3" name=""/>
           <p:cNvSpPr/>
           <p:nvPr/>
         </p:nvSpPr>
@@ -6185,7 +6185,7 @@
       </p:sp>
       <p:sp>
         <p:nvSpPr>
-          <p:cNvPr id="4" name="Shape 2"/>
+          <p:cNvPr id="4" name=""/>
           <p:cNvSpPr/>
           <p:nvPr/>
         </p:nvSpPr>
@@ -6207,7 +6207,7 @@
       </p:sp>
       <p:sp>
         <p:nvSpPr>
-          <p:cNvPr id="5" name="Shape 3"/>
+          <p:cNvPr id="5" name=""/>
           <p:cNvSpPr/>
           <p:nvPr/>
         </p:nvSpPr>
@@ -6227,7 +6227,7 @@
       </p:sp>
       <p:sp>
         <p:nvSpPr>
-          <p:cNvPr id="6" name="Shape 4"/>
+          <p:cNvPr id="6" name=""/>
           <p:cNvSpPr/>
           <p:nvPr/>
         </p:nvSpPr>
@@ -6247,7 +6247,7 @@
       </p:sp>
       <p:sp>
         <p:nvSpPr>
-          <p:cNvPr id="7" name="Shape 5"/>
+          <p:cNvPr id="7" name=""/>
           <p:cNvSpPr/>
           <p:nvPr/>
         </p:nvSpPr>
@@ -6267,7 +6267,7 @@
       </p:sp>
       <p:sp>
         <p:nvSpPr>
-          <p:cNvPr id="8" name="Shape 6"/>
+          <p:cNvPr id="8" name=""/>
           <p:cNvSpPr/>
           <p:nvPr/>
         </p:nvSpPr>
@@ -6287,7 +6287,7 @@
       </p:sp>
       <p:sp>
         <p:nvSpPr>
-          <p:cNvPr id="9" name="Shape 7"/>
+          <p:cNvPr id="9" name=""/>
           <p:cNvSpPr/>
           <p:nvPr/>
         </p:nvSpPr>
@@ -6307,7 +6307,7 @@
       </p:sp>
       <p:sp>
         <p:nvSpPr>
-          <p:cNvPr id="10" name="Shape 8"/>
+          <p:cNvPr id="10" name=""/>
           <p:cNvSpPr/>
           <p:nvPr/>
         </p:nvSpPr>
@@ -6327,7 +6327,7 @@
       </p:sp>
       <p:sp>
         <p:nvSpPr>
-          <p:cNvPr id="11" name="Shape 9"/>
+          <p:cNvPr id="11" name=""/>
           <p:cNvSpPr/>
           <p:nvPr/>
         </p:nvSpPr>
@@ -6347,7 +6347,7 @@
       </p:sp>
       <p:sp>
         <p:nvSpPr>
-          <p:cNvPr id="12" name="Text 10"/>
+          <p:cNvPr id="12" name=""/>
           <p:cNvSpPr txBox="1"/>
           <p:nvPr/>
         </p:nvSpPr>
@@ -6366,7 +6366,7 @@
           <a:bodyPr wrap="square" lIns="0" tIns="0" rIns="0" bIns="0" anchor="ctr"/>
           <a:lstStyle/>
           <a:p>
-            <a:pPr algn="l"/>
+            <a:pPr/>
             <a:r>
               <a:rPr sz="8100" b="1">
                 <a:solidFill>
@@ -6382,7 +6382,7 @@
       </p:sp>
       <p:sp>
         <p:nvSpPr>
-          <p:cNvPr id="13" name="Text 11"/>
+          <p:cNvPr id="13" name=""/>
           <p:cNvSpPr txBox="1"/>
           <p:nvPr/>
         </p:nvSpPr>
@@ -6401,7 +6401,7 @@
           <a:bodyPr wrap="square" lIns="0" tIns="0" rIns="0" bIns="0" anchor="ctr"/>
           <a:lstStyle/>
           <a:p>
-            <a:pPr algn="l"/>
+            <a:pPr/>
             <a:r>
               <a:rPr sz="4050" b="1">
                 <a:solidFill>
@@ -6412,7 +6412,7 @@
               </a:rPr>
               <a:t>I used to </a:t>
             </a:r>
-            <a:pPr algn="l"/>
+            <a:pPr/>
             <a:r>
               <a:rPr sz="4050" b="1">
                 <a:solidFill>
@@ -6428,7 +6428,7 @@
       </p:sp>
       <p:sp>
         <p:nvSpPr>
-          <p:cNvPr id="14" name="Text 12"/>
+          <p:cNvPr id="14" name=""/>
           <p:cNvSpPr txBox="1"/>
           <p:nvPr/>
         </p:nvSpPr>
@@ -6447,7 +6447,7 @@
           <a:bodyPr wrap="square" lIns="0" tIns="0" rIns="0" bIns="0" anchor="ctr"/>
           <a:lstStyle/>
           <a:p>
-            <a:pPr algn="l"/>
+            <a:pPr/>
             <a:r>
               <a:rPr sz="2100" b="1">
                 <a:solidFill>
@@ -6463,7 +6463,7 @@
       </p:sp>
       <p:sp>
         <p:nvSpPr>
-          <p:cNvPr id="15" name="Shape 13"/>
+          <p:cNvPr id="15" name=""/>
           <p:cNvSpPr/>
           <p:nvPr/>
         </p:nvSpPr>
@@ -6485,7 +6485,7 @@
       </p:sp>
       <p:sp>
         <p:nvSpPr>
-          <p:cNvPr id="16" name="Text 14"/>
+          <p:cNvPr id="16" name=""/>
           <p:cNvSpPr txBox="1"/>
           <p:nvPr/>
         </p:nvSpPr>
@@ -6504,7 +6504,7 @@
           <a:bodyPr wrap="square" lIns="0" tIns="0" rIns="0" bIns="0" anchor="ctr"/>
           <a:lstStyle/>
           <a:p>
-            <a:pPr algn="l"/>
+            <a:pPr/>
             <a:r>
               <a:rPr sz="1300" b="1">
                 <a:solidFill>
@@ -6520,7 +6520,7 @@
       </p:sp>
       <p:sp>
         <p:nvSpPr>
-          <p:cNvPr id="17" name="Text 15"/>
+          <p:cNvPr id="17" name=""/>
           <p:cNvSpPr txBox="1"/>
           <p:nvPr/>
         </p:nvSpPr>
@@ -6539,7 +6539,7 @@
           <a:bodyPr wrap="square" lIns="0" tIns="0" rIns="0" bIns="0" anchor="ctr"/>
           <a:lstStyle/>
           <a:p>
-            <a:pPr algn="l"/>
+            <a:pPr/>
             <a:r>
               <a:rPr sz="1150" b="1">
                 <a:solidFill>
@@ -6555,7 +6555,7 @@
       </p:sp>
       <p:sp>
         <p:nvSpPr>
-          <p:cNvPr id="18" name="Shape 16"/>
+          <p:cNvPr id="18" name=""/>
           <p:cNvSpPr/>
           <p:nvPr/>
         </p:nvSpPr>
@@ -6578,7 +6578,7 @@
       </p:sp>
       <p:sp>
         <p:nvSpPr>
-          <p:cNvPr id="19" name="Shape 17"/>
+          <p:cNvPr id="19" name=""/>
           <p:cNvSpPr/>
           <p:nvPr/>
         </p:nvSpPr>
@@ -6607,7 +6607,7 @@
       </p:sp>
       <p:sp>
         <p:nvSpPr>
-          <p:cNvPr id="20" name="Shape 18"/>
+          <p:cNvPr id="20" name=""/>
           <p:cNvSpPr/>
           <p:nvPr/>
         </p:nvSpPr>
@@ -6627,7 +6627,7 @@
       </p:sp>
       <p:sp>
         <p:nvSpPr>
-          <p:cNvPr id="21" name="Text 19"/>
+          <p:cNvPr id="21" name=""/>
           <p:cNvSpPr txBox="1"/>
           <p:nvPr/>
         </p:nvSpPr>
@@ -6662,7 +6662,7 @@
       </p:sp>
       <p:sp>
         <p:nvSpPr>
-          <p:cNvPr id="22" name="Text 20"/>
+          <p:cNvPr id="22" name=""/>
           <p:cNvSpPr txBox="1"/>
           <p:nvPr/>
         </p:nvSpPr>
@@ -6681,7 +6681,7 @@
           <a:bodyPr wrap="square" lIns="0" tIns="0" rIns="0" bIns="0" anchor="ctr"/>
           <a:lstStyle/>
           <a:p>
-            <a:pPr algn="l"/>
+            <a:pPr/>
             <a:r>
               <a:rPr sz="2350" b="1">
                 <a:solidFill>
@@ -6695,7 +6695,7 @@
               </a:rPr>
               <a:t>I used to</a:t>
             </a:r>
-            <a:pPr algn="l"/>
+            <a:pPr/>
             <a:r>
               <a:rPr sz="2350" b="1">
                 <a:solidFill>
@@ -6706,7 +6706,7 @@
               </a:rPr>
               <a:t> </a:t>
             </a:r>
-            <a:pPr algn="l"/>
+            <a:pPr/>
             <a:r>
               <a:rPr sz="2350" b="1">
                 <a:solidFill>
@@ -6717,7 +6717,7 @@
               </a:rPr>
               <a:t>play</a:t>
             </a:r>
-            <a:pPr algn="l"/>
+            <a:pPr/>
             <a:r>
               <a:rPr sz="2350" b="1">
                 <a:solidFill>
@@ -6733,7 +6733,7 @@
       </p:sp>
       <p:sp>
         <p:nvSpPr>
-          <p:cNvPr id="23" name="Text 21"/>
+          <p:cNvPr id="23" name=""/>
           <p:cNvSpPr txBox="1"/>
           <p:nvPr/>
         </p:nvSpPr>
@@ -6752,7 +6752,7 @@
           <a:bodyPr wrap="square" lIns="0" tIns="0" rIns="0" bIns="0" anchor="ctr"/>
           <a:lstStyle/>
           <a:p>
-            <a:pPr algn="l"/>
+            <a:pPr/>
             <a:r>
               <a:rPr sz="1650" b="1">
                 <a:solidFill>
@@ -6768,7 +6768,7 @@
       </p:sp>
       <p:sp>
         <p:nvSpPr>
-          <p:cNvPr id="24" name="Shape 22"/>
+          <p:cNvPr id="24" name=""/>
           <p:cNvSpPr/>
           <p:nvPr/>
         </p:nvSpPr>
@@ -6797,7 +6797,7 @@
       </p:sp>
       <p:sp>
         <p:nvSpPr>
-          <p:cNvPr id="25" name="Shape 23"/>
+          <p:cNvPr id="25" name=""/>
           <p:cNvSpPr/>
           <p:nvPr/>
         </p:nvSpPr>
@@ -6817,7 +6817,7 @@
       </p:sp>
       <p:sp>
         <p:nvSpPr>
-          <p:cNvPr id="26" name="Text 24"/>
+          <p:cNvPr id="26" name=""/>
           <p:cNvSpPr txBox="1"/>
           <p:nvPr/>
         </p:nvSpPr>
@@ -6852,7 +6852,7 @@
       </p:sp>
       <p:sp>
         <p:nvSpPr>
-          <p:cNvPr id="27" name="Text 25"/>
+          <p:cNvPr id="27" name=""/>
           <p:cNvSpPr txBox="1"/>
           <p:nvPr/>
         </p:nvSpPr>
@@ -6871,7 +6871,7 @@
           <a:bodyPr wrap="square" lIns="0" tIns="0" rIns="0" bIns="0" anchor="ctr"/>
           <a:lstStyle/>
           <a:p>
-            <a:pPr algn="l"/>
+            <a:pPr/>
             <a:r>
               <a:rPr sz="2350" b="1">
                 <a:solidFill>
@@ -6885,7 +6885,7 @@
               </a:rPr>
               <a:t>I used to</a:t>
             </a:r>
-            <a:pPr algn="l"/>
+            <a:pPr/>
             <a:r>
               <a:rPr sz="2350" b="1">
                 <a:solidFill>
@@ -6896,7 +6896,7 @@
               </a:rPr>
               <a:t> </a:t>
             </a:r>
-            <a:pPr algn="l"/>
+            <a:pPr/>
             <a:r>
               <a:rPr sz="2350" b="1">
                 <a:solidFill>
@@ -6907,7 +6907,7 @@
               </a:rPr>
               <a:t>smoke</a:t>
             </a:r>
-            <a:pPr algn="l"/>
+            <a:pPr/>
             <a:r>
               <a:rPr sz="2350" b="1">
                 <a:solidFill>
@@ -6923,7 +6923,7 @@
       </p:sp>
       <p:sp>
         <p:nvSpPr>
-          <p:cNvPr id="28" name="Text 26"/>
+          <p:cNvPr id="28" name=""/>
           <p:cNvSpPr txBox="1"/>
           <p:nvPr/>
         </p:nvSpPr>
@@ -6942,7 +6942,7 @@
           <a:bodyPr wrap="square" lIns="0" tIns="0" rIns="0" bIns="0" anchor="ctr"/>
           <a:lstStyle/>
           <a:p>
-            <a:pPr algn="l"/>
+            <a:pPr/>
             <a:r>
               <a:rPr sz="1650" b="1">
                 <a:solidFill>
@@ -6958,7 +6958,7 @@
       </p:sp>
       <p:sp>
         <p:nvSpPr>
-          <p:cNvPr id="29" name="Shape 27"/>
+          <p:cNvPr id="29" name=""/>
           <p:cNvSpPr/>
           <p:nvPr/>
         </p:nvSpPr>
@@ -6987,7 +6987,7 @@
       </p:sp>
       <p:sp>
         <p:nvSpPr>
-          <p:cNvPr id="30" name="Shape 28"/>
+          <p:cNvPr id="30" name=""/>
           <p:cNvSpPr/>
           <p:nvPr/>
         </p:nvSpPr>
@@ -7007,7 +7007,7 @@
       </p:sp>
       <p:sp>
         <p:nvSpPr>
-          <p:cNvPr id="31" name="Text 29"/>
+          <p:cNvPr id="31" name=""/>
           <p:cNvSpPr txBox="1"/>
           <p:nvPr/>
         </p:nvSpPr>
@@ -7042,7 +7042,7 @@
       </p:sp>
       <p:sp>
         <p:nvSpPr>
-          <p:cNvPr id="32" name="Text 30"/>
+          <p:cNvPr id="32" name=""/>
           <p:cNvSpPr txBox="1"/>
           <p:nvPr/>
         </p:nvSpPr>
@@ -7061,7 +7061,7 @@
           <a:bodyPr wrap="square" lIns="0" tIns="0" rIns="0" bIns="0" anchor="ctr"/>
           <a:lstStyle/>
           <a:p>
-            <a:pPr algn="l"/>
+            <a:pPr/>
             <a:r>
               <a:rPr sz="2350" b="1">
                 <a:solidFill>
@@ -7075,7 +7075,7 @@
               </a:rPr>
               <a:t>I used to</a:t>
             </a:r>
-            <a:pPr algn="l"/>
+            <a:pPr/>
             <a:r>
               <a:rPr sz="2350" b="1">
                 <a:solidFill>
@@ -7086,7 +7086,7 @@
               </a:rPr>
               <a:t> </a:t>
             </a:r>
-            <a:pPr algn="l"/>
+            <a:pPr/>
             <a:r>
               <a:rPr sz="2350" b="1">
                 <a:solidFill>
@@ -7097,7 +7097,7 @@
               </a:rPr>
               <a:t>work</a:t>
             </a:r>
-            <a:pPr algn="l"/>
+            <a:pPr/>
             <a:r>
               <a:rPr sz="2350" b="1">
                 <a:solidFill>
@@ -7108,7 +7108,7 @@
               </a:rPr>
               <a:t> late </a:t>
             </a:r>
-            <a:pPr algn="l"/>
+            <a:pPr/>
             <a:r>
               <a:rPr sz="2350" b="1">
                 <a:solidFill>
@@ -7119,7 +7119,7 @@
               </a:rPr>
               <a:t>(often)</a:t>
             </a:r>
-            <a:pPr algn="l"/>
+            <a:pPr/>
             <a:r>
               <a:rPr sz="2350" b="1">
                 <a:solidFill>
@@ -7135,7 +7135,7 @@
       </p:sp>
       <p:sp>
         <p:nvSpPr>
-          <p:cNvPr id="33" name="Text 31"/>
+          <p:cNvPr id="33" name=""/>
           <p:cNvSpPr txBox="1"/>
           <p:nvPr/>
         </p:nvSpPr>
@@ -7154,7 +7154,7 @@
           <a:bodyPr wrap="square" lIns="0" tIns="0" rIns="0" bIns="0" anchor="ctr"/>
           <a:lstStyle/>
           <a:p>
-            <a:pPr algn="l"/>
+            <a:pPr/>
             <a:r>
               <a:rPr sz="1650" b="1">
                 <a:solidFill>
@@ -7202,7 +7202,7 @@
       </p:grpSpPr>
       <p:sp>
         <p:nvSpPr>
-          <p:cNvPr id="2" name="Text 0"/>
+          <p:cNvPr id="2" name=""/>
           <p:cNvSpPr txBox="1"/>
           <p:nvPr/>
         </p:nvSpPr>
@@ -7221,7 +7221,7 @@
           <a:bodyPr wrap="square" lIns="0" tIns="0" rIns="0" bIns="0" anchor="ctr"/>
           <a:lstStyle/>
           <a:p>
-            <a:pPr algn="l"/>
+            <a:pPr/>
             <a:r>
               <a:rPr sz="1150" b="1">
                 <a:solidFill>
@@ -7237,7 +7237,7 @@
       </p:sp>
       <p:sp>
         <p:nvSpPr>
-          <p:cNvPr id="3" name="Shape 1"/>
+          <p:cNvPr id="3" name=""/>
           <p:cNvSpPr/>
           <p:nvPr/>
         </p:nvSpPr>
@@ -7257,7 +7257,7 @@
       </p:sp>
       <p:sp>
         <p:nvSpPr>
-          <p:cNvPr id="4" name="Shape 2"/>
+          <p:cNvPr id="4" name=""/>
           <p:cNvSpPr/>
           <p:nvPr/>
         </p:nvSpPr>
@@ -7277,7 +7277,7 @@
       </p:sp>
       <p:sp>
         <p:nvSpPr>
-          <p:cNvPr id="5" name="Shape 3"/>
+          <p:cNvPr id="5" name=""/>
           <p:cNvSpPr/>
           <p:nvPr/>
         </p:nvSpPr>
@@ -7299,7 +7299,7 @@
       </p:sp>
       <p:sp>
         <p:nvSpPr>
-          <p:cNvPr id="6" name="Shape 4"/>
+          <p:cNvPr id="6" name=""/>
           <p:cNvSpPr/>
           <p:nvPr/>
         </p:nvSpPr>
@@ -7319,7 +7319,7 @@
       </p:sp>
       <p:sp>
         <p:nvSpPr>
-          <p:cNvPr id="7" name="Shape 5"/>
+          <p:cNvPr id="7" name=""/>
           <p:cNvSpPr/>
           <p:nvPr/>
         </p:nvSpPr>
@@ -7339,7 +7339,7 @@
       </p:sp>
       <p:sp>
         <p:nvSpPr>
-          <p:cNvPr id="8" name="Shape 6"/>
+          <p:cNvPr id="8" name=""/>
           <p:cNvSpPr/>
           <p:nvPr/>
         </p:nvSpPr>
@@ -7359,7 +7359,7 @@
       </p:sp>
       <p:sp>
         <p:nvSpPr>
-          <p:cNvPr id="9" name="Shape 7"/>
+          <p:cNvPr id="9" name=""/>
           <p:cNvSpPr/>
           <p:nvPr/>
         </p:nvSpPr>
@@ -7379,7 +7379,7 @@
       </p:sp>
       <p:sp>
         <p:nvSpPr>
-          <p:cNvPr id="10" name="Shape 8"/>
+          <p:cNvPr id="10" name=""/>
           <p:cNvSpPr/>
           <p:nvPr/>
         </p:nvSpPr>
@@ -7399,7 +7399,7 @@
       </p:sp>
       <p:sp>
         <p:nvSpPr>
-          <p:cNvPr id="11" name="Shape 9"/>
+          <p:cNvPr id="11" name=""/>
           <p:cNvSpPr/>
           <p:nvPr/>
         </p:nvSpPr>
@@ -7419,7 +7419,7 @@
       </p:sp>
       <p:sp>
         <p:nvSpPr>
-          <p:cNvPr id="12" name="Text 10"/>
+          <p:cNvPr id="12" name=""/>
           <p:cNvSpPr txBox="1"/>
           <p:nvPr/>
         </p:nvSpPr>
@@ -7438,7 +7438,7 @@
           <a:bodyPr wrap="square" lIns="0" tIns="0" rIns="0" bIns="0" anchor="ctr"/>
           <a:lstStyle/>
           <a:p>
-            <a:pPr algn="l"/>
+            <a:pPr/>
             <a:r>
               <a:rPr sz="8100" b="1">
                 <a:solidFill>
@@ -7454,7 +7454,7 @@
       </p:sp>
       <p:sp>
         <p:nvSpPr>
-          <p:cNvPr id="13" name="Text 11"/>
+          <p:cNvPr id="13" name=""/>
           <p:cNvSpPr txBox="1"/>
           <p:nvPr/>
         </p:nvSpPr>
@@ -7473,7 +7473,7 @@
           <a:bodyPr wrap="square" lIns="0" tIns="0" rIns="0" bIns="0" anchor="ctr"/>
           <a:lstStyle/>
           <a:p>
-            <a:pPr algn="l"/>
+            <a:pPr/>
             <a:r>
               <a:rPr sz="4050" b="1">
                 <a:solidFill>
@@ -7484,7 +7484,7 @@
               </a:rPr>
               <a:t>I should have </a:t>
             </a:r>
-            <a:pPr algn="l"/>
+            <a:pPr/>
             <a:r>
               <a:rPr sz="4050" b="1">
                 <a:solidFill>
@@ -7500,7 +7500,7 @@
       </p:sp>
       <p:sp>
         <p:nvSpPr>
-          <p:cNvPr id="14" name="Text 12"/>
+          <p:cNvPr id="14" name=""/>
           <p:cNvSpPr txBox="1"/>
           <p:nvPr/>
         </p:nvSpPr>
@@ -7519,7 +7519,7 @@
           <a:bodyPr wrap="square" lIns="0" tIns="0" rIns="0" bIns="0" anchor="ctr"/>
           <a:lstStyle/>
           <a:p>
-            <a:pPr algn="l"/>
+            <a:pPr/>
             <a:r>
               <a:rPr sz="2100" b="1">
                 <a:solidFill>
@@ -7535,7 +7535,7 @@
       </p:sp>
       <p:sp>
         <p:nvSpPr>
-          <p:cNvPr id="15" name="Shape 13"/>
+          <p:cNvPr id="15" name=""/>
           <p:cNvSpPr/>
           <p:nvPr/>
         </p:nvSpPr>
@@ -7557,7 +7557,7 @@
       </p:sp>
       <p:sp>
         <p:nvSpPr>
-          <p:cNvPr id="16" name="Text 14"/>
+          <p:cNvPr id="16" name=""/>
           <p:cNvSpPr txBox="1"/>
           <p:nvPr/>
         </p:nvSpPr>
@@ -7576,7 +7576,7 @@
           <a:bodyPr wrap="square" lIns="0" tIns="0" rIns="0" bIns="0" anchor="ctr"/>
           <a:lstStyle/>
           <a:p>
-            <a:pPr algn="l"/>
+            <a:pPr/>
             <a:r>
               <a:rPr sz="1300" b="1">
                 <a:solidFill>
@@ -7592,7 +7592,7 @@
       </p:sp>
       <p:sp>
         <p:nvSpPr>
-          <p:cNvPr id="17" name="Shape 15"/>
+          <p:cNvPr id="17" name=""/>
           <p:cNvSpPr/>
           <p:nvPr/>
         </p:nvSpPr>
@@ -7614,7 +7614,7 @@
       </p:sp>
       <p:sp>
         <p:nvSpPr>
-          <p:cNvPr id="18" name="Text 16"/>
+          <p:cNvPr id="18" name=""/>
           <p:cNvSpPr txBox="1"/>
           <p:nvPr/>
         </p:nvSpPr>
@@ -7633,7 +7633,7 @@
           <a:bodyPr wrap="square" lIns="0" tIns="0" rIns="0" bIns="0" anchor="ctr"/>
           <a:lstStyle/>
           <a:p>
-            <a:pPr algn="l"/>
+            <a:pPr/>
             <a:r>
               <a:rPr sz="1050" b="1">
                 <a:solidFill>
@@ -7649,7 +7649,7 @@
       </p:sp>
       <p:sp>
         <p:nvSpPr>
-          <p:cNvPr id="19" name="Text 17"/>
+          <p:cNvPr id="19" name=""/>
           <p:cNvSpPr txBox="1"/>
           <p:nvPr/>
         </p:nvSpPr>
@@ -7668,7 +7668,7 @@
           <a:bodyPr wrap="square" lIns="0" tIns="0" rIns="0" bIns="0" anchor="ctr"/>
           <a:lstStyle/>
           <a:p>
-            <a:pPr algn="l"/>
+            <a:pPr/>
             <a:r>
               <a:rPr sz="1900" b="1">
                 <a:solidFill>
@@ -7684,7 +7684,7 @@
       </p:sp>
       <p:sp>
         <p:nvSpPr>
-          <p:cNvPr id="20" name="Text 18"/>
+          <p:cNvPr id="20" name=""/>
           <p:cNvSpPr txBox="1"/>
           <p:nvPr/>
         </p:nvSpPr>
@@ -7703,7 +7703,7 @@
           <a:bodyPr wrap="square" lIns="0" tIns="0" rIns="0" bIns="0" anchor="ctr"/>
           <a:lstStyle/>
           <a:p>
-            <a:pPr algn="l"/>
+            <a:pPr/>
             <a:r>
               <a:rPr sz="1500" b="1">
                 <a:solidFill>
@@ -7719,7 +7719,7 @@
       </p:sp>
       <p:sp>
         <p:nvSpPr>
-          <p:cNvPr id="21" name="Text 19"/>
+          <p:cNvPr id="21" name=""/>
           <p:cNvSpPr txBox="1"/>
           <p:nvPr/>
         </p:nvSpPr>
@@ -7738,7 +7738,7 @@
           <a:bodyPr wrap="square" lIns="0" tIns="0" rIns="0" bIns="0" anchor="ctr"/>
           <a:lstStyle/>
           <a:p>
-            <a:pPr algn="l"/>
+            <a:pPr/>
             <a:r>
               <a:rPr sz="1150" b="1">
                 <a:solidFill>
@@ -7754,7 +7754,7 @@
       </p:sp>
       <p:sp>
         <p:nvSpPr>
-          <p:cNvPr id="22" name="Shape 20"/>
+          <p:cNvPr id="22" name=""/>
           <p:cNvSpPr/>
           <p:nvPr/>
         </p:nvSpPr>
@@ -7777,7 +7777,7 @@
       </p:sp>
       <p:sp>
         <p:nvSpPr>
-          <p:cNvPr id="23" name="Shape 21"/>
+          <p:cNvPr id="23" name=""/>
           <p:cNvSpPr/>
           <p:nvPr/>
         </p:nvSpPr>
@@ -7806,7 +7806,7 @@
       </p:sp>
       <p:sp>
         <p:nvSpPr>
-          <p:cNvPr id="24" name="Shape 22"/>
+          <p:cNvPr id="24" name=""/>
           <p:cNvSpPr/>
           <p:nvPr/>
         </p:nvSpPr>
@@ -7826,7 +7826,7 @@
       </p:sp>
       <p:sp>
         <p:nvSpPr>
-          <p:cNvPr id="25" name="Text 23"/>
+          <p:cNvPr id="25" name=""/>
           <p:cNvSpPr txBox="1"/>
           <p:nvPr/>
         </p:nvSpPr>
@@ -7861,7 +7861,7 @@
       </p:sp>
       <p:sp>
         <p:nvSpPr>
-          <p:cNvPr id="26" name="Text 24"/>
+          <p:cNvPr id="26" name=""/>
           <p:cNvSpPr txBox="1"/>
           <p:nvPr/>
         </p:nvSpPr>
@@ -7880,7 +7880,7 @@
           <a:bodyPr wrap="square" lIns="0" tIns="0" rIns="0" bIns="0" anchor="ctr"/>
           <a:lstStyle/>
           <a:p>
-            <a:pPr algn="l"/>
+            <a:pPr/>
             <a:r>
               <a:rPr sz="2050" b="1">
                 <a:solidFill>
@@ -7894,7 +7894,7 @@
               </a:rPr>
               <a:t>I should have</a:t>
             </a:r>
-            <a:pPr algn="l"/>
+            <a:pPr/>
             <a:r>
               <a:rPr sz="2050" b="1">
                 <a:solidFill>
@@ -7905,7 +7905,7 @@
               </a:rPr>
               <a:t> </a:t>
             </a:r>
-            <a:pPr algn="l"/>
+            <a:pPr/>
             <a:r>
               <a:rPr sz="2050" b="1">
                 <a:solidFill>
@@ -7916,7 +7916,7 @@
               </a:rPr>
               <a:t>left</a:t>
             </a:r>
-            <a:pPr algn="l"/>
+            <a:pPr/>
             <a:r>
               <a:rPr sz="2050" b="1">
                 <a:solidFill>
@@ -7932,7 +7932,7 @@
       </p:sp>
       <p:sp>
         <p:nvSpPr>
-          <p:cNvPr id="27" name="Text 25"/>
+          <p:cNvPr id="27" name=""/>
           <p:cNvSpPr txBox="1"/>
           <p:nvPr/>
         </p:nvSpPr>
@@ -7951,7 +7951,7 @@
           <a:bodyPr wrap="square" lIns="0" tIns="0" rIns="0" bIns="0" anchor="ctr"/>
           <a:lstStyle/>
           <a:p>
-            <a:pPr algn="l"/>
+            <a:pPr/>
             <a:r>
               <a:rPr sz="1450" b="1">
                 <a:solidFill>
@@ -7967,7 +7967,7 @@
       </p:sp>
       <p:sp>
         <p:nvSpPr>
-          <p:cNvPr id="28" name="Shape 26"/>
+          <p:cNvPr id="28" name=""/>
           <p:cNvSpPr/>
           <p:nvPr/>
         </p:nvSpPr>
@@ -7996,7 +7996,7 @@
       </p:sp>
       <p:sp>
         <p:nvSpPr>
-          <p:cNvPr id="29" name="Shape 27"/>
+          <p:cNvPr id="29" name=""/>
           <p:cNvSpPr/>
           <p:nvPr/>
         </p:nvSpPr>
@@ -8016,7 +8016,7 @@
       </p:sp>
       <p:sp>
         <p:nvSpPr>
-          <p:cNvPr id="30" name="Text 28"/>
+          <p:cNvPr id="30" name=""/>
           <p:cNvSpPr txBox="1"/>
           <p:nvPr/>
         </p:nvSpPr>
@@ -8051,7 +8051,7 @@
       </p:sp>
       <p:sp>
         <p:nvSpPr>
-          <p:cNvPr id="31" name="Text 29"/>
+          <p:cNvPr id="31" name=""/>
           <p:cNvSpPr txBox="1"/>
           <p:nvPr/>
         </p:nvSpPr>
@@ -8070,7 +8070,7 @@
           <a:bodyPr wrap="square" lIns="0" tIns="0" rIns="0" bIns="0" anchor="ctr"/>
           <a:lstStyle/>
           <a:p>
-            <a:pPr algn="l"/>
+            <a:pPr/>
             <a:r>
               <a:rPr sz="2050" b="1">
                 <a:solidFill>
@@ -8084,7 +8084,7 @@
               </a:rPr>
               <a:t>I should have</a:t>
             </a:r>
-            <a:pPr algn="l"/>
+            <a:pPr/>
             <a:r>
               <a:rPr sz="2050" b="1">
                 <a:solidFill>
@@ -8095,7 +8095,7 @@
               </a:rPr>
               <a:t> </a:t>
             </a:r>
-            <a:pPr algn="l"/>
+            <a:pPr/>
             <a:r>
               <a:rPr sz="2050" b="1">
                 <a:solidFill>
@@ -8106,7 +8106,7 @@
               </a:rPr>
               <a:t>bought</a:t>
             </a:r>
-            <a:pPr algn="l"/>
+            <a:pPr/>
             <a:r>
               <a:rPr sz="2050" b="1">
                 <a:solidFill>
@@ -8122,7 +8122,7 @@
       </p:sp>
       <p:sp>
         <p:nvSpPr>
-          <p:cNvPr id="32" name="Text 30"/>
+          <p:cNvPr id="32" name=""/>
           <p:cNvSpPr txBox="1"/>
           <p:nvPr/>
         </p:nvSpPr>
@@ -8141,7 +8141,7 @@
           <a:bodyPr wrap="square" lIns="0" tIns="0" rIns="0" bIns="0" anchor="ctr"/>
           <a:lstStyle/>
           <a:p>
-            <a:pPr algn="l"/>
+            <a:pPr/>
             <a:r>
               <a:rPr sz="1450" b="1">
                 <a:solidFill>
@@ -8157,7 +8157,7 @@
       </p:sp>
       <p:sp>
         <p:nvSpPr>
-          <p:cNvPr id="33" name="Shape 31"/>
+          <p:cNvPr id="33" name=""/>
           <p:cNvSpPr/>
           <p:nvPr/>
         </p:nvSpPr>
@@ -8186,7 +8186,7 @@
       </p:sp>
       <p:sp>
         <p:nvSpPr>
-          <p:cNvPr id="34" name="Shape 32"/>
+          <p:cNvPr id="34" name=""/>
           <p:cNvSpPr/>
           <p:nvPr/>
         </p:nvSpPr>
@@ -8206,7 +8206,7 @@
       </p:sp>
       <p:sp>
         <p:nvSpPr>
-          <p:cNvPr id="35" name="Text 33"/>
+          <p:cNvPr id="35" name=""/>
           <p:cNvSpPr txBox="1"/>
           <p:nvPr/>
         </p:nvSpPr>
@@ -8241,7 +8241,7 @@
       </p:sp>
       <p:sp>
         <p:nvSpPr>
-          <p:cNvPr id="36" name="Text 34"/>
+          <p:cNvPr id="36" name=""/>
           <p:cNvSpPr txBox="1"/>
           <p:nvPr/>
         </p:nvSpPr>
@@ -8260,7 +8260,7 @@
           <a:bodyPr wrap="square" lIns="0" tIns="0" rIns="0" bIns="0" anchor="ctr"/>
           <a:lstStyle/>
           <a:p>
-            <a:pPr algn="l"/>
+            <a:pPr/>
             <a:r>
               <a:rPr sz="2050" b="1">
                 <a:solidFill>
@@ -8274,7 +8274,7 @@
               </a:rPr>
               <a:t>I shouldn't have</a:t>
             </a:r>
-            <a:pPr algn="l"/>
+            <a:pPr/>
             <a:r>
               <a:rPr sz="2050" b="1">
                 <a:solidFill>
@@ -8285,7 +8285,7 @@
               </a:rPr>
               <a:t> </a:t>
             </a:r>
-            <a:pPr algn="l"/>
+            <a:pPr/>
             <a:r>
               <a:rPr sz="2050" b="1">
                 <a:solidFill>
@@ -8296,7 +8296,7 @@
               </a:rPr>
               <a:t>said</a:t>
             </a:r>
-            <a:pPr algn="l"/>
+            <a:pPr/>
             <a:r>
               <a:rPr sz="2050" b="1">
                 <a:solidFill>
@@ -8312,7 +8312,7 @@
       </p:sp>
       <p:sp>
         <p:nvSpPr>
-          <p:cNvPr id="37" name="Text 35"/>
+          <p:cNvPr id="37" name=""/>
           <p:cNvSpPr txBox="1"/>
           <p:nvPr/>
         </p:nvSpPr>
@@ -8331,7 +8331,7 @@
           <a:bodyPr wrap="square" lIns="0" tIns="0" rIns="0" bIns="0" anchor="ctr"/>
           <a:lstStyle/>
           <a:p>
-            <a:pPr algn="l"/>
+            <a:pPr/>
             <a:r>
               <a:rPr sz="1450" b="1">
                 <a:solidFill>
@@ -8347,7 +8347,7 @@
       </p:sp>
       <p:sp>
         <p:nvSpPr>
-          <p:cNvPr id="38" name="Text 36"/>
+          <p:cNvPr id="38" name=""/>
           <p:cNvSpPr txBox="1"/>
           <p:nvPr/>
         </p:nvSpPr>
@@ -8366,7 +8366,7 @@
           <a:bodyPr wrap="square" lIns="0" tIns="0" rIns="0" bIns="0" anchor="ctr"/>
           <a:lstStyle/>
           <a:p>
-            <a:pPr algn="l"/>
+            <a:pPr/>
             <a:r>
               <a:rPr sz="1150" b="1">
                 <a:solidFill>
@@ -8382,7 +8382,7 @@
       </p:sp>
       <p:sp>
         <p:nvSpPr>
-          <p:cNvPr id="39" name="Shape 37"/>
+          <p:cNvPr id="39" name=""/>
           <p:cNvSpPr/>
           <p:nvPr/>
         </p:nvSpPr>
@@ -8405,7 +8405,7 @@
       </p:sp>
       <p:sp>
         <p:nvSpPr>
-          <p:cNvPr id="40" name="Shape 38"/>
+          <p:cNvPr id="40" name=""/>
           <p:cNvSpPr/>
           <p:nvPr/>
         </p:nvSpPr>
@@ -8432,7 +8432,7 @@
       </p:sp>
       <p:sp>
         <p:nvSpPr>
-          <p:cNvPr id="41" name="Text 39"/>
+          <p:cNvPr id="41" name=""/>
           <p:cNvSpPr txBox="1"/>
           <p:nvPr/>
         </p:nvSpPr>
@@ -8451,7 +8451,7 @@
           <a:bodyPr wrap="square" lIns="0" tIns="0" rIns="0" bIns="0" anchor="ctr"/>
           <a:lstStyle/>
           <a:p>
-            <a:pPr algn="l"/>
+            <a:pPr/>
             <a:r>
               <a:rPr sz="1600" b="1">
                 <a:solidFill>
@@ -8467,7 +8467,7 @@
       </p:sp>
       <p:sp>
         <p:nvSpPr>
-          <p:cNvPr id="42" name="Shape 40"/>
+          <p:cNvPr id="42" name=""/>
           <p:cNvSpPr/>
           <p:nvPr/>
         </p:nvSpPr>
@@ -8489,7 +8489,7 @@
       </p:sp>
       <p:sp>
         <p:nvSpPr>
-          <p:cNvPr id="43" name="Text 41"/>
+          <p:cNvPr id="43" name=""/>
           <p:cNvSpPr txBox="1"/>
           <p:nvPr/>
         </p:nvSpPr>
@@ -8508,7 +8508,7 @@
           <a:bodyPr wrap="square" lIns="0" tIns="0" rIns="0" bIns="0" anchor="ctr"/>
           <a:lstStyle/>
           <a:p>
-            <a:pPr algn="l"/>
+            <a:pPr/>
             <a:r>
               <a:rPr sz="1050" b="1">
                 <a:solidFill>
@@ -8524,7 +8524,7 @@
       </p:sp>
       <p:sp>
         <p:nvSpPr>
-          <p:cNvPr id="44" name="Text 42"/>
+          <p:cNvPr id="44" name=""/>
           <p:cNvSpPr txBox="1"/>
           <p:nvPr/>
         </p:nvSpPr>
@@ -8543,7 +8543,7 @@
           <a:bodyPr wrap="square" lIns="0" tIns="0" rIns="0" bIns="0" anchor="ctr"/>
           <a:lstStyle/>
           <a:p>
-            <a:pPr algn="l"/>
+            <a:pPr/>
             <a:r>
               <a:rPr sz="1750" b="1">
                 <a:solidFill>
@@ -8554,7 +8554,7 @@
               </a:rPr>
               <a:t>I </a:t>
             </a:r>
-            <a:pPr algn="l"/>
+            <a:pPr/>
             <a:r>
               <a:rPr sz="1750" b="1">
                 <a:solidFill>
@@ -8568,7 +8568,7 @@
               </a:rPr>
               <a:t>should have</a:t>
             </a:r>
-            <a:pPr algn="l"/>
+            <a:pPr/>
             <a:r>
               <a:rPr sz="1750" b="1">
                 <a:solidFill>
@@ -8584,7 +8584,7 @@
       </p:sp>
       <p:sp>
         <p:nvSpPr>
-          <p:cNvPr id="45" name="Text 43"/>
+          <p:cNvPr id="45" name=""/>
           <p:cNvSpPr txBox="1"/>
           <p:nvPr/>
         </p:nvSpPr>
@@ -8603,7 +8603,7 @@
           <a:bodyPr wrap="square" lIns="0" tIns="0" rIns="0" bIns="0" anchor="ctr"/>
           <a:lstStyle/>
           <a:p>
-            <a:pPr algn="l"/>
+            <a:pPr/>
             <a:r>
               <a:rPr sz="1300" b="1">
                 <a:solidFill>
@@ -8619,7 +8619,7 @@
       </p:sp>
       <p:sp>
         <p:nvSpPr>
-          <p:cNvPr id="46" name="Text 44"/>
+          <p:cNvPr id="46" name=""/>
           <p:cNvSpPr txBox="1"/>
           <p:nvPr/>
         </p:nvSpPr>
@@ -8638,7 +8638,7 @@
           <a:bodyPr wrap="square" lIns="0" tIns="0" rIns="0" bIns="0" anchor="ctr"/>
           <a:lstStyle/>
           <a:p>
-            <a:pPr algn="l"/>
+            <a:pPr/>
             <a:r>
               <a:rPr sz="1750" b="1">
                 <a:solidFill>
@@ -8649,7 +8649,7 @@
               </a:rPr>
               <a:t>I </a:t>
             </a:r>
-            <a:pPr algn="l"/>
+            <a:pPr/>
             <a:r>
               <a:rPr sz="1750" b="1">
                 <a:solidFill>
@@ -8663,7 +8663,7 @@
               </a:rPr>
               <a:t>shouldn't have</a:t>
             </a:r>
-            <a:pPr algn="l"/>
+            <a:pPr/>
             <a:r>
               <a:rPr sz="1750" b="1">
                 <a:solidFill>
@@ -8679,7 +8679,7 @@
       </p:sp>
       <p:sp>
         <p:nvSpPr>
-          <p:cNvPr id="47" name="Text 45"/>
+          <p:cNvPr id="47" name=""/>
           <p:cNvSpPr txBox="1"/>
           <p:nvPr/>
         </p:nvSpPr>
@@ -8698,7 +8698,7 @@
           <a:bodyPr wrap="square" lIns="0" tIns="0" rIns="0" bIns="0" anchor="ctr"/>
           <a:lstStyle/>
           <a:p>
-            <a:pPr algn="l"/>
+            <a:pPr/>
             <a:r>
               <a:rPr sz="1300" b="1">
                 <a:solidFill>
@@ -8714,7 +8714,7 @@
       </p:sp>
       <p:sp>
         <p:nvSpPr>
-          <p:cNvPr id="48" name="Shape 46"/>
+          <p:cNvPr id="48" name=""/>
           <p:cNvSpPr/>
           <p:nvPr/>
         </p:nvSpPr>
@@ -8737,7 +8737,7 @@
       </p:sp>
       <p:sp>
         <p:nvSpPr>
-          <p:cNvPr id="49" name="Text 47"/>
+          <p:cNvPr id="49" name=""/>
           <p:cNvSpPr txBox="1"/>
           <p:nvPr/>
         </p:nvSpPr>
@@ -8756,7 +8756,7 @@
           <a:bodyPr wrap="square" lIns="0" tIns="0" rIns="0" bIns="0" anchor="ctr"/>
           <a:lstStyle/>
           <a:p>
-            <a:pPr algn="l"/>
+            <a:pPr/>
             <a:r>
               <a:rPr sz="1600" b="1">
                 <a:solidFill>
@@ -8772,7 +8772,7 @@
       </p:sp>
       <p:sp>
         <p:nvSpPr>
-          <p:cNvPr id="50" name="Shape 48"/>
+          <p:cNvPr id="50" name=""/>
           <p:cNvSpPr/>
           <p:nvPr/>
         </p:nvSpPr>
@@ -8794,7 +8794,7 @@
       </p:sp>
       <p:sp>
         <p:nvSpPr>
-          <p:cNvPr id="51" name="Text 49"/>
+          <p:cNvPr id="51" name=""/>
           <p:cNvSpPr txBox="1"/>
           <p:nvPr/>
         </p:nvSpPr>
@@ -8813,7 +8813,7 @@
           <a:bodyPr wrap="square" lIns="0" tIns="0" rIns="0" bIns="0" anchor="ctr"/>
           <a:lstStyle/>
           <a:p>
-            <a:pPr algn="l"/>
+            <a:pPr/>
             <a:r>
               <a:rPr sz="1050" b="1">
                 <a:solidFill>
@@ -8829,7 +8829,7 @@
       </p:sp>
       <p:sp>
         <p:nvSpPr>
-          <p:cNvPr id="52" name="Shape 50"/>
+          <p:cNvPr id="52" name=""/>
           <p:cNvSpPr/>
           <p:nvPr/>
         </p:nvSpPr>
@@ -8851,7 +8851,7 @@
       </p:sp>
       <p:sp>
         <p:nvSpPr>
-          <p:cNvPr id="53" name="Text 51"/>
+          <p:cNvPr id="53" name=""/>
           <p:cNvSpPr txBox="1"/>
           <p:nvPr/>
         </p:nvSpPr>
@@ -8870,7 +8870,7 @@
           <a:bodyPr wrap="square" lIns="0" tIns="0" rIns="0" bIns="0" anchor="ctr"/>
           <a:lstStyle/>
           <a:p>
-            <a:pPr algn="l"/>
+            <a:pPr/>
             <a:r>
               <a:rPr sz="2050" b="1">
                 <a:solidFill>
@@ -8886,7 +8886,7 @@
       </p:sp>
       <p:sp>
         <p:nvSpPr>
-          <p:cNvPr id="54" name="Text 52"/>
+          <p:cNvPr id="54" name=""/>
           <p:cNvSpPr txBox="1"/>
           <p:nvPr/>
         </p:nvSpPr>
@@ -8905,7 +8905,7 @@
           <a:bodyPr wrap="square" lIns="0" tIns="0" rIns="0" bIns="0" anchor="ctr"/>
           <a:lstStyle/>
           <a:p>
-            <a:pPr algn="l"/>
+            <a:pPr/>
             <a:r>
               <a:rPr sz="1800" b="1">
                 <a:solidFill>
@@ -8921,7 +8921,7 @@
       </p:sp>
       <p:sp>
         <p:nvSpPr>
-          <p:cNvPr id="55" name="Text 53"/>
+          <p:cNvPr id="55" name=""/>
           <p:cNvSpPr txBox="1"/>
           <p:nvPr/>
         </p:nvSpPr>
@@ -8940,7 +8940,7 @@
           <a:bodyPr wrap="square" lIns="0" tIns="0" rIns="0" bIns="0" anchor="ctr"/>
           <a:lstStyle/>
           <a:p>
-            <a:pPr algn="l"/>
+            <a:pPr/>
             <a:r>
               <a:rPr sz="2050" b="1">
                 <a:solidFill>
@@ -8988,7 +8988,7 @@
       </p:grpSpPr>
       <p:sp>
         <p:nvSpPr>
-          <p:cNvPr id="2" name="Text 0"/>
+          <p:cNvPr id="2" name=""/>
           <p:cNvSpPr txBox="1"/>
           <p:nvPr/>
         </p:nvSpPr>
@@ -9007,7 +9007,7 @@
           <a:bodyPr wrap="square" lIns="0" tIns="0" rIns="0" bIns="0" anchor="ctr"/>
           <a:lstStyle/>
           <a:p>
-            <a:pPr algn="l"/>
+            <a:pPr/>
             <a:r>
               <a:rPr sz="1150" b="1">
                 <a:solidFill>
@@ -9023,7 +9023,7 @@
       </p:sp>
       <p:sp>
         <p:nvSpPr>
-          <p:cNvPr id="3" name="Shape 1"/>
+          <p:cNvPr id="3" name=""/>
           <p:cNvSpPr/>
           <p:nvPr/>
         </p:nvSpPr>
@@ -9043,7 +9043,7 @@
       </p:sp>
       <p:sp>
         <p:nvSpPr>
-          <p:cNvPr id="4" name="Shape 2"/>
+          <p:cNvPr id="4" name=""/>
           <p:cNvSpPr/>
           <p:nvPr/>
         </p:nvSpPr>
@@ -9063,7 +9063,7 @@
       </p:sp>
       <p:sp>
         <p:nvSpPr>
-          <p:cNvPr id="5" name="Shape 3"/>
+          <p:cNvPr id="5" name=""/>
           <p:cNvSpPr/>
           <p:nvPr/>
         </p:nvSpPr>
@@ -9083,7 +9083,7 @@
       </p:sp>
       <p:sp>
         <p:nvSpPr>
-          <p:cNvPr id="6" name="Shape 4"/>
+          <p:cNvPr id="6" name=""/>
           <p:cNvSpPr/>
           <p:nvPr/>
         </p:nvSpPr>
@@ -9105,7 +9105,7 @@
       </p:sp>
       <p:sp>
         <p:nvSpPr>
-          <p:cNvPr id="7" name="Shape 5"/>
+          <p:cNvPr id="7" name=""/>
           <p:cNvSpPr/>
           <p:nvPr/>
         </p:nvSpPr>
@@ -9125,7 +9125,7 @@
       </p:sp>
       <p:sp>
         <p:nvSpPr>
-          <p:cNvPr id="8" name="Shape 6"/>
+          <p:cNvPr id="8" name=""/>
           <p:cNvSpPr/>
           <p:nvPr/>
         </p:nvSpPr>
@@ -9145,7 +9145,7 @@
       </p:sp>
       <p:sp>
         <p:nvSpPr>
-          <p:cNvPr id="9" name="Shape 7"/>
+          <p:cNvPr id="9" name=""/>
           <p:cNvSpPr/>
           <p:nvPr/>
         </p:nvSpPr>
@@ -9165,7 +9165,7 @@
       </p:sp>
       <p:sp>
         <p:nvSpPr>
-          <p:cNvPr id="10" name="Shape 8"/>
+          <p:cNvPr id="10" name=""/>
           <p:cNvSpPr/>
           <p:nvPr/>
         </p:nvSpPr>
@@ -9185,7 +9185,7 @@
       </p:sp>
       <p:sp>
         <p:nvSpPr>
-          <p:cNvPr id="11" name="Shape 9"/>
+          <p:cNvPr id="11" name=""/>
           <p:cNvSpPr/>
           <p:nvPr/>
         </p:nvSpPr>
@@ -9205,7 +9205,7 @@
       </p:sp>
       <p:sp>
         <p:nvSpPr>
-          <p:cNvPr id="12" name="Text 10"/>
+          <p:cNvPr id="12" name=""/>
           <p:cNvSpPr txBox="1"/>
           <p:nvPr/>
         </p:nvSpPr>
@@ -9224,7 +9224,7 @@
           <a:bodyPr wrap="square" lIns="0" tIns="0" rIns="0" bIns="0" anchor="ctr"/>
           <a:lstStyle/>
           <a:p>
-            <a:pPr algn="l"/>
+            <a:pPr/>
             <a:r>
               <a:rPr sz="8100" b="1">
                 <a:solidFill>
@@ -9240,7 +9240,7 @@
       </p:sp>
       <p:sp>
         <p:nvSpPr>
-          <p:cNvPr id="13" name="Text 11"/>
+          <p:cNvPr id="13" name=""/>
           <p:cNvSpPr txBox="1"/>
           <p:nvPr/>
         </p:nvSpPr>
@@ -9259,7 +9259,7 @@
           <a:bodyPr wrap="square" lIns="0" tIns="0" rIns="0" bIns="0" anchor="ctr"/>
           <a:lstStyle/>
           <a:p>
-            <a:pPr algn="l"/>
+            <a:pPr/>
             <a:r>
               <a:rPr sz="4050" b="1">
                 <a:solidFill>
@@ -9270,7 +9270,7 @@
               </a:rPr>
               <a:t>Do you wanna </a:t>
             </a:r>
-            <a:pPr algn="l"/>
+            <a:pPr/>
             <a:r>
               <a:rPr sz="4050" b="1">
                 <a:solidFill>
@@ -9281,7 +9281,7 @@
               </a:rPr>
               <a:t>~</a:t>
             </a:r>
-            <a:pPr algn="l"/>
+            <a:pPr/>
             <a:r>
               <a:rPr sz="4050" b="1">
                 <a:solidFill>
@@ -9297,7 +9297,7 @@
       </p:sp>
       <p:sp>
         <p:nvSpPr>
-          <p:cNvPr id="14" name="Text 12"/>
+          <p:cNvPr id="14" name=""/>
           <p:cNvSpPr txBox="1"/>
           <p:nvPr/>
         </p:nvSpPr>
@@ -9316,7 +9316,7 @@
           <a:bodyPr wrap="square" lIns="0" tIns="0" rIns="0" bIns="0" anchor="ctr"/>
           <a:lstStyle/>
           <a:p>
-            <a:pPr algn="l"/>
+            <a:pPr/>
             <a:r>
               <a:rPr sz="2100" b="1">
                 <a:solidFill>
@@ -9332,7 +9332,7 @@
       </p:sp>
       <p:sp>
         <p:nvSpPr>
-          <p:cNvPr id="15" name="Shape 13"/>
+          <p:cNvPr id="15" name=""/>
           <p:cNvSpPr/>
           <p:nvPr/>
         </p:nvSpPr>
@@ -9354,7 +9354,7 @@
       </p:sp>
       <p:sp>
         <p:nvSpPr>
-          <p:cNvPr id="16" name="Text 14"/>
+          <p:cNvPr id="16" name=""/>
           <p:cNvSpPr txBox="1"/>
           <p:nvPr/>
         </p:nvSpPr>
@@ -9373,7 +9373,7 @@
           <a:bodyPr wrap="square" lIns="0" tIns="0" rIns="0" bIns="0" anchor="ctr"/>
           <a:lstStyle/>
           <a:p>
-            <a:pPr algn="l"/>
+            <a:pPr/>
             <a:r>
               <a:rPr sz="1300" b="1">
                 <a:solidFill>
@@ -9389,7 +9389,7 @@
       </p:sp>
       <p:sp>
         <p:nvSpPr>
-          <p:cNvPr id="17" name="Shape 15"/>
+          <p:cNvPr id="17" name=""/>
           <p:cNvSpPr/>
           <p:nvPr/>
         </p:nvSpPr>
@@ -9411,7 +9411,7 @@
       </p:sp>
       <p:sp>
         <p:nvSpPr>
-          <p:cNvPr id="18" name="Text 16"/>
+          <p:cNvPr id="18" name=""/>
           <p:cNvSpPr txBox="1"/>
           <p:nvPr/>
         </p:nvSpPr>
@@ -9430,7 +9430,7 @@
           <a:bodyPr wrap="square" lIns="0" tIns="0" rIns="0" bIns="0" anchor="ctr"/>
           <a:lstStyle/>
           <a:p>
-            <a:pPr algn="l"/>
+            <a:pPr/>
             <a:r>
               <a:rPr sz="1050" b="1">
                 <a:solidFill>
@@ -9446,7 +9446,7 @@
       </p:sp>
       <p:sp>
         <p:nvSpPr>
-          <p:cNvPr id="19" name="Text 17"/>
+          <p:cNvPr id="19" name=""/>
           <p:cNvSpPr txBox="1"/>
           <p:nvPr/>
         </p:nvSpPr>
@@ -9465,7 +9465,7 @@
           <a:bodyPr wrap="square" lIns="0" tIns="0" rIns="0" bIns="0" anchor="ctr"/>
           <a:lstStyle/>
           <a:p>
-            <a:pPr algn="l"/>
+            <a:pPr/>
             <a:r>
               <a:rPr sz="1900" b="1">
                 <a:solidFill>
@@ -9481,7 +9481,7 @@
       </p:sp>
       <p:sp>
         <p:nvSpPr>
-          <p:cNvPr id="20" name="Text 18"/>
+          <p:cNvPr id="20" name=""/>
           <p:cNvSpPr txBox="1"/>
           <p:nvPr/>
         </p:nvSpPr>
@@ -9500,7 +9500,7 @@
           <a:bodyPr wrap="square" lIns="0" tIns="0" rIns="0" bIns="0" anchor="ctr"/>
           <a:lstStyle/>
           <a:p>
-            <a:pPr algn="l"/>
+            <a:pPr/>
             <a:r>
               <a:rPr sz="1500" b="1">
                 <a:solidFill>
@@ -9516,7 +9516,7 @@
       </p:sp>
       <p:sp>
         <p:nvSpPr>
-          <p:cNvPr id="21" name="Text 19"/>
+          <p:cNvPr id="21" name=""/>
           <p:cNvSpPr txBox="1"/>
           <p:nvPr/>
         </p:nvSpPr>
@@ -9535,7 +9535,7 @@
           <a:bodyPr wrap="square" lIns="0" tIns="0" rIns="0" bIns="0" anchor="ctr"/>
           <a:lstStyle/>
           <a:p>
-            <a:pPr algn="l"/>
+            <a:pPr/>
             <a:r>
               <a:rPr sz="1150" b="1">
                 <a:solidFill>
@@ -9551,7 +9551,7 @@
       </p:sp>
       <p:sp>
         <p:nvSpPr>
-          <p:cNvPr id="22" name="Shape 20"/>
+          <p:cNvPr id="22" name=""/>
           <p:cNvSpPr/>
           <p:nvPr/>
         </p:nvSpPr>
@@ -9574,7 +9574,7 @@
       </p:sp>
       <p:sp>
         <p:nvSpPr>
-          <p:cNvPr id="23" name="Shape 21"/>
+          <p:cNvPr id="23" name=""/>
           <p:cNvSpPr/>
           <p:nvPr/>
         </p:nvSpPr>
@@ -9603,7 +9603,7 @@
       </p:sp>
       <p:sp>
         <p:nvSpPr>
-          <p:cNvPr id="24" name="Shape 22"/>
+          <p:cNvPr id="24" name=""/>
           <p:cNvSpPr/>
           <p:nvPr/>
         </p:nvSpPr>
@@ -9623,7 +9623,7 @@
       </p:sp>
       <p:sp>
         <p:nvSpPr>
-          <p:cNvPr id="25" name="Text 23"/>
+          <p:cNvPr id="25" name=""/>
           <p:cNvSpPr txBox="1"/>
           <p:nvPr/>
         </p:nvSpPr>
@@ -9658,7 +9658,7 @@
       </p:sp>
       <p:sp>
         <p:nvSpPr>
-          <p:cNvPr id="26" name="Text 24"/>
+          <p:cNvPr id="26" name=""/>
           <p:cNvSpPr txBox="1"/>
           <p:nvPr/>
         </p:nvSpPr>
@@ -9677,7 +9677,7 @@
           <a:bodyPr wrap="square" lIns="0" tIns="0" rIns="0" bIns="0" anchor="ctr"/>
           <a:lstStyle/>
           <a:p>
-            <a:pPr algn="l"/>
+            <a:pPr/>
             <a:r>
               <a:rPr sz="2350" b="1">
                 <a:solidFill>
@@ -9691,7 +9691,7 @@
               </a:rPr>
               <a:t>Do you wanna</a:t>
             </a:r>
-            <a:pPr algn="l"/>
+            <a:pPr/>
             <a:r>
               <a:rPr sz="2350" b="1">
                 <a:solidFill>
@@ -9702,7 +9702,7 @@
               </a:rPr>
               <a:t> </a:t>
             </a:r>
-            <a:pPr algn="l"/>
+            <a:pPr/>
             <a:r>
               <a:rPr sz="2350" b="1">
                 <a:solidFill>
@@ -9713,7 +9713,7 @@
               </a:rPr>
               <a:t>eat</a:t>
             </a:r>
-            <a:pPr algn="l"/>
+            <a:pPr/>
             <a:r>
               <a:rPr sz="2350" b="1">
                 <a:solidFill>
@@ -9729,7 +9729,7 @@
       </p:sp>
       <p:sp>
         <p:nvSpPr>
-          <p:cNvPr id="27" name="Text 25"/>
+          <p:cNvPr id="27" name=""/>
           <p:cNvSpPr txBox="1"/>
           <p:nvPr/>
         </p:nvSpPr>
@@ -9748,7 +9748,7 @@
           <a:bodyPr wrap="square" lIns="0" tIns="0" rIns="0" bIns="0" anchor="ctr"/>
           <a:lstStyle/>
           <a:p>
-            <a:pPr algn="l"/>
+            <a:pPr/>
             <a:r>
               <a:rPr sz="1650" b="1">
                 <a:solidFill>
@@ -9764,7 +9764,7 @@
       </p:sp>
       <p:sp>
         <p:nvSpPr>
-          <p:cNvPr id="28" name="Shape 26"/>
+          <p:cNvPr id="28" name=""/>
           <p:cNvSpPr/>
           <p:nvPr/>
         </p:nvSpPr>
@@ -9793,7 +9793,7 @@
       </p:sp>
       <p:sp>
         <p:nvSpPr>
-          <p:cNvPr id="29" name="Shape 27"/>
+          <p:cNvPr id="29" name=""/>
           <p:cNvSpPr/>
           <p:nvPr/>
         </p:nvSpPr>
@@ -9813,7 +9813,7 @@
       </p:sp>
       <p:sp>
         <p:nvSpPr>
-          <p:cNvPr id="30" name="Text 28"/>
+          <p:cNvPr id="30" name=""/>
           <p:cNvSpPr txBox="1"/>
           <p:nvPr/>
         </p:nvSpPr>
@@ -9848,7 +9848,7 @@
       </p:sp>
       <p:sp>
         <p:nvSpPr>
-          <p:cNvPr id="31" name="Text 29"/>
+          <p:cNvPr id="31" name=""/>
           <p:cNvSpPr txBox="1"/>
           <p:nvPr/>
         </p:nvSpPr>
@@ -9867,7 +9867,7 @@
           <a:bodyPr wrap="square" lIns="0" tIns="0" rIns="0" bIns="0" anchor="ctr"/>
           <a:lstStyle/>
           <a:p>
-            <a:pPr algn="l"/>
+            <a:pPr/>
             <a:r>
               <a:rPr sz="2350" b="1">
                 <a:solidFill>
@@ -9881,7 +9881,7 @@
               </a:rPr>
               <a:t>Do you wanna</a:t>
             </a:r>
-            <a:pPr algn="l"/>
+            <a:pPr/>
             <a:r>
               <a:rPr sz="2350" b="1">
                 <a:solidFill>
@@ -9892,7 +9892,7 @@
               </a:rPr>
               <a:t> </a:t>
             </a:r>
-            <a:pPr algn="l"/>
+            <a:pPr/>
             <a:r>
               <a:rPr sz="2350" b="1">
                 <a:solidFill>
@@ -9903,7 +9903,7 @@
               </a:rPr>
               <a:t>come</a:t>
             </a:r>
-            <a:pPr algn="l"/>
+            <a:pPr/>
             <a:r>
               <a:rPr sz="2350" b="1">
                 <a:solidFill>
@@ -9919,7 +9919,7 @@
       </p:sp>
       <p:sp>
         <p:nvSpPr>
-          <p:cNvPr id="32" name="Text 30"/>
+          <p:cNvPr id="32" name=""/>
           <p:cNvSpPr txBox="1"/>
           <p:nvPr/>
         </p:nvSpPr>
@@ -9938,7 +9938,7 @@
           <a:bodyPr wrap="square" lIns="0" tIns="0" rIns="0" bIns="0" anchor="ctr"/>
           <a:lstStyle/>
           <a:p>
-            <a:pPr algn="l"/>
+            <a:pPr/>
             <a:r>
               <a:rPr sz="1650" b="1">
                 <a:solidFill>
@@ -9954,7 +9954,7 @@
       </p:sp>
       <p:sp>
         <p:nvSpPr>
-          <p:cNvPr id="33" name="Shape 31"/>
+          <p:cNvPr id="33" name=""/>
           <p:cNvSpPr/>
           <p:nvPr/>
         </p:nvSpPr>
@@ -9983,7 +9983,7 @@
       </p:sp>
       <p:sp>
         <p:nvSpPr>
-          <p:cNvPr id="34" name="Shape 32"/>
+          <p:cNvPr id="34" name=""/>
           <p:cNvSpPr/>
           <p:nvPr/>
         </p:nvSpPr>
@@ -10003,7 +10003,7 @@
       </p:sp>
       <p:sp>
         <p:nvSpPr>
-          <p:cNvPr id="35" name="Text 33"/>
+          <p:cNvPr id="35" name=""/>
           <p:cNvSpPr txBox="1"/>
           <p:nvPr/>
         </p:nvSpPr>
@@ -10038,7 +10038,7 @@
       </p:sp>
       <p:sp>
         <p:nvSpPr>
-          <p:cNvPr id="36" name="Text 34"/>
+          <p:cNvPr id="36" name=""/>
           <p:cNvSpPr txBox="1"/>
           <p:nvPr/>
         </p:nvSpPr>
@@ -10057,7 +10057,7 @@
           <a:bodyPr wrap="square" lIns="0" tIns="0" rIns="0" bIns="0" anchor="ctr"/>
           <a:lstStyle/>
           <a:p>
-            <a:pPr algn="l"/>
+            <a:pPr/>
             <a:r>
               <a:rPr sz="2350" b="1">
                 <a:solidFill>
@@ -10071,7 +10071,7 @@
               </a:rPr>
               <a:t>Do you wanna</a:t>
             </a:r>
-            <a:pPr algn="l"/>
+            <a:pPr/>
             <a:r>
               <a:rPr sz="2350" b="1">
                 <a:solidFill>
@@ -10082,7 +10082,7 @@
               </a:rPr>
               <a:t> </a:t>
             </a:r>
-            <a:pPr algn="l"/>
+            <a:pPr/>
             <a:r>
               <a:rPr sz="2350" b="1">
                 <a:solidFill>
@@ -10093,7 +10093,7 @@
               </a:rPr>
               <a:t>eat</a:t>
             </a:r>
-            <a:pPr algn="l"/>
+            <a:pPr/>
             <a:r>
               <a:rPr sz="2350" b="1">
                 <a:solidFill>
@@ -10109,7 +10109,7 @@
       </p:sp>
       <p:sp>
         <p:nvSpPr>
-          <p:cNvPr id="37" name="Text 35"/>
+          <p:cNvPr id="37" name=""/>
           <p:cNvSpPr txBox="1"/>
           <p:nvPr/>
         </p:nvSpPr>
@@ -10128,7 +10128,7 @@
           <a:bodyPr wrap="square" lIns="0" tIns="0" rIns="0" bIns="0" anchor="ctr"/>
           <a:lstStyle/>
           <a:p>
-            <a:pPr algn="l"/>
+            <a:pPr/>
             <a:r>
               <a:rPr sz="1650" b="1">
                 <a:solidFill>
@@ -10176,7 +10176,7 @@
       </p:grpSpPr>
       <p:sp>
         <p:nvSpPr>
-          <p:cNvPr id="2" name="Text 0"/>
+          <p:cNvPr id="2" name=""/>
           <p:cNvSpPr txBox="1"/>
           <p:nvPr/>
         </p:nvSpPr>
@@ -10195,7 +10195,7 @@
           <a:bodyPr wrap="square" lIns="0" tIns="0" rIns="0" bIns="0" anchor="ctr"/>
           <a:lstStyle/>
           <a:p>
-            <a:pPr algn="l"/>
+            <a:pPr/>
             <a:r>
               <a:rPr sz="1150" b="1">
                 <a:solidFill>
@@ -10211,7 +10211,7 @@
       </p:sp>
       <p:sp>
         <p:nvSpPr>
-          <p:cNvPr id="3" name="Shape 1"/>
+          <p:cNvPr id="3" name=""/>
           <p:cNvSpPr/>
           <p:nvPr/>
         </p:nvSpPr>
@@ -10231,7 +10231,7 @@
       </p:sp>
       <p:sp>
         <p:nvSpPr>
-          <p:cNvPr id="4" name="Shape 2"/>
+          <p:cNvPr id="4" name=""/>
           <p:cNvSpPr/>
           <p:nvPr/>
         </p:nvSpPr>
@@ -10251,7 +10251,7 @@
       </p:sp>
       <p:sp>
         <p:nvSpPr>
-          <p:cNvPr id="5" name="Shape 3"/>
+          <p:cNvPr id="5" name=""/>
           <p:cNvSpPr/>
           <p:nvPr/>
         </p:nvSpPr>
@@ -10271,7 +10271,7 @@
       </p:sp>
       <p:sp>
         <p:nvSpPr>
-          <p:cNvPr id="6" name="Shape 4"/>
+          <p:cNvPr id="6" name=""/>
           <p:cNvSpPr/>
           <p:nvPr/>
         </p:nvSpPr>
@@ -10291,7 +10291,7 @@
       </p:sp>
       <p:sp>
         <p:nvSpPr>
-          <p:cNvPr id="7" name="Shape 5"/>
+          <p:cNvPr id="7" name=""/>
           <p:cNvSpPr/>
           <p:nvPr/>
         </p:nvSpPr>
@@ -10313,7 +10313,7 @@
       </p:sp>
       <p:sp>
         <p:nvSpPr>
-          <p:cNvPr id="8" name="Shape 6"/>
+          <p:cNvPr id="8" name=""/>
           <p:cNvSpPr/>
           <p:nvPr/>
         </p:nvSpPr>
@@ -10333,7 +10333,7 @@
       </p:sp>
       <p:sp>
         <p:nvSpPr>
-          <p:cNvPr id="9" name="Shape 7"/>
+          <p:cNvPr id="9" name=""/>
           <p:cNvSpPr/>
           <p:nvPr/>
         </p:nvSpPr>
@@ -10353,7 +10353,7 @@
       </p:sp>
       <p:sp>
         <p:nvSpPr>
-          <p:cNvPr id="10" name="Shape 8"/>
+          <p:cNvPr id="10" name=""/>
           <p:cNvSpPr/>
           <p:nvPr/>
         </p:nvSpPr>
@@ -10373,7 +10373,7 @@
       </p:sp>
       <p:sp>
         <p:nvSpPr>
-          <p:cNvPr id="11" name="Shape 9"/>
+          <p:cNvPr id="11" name=""/>
           <p:cNvSpPr/>
           <p:nvPr/>
         </p:nvSpPr>
@@ -10393,7 +10393,7 @@
       </p:sp>
       <p:sp>
         <p:nvSpPr>
-          <p:cNvPr id="12" name="Text 10"/>
+          <p:cNvPr id="12" name=""/>
           <p:cNvSpPr txBox="1"/>
           <p:nvPr/>
         </p:nvSpPr>
@@ -10412,7 +10412,7 @@
           <a:bodyPr wrap="square" lIns="0" tIns="0" rIns="0" bIns="0" anchor="ctr"/>
           <a:lstStyle/>
           <a:p>
-            <a:pPr algn="l"/>
+            <a:pPr/>
             <a:r>
               <a:rPr sz="8100" b="1">
                 <a:solidFill>
@@ -10428,7 +10428,7 @@
       </p:sp>
       <p:sp>
         <p:nvSpPr>
-          <p:cNvPr id="13" name="Text 11"/>
+          <p:cNvPr id="13" name=""/>
           <p:cNvSpPr txBox="1"/>
           <p:nvPr/>
         </p:nvSpPr>
@@ -10447,7 +10447,7 @@
           <a:bodyPr wrap="square" lIns="0" tIns="0" rIns="0" bIns="0" anchor="ctr"/>
           <a:lstStyle/>
           <a:p>
-            <a:pPr algn="l"/>
+            <a:pPr/>
             <a:r>
               <a:rPr sz="4050" b="1">
                 <a:solidFill>
@@ -10458,7 +10458,7 @@
               </a:rPr>
               <a:t>I'm looking for </a:t>
             </a:r>
-            <a:pPr algn="l"/>
+            <a:pPr/>
             <a:r>
               <a:rPr sz="4050" b="1">
                 <a:solidFill>
@@ -10474,7 +10474,7 @@
       </p:sp>
       <p:sp>
         <p:nvSpPr>
-          <p:cNvPr id="14" name="Text 12"/>
+          <p:cNvPr id="14" name=""/>
           <p:cNvSpPr txBox="1"/>
           <p:nvPr/>
         </p:nvSpPr>
@@ -10493,7 +10493,7 @@
           <a:bodyPr wrap="square" lIns="0" tIns="0" rIns="0" bIns="0" anchor="ctr"/>
           <a:lstStyle/>
           <a:p>
-            <a:pPr algn="l"/>
+            <a:pPr/>
             <a:r>
               <a:rPr sz="2100" b="1">
                 <a:solidFill>
@@ -10509,7 +10509,7 @@
       </p:sp>
       <p:sp>
         <p:nvSpPr>
-          <p:cNvPr id="15" name="Shape 13"/>
+          <p:cNvPr id="15" name=""/>
           <p:cNvSpPr/>
           <p:nvPr/>
         </p:nvSpPr>
@@ -10531,7 +10531,7 @@
       </p:sp>
       <p:sp>
         <p:nvSpPr>
-          <p:cNvPr id="16" name="Text 14"/>
+          <p:cNvPr id="16" name=""/>
           <p:cNvSpPr txBox="1"/>
           <p:nvPr/>
         </p:nvSpPr>
@@ -10550,7 +10550,7 @@
           <a:bodyPr wrap="square" lIns="0" tIns="0" rIns="0" bIns="0" anchor="ctr"/>
           <a:lstStyle/>
           <a:p>
-            <a:pPr algn="l"/>
+            <a:pPr/>
             <a:r>
               <a:rPr sz="1300" b="1">
                 <a:solidFill>
@@ -10566,7 +10566,7 @@
       </p:sp>
       <p:sp>
         <p:nvSpPr>
-          <p:cNvPr id="17" name="Text 15"/>
+          <p:cNvPr id="17" name=""/>
           <p:cNvSpPr txBox="1"/>
           <p:nvPr/>
         </p:nvSpPr>
@@ -10585,7 +10585,7 @@
           <a:bodyPr wrap="square" lIns="0" tIns="0" rIns="0" bIns="0" anchor="ctr"/>
           <a:lstStyle/>
           <a:p>
-            <a:pPr algn="l"/>
+            <a:pPr/>
             <a:r>
               <a:rPr sz="1150" b="1">
                 <a:solidFill>
@@ -10601,7 +10601,7 @@
       </p:sp>
       <p:sp>
         <p:nvSpPr>
-          <p:cNvPr id="18" name="Shape 16"/>
+          <p:cNvPr id="18" name=""/>
           <p:cNvSpPr/>
           <p:nvPr/>
         </p:nvSpPr>
@@ -10624,7 +10624,7 @@
       </p:sp>
       <p:sp>
         <p:nvSpPr>
-          <p:cNvPr id="19" name="Shape 17"/>
+          <p:cNvPr id="19" name=""/>
           <p:cNvSpPr/>
           <p:nvPr/>
         </p:nvSpPr>
@@ -10653,7 +10653,7 @@
       </p:sp>
       <p:sp>
         <p:nvSpPr>
-          <p:cNvPr id="20" name="Shape 18"/>
+          <p:cNvPr id="20" name=""/>
           <p:cNvSpPr/>
           <p:nvPr/>
         </p:nvSpPr>
@@ -10673,7 +10673,7 @@
       </p:sp>
       <p:sp>
         <p:nvSpPr>
-          <p:cNvPr id="21" name="Text 19"/>
+          <p:cNvPr id="21" name=""/>
           <p:cNvSpPr txBox="1"/>
           <p:nvPr/>
         </p:nvSpPr>
@@ -10708,7 +10708,7 @@
       </p:sp>
       <p:sp>
         <p:nvSpPr>
-          <p:cNvPr id="22" name="Text 20"/>
+          <p:cNvPr id="22" name=""/>
           <p:cNvSpPr txBox="1"/>
           <p:nvPr/>
         </p:nvSpPr>
@@ -10727,7 +10727,7 @@
           <a:bodyPr wrap="square" lIns="0" tIns="0" rIns="0" bIns="0" anchor="ctr"/>
           <a:lstStyle/>
           <a:p>
-            <a:pPr algn="l"/>
+            <a:pPr/>
             <a:r>
               <a:rPr sz="2050" b="1">
                 <a:solidFill>
@@ -10741,7 +10741,7 @@
               </a:rPr>
               <a:t>I'm looking for</a:t>
             </a:r>
-            <a:pPr algn="l"/>
+            <a:pPr/>
             <a:r>
               <a:rPr sz="2050" b="1">
                 <a:solidFill>
@@ -10752,7 +10752,7 @@
               </a:rPr>
               <a:t> </a:t>
             </a:r>
-            <a:pPr algn="l"/>
+            <a:pPr/>
             <a:r>
               <a:rPr sz="2050" b="1">
                 <a:solidFill>
@@ -10763,7 +10763,7 @@
               </a:rPr>
               <a:t>a</a:t>
             </a:r>
-            <a:pPr algn="l"/>
+            <a:pPr/>
             <a:r>
               <a:rPr sz="2050" b="1">
                 <a:solidFill>
@@ -10779,7 +10779,7 @@
       </p:sp>
       <p:sp>
         <p:nvSpPr>
-          <p:cNvPr id="23" name="Text 21"/>
+          <p:cNvPr id="23" name=""/>
           <p:cNvSpPr txBox="1"/>
           <p:nvPr/>
         </p:nvSpPr>
@@ -10798,7 +10798,7 @@
           <a:bodyPr wrap="square" lIns="0" tIns="0" rIns="0" bIns="0" anchor="ctr"/>
           <a:lstStyle/>
           <a:p>
-            <a:pPr algn="l"/>
+            <a:pPr/>
             <a:r>
               <a:rPr sz="1450" b="1">
                 <a:solidFill>
@@ -10814,7 +10814,7 @@
       </p:sp>
       <p:sp>
         <p:nvSpPr>
-          <p:cNvPr id="24" name="Shape 22"/>
+          <p:cNvPr id="24" name=""/>
           <p:cNvSpPr/>
           <p:nvPr/>
         </p:nvSpPr>
@@ -10843,7 +10843,7 @@
       </p:sp>
       <p:sp>
         <p:nvSpPr>
-          <p:cNvPr id="25" name="Shape 23"/>
+          <p:cNvPr id="25" name=""/>
           <p:cNvSpPr/>
           <p:nvPr/>
         </p:nvSpPr>
@@ -10863,7 +10863,7 @@
       </p:sp>
       <p:sp>
         <p:nvSpPr>
-          <p:cNvPr id="26" name="Text 24"/>
+          <p:cNvPr id="26" name=""/>
           <p:cNvSpPr txBox="1"/>
           <p:nvPr/>
         </p:nvSpPr>
@@ -10898,7 +10898,7 @@
       </p:sp>
       <p:sp>
         <p:nvSpPr>
-          <p:cNvPr id="27" name="Text 25"/>
+          <p:cNvPr id="27" name=""/>
           <p:cNvSpPr txBox="1"/>
           <p:nvPr/>
         </p:nvSpPr>
@@ -10917,7 +10917,7 @@
           <a:bodyPr wrap="square" lIns="0" tIns="0" rIns="0" bIns="0" anchor="ctr"/>
           <a:lstStyle/>
           <a:p>
-            <a:pPr algn="l"/>
+            <a:pPr/>
             <a:r>
               <a:rPr sz="2050" b="1">
                 <a:solidFill>
@@ -10931,7 +10931,7 @@
               </a:rPr>
               <a:t>I'm looking for</a:t>
             </a:r>
-            <a:pPr algn="l"/>
+            <a:pPr/>
             <a:r>
               <a:rPr sz="2050" b="1">
                 <a:solidFill>
@@ -10942,7 +10942,7 @@
               </a:rPr>
               <a:t> </a:t>
             </a:r>
-            <a:pPr algn="l"/>
+            <a:pPr/>
             <a:r>
               <a:rPr sz="2050" b="1">
                 <a:solidFill>
@@ -10953,7 +10953,7 @@
               </a:rPr>
               <a:t>the</a:t>
             </a:r>
-            <a:pPr algn="l"/>
+            <a:pPr/>
             <a:r>
               <a:rPr sz="2050" b="1">
                 <a:solidFill>
@@ -10969,7 +10969,7 @@
       </p:sp>
       <p:sp>
         <p:nvSpPr>
-          <p:cNvPr id="28" name="Text 26"/>
+          <p:cNvPr id="28" name=""/>
           <p:cNvSpPr txBox="1"/>
           <p:nvPr/>
         </p:nvSpPr>
@@ -10988,7 +10988,7 @@
           <a:bodyPr wrap="square" lIns="0" tIns="0" rIns="0" bIns="0" anchor="ctr"/>
           <a:lstStyle/>
           <a:p>
-            <a:pPr algn="l"/>
+            <a:pPr/>
             <a:r>
               <a:rPr sz="1450" b="1">
                 <a:solidFill>
@@ -11004,7 +11004,7 @@
       </p:sp>
       <p:sp>
         <p:nvSpPr>
-          <p:cNvPr id="29" name="Shape 27"/>
+          <p:cNvPr id="29" name=""/>
           <p:cNvSpPr/>
           <p:nvPr/>
         </p:nvSpPr>
@@ -11033,7 +11033,7 @@
       </p:sp>
       <p:sp>
         <p:nvSpPr>
-          <p:cNvPr id="30" name="Shape 28"/>
+          <p:cNvPr id="30" name=""/>
           <p:cNvSpPr/>
           <p:nvPr/>
         </p:nvSpPr>
@@ -11053,7 +11053,7 @@
       </p:sp>
       <p:sp>
         <p:nvSpPr>
-          <p:cNvPr id="31" name="Text 29"/>
+          <p:cNvPr id="31" name=""/>
           <p:cNvSpPr txBox="1"/>
           <p:nvPr/>
         </p:nvSpPr>
@@ -11088,7 +11088,7 @@
       </p:sp>
       <p:sp>
         <p:nvSpPr>
-          <p:cNvPr id="32" name="Text 30"/>
+          <p:cNvPr id="32" name=""/>
           <p:cNvSpPr txBox="1"/>
           <p:nvPr/>
         </p:nvSpPr>
@@ -11107,7 +11107,7 @@
           <a:bodyPr wrap="square" lIns="0" tIns="0" rIns="0" bIns="0" anchor="ctr"/>
           <a:lstStyle/>
           <a:p>
-            <a:pPr algn="l"/>
+            <a:pPr/>
             <a:r>
               <a:rPr sz="2050" b="1">
                 <a:solidFill>
@@ -11121,7 +11121,7 @@
               </a:rPr>
               <a:t>I'm looking for</a:t>
             </a:r>
-            <a:pPr algn="l"/>
+            <a:pPr/>
             <a:r>
               <a:rPr sz="2050" b="1">
                 <a:solidFill>
@@ -11132,7 +11132,7 @@
               </a:rPr>
               <a:t> </a:t>
             </a:r>
-            <a:pPr algn="l"/>
+            <a:pPr/>
             <a:r>
               <a:rPr sz="2050" b="1">
                 <a:solidFill>
@@ -11143,7 +11143,7 @@
               </a:rPr>
               <a:t>my</a:t>
             </a:r>
-            <a:pPr algn="l"/>
+            <a:pPr/>
             <a:r>
               <a:rPr sz="2050" b="1">
                 <a:solidFill>
@@ -11159,7 +11159,7 @@
       </p:sp>
       <p:sp>
         <p:nvSpPr>
-          <p:cNvPr id="33" name="Text 31"/>
+          <p:cNvPr id="33" name=""/>
           <p:cNvSpPr txBox="1"/>
           <p:nvPr/>
         </p:nvSpPr>
@@ -11178,7 +11178,7 @@
           <a:bodyPr wrap="square" lIns="0" tIns="0" rIns="0" bIns="0" anchor="ctr"/>
           <a:lstStyle/>
           <a:p>
-            <a:pPr algn="l"/>
+            <a:pPr/>
             <a:r>
               <a:rPr sz="1450" b="1">
                 <a:solidFill>
@@ -11194,7 +11194,7 @@
       </p:sp>
       <p:sp>
         <p:nvSpPr>
-          <p:cNvPr id="34" name="Text 32"/>
+          <p:cNvPr id="34" name=""/>
           <p:cNvSpPr txBox="1"/>
           <p:nvPr/>
         </p:nvSpPr>
@@ -11213,7 +11213,7 @@
           <a:bodyPr wrap="square" lIns="0" tIns="0" rIns="0" bIns="0" anchor="ctr"/>
           <a:lstStyle/>
           <a:p>
-            <a:pPr algn="l"/>
+            <a:pPr/>
             <a:r>
               <a:rPr sz="1150" b="1">
                 <a:solidFill>
@@ -11229,7 +11229,7 @@
       </p:sp>
       <p:sp>
         <p:nvSpPr>
-          <p:cNvPr id="35" name="Shape 33"/>
+          <p:cNvPr id="35" name=""/>
           <p:cNvSpPr/>
           <p:nvPr/>
         </p:nvSpPr>
@@ -11252,7 +11252,7 @@
       </p:sp>
       <p:sp>
         <p:nvSpPr>
-          <p:cNvPr id="36" name="Shape 34"/>
+          <p:cNvPr id="36" name=""/>
           <p:cNvSpPr/>
           <p:nvPr/>
         </p:nvSpPr>
@@ -11279,7 +11279,7 @@
       </p:sp>
       <p:sp>
         <p:nvSpPr>
-          <p:cNvPr id="37" name="Text 35"/>
+          <p:cNvPr id="37" name=""/>
           <p:cNvSpPr txBox="1"/>
           <p:nvPr/>
         </p:nvSpPr>
@@ -11298,7 +11298,7 @@
           <a:bodyPr wrap="square" lIns="0" tIns="0" rIns="0" bIns="0" anchor="ctr"/>
           <a:lstStyle/>
           <a:p>
-            <a:pPr algn="l"/>
+            <a:pPr/>
             <a:r>
               <a:rPr sz="1600" b="1">
                 <a:solidFill>
@@ -11314,7 +11314,7 @@
       </p:sp>
       <p:sp>
         <p:nvSpPr>
-          <p:cNvPr id="38" name="Shape 36"/>
+          <p:cNvPr id="38" name=""/>
           <p:cNvSpPr/>
           <p:nvPr/>
         </p:nvSpPr>
@@ -11336,7 +11336,7 @@
       </p:sp>
       <p:sp>
         <p:nvSpPr>
-          <p:cNvPr id="39" name="Text 37"/>
+          <p:cNvPr id="39" name=""/>
           <p:cNvSpPr txBox="1"/>
           <p:nvPr/>
         </p:nvSpPr>
@@ -11355,7 +11355,7 @@
           <a:bodyPr wrap="square" lIns="0" tIns="0" rIns="0" bIns="0" anchor="ctr"/>
           <a:lstStyle/>
           <a:p>
-            <a:pPr algn="l"/>
+            <a:pPr/>
             <a:r>
               <a:rPr sz="1050" b="1">
                 <a:solidFill>
@@ -11371,7 +11371,7 @@
       </p:sp>
       <p:sp>
         <p:nvSpPr>
-          <p:cNvPr id="40" name="Shape 38"/>
+          <p:cNvPr id="40" name=""/>
           <p:cNvSpPr/>
           <p:nvPr/>
         </p:nvSpPr>
@@ -11393,7 +11393,7 @@
       </p:sp>
       <p:sp>
         <p:nvSpPr>
-          <p:cNvPr id="41" name="Text 39"/>
+          <p:cNvPr id="41" name=""/>
           <p:cNvSpPr txBox="1"/>
           <p:nvPr/>
         </p:nvSpPr>
@@ -11428,7 +11428,7 @@
       </p:sp>
       <p:sp>
         <p:nvSpPr>
-          <p:cNvPr id="42" name="Text 40"/>
+          <p:cNvPr id="42" name=""/>
           <p:cNvSpPr txBox="1"/>
           <p:nvPr/>
         </p:nvSpPr>
@@ -11447,7 +11447,7 @@
           <a:bodyPr wrap="square" lIns="0" tIns="0" rIns="0" bIns="0" anchor="ctr"/>
           <a:lstStyle/>
           <a:p>
-            <a:pPr algn="l"/>
+            <a:pPr/>
             <a:r>
               <a:rPr sz="1500" b="1">
                 <a:solidFill>
@@ -11463,7 +11463,7 @@
       </p:sp>
       <p:sp>
         <p:nvSpPr>
-          <p:cNvPr id="43" name="Text 41"/>
+          <p:cNvPr id="43" name=""/>
           <p:cNvSpPr txBox="1"/>
           <p:nvPr/>
         </p:nvSpPr>
@@ -11482,7 +11482,7 @@
           <a:bodyPr wrap="square" lIns="0" tIns="0" rIns="0" bIns="0" anchor="ctr"/>
           <a:lstStyle/>
           <a:p>
-            <a:pPr algn="l"/>
+            <a:pPr/>
             <a:r>
               <a:rPr sz="1500" b="1">
                 <a:solidFill>
@@ -11493,7 +11493,7 @@
               </a:rPr>
               <a:t>I'm looking for </a:t>
             </a:r>
-            <a:pPr algn="l"/>
+            <a:pPr/>
             <a:r>
               <a:rPr sz="1500" b="1">
                 <a:solidFill>
@@ -11504,7 +11504,7 @@
               </a:rPr>
               <a:t>the</a:t>
             </a:r>
-            <a:pPr algn="l"/>
+            <a:pPr/>
             <a:r>
               <a:rPr sz="1500" b="1">
                 <a:solidFill>
@@ -11520,7 +11520,7 @@
       </p:sp>
       <p:sp>
         <p:nvSpPr>
-          <p:cNvPr id="44" name="Shape 42"/>
+          <p:cNvPr id="44" name=""/>
           <p:cNvSpPr/>
           <p:nvPr/>
         </p:nvSpPr>
@@ -11542,7 +11542,7 @@
       </p:sp>
       <p:sp>
         <p:nvSpPr>
-          <p:cNvPr id="45" name="Text 43"/>
+          <p:cNvPr id="45" name=""/>
           <p:cNvSpPr txBox="1"/>
           <p:nvPr/>
         </p:nvSpPr>
@@ -11577,7 +11577,7 @@
       </p:sp>
       <p:sp>
         <p:nvSpPr>
-          <p:cNvPr id="46" name="Text 44"/>
+          <p:cNvPr id="46" name=""/>
           <p:cNvSpPr txBox="1"/>
           <p:nvPr/>
         </p:nvSpPr>
@@ -11596,7 +11596,7 @@
           <a:bodyPr wrap="square" lIns="0" tIns="0" rIns="0" bIns="0" anchor="ctr"/>
           <a:lstStyle/>
           <a:p>
-            <a:pPr algn="l"/>
+            <a:pPr/>
             <a:r>
               <a:rPr sz="1500" b="1">
                 <a:solidFill>
@@ -11612,7 +11612,7 @@
       </p:sp>
       <p:sp>
         <p:nvSpPr>
-          <p:cNvPr id="47" name="Text 45"/>
+          <p:cNvPr id="47" name=""/>
           <p:cNvSpPr txBox="1"/>
           <p:nvPr/>
         </p:nvSpPr>
@@ -11631,7 +11631,7 @@
           <a:bodyPr wrap="square" lIns="0" tIns="0" rIns="0" bIns="0" anchor="ctr"/>
           <a:lstStyle/>
           <a:p>
-            <a:pPr algn="l"/>
+            <a:pPr/>
             <a:r>
               <a:rPr sz="1500" b="1">
                 <a:solidFill>
@@ -11642,7 +11642,7 @@
               </a:rPr>
               <a:t>I'm looking for </a:t>
             </a:r>
-            <a:pPr algn="l"/>
+            <a:pPr/>
             <a:r>
               <a:rPr sz="1500" b="1">
                 <a:solidFill>
@@ -11653,7 +11653,7 @@
               </a:rPr>
               <a:t>a</a:t>
             </a:r>
-            <a:pPr algn="l"/>
+            <a:pPr/>
             <a:r>
               <a:rPr sz="1500" b="1">
                 <a:solidFill>
@@ -11669,7 +11669,7 @@
       </p:sp>
       <p:sp>
         <p:nvSpPr>
-          <p:cNvPr id="48" name="Shape 46"/>
+          <p:cNvPr id="48" name=""/>
           <p:cNvSpPr/>
           <p:nvPr/>
         </p:nvSpPr>
@@ -11692,7 +11692,7 @@
       </p:sp>
       <p:sp>
         <p:nvSpPr>
-          <p:cNvPr id="49" name="Text 47"/>
+          <p:cNvPr id="49" name=""/>
           <p:cNvSpPr txBox="1"/>
           <p:nvPr/>
         </p:nvSpPr>
@@ -11711,7 +11711,7 @@
           <a:bodyPr wrap="square" lIns="0" tIns="0" rIns="0" bIns="0" anchor="ctr"/>
           <a:lstStyle/>
           <a:p>
-            <a:pPr algn="l"/>
+            <a:pPr/>
             <a:r>
               <a:rPr sz="1350" b="1">
                 <a:solidFill>
@@ -11722,7 +11722,7 @@
               </a:rPr>
               <a:t>The</a:t>
             </a:r>
-            <a:pPr algn="l"/>
+            <a:pPr/>
             <a:r>
               <a:rPr sz="1350" b="1">
                 <a:solidFill>
@@ -11738,7 +11738,7 @@
       </p:sp>
       <p:sp>
         <p:nvSpPr>
-          <p:cNvPr id="50" name="Text 48"/>
+          <p:cNvPr id="50" name=""/>
           <p:cNvSpPr txBox="1"/>
           <p:nvPr/>
         </p:nvSpPr>
@@ -11757,7 +11757,7 @@
           <a:bodyPr wrap="square" lIns="0" tIns="0" rIns="0" bIns="0" anchor="ctr"/>
           <a:lstStyle/>
           <a:p>
-            <a:pPr algn="l"/>
+            <a:pPr/>
             <a:r>
               <a:rPr sz="1650" b="1">
                 <a:solidFill>
@@ -11768,7 +11768,7 @@
               </a:rPr>
               <a:t>The</a:t>
             </a:r>
-            <a:pPr algn="l"/>
+            <a:pPr/>
             <a:r>
               <a:rPr sz="1650" b="1">
                 <a:solidFill>
@@ -11779,7 +11779,7 @@
               </a:rPr>
               <a:t> Eiffel Tower </a:t>
             </a:r>
-            <a:pPr algn="l"/>
+            <a:pPr/>
             <a:r>
               <a:rPr sz="1650" b="1">
                 <a:solidFill>
@@ -11790,7 +11790,7 @@
               </a:rPr>
               <a:t>／</a:t>
             </a:r>
-            <a:pPr algn="l"/>
+            <a:pPr/>
             <a:r>
               <a:rPr sz="1650" b="1">
                 <a:solidFill>
@@ -11801,7 +11801,7 @@
               </a:rPr>
               <a:t> </a:t>
             </a:r>
-            <a:pPr algn="l"/>
+            <a:pPr/>
             <a:r>
               <a:rPr sz="1650" b="1">
                 <a:solidFill>
@@ -11812,7 +11812,7 @@
               </a:rPr>
               <a:t>The</a:t>
             </a:r>
-            <a:pPr algn="l"/>
+            <a:pPr/>
             <a:r>
               <a:rPr sz="1650" b="1">
                 <a:solidFill>
@@ -11860,7 +11860,7 @@
       </p:grpSpPr>
       <p:sp>
         <p:nvSpPr>
-          <p:cNvPr id="2" name="Text 0"/>
+          <p:cNvPr id="2" name=""/>
           <p:cNvSpPr txBox="1"/>
           <p:nvPr/>
         </p:nvSpPr>
@@ -11879,7 +11879,7 @@
           <a:bodyPr wrap="square" lIns="0" tIns="0" rIns="0" bIns="0" anchor="ctr"/>
           <a:lstStyle/>
           <a:p>
-            <a:pPr algn="l"/>
+            <a:pPr/>
             <a:r>
               <a:rPr sz="1150" b="1">
                 <a:solidFill>
@@ -11895,7 +11895,7 @@
       </p:sp>
       <p:sp>
         <p:nvSpPr>
-          <p:cNvPr id="3" name="Shape 1"/>
+          <p:cNvPr id="3" name=""/>
           <p:cNvSpPr/>
           <p:nvPr/>
         </p:nvSpPr>
@@ -11915,7 +11915,7 @@
       </p:sp>
       <p:sp>
         <p:nvSpPr>
-          <p:cNvPr id="4" name="Shape 2"/>
+          <p:cNvPr id="4" name=""/>
           <p:cNvSpPr/>
           <p:nvPr/>
         </p:nvSpPr>
@@ -11935,7 +11935,7 @@
       </p:sp>
       <p:sp>
         <p:nvSpPr>
-          <p:cNvPr id="5" name="Shape 3"/>
+          <p:cNvPr id="5" name=""/>
           <p:cNvSpPr/>
           <p:nvPr/>
         </p:nvSpPr>
@@ -11955,7 +11955,7 @@
       </p:sp>
       <p:sp>
         <p:nvSpPr>
-          <p:cNvPr id="6" name="Shape 4"/>
+          <p:cNvPr id="6" name=""/>
           <p:cNvSpPr/>
           <p:nvPr/>
         </p:nvSpPr>
@@ -11975,7 +11975,7 @@
       </p:sp>
       <p:sp>
         <p:nvSpPr>
-          <p:cNvPr id="7" name="Shape 5"/>
+          <p:cNvPr id="7" name=""/>
           <p:cNvSpPr/>
           <p:nvPr/>
         </p:nvSpPr>
@@ -11995,7 +11995,7 @@
       </p:sp>
       <p:sp>
         <p:nvSpPr>
-          <p:cNvPr id="8" name="Shape 6"/>
+          <p:cNvPr id="8" name=""/>
           <p:cNvSpPr/>
           <p:nvPr/>
         </p:nvSpPr>
@@ -12017,7 +12017,7 @@
       </p:sp>
       <p:sp>
         <p:nvSpPr>
-          <p:cNvPr id="9" name="Shape 7"/>
+          <p:cNvPr id="9" name=""/>
           <p:cNvSpPr/>
           <p:nvPr/>
         </p:nvSpPr>
@@ -12037,7 +12037,7 @@
       </p:sp>
       <p:sp>
         <p:nvSpPr>
-          <p:cNvPr id="10" name="Shape 8"/>
+          <p:cNvPr id="10" name=""/>
           <p:cNvSpPr/>
           <p:nvPr/>
         </p:nvSpPr>
@@ -12057,7 +12057,7 @@
       </p:sp>
       <p:sp>
         <p:nvSpPr>
-          <p:cNvPr id="11" name="Shape 9"/>
+          <p:cNvPr id="11" name=""/>
           <p:cNvSpPr/>
           <p:nvPr/>
         </p:nvSpPr>
@@ -12077,7 +12077,7 @@
       </p:sp>
       <p:sp>
         <p:nvSpPr>
-          <p:cNvPr id="12" name="Text 10"/>
+          <p:cNvPr id="12" name=""/>
           <p:cNvSpPr txBox="1"/>
           <p:nvPr/>
         </p:nvSpPr>
@@ -12096,7 +12096,7 @@
           <a:bodyPr wrap="square" lIns="0" tIns="0" rIns="0" bIns="0" anchor="ctr"/>
           <a:lstStyle/>
           <a:p>
-            <a:pPr algn="l"/>
+            <a:pPr/>
             <a:r>
               <a:rPr sz="8100" b="1">
                 <a:solidFill>
@@ -12112,7 +12112,7 @@
       </p:sp>
       <p:sp>
         <p:nvSpPr>
-          <p:cNvPr id="13" name="Text 11"/>
+          <p:cNvPr id="13" name=""/>
           <p:cNvSpPr txBox="1"/>
           <p:nvPr/>
         </p:nvSpPr>
@@ -12131,7 +12131,7 @@
           <a:bodyPr wrap="square" lIns="0" tIns="0" rIns="0" bIns="0" anchor="ctr"/>
           <a:lstStyle/>
           <a:p>
-            <a:pPr algn="l"/>
+            <a:pPr/>
             <a:r>
               <a:rPr sz="4050" b="1">
                 <a:solidFill>
@@ -12142,7 +12142,7 @@
               </a:rPr>
               <a:t>I might </a:t>
             </a:r>
-            <a:pPr algn="l"/>
+            <a:pPr/>
             <a:r>
               <a:rPr sz="4050" b="1">
                 <a:solidFill>
@@ -12158,7 +12158,7 @@
       </p:sp>
       <p:sp>
         <p:nvSpPr>
-          <p:cNvPr id="14" name="Text 12"/>
+          <p:cNvPr id="14" name=""/>
           <p:cNvSpPr txBox="1"/>
           <p:nvPr/>
         </p:nvSpPr>
@@ -12177,7 +12177,7 @@
           <a:bodyPr wrap="square" lIns="0" tIns="0" rIns="0" bIns="0" anchor="ctr"/>
           <a:lstStyle/>
           <a:p>
-            <a:pPr algn="l"/>
+            <a:pPr/>
             <a:r>
               <a:rPr sz="2100" b="1">
                 <a:solidFill>
@@ -12193,7 +12193,7 @@
       </p:sp>
       <p:sp>
         <p:nvSpPr>
-          <p:cNvPr id="15" name="Shape 13"/>
+          <p:cNvPr id="15" name=""/>
           <p:cNvSpPr/>
           <p:nvPr/>
         </p:nvSpPr>
@@ -12215,7 +12215,7 @@
       </p:sp>
       <p:sp>
         <p:nvSpPr>
-          <p:cNvPr id="16" name="Text 14"/>
+          <p:cNvPr id="16" name=""/>
           <p:cNvSpPr txBox="1"/>
           <p:nvPr/>
         </p:nvSpPr>
@@ -12234,7 +12234,7 @@
           <a:bodyPr wrap="square" lIns="0" tIns="0" rIns="0" bIns="0" anchor="ctr"/>
           <a:lstStyle/>
           <a:p>
-            <a:pPr algn="l"/>
+            <a:pPr/>
             <a:r>
               <a:rPr sz="1300" b="1">
                 <a:solidFill>
@@ -12250,7 +12250,7 @@
       </p:sp>
       <p:sp>
         <p:nvSpPr>
-          <p:cNvPr id="17" name="Shape 15"/>
+          <p:cNvPr id="17" name=""/>
           <p:cNvSpPr/>
           <p:nvPr/>
         </p:nvSpPr>
@@ -12272,7 +12272,7 @@
       </p:sp>
       <p:sp>
         <p:nvSpPr>
-          <p:cNvPr id="18" name="Text 16"/>
+          <p:cNvPr id="18" name=""/>
           <p:cNvSpPr txBox="1"/>
           <p:nvPr/>
         </p:nvSpPr>
@@ -12291,7 +12291,7 @@
           <a:bodyPr wrap="square" lIns="0" tIns="0" rIns="0" bIns="0" anchor="ctr"/>
           <a:lstStyle/>
           <a:p>
-            <a:pPr algn="l"/>
+            <a:pPr/>
             <a:r>
               <a:rPr sz="1050" b="1">
                 <a:solidFill>
@@ -12307,7 +12307,7 @@
       </p:sp>
       <p:sp>
         <p:nvSpPr>
-          <p:cNvPr id="19" name="Text 17"/>
+          <p:cNvPr id="19" name=""/>
           <p:cNvSpPr txBox="1"/>
           <p:nvPr/>
         </p:nvSpPr>
@@ -12326,7 +12326,7 @@
           <a:bodyPr wrap="square" lIns="0" tIns="0" rIns="0" bIns="0" anchor="ctr"/>
           <a:lstStyle/>
           <a:p>
-            <a:pPr algn="l"/>
+            <a:pPr/>
             <a:r>
               <a:rPr sz="1900" b="1">
                 <a:solidFill>
@@ -12342,7 +12342,7 @@
       </p:sp>
       <p:sp>
         <p:nvSpPr>
-          <p:cNvPr id="20" name="Text 18"/>
+          <p:cNvPr id="20" name=""/>
           <p:cNvSpPr txBox="1"/>
           <p:nvPr/>
         </p:nvSpPr>
@@ -12361,7 +12361,7 @@
           <a:bodyPr wrap="square" lIns="0" tIns="0" rIns="0" bIns="0" anchor="ctr"/>
           <a:lstStyle/>
           <a:p>
-            <a:pPr algn="l"/>
+            <a:pPr/>
             <a:r>
               <a:rPr sz="1500" b="1">
                 <a:solidFill>
@@ -12377,7 +12377,7 @@
       </p:sp>
       <p:sp>
         <p:nvSpPr>
-          <p:cNvPr id="21" name="Text 19"/>
+          <p:cNvPr id="21" name=""/>
           <p:cNvSpPr txBox="1"/>
           <p:nvPr/>
         </p:nvSpPr>
@@ -12396,7 +12396,7 @@
           <a:bodyPr wrap="square" lIns="0" tIns="0" rIns="0" bIns="0" anchor="ctr"/>
           <a:lstStyle/>
           <a:p>
-            <a:pPr algn="l"/>
+            <a:pPr/>
             <a:r>
               <a:rPr sz="1150" b="1">
                 <a:solidFill>
@@ -12412,7 +12412,7 @@
       </p:sp>
       <p:sp>
         <p:nvSpPr>
-          <p:cNvPr id="22" name="Shape 20"/>
+          <p:cNvPr id="22" name=""/>
           <p:cNvSpPr/>
           <p:nvPr/>
         </p:nvSpPr>
@@ -12435,7 +12435,7 @@
       </p:sp>
       <p:sp>
         <p:nvSpPr>
-          <p:cNvPr id="23" name="Shape 21"/>
+          <p:cNvPr id="23" name=""/>
           <p:cNvSpPr/>
           <p:nvPr/>
         </p:nvSpPr>
@@ -12464,7 +12464,7 @@
       </p:sp>
       <p:sp>
         <p:nvSpPr>
-          <p:cNvPr id="24" name="Shape 22"/>
+          <p:cNvPr id="24" name=""/>
           <p:cNvSpPr/>
           <p:nvPr/>
         </p:nvSpPr>
@@ -12484,7 +12484,7 @@
       </p:sp>
       <p:sp>
         <p:nvSpPr>
-          <p:cNvPr id="25" name="Text 23"/>
+          <p:cNvPr id="25" name=""/>
           <p:cNvSpPr txBox="1"/>
           <p:nvPr/>
         </p:nvSpPr>
@@ -12519,7 +12519,7 @@
       </p:sp>
       <p:sp>
         <p:nvSpPr>
-          <p:cNvPr id="26" name="Text 24"/>
+          <p:cNvPr id="26" name=""/>
           <p:cNvSpPr txBox="1"/>
           <p:nvPr/>
         </p:nvSpPr>
@@ -12538,7 +12538,7 @@
           <a:bodyPr wrap="square" lIns="0" tIns="0" rIns="0" bIns="0" anchor="ctr"/>
           <a:lstStyle/>
           <a:p>
-            <a:pPr algn="l"/>
+            <a:pPr/>
             <a:r>
               <a:rPr sz="2350" b="1">
                 <a:solidFill>
@@ -12552,7 +12552,7 @@
               </a:rPr>
               <a:t>I might</a:t>
             </a:r>
-            <a:pPr algn="l"/>
+            <a:pPr/>
             <a:r>
               <a:rPr sz="2350" b="1">
                 <a:solidFill>
@@ -12563,7 +12563,7 @@
               </a:rPr>
               <a:t> </a:t>
             </a:r>
-            <a:pPr algn="l"/>
+            <a:pPr/>
             <a:r>
               <a:rPr sz="2350" b="1">
                 <a:solidFill>
@@ -12574,7 +12574,7 @@
               </a:rPr>
               <a:t>eat</a:t>
             </a:r>
-            <a:pPr algn="l"/>
+            <a:pPr/>
             <a:r>
               <a:rPr sz="2350" b="1">
                 <a:solidFill>
@@ -12590,7 +12590,7 @@
       </p:sp>
       <p:sp>
         <p:nvSpPr>
-          <p:cNvPr id="27" name="Text 25"/>
+          <p:cNvPr id="27" name=""/>
           <p:cNvSpPr txBox="1"/>
           <p:nvPr/>
         </p:nvSpPr>
@@ -12609,7 +12609,7 @@
           <a:bodyPr wrap="square" lIns="0" tIns="0" rIns="0" bIns="0" anchor="ctr"/>
           <a:lstStyle/>
           <a:p>
-            <a:pPr algn="l"/>
+            <a:pPr/>
             <a:r>
               <a:rPr sz="1650" b="1">
                 <a:solidFill>
@@ -12625,7 +12625,7 @@
       </p:sp>
       <p:sp>
         <p:nvSpPr>
-          <p:cNvPr id="28" name="Shape 26"/>
+          <p:cNvPr id="28" name=""/>
           <p:cNvSpPr/>
           <p:nvPr/>
         </p:nvSpPr>
@@ -12654,7 +12654,7 @@
       </p:sp>
       <p:sp>
         <p:nvSpPr>
-          <p:cNvPr id="29" name="Shape 27"/>
+          <p:cNvPr id="29" name=""/>
           <p:cNvSpPr/>
           <p:nvPr/>
         </p:nvSpPr>
@@ -12674,7 +12674,7 @@
       </p:sp>
       <p:sp>
         <p:nvSpPr>
-          <p:cNvPr id="30" name="Text 28"/>
+          <p:cNvPr id="30" name=""/>
           <p:cNvSpPr txBox="1"/>
           <p:nvPr/>
         </p:nvSpPr>
@@ -12709,7 +12709,7 @@
       </p:sp>
       <p:sp>
         <p:nvSpPr>
-          <p:cNvPr id="31" name="Text 29"/>
+          <p:cNvPr id="31" name=""/>
           <p:cNvSpPr txBox="1"/>
           <p:nvPr/>
         </p:nvSpPr>
@@ -12728,7 +12728,7 @@
           <a:bodyPr wrap="square" lIns="0" tIns="0" rIns="0" bIns="0" anchor="ctr"/>
           <a:lstStyle/>
           <a:p>
-            <a:pPr algn="l"/>
+            <a:pPr/>
             <a:r>
               <a:rPr sz="2350" b="1">
                 <a:solidFill>
@@ -12742,7 +12742,7 @@
               </a:rPr>
               <a:t>I might</a:t>
             </a:r>
-            <a:pPr algn="l"/>
+            <a:pPr/>
             <a:r>
               <a:rPr sz="2350" b="1">
                 <a:solidFill>
@@ -12753,7 +12753,7 @@
               </a:rPr>
               <a:t> </a:t>
             </a:r>
-            <a:pPr algn="l"/>
+            <a:pPr/>
             <a:r>
               <a:rPr sz="2350" b="1">
                 <a:solidFill>
@@ -12764,7 +12764,7 @@
               </a:rPr>
               <a:t>be</a:t>
             </a:r>
-            <a:pPr algn="l"/>
+            <a:pPr/>
             <a:r>
               <a:rPr sz="2350" b="1">
                 <a:solidFill>
@@ -12780,7 +12780,7 @@
       </p:sp>
       <p:sp>
         <p:nvSpPr>
-          <p:cNvPr id="32" name="Text 30"/>
+          <p:cNvPr id="32" name=""/>
           <p:cNvSpPr txBox="1"/>
           <p:nvPr/>
         </p:nvSpPr>
@@ -12799,7 +12799,7 @@
           <a:bodyPr wrap="square" lIns="0" tIns="0" rIns="0" bIns="0" anchor="ctr"/>
           <a:lstStyle/>
           <a:p>
-            <a:pPr algn="l"/>
+            <a:pPr/>
             <a:r>
               <a:rPr sz="1650" b="1">
                 <a:solidFill>
@@ -12815,7 +12815,7 @@
       </p:sp>
       <p:sp>
         <p:nvSpPr>
-          <p:cNvPr id="33" name="Shape 31"/>
+          <p:cNvPr id="33" name=""/>
           <p:cNvSpPr/>
           <p:nvPr/>
         </p:nvSpPr>
@@ -12842,7 +12842,7 @@
       </p:sp>
       <p:sp>
         <p:nvSpPr>
-          <p:cNvPr id="34" name="Text 32"/>
+          <p:cNvPr id="34" name=""/>
           <p:cNvSpPr txBox="1"/>
           <p:nvPr/>
         </p:nvSpPr>
@@ -12861,7 +12861,7 @@
           <a:bodyPr wrap="square" lIns="0" tIns="0" rIns="0" bIns="0" anchor="ctr"/>
           <a:lstStyle/>
           <a:p>
-            <a:pPr algn="l"/>
+            <a:pPr/>
             <a:r>
               <a:rPr sz="1150" b="1">
                 <a:solidFill>
@@ -12877,7 +12877,7 @@
       </p:sp>
       <p:sp>
         <p:nvSpPr>
-          <p:cNvPr id="35" name="Shape 33"/>
+          <p:cNvPr id="35" name=""/>
           <p:cNvSpPr/>
           <p:nvPr/>
         </p:nvSpPr>
@@ -12906,7 +12906,7 @@
       </p:sp>
       <p:sp>
         <p:nvSpPr>
-          <p:cNvPr id="36" name="Shape 34"/>
+          <p:cNvPr id="36" name=""/>
           <p:cNvSpPr/>
           <p:nvPr/>
         </p:nvSpPr>
@@ -12926,7 +12926,7 @@
       </p:sp>
       <p:sp>
         <p:nvSpPr>
-          <p:cNvPr id="37" name="Text 35"/>
+          <p:cNvPr id="37" name=""/>
           <p:cNvSpPr txBox="1"/>
           <p:nvPr/>
         </p:nvSpPr>
@@ -12961,7 +12961,7 @@
       </p:sp>
       <p:sp>
         <p:nvSpPr>
-          <p:cNvPr id="38" name="Text 36"/>
+          <p:cNvPr id="38" name=""/>
           <p:cNvSpPr txBox="1"/>
           <p:nvPr/>
         </p:nvSpPr>
@@ -12980,7 +12980,7 @@
           <a:bodyPr wrap="square" lIns="0" tIns="0" rIns="0" bIns="0" anchor="ctr"/>
           <a:lstStyle/>
           <a:p>
-            <a:pPr algn="l"/>
+            <a:pPr/>
             <a:r>
               <a:rPr sz="2350" b="1">
                 <a:solidFill>
@@ -12994,7 +12994,7 @@
               </a:rPr>
               <a:t>I might not</a:t>
             </a:r>
-            <a:pPr algn="l"/>
+            <a:pPr/>
             <a:r>
               <a:rPr sz="2350" b="1">
                 <a:solidFill>
@@ -13005,7 +13005,7 @@
               </a:rPr>
               <a:t> </a:t>
             </a:r>
-            <a:pPr algn="l"/>
+            <a:pPr/>
             <a:r>
               <a:rPr sz="2350" b="1">
                 <a:solidFill>
@@ -13016,7 +13016,7 @@
               </a:rPr>
               <a:t>go</a:t>
             </a:r>
-            <a:pPr algn="l"/>
+            <a:pPr/>
             <a:r>
               <a:rPr sz="2350" b="1">
                 <a:solidFill>
@@ -13032,7 +13032,7 @@
       </p:sp>
       <p:sp>
         <p:nvSpPr>
-          <p:cNvPr id="39" name="Text 37"/>
+          <p:cNvPr id="39" name=""/>
           <p:cNvSpPr txBox="1"/>
           <p:nvPr/>
         </p:nvSpPr>
@@ -13051,7 +13051,7 @@
           <a:bodyPr wrap="square" lIns="0" tIns="0" rIns="0" bIns="0" anchor="ctr"/>
           <a:lstStyle/>
           <a:p>
-            <a:pPr algn="l"/>
+            <a:pPr/>
             <a:r>
               <a:rPr sz="1650" b="1">
                 <a:solidFill>
@@ -13099,7 +13099,7 @@
       </p:grpSpPr>
       <p:sp>
         <p:nvSpPr>
-          <p:cNvPr id="2" name="Text 0"/>
+          <p:cNvPr id="2" name=""/>
           <p:cNvSpPr txBox="1"/>
           <p:nvPr/>
         </p:nvSpPr>
@@ -13118,7 +13118,7 @@
           <a:bodyPr wrap="square" lIns="0" tIns="0" rIns="0" bIns="0" anchor="ctr"/>
           <a:lstStyle/>
           <a:p>
-            <a:pPr algn="l"/>
+            <a:pPr/>
             <a:r>
               <a:rPr sz="1150" b="1">
                 <a:solidFill>
@@ -13134,7 +13134,7 @@
       </p:sp>
       <p:sp>
         <p:nvSpPr>
-          <p:cNvPr id="3" name="Shape 1"/>
+          <p:cNvPr id="3" name=""/>
           <p:cNvSpPr/>
           <p:nvPr/>
         </p:nvSpPr>
@@ -13154,7 +13154,7 @@
       </p:sp>
       <p:sp>
         <p:nvSpPr>
-          <p:cNvPr id="4" name="Shape 2"/>
+          <p:cNvPr id="4" name=""/>
           <p:cNvSpPr/>
           <p:nvPr/>
         </p:nvSpPr>
@@ -13174,7 +13174,7 @@
       </p:sp>
       <p:sp>
         <p:nvSpPr>
-          <p:cNvPr id="5" name="Shape 3"/>
+          <p:cNvPr id="5" name=""/>
           <p:cNvSpPr/>
           <p:nvPr/>
         </p:nvSpPr>
@@ -13194,7 +13194,7 @@
       </p:sp>
       <p:sp>
         <p:nvSpPr>
-          <p:cNvPr id="6" name="Shape 4"/>
+          <p:cNvPr id="6" name=""/>
           <p:cNvSpPr/>
           <p:nvPr/>
         </p:nvSpPr>
@@ -13214,7 +13214,7 @@
       </p:sp>
       <p:sp>
         <p:nvSpPr>
-          <p:cNvPr id="7" name="Shape 5"/>
+          <p:cNvPr id="7" name=""/>
           <p:cNvSpPr/>
           <p:nvPr/>
         </p:nvSpPr>
@@ -13234,7 +13234,7 @@
       </p:sp>
       <p:sp>
         <p:nvSpPr>
-          <p:cNvPr id="8" name="Shape 6"/>
+          <p:cNvPr id="8" name=""/>
           <p:cNvSpPr/>
           <p:nvPr/>
         </p:nvSpPr>
@@ -13254,7 +13254,7 @@
       </p:sp>
       <p:sp>
         <p:nvSpPr>
-          <p:cNvPr id="9" name="Shape 7"/>
+          <p:cNvPr id="9" name=""/>
           <p:cNvSpPr/>
           <p:nvPr/>
         </p:nvSpPr>
@@ -13276,7 +13276,7 @@
       </p:sp>
       <p:sp>
         <p:nvSpPr>
-          <p:cNvPr id="10" name="Shape 8"/>
+          <p:cNvPr id="10" name=""/>
           <p:cNvSpPr/>
           <p:nvPr/>
         </p:nvSpPr>
@@ -13296,7 +13296,7 @@
       </p:sp>
       <p:sp>
         <p:nvSpPr>
-          <p:cNvPr id="11" name="Shape 9"/>
+          <p:cNvPr id="11" name=""/>
           <p:cNvSpPr/>
           <p:nvPr/>
         </p:nvSpPr>
@@ -13316,7 +13316,7 @@
       </p:sp>
       <p:sp>
         <p:nvSpPr>
-          <p:cNvPr id="12" name="Text 10"/>
+          <p:cNvPr id="12" name=""/>
           <p:cNvSpPr txBox="1"/>
           <p:nvPr/>
         </p:nvSpPr>
@@ -13335,7 +13335,7 @@
           <a:bodyPr wrap="square" lIns="0" tIns="0" rIns="0" bIns="0" anchor="ctr"/>
           <a:lstStyle/>
           <a:p>
-            <a:pPr algn="l"/>
+            <a:pPr/>
             <a:r>
               <a:rPr sz="8100" b="1">
                 <a:solidFill>
@@ -13351,7 +13351,7 @@
       </p:sp>
       <p:sp>
         <p:nvSpPr>
-          <p:cNvPr id="13" name="Text 11"/>
+          <p:cNvPr id="13" name=""/>
           <p:cNvSpPr txBox="1"/>
           <p:nvPr/>
         </p:nvSpPr>
@@ -13370,7 +13370,7 @@
           <a:bodyPr wrap="square" lIns="0" tIns="0" rIns="0" bIns="0" anchor="ctr"/>
           <a:lstStyle/>
           <a:p>
-            <a:pPr algn="l"/>
+            <a:pPr/>
             <a:r>
               <a:rPr sz="4050" b="1">
                 <a:solidFill>
@@ -13381,7 +13381,7 @@
               </a:rPr>
               <a:t>Do you mind if I </a:t>
             </a:r>
-            <a:pPr algn="l"/>
+            <a:pPr/>
             <a:r>
               <a:rPr sz="4050" b="1">
                 <a:solidFill>
@@ -13392,7 +13392,7 @@
               </a:rPr>
               <a:t>~</a:t>
             </a:r>
-            <a:pPr algn="l"/>
+            <a:pPr/>
             <a:r>
               <a:rPr sz="4050" b="1">
                 <a:solidFill>
@@ -13408,7 +13408,7 @@
       </p:sp>
       <p:sp>
         <p:nvSpPr>
-          <p:cNvPr id="14" name="Text 12"/>
+          <p:cNvPr id="14" name=""/>
           <p:cNvSpPr txBox="1"/>
           <p:nvPr/>
         </p:nvSpPr>
@@ -13427,7 +13427,7 @@
           <a:bodyPr wrap="square" lIns="0" tIns="0" rIns="0" bIns="0" anchor="ctr"/>
           <a:lstStyle/>
           <a:p>
-            <a:pPr algn="l"/>
+            <a:pPr/>
             <a:r>
               <a:rPr sz="2100" b="1">
                 <a:solidFill>
@@ -13443,7 +13443,7 @@
       </p:sp>
       <p:sp>
         <p:nvSpPr>
-          <p:cNvPr id="15" name="Text 13"/>
+          <p:cNvPr id="15" name=""/>
           <p:cNvSpPr txBox="1"/>
           <p:nvPr/>
         </p:nvSpPr>
@@ -13462,7 +13462,7 @@
           <a:bodyPr wrap="square" lIns="0" tIns="0" rIns="0" bIns="0" anchor="ctr"/>
           <a:lstStyle/>
           <a:p>
-            <a:pPr algn="l"/>
+            <a:pPr/>
             <a:r>
               <a:rPr sz="1150" b="1">
                 <a:solidFill>
@@ -13478,7 +13478,7 @@
       </p:sp>
       <p:sp>
         <p:nvSpPr>
-          <p:cNvPr id="16" name="Shape 14"/>
+          <p:cNvPr id="16" name=""/>
           <p:cNvSpPr/>
           <p:nvPr/>
         </p:nvSpPr>
@@ -13501,7 +13501,7 @@
       </p:sp>
       <p:sp>
         <p:nvSpPr>
-          <p:cNvPr id="17" name="Shape 15"/>
+          <p:cNvPr id="17" name=""/>
           <p:cNvSpPr/>
           <p:nvPr/>
         </p:nvSpPr>
@@ -13530,7 +13530,7 @@
       </p:sp>
       <p:sp>
         <p:nvSpPr>
-          <p:cNvPr id="18" name="Shape 16"/>
+          <p:cNvPr id="18" name=""/>
           <p:cNvSpPr/>
           <p:nvPr/>
         </p:nvSpPr>
@@ -13550,7 +13550,7 @@
       </p:sp>
       <p:sp>
         <p:nvSpPr>
-          <p:cNvPr id="19" name="Text 17"/>
+          <p:cNvPr id="19" name=""/>
           <p:cNvSpPr txBox="1"/>
           <p:nvPr/>
         </p:nvSpPr>
@@ -13585,7 +13585,7 @@
       </p:sp>
       <p:sp>
         <p:nvSpPr>
-          <p:cNvPr id="20" name="Text 18"/>
+          <p:cNvPr id="20" name=""/>
           <p:cNvSpPr txBox="1"/>
           <p:nvPr/>
         </p:nvSpPr>
@@ -13604,7 +13604,7 @@
           <a:bodyPr wrap="square" lIns="0" tIns="0" rIns="0" bIns="0" anchor="ctr"/>
           <a:lstStyle/>
           <a:p>
-            <a:pPr algn="l"/>
+            <a:pPr/>
             <a:r>
               <a:rPr sz="2050" b="1">
                 <a:solidFill>
@@ -13618,7 +13618,7 @@
               </a:rPr>
               <a:t>Do you mind if I</a:t>
             </a:r>
-            <a:pPr algn="l"/>
+            <a:pPr/>
             <a:r>
               <a:rPr sz="2050" b="1">
                 <a:solidFill>
@@ -13629,7 +13629,7 @@
               </a:rPr>
               <a:t> </a:t>
             </a:r>
-            <a:pPr algn="l"/>
+            <a:pPr/>
             <a:r>
               <a:rPr sz="2050" b="1">
                 <a:solidFill>
@@ -13640,7 +13640,7 @@
               </a:rPr>
               <a:t>sit</a:t>
             </a:r>
-            <a:pPr algn="l"/>
+            <a:pPr/>
             <a:r>
               <a:rPr sz="2050" b="1">
                 <a:solidFill>
@@ -13656,7 +13656,7 @@
       </p:sp>
       <p:sp>
         <p:nvSpPr>
-          <p:cNvPr id="21" name="Text 19"/>
+          <p:cNvPr id="21" name=""/>
           <p:cNvSpPr txBox="1"/>
           <p:nvPr/>
         </p:nvSpPr>
@@ -13675,7 +13675,7 @@
           <a:bodyPr wrap="square" lIns="0" tIns="0" rIns="0" bIns="0" anchor="ctr"/>
           <a:lstStyle/>
           <a:p>
-            <a:pPr algn="l"/>
+            <a:pPr/>
             <a:r>
               <a:rPr sz="1450" b="1">
                 <a:solidFill>
@@ -13691,7 +13691,7 @@
       </p:sp>
       <p:sp>
         <p:nvSpPr>
-          <p:cNvPr id="22" name="Shape 20"/>
+          <p:cNvPr id="22" name=""/>
           <p:cNvSpPr/>
           <p:nvPr/>
         </p:nvSpPr>
@@ -13720,7 +13720,7 @@
       </p:sp>
       <p:sp>
         <p:nvSpPr>
-          <p:cNvPr id="23" name="Shape 21"/>
+          <p:cNvPr id="23" name=""/>
           <p:cNvSpPr/>
           <p:nvPr/>
         </p:nvSpPr>
@@ -13740,7 +13740,7 @@
       </p:sp>
       <p:sp>
         <p:nvSpPr>
-          <p:cNvPr id="24" name="Text 22"/>
+          <p:cNvPr id="24" name=""/>
           <p:cNvSpPr txBox="1"/>
           <p:nvPr/>
         </p:nvSpPr>
@@ -13775,7 +13775,7 @@
       </p:sp>
       <p:sp>
         <p:nvSpPr>
-          <p:cNvPr id="25" name="Text 23"/>
+          <p:cNvPr id="25" name=""/>
           <p:cNvSpPr txBox="1"/>
           <p:nvPr/>
         </p:nvSpPr>
@@ -13794,7 +13794,7 @@
           <a:bodyPr wrap="square" lIns="0" tIns="0" rIns="0" bIns="0" anchor="ctr"/>
           <a:lstStyle/>
           <a:p>
-            <a:pPr algn="l"/>
+            <a:pPr/>
             <a:r>
               <a:rPr sz="2050" b="1">
                 <a:solidFill>
@@ -13808,7 +13808,7 @@
               </a:rPr>
               <a:t>Do you mind if I</a:t>
             </a:r>
-            <a:pPr algn="l"/>
+            <a:pPr/>
             <a:r>
               <a:rPr sz="2050" b="1">
                 <a:solidFill>
@@ -13819,7 +13819,7 @@
               </a:rPr>
               <a:t> </a:t>
             </a:r>
-            <a:pPr algn="l"/>
+            <a:pPr/>
             <a:r>
               <a:rPr sz="2050" b="1">
                 <a:solidFill>
@@ -13830,7 +13830,7 @@
               </a:rPr>
               <a:t>open</a:t>
             </a:r>
-            <a:pPr algn="l"/>
+            <a:pPr/>
             <a:r>
               <a:rPr sz="2050" b="1">
                 <a:solidFill>
@@ -13846,7 +13846,7 @@
       </p:sp>
       <p:sp>
         <p:nvSpPr>
-          <p:cNvPr id="26" name="Text 24"/>
+          <p:cNvPr id="26" name=""/>
           <p:cNvSpPr txBox="1"/>
           <p:nvPr/>
         </p:nvSpPr>
@@ -13865,7 +13865,7 @@
           <a:bodyPr wrap="square" lIns="0" tIns="0" rIns="0" bIns="0" anchor="ctr"/>
           <a:lstStyle/>
           <a:p>
-            <a:pPr algn="l"/>
+            <a:pPr/>
             <a:r>
               <a:rPr sz="1450" b="1">
                 <a:solidFill>
@@ -13881,7 +13881,7 @@
       </p:sp>
       <p:sp>
         <p:nvSpPr>
-          <p:cNvPr id="27" name="Shape 25"/>
+          <p:cNvPr id="27" name=""/>
           <p:cNvSpPr/>
           <p:nvPr/>
         </p:nvSpPr>
@@ -13910,7 +13910,7 @@
       </p:sp>
       <p:sp>
         <p:nvSpPr>
-          <p:cNvPr id="28" name="Shape 26"/>
+          <p:cNvPr id="28" name=""/>
           <p:cNvSpPr/>
           <p:nvPr/>
         </p:nvSpPr>
@@ -13930,7 +13930,7 @@
       </p:sp>
       <p:sp>
         <p:nvSpPr>
-          <p:cNvPr id="29" name="Text 27"/>
+          <p:cNvPr id="29" name=""/>
           <p:cNvSpPr txBox="1"/>
           <p:nvPr/>
         </p:nvSpPr>
@@ -13965,7 +13965,7 @@
       </p:sp>
       <p:sp>
         <p:nvSpPr>
-          <p:cNvPr id="30" name="Text 28"/>
+          <p:cNvPr id="30" name=""/>
           <p:cNvSpPr txBox="1"/>
           <p:nvPr/>
         </p:nvSpPr>
@@ -13984,7 +13984,7 @@
           <a:bodyPr wrap="square" lIns="0" tIns="0" rIns="0" bIns="0" anchor="ctr"/>
           <a:lstStyle/>
           <a:p>
-            <a:pPr algn="l"/>
+            <a:pPr/>
             <a:r>
               <a:rPr sz="2050" b="1">
                 <a:solidFill>
@@ -13998,7 +13998,7 @@
               </a:rPr>
               <a:t>Do you mind if I</a:t>
             </a:r>
-            <a:pPr algn="l"/>
+            <a:pPr/>
             <a:r>
               <a:rPr sz="2050" b="1">
                 <a:solidFill>
@@ -14009,7 +14009,7 @@
               </a:rPr>
               <a:t> </a:t>
             </a:r>
-            <a:pPr algn="l"/>
+            <a:pPr/>
             <a:r>
               <a:rPr sz="2050" b="1">
                 <a:solidFill>
@@ -14020,7 +14020,7 @@
               </a:rPr>
               <a:t>ask</a:t>
             </a:r>
-            <a:pPr algn="l"/>
+            <a:pPr/>
             <a:r>
               <a:rPr sz="2050" b="1">
                 <a:solidFill>
@@ -14036,7 +14036,7 @@
       </p:sp>
       <p:sp>
         <p:nvSpPr>
-          <p:cNvPr id="31" name="Text 29"/>
+          <p:cNvPr id="31" name=""/>
           <p:cNvSpPr txBox="1"/>
           <p:nvPr/>
         </p:nvSpPr>
@@ -14055,7 +14055,7 @@
           <a:bodyPr wrap="square" lIns="0" tIns="0" rIns="0" bIns="0" anchor="ctr"/>
           <a:lstStyle/>
           <a:p>
-            <a:pPr algn="l"/>
+            <a:pPr/>
             <a:r>
               <a:rPr sz="1450" b="1">
                 <a:solidFill>
@@ -14071,7 +14071,7 @@
       </p:sp>
       <p:sp>
         <p:nvSpPr>
-          <p:cNvPr id="32" name="Text 30"/>
+          <p:cNvPr id="32" name=""/>
           <p:cNvSpPr txBox="1"/>
           <p:nvPr/>
         </p:nvSpPr>
@@ -14090,7 +14090,7 @@
           <a:bodyPr wrap="square" lIns="0" tIns="0" rIns="0" bIns="0" anchor="ctr"/>
           <a:lstStyle/>
           <a:p>
-            <a:pPr algn="l"/>
+            <a:pPr/>
             <a:r>
               <a:rPr sz="1150" b="1">
                 <a:solidFill>
@@ -14106,7 +14106,7 @@
       </p:sp>
       <p:sp>
         <p:nvSpPr>
-          <p:cNvPr id="33" name="Shape 31"/>
+          <p:cNvPr id="33" name=""/>
           <p:cNvSpPr/>
           <p:nvPr/>
         </p:nvSpPr>
@@ -14129,7 +14129,7 @@
       </p:sp>
       <p:sp>
         <p:nvSpPr>
-          <p:cNvPr id="34" name="Shape 32"/>
+          <p:cNvPr id="34" name=""/>
           <p:cNvSpPr/>
           <p:nvPr/>
         </p:nvSpPr>
@@ -14156,7 +14156,7 @@
       </p:sp>
       <p:sp>
         <p:nvSpPr>
-          <p:cNvPr id="35" name="Text 33"/>
+          <p:cNvPr id="35" name=""/>
           <p:cNvSpPr txBox="1"/>
           <p:nvPr/>
         </p:nvSpPr>
@@ -14175,7 +14175,7 @@
           <a:bodyPr wrap="square" lIns="0" tIns="0" rIns="0" bIns="0" anchor="ctr"/>
           <a:lstStyle/>
           <a:p>
-            <a:pPr algn="l"/>
+            <a:pPr/>
             <a:r>
               <a:rPr sz="1600" b="1">
                 <a:solidFill>
@@ -14191,7 +14191,7 @@
       </p:sp>
       <p:sp>
         <p:nvSpPr>
-          <p:cNvPr id="36" name="Shape 34"/>
+          <p:cNvPr id="36" name=""/>
           <p:cNvSpPr/>
           <p:nvPr/>
         </p:nvSpPr>
@@ -14213,7 +14213,7 @@
       </p:sp>
       <p:sp>
         <p:nvSpPr>
-          <p:cNvPr id="37" name="Text 35"/>
+          <p:cNvPr id="37" name=""/>
           <p:cNvSpPr txBox="1"/>
           <p:nvPr/>
         </p:nvSpPr>
@@ -14232,7 +14232,7 @@
           <a:bodyPr wrap="square" lIns="0" tIns="0" rIns="0" bIns="0" anchor="ctr"/>
           <a:lstStyle/>
           <a:p>
-            <a:pPr algn="l"/>
+            <a:pPr/>
             <a:r>
               <a:rPr sz="1050" b="1">
                 <a:solidFill>
@@ -14248,7 +14248,7 @@
       </p:sp>
       <p:sp>
         <p:nvSpPr>
-          <p:cNvPr id="38" name="Shape 36"/>
+          <p:cNvPr id="38" name=""/>
           <p:cNvSpPr/>
           <p:nvPr/>
         </p:nvSpPr>
@@ -14270,7 +14270,7 @@
       </p:sp>
       <p:sp>
         <p:nvSpPr>
-          <p:cNvPr id="39" name="Shape 37"/>
+          <p:cNvPr id="39" name=""/>
           <p:cNvSpPr/>
           <p:nvPr/>
         </p:nvSpPr>
@@ -14290,7 +14290,7 @@
       </p:sp>
       <p:sp>
         <p:nvSpPr>
-          <p:cNvPr id="40" name="Text 38"/>
+          <p:cNvPr id="40" name=""/>
           <p:cNvSpPr txBox="1"/>
           <p:nvPr/>
         </p:nvSpPr>
@@ -14325,7 +14325,7 @@
       </p:sp>
       <p:sp>
         <p:nvSpPr>
-          <p:cNvPr id="41" name="Text 39"/>
+          <p:cNvPr id="41" name=""/>
           <p:cNvSpPr txBox="1"/>
           <p:nvPr/>
         </p:nvSpPr>
@@ -14344,7 +14344,7 @@
           <a:bodyPr wrap="square" lIns="0" tIns="0" rIns="0" bIns="0" anchor="ctr"/>
           <a:lstStyle/>
           <a:p>
-            <a:pPr algn="l"/>
+            <a:pPr/>
             <a:r>
               <a:rPr sz="1800" b="1">
                 <a:solidFill>
@@ -14355,7 +14355,7 @@
               </a:rPr>
               <a:t>No. </a:t>
             </a:r>
-            <a:pPr algn="l"/>
+            <a:pPr/>
             <a:r>
               <a:rPr sz="1800" b="1">
                 <a:solidFill>
@@ -14366,7 +14366,7 @@
               </a:rPr>
               <a:t>／</a:t>
             </a:r>
-            <a:pPr algn="l"/>
+            <a:pPr/>
             <a:r>
               <a:rPr sz="1800" b="1">
                 <a:solidFill>
@@ -14382,7 +14382,7 @@
       </p:sp>
       <p:sp>
         <p:nvSpPr>
-          <p:cNvPr id="42" name="Text 40"/>
+          <p:cNvPr id="42" name=""/>
           <p:cNvSpPr txBox="1"/>
           <p:nvPr/>
         </p:nvSpPr>
@@ -14401,7 +14401,7 @@
           <a:bodyPr wrap="square" lIns="0" tIns="0" rIns="0" bIns="0" anchor="ctr"/>
           <a:lstStyle/>
           <a:p>
-            <a:pPr algn="l"/>
+            <a:pPr/>
             <a:r>
               <a:rPr sz="1300" b="1">
                 <a:solidFill>
@@ -14417,7 +14417,7 @@
       </p:sp>
       <p:sp>
         <p:nvSpPr>
-          <p:cNvPr id="43" name="Shape 41"/>
+          <p:cNvPr id="43" name=""/>
           <p:cNvSpPr/>
           <p:nvPr/>
         </p:nvSpPr>
@@ -14439,7 +14439,7 @@
       </p:sp>
       <p:sp>
         <p:nvSpPr>
-          <p:cNvPr id="44" name="Shape 42"/>
+          <p:cNvPr id="44" name=""/>
           <p:cNvSpPr/>
           <p:nvPr/>
         </p:nvSpPr>
@@ -14459,7 +14459,7 @@
       </p:sp>
       <p:sp>
         <p:nvSpPr>
-          <p:cNvPr id="45" name="Text 43"/>
+          <p:cNvPr id="45" name=""/>
           <p:cNvSpPr txBox="1"/>
           <p:nvPr/>
         </p:nvSpPr>
@@ -14494,7 +14494,7 @@
       </p:sp>
       <p:sp>
         <p:nvSpPr>
-          <p:cNvPr id="46" name="Text 44"/>
+          <p:cNvPr id="46" name=""/>
           <p:cNvSpPr txBox="1"/>
           <p:nvPr/>
         </p:nvSpPr>
@@ -14513,7 +14513,7 @@
           <a:bodyPr wrap="square" lIns="0" tIns="0" rIns="0" bIns="0" anchor="ctr"/>
           <a:lstStyle/>
           <a:p>
-            <a:pPr algn="l"/>
+            <a:pPr/>
             <a:r>
               <a:rPr sz="1800" b="1">
                 <a:solidFill>
@@ -14529,7 +14529,7 @@
       </p:sp>
       <p:sp>
         <p:nvSpPr>
-          <p:cNvPr id="47" name="Text 45"/>
+          <p:cNvPr id="47" name=""/>
           <p:cNvSpPr txBox="1"/>
           <p:nvPr/>
         </p:nvSpPr>
@@ -14548,7 +14548,7 @@
           <a:bodyPr wrap="square" lIns="0" tIns="0" rIns="0" bIns="0" anchor="ctr"/>
           <a:lstStyle/>
           <a:p>
-            <a:pPr algn="l"/>
+            <a:pPr/>
             <a:r>
               <a:rPr sz="1300" b="1">
                 <a:solidFill>
@@ -14564,7 +14564,7 @@
       </p:sp>
       <p:sp>
         <p:nvSpPr>
-          <p:cNvPr id="48" name="Shape 46"/>
+          <p:cNvPr id="48" name=""/>
           <p:cNvSpPr/>
           <p:nvPr/>
         </p:nvSpPr>
@@ -14587,7 +14587,7 @@
       </p:sp>
       <p:sp>
         <p:nvSpPr>
-          <p:cNvPr id="49" name="Text 47"/>
+          <p:cNvPr id="49" name=""/>
           <p:cNvSpPr txBox="1"/>
           <p:nvPr/>
         </p:nvSpPr>
@@ -14606,7 +14606,7 @@
           <a:bodyPr wrap="square" lIns="0" tIns="0" rIns="0" bIns="0" anchor="ctr"/>
           <a:lstStyle/>
           <a:p>
-            <a:pPr algn="l"/>
+            <a:pPr/>
             <a:r>
               <a:rPr sz="1350" b="1">
                 <a:solidFill>
@@ -14617,7 +14617,7 @@
               </a:rPr>
               <a:t>mind</a:t>
             </a:r>
-            <a:pPr algn="l"/>
+            <a:pPr/>
             <a:r>
               <a:rPr sz="1350" b="1">
                 <a:solidFill>
@@ -14633,7 +14633,7 @@
       </p:sp>
       <p:sp>
         <p:nvSpPr>
-          <p:cNvPr id="50" name="Text 48"/>
+          <p:cNvPr id="50" name=""/>
           <p:cNvSpPr txBox="1"/>
           <p:nvPr/>
         </p:nvSpPr>
@@ -14652,7 +14652,7 @@
           <a:bodyPr wrap="square" lIns="0" tIns="0" rIns="0" bIns="0" anchor="ctr"/>
           <a:lstStyle/>
           <a:p>
-            <a:pPr algn="l"/>
+            <a:pPr/>
             <a:r>
               <a:rPr sz="1350" b="1">
                 <a:solidFill>
@@ -14663,7 +14663,7 @@
               </a:rPr>
               <a:t>No</a:t>
             </a:r>
-            <a:pPr algn="l"/>
+            <a:pPr/>
             <a:r>
               <a:rPr sz="1350" b="1">
                 <a:solidFill>
@@ -14711,7 +14711,7 @@
       </p:grpSpPr>
       <p:sp>
         <p:nvSpPr>
-          <p:cNvPr id="2" name="Text 0"/>
+          <p:cNvPr id="2" name=""/>
           <p:cNvSpPr txBox="1"/>
           <p:nvPr/>
         </p:nvSpPr>
@@ -14730,7 +14730,7 @@
           <a:bodyPr wrap="square" lIns="0" tIns="0" rIns="0" bIns="0" anchor="ctr"/>
           <a:lstStyle/>
           <a:p>
-            <a:pPr algn="l"/>
+            <a:pPr/>
             <a:r>
               <a:rPr sz="1150" b="1">
                 <a:solidFill>
@@ -14746,7 +14746,7 @@
       </p:sp>
       <p:sp>
         <p:nvSpPr>
-          <p:cNvPr id="3" name="Shape 1"/>
+          <p:cNvPr id="3" name=""/>
           <p:cNvSpPr/>
           <p:nvPr/>
         </p:nvSpPr>
@@ -14766,7 +14766,7 @@
       </p:sp>
       <p:sp>
         <p:nvSpPr>
-          <p:cNvPr id="4" name="Shape 2"/>
+          <p:cNvPr id="4" name=""/>
           <p:cNvSpPr/>
           <p:nvPr/>
         </p:nvSpPr>
@@ -14786,7 +14786,7 @@
       </p:sp>
       <p:sp>
         <p:nvSpPr>
-          <p:cNvPr id="5" name="Shape 3"/>
+          <p:cNvPr id="5" name=""/>
           <p:cNvSpPr/>
           <p:nvPr/>
         </p:nvSpPr>
@@ -14806,7 +14806,7 @@
       </p:sp>
       <p:sp>
         <p:nvSpPr>
-          <p:cNvPr id="6" name="Shape 4"/>
+          <p:cNvPr id="6" name=""/>
           <p:cNvSpPr/>
           <p:nvPr/>
         </p:nvSpPr>
@@ -14826,7 +14826,7 @@
       </p:sp>
       <p:sp>
         <p:nvSpPr>
-          <p:cNvPr id="7" name="Shape 5"/>
+          <p:cNvPr id="7" name=""/>
           <p:cNvSpPr/>
           <p:nvPr/>
         </p:nvSpPr>
@@ -14846,7 +14846,7 @@
       </p:sp>
       <p:sp>
         <p:nvSpPr>
-          <p:cNvPr id="8" name="Shape 6"/>
+          <p:cNvPr id="8" name=""/>
           <p:cNvSpPr/>
           <p:nvPr/>
         </p:nvSpPr>
@@ -14866,7 +14866,7 @@
       </p:sp>
       <p:sp>
         <p:nvSpPr>
-          <p:cNvPr id="9" name="Shape 7"/>
+          <p:cNvPr id="9" name=""/>
           <p:cNvSpPr/>
           <p:nvPr/>
         </p:nvSpPr>
@@ -14886,7 +14886,7 @@
       </p:sp>
       <p:sp>
         <p:nvSpPr>
-          <p:cNvPr id="10" name="Shape 8"/>
+          <p:cNvPr id="10" name=""/>
           <p:cNvSpPr/>
           <p:nvPr/>
         </p:nvSpPr>
@@ -14908,7 +14908,7 @@
       </p:sp>
       <p:sp>
         <p:nvSpPr>
-          <p:cNvPr id="11" name="Shape 9"/>
+          <p:cNvPr id="11" name=""/>
           <p:cNvSpPr/>
           <p:nvPr/>
         </p:nvSpPr>
@@ -14928,7 +14928,7 @@
       </p:sp>
       <p:sp>
         <p:nvSpPr>
-          <p:cNvPr id="12" name="Text 10"/>
+          <p:cNvPr id="12" name=""/>
           <p:cNvSpPr txBox="1"/>
           <p:nvPr/>
         </p:nvSpPr>
@@ -14947,7 +14947,7 @@
           <a:bodyPr wrap="square" lIns="0" tIns="0" rIns="0" bIns="0" anchor="ctr"/>
           <a:lstStyle/>
           <a:p>
-            <a:pPr algn="l"/>
+            <a:pPr/>
             <a:r>
               <a:rPr sz="8100" b="1">
                 <a:solidFill>
@@ -14963,7 +14963,7 @@
       </p:sp>
       <p:sp>
         <p:nvSpPr>
-          <p:cNvPr id="13" name="Text 11"/>
+          <p:cNvPr id="13" name=""/>
           <p:cNvSpPr txBox="1"/>
           <p:nvPr/>
         </p:nvSpPr>
@@ -14982,7 +14982,7 @@
           <a:bodyPr wrap="square" lIns="0" tIns="0" rIns="0" bIns="0" anchor="ctr"/>
           <a:lstStyle/>
           <a:p>
-            <a:pPr algn="l"/>
+            <a:pPr/>
             <a:r>
               <a:rPr sz="4050" b="1">
                 <a:solidFill>
@@ -14993,7 +14993,7 @@
               </a:rPr>
               <a:t>I bet </a:t>
             </a:r>
-            <a:pPr algn="l"/>
+            <a:pPr/>
             <a:r>
               <a:rPr sz="4050" b="1">
                 <a:solidFill>
@@ -15009,7 +15009,7 @@
       </p:sp>
       <p:sp>
         <p:nvSpPr>
-          <p:cNvPr id="14" name="Text 12"/>
+          <p:cNvPr id="14" name=""/>
           <p:cNvSpPr txBox="1"/>
           <p:nvPr/>
         </p:nvSpPr>
@@ -15028,7 +15028,7 @@
           <a:bodyPr wrap="square" lIns="0" tIns="0" rIns="0" bIns="0" anchor="ctr"/>
           <a:lstStyle/>
           <a:p>
-            <a:pPr algn="l"/>
+            <a:pPr/>
             <a:r>
               <a:rPr sz="2100" b="1">
                 <a:solidFill>
@@ -15044,7 +15044,7 @@
       </p:sp>
       <p:sp>
         <p:nvSpPr>
-          <p:cNvPr id="15" name="Shape 13"/>
+          <p:cNvPr id="15" name=""/>
           <p:cNvSpPr/>
           <p:nvPr/>
         </p:nvSpPr>
@@ -15066,7 +15066,7 @@
       </p:sp>
       <p:sp>
         <p:nvSpPr>
-          <p:cNvPr id="16" name="Text 14"/>
+          <p:cNvPr id="16" name=""/>
           <p:cNvSpPr txBox="1"/>
           <p:nvPr/>
         </p:nvSpPr>
@@ -15085,7 +15085,7 @@
           <a:bodyPr wrap="square" lIns="0" tIns="0" rIns="0" bIns="0" anchor="ctr"/>
           <a:lstStyle/>
           <a:p>
-            <a:pPr algn="l"/>
+            <a:pPr/>
             <a:r>
               <a:rPr sz="1300" b="1">
                 <a:solidFill>
@@ -15101,7 +15101,7 @@
       </p:sp>
       <p:sp>
         <p:nvSpPr>
-          <p:cNvPr id="17" name="Text 15"/>
+          <p:cNvPr id="17" name=""/>
           <p:cNvSpPr txBox="1"/>
           <p:nvPr/>
         </p:nvSpPr>
@@ -15120,7 +15120,7 @@
           <a:bodyPr wrap="square" lIns="0" tIns="0" rIns="0" bIns="0" anchor="ctr"/>
           <a:lstStyle/>
           <a:p>
-            <a:pPr algn="l"/>
+            <a:pPr/>
             <a:r>
               <a:rPr sz="1150" b="1">
                 <a:solidFill>
@@ -15136,7 +15136,7 @@
       </p:sp>
       <p:sp>
         <p:nvSpPr>
-          <p:cNvPr id="18" name="Shape 16"/>
+          <p:cNvPr id="18" name=""/>
           <p:cNvSpPr/>
           <p:nvPr/>
         </p:nvSpPr>
@@ -15159,7 +15159,7 @@
       </p:sp>
       <p:sp>
         <p:nvSpPr>
-          <p:cNvPr id="19" name="Shape 17"/>
+          <p:cNvPr id="19" name=""/>
           <p:cNvSpPr/>
           <p:nvPr/>
         </p:nvSpPr>
@@ -15188,7 +15188,7 @@
       </p:sp>
       <p:sp>
         <p:nvSpPr>
-          <p:cNvPr id="20" name="Shape 18"/>
+          <p:cNvPr id="20" name=""/>
           <p:cNvSpPr/>
           <p:nvPr/>
         </p:nvSpPr>
@@ -15208,7 +15208,7 @@
       </p:sp>
       <p:sp>
         <p:nvSpPr>
-          <p:cNvPr id="21" name="Text 19"/>
+          <p:cNvPr id="21" name=""/>
           <p:cNvSpPr txBox="1"/>
           <p:nvPr/>
         </p:nvSpPr>
@@ -15243,7 +15243,7 @@
       </p:sp>
       <p:sp>
         <p:nvSpPr>
-          <p:cNvPr id="22" name="Text 20"/>
+          <p:cNvPr id="22" name=""/>
           <p:cNvSpPr txBox="1"/>
           <p:nvPr/>
         </p:nvSpPr>
@@ -15262,7 +15262,7 @@
           <a:bodyPr wrap="square" lIns="0" tIns="0" rIns="0" bIns="0" anchor="ctr"/>
           <a:lstStyle/>
           <a:p>
-            <a:pPr algn="l"/>
+            <a:pPr/>
             <a:r>
               <a:rPr sz="2350" b="1">
                 <a:solidFill>
@@ -15276,7 +15276,7 @@
               </a:rPr>
               <a:t>I bet</a:t>
             </a:r>
-            <a:pPr algn="l"/>
+            <a:pPr/>
             <a:r>
               <a:rPr sz="2350" b="1">
                 <a:solidFill>
@@ -15292,7 +15292,7 @@
       </p:sp>
       <p:sp>
         <p:nvSpPr>
-          <p:cNvPr id="23" name="Text 21"/>
+          <p:cNvPr id="23" name=""/>
           <p:cNvSpPr txBox="1"/>
           <p:nvPr/>
         </p:nvSpPr>
@@ -15311,7 +15311,7 @@
           <a:bodyPr wrap="square" lIns="0" tIns="0" rIns="0" bIns="0" anchor="ctr"/>
           <a:lstStyle/>
           <a:p>
-            <a:pPr algn="l"/>
+            <a:pPr/>
             <a:r>
               <a:rPr sz="1650" b="1">
                 <a:solidFill>
@@ -15327,7 +15327,7 @@
       </p:sp>
       <p:sp>
         <p:nvSpPr>
-          <p:cNvPr id="24" name="Shape 22"/>
+          <p:cNvPr id="24" name=""/>
           <p:cNvSpPr/>
           <p:nvPr/>
         </p:nvSpPr>
@@ -15356,7 +15356,7 @@
       </p:sp>
       <p:sp>
         <p:nvSpPr>
-          <p:cNvPr id="25" name="Shape 23"/>
+          <p:cNvPr id="25" name=""/>
           <p:cNvSpPr/>
           <p:nvPr/>
         </p:nvSpPr>
@@ -15376,7 +15376,7 @@
       </p:sp>
       <p:sp>
         <p:nvSpPr>
-          <p:cNvPr id="26" name="Text 24"/>
+          <p:cNvPr id="26" name=""/>
           <p:cNvSpPr txBox="1"/>
           <p:nvPr/>
         </p:nvSpPr>
@@ -15411,7 +15411,7 @@
       </p:sp>
       <p:sp>
         <p:nvSpPr>
-          <p:cNvPr id="27" name="Text 25"/>
+          <p:cNvPr id="27" name=""/>
           <p:cNvSpPr txBox="1"/>
           <p:nvPr/>
         </p:nvSpPr>
@@ -15430,7 +15430,7 @@
           <a:bodyPr wrap="square" lIns="0" tIns="0" rIns="0" bIns="0" anchor="ctr"/>
           <a:lstStyle/>
           <a:p>
-            <a:pPr algn="l"/>
+            <a:pPr/>
             <a:r>
               <a:rPr sz="2350" b="1">
                 <a:solidFill>
@@ -15444,7 +15444,7 @@
               </a:rPr>
               <a:t>I bet</a:t>
             </a:r>
-            <a:pPr algn="l"/>
+            <a:pPr/>
             <a:r>
               <a:rPr sz="2350" b="1">
                 <a:solidFill>
@@ -15460,7 +15460,7 @@
       </p:sp>
       <p:sp>
         <p:nvSpPr>
-          <p:cNvPr id="28" name="Text 26"/>
+          <p:cNvPr id="28" name=""/>
           <p:cNvSpPr txBox="1"/>
           <p:nvPr/>
         </p:nvSpPr>
@@ -15479,7 +15479,7 @@
           <a:bodyPr wrap="square" lIns="0" tIns="0" rIns="0" bIns="0" anchor="ctr"/>
           <a:lstStyle/>
           <a:p>
-            <a:pPr algn="l"/>
+            <a:pPr/>
             <a:r>
               <a:rPr sz="1650" b="1">
                 <a:solidFill>
@@ -15495,7 +15495,7 @@
       </p:sp>
       <p:sp>
         <p:nvSpPr>
-          <p:cNvPr id="29" name="Shape 27"/>
+          <p:cNvPr id="29" name=""/>
           <p:cNvSpPr/>
           <p:nvPr/>
         </p:nvSpPr>
@@ -15524,7 +15524,7 @@
       </p:sp>
       <p:sp>
         <p:nvSpPr>
-          <p:cNvPr id="30" name="Shape 28"/>
+          <p:cNvPr id="30" name=""/>
           <p:cNvSpPr/>
           <p:nvPr/>
         </p:nvSpPr>
@@ -15544,7 +15544,7 @@
       </p:sp>
       <p:sp>
         <p:nvSpPr>
-          <p:cNvPr id="31" name="Text 29"/>
+          <p:cNvPr id="31" name=""/>
           <p:cNvSpPr txBox="1"/>
           <p:nvPr/>
         </p:nvSpPr>
@@ -15579,7 +15579,7 @@
       </p:sp>
       <p:sp>
         <p:nvSpPr>
-          <p:cNvPr id="32" name="Text 30"/>
+          <p:cNvPr id="32" name=""/>
           <p:cNvSpPr txBox="1"/>
           <p:nvPr/>
         </p:nvSpPr>
@@ -15598,7 +15598,7 @@
           <a:bodyPr wrap="square" lIns="0" tIns="0" rIns="0" bIns="0" anchor="ctr"/>
           <a:lstStyle/>
           <a:p>
-            <a:pPr algn="l"/>
+            <a:pPr/>
             <a:r>
               <a:rPr sz="2350" b="1">
                 <a:solidFill>
@@ -15612,7 +15612,7 @@
               </a:rPr>
               <a:t>I bet</a:t>
             </a:r>
-            <a:pPr algn="l"/>
+            <a:pPr/>
             <a:r>
               <a:rPr sz="2350" b="1">
                 <a:solidFill>
@@ -15628,7 +15628,7 @@
       </p:sp>
       <p:sp>
         <p:nvSpPr>
-          <p:cNvPr id="33" name="Text 31"/>
+          <p:cNvPr id="33" name=""/>
           <p:cNvSpPr txBox="1"/>
           <p:nvPr/>
         </p:nvSpPr>
@@ -15647,7 +15647,7 @@
           <a:bodyPr wrap="square" lIns="0" tIns="0" rIns="0" bIns="0" anchor="ctr"/>
           <a:lstStyle/>
           <a:p>
-            <a:pPr algn="l"/>
+            <a:pPr/>
             <a:r>
               <a:rPr sz="1650" b="1">
                 <a:solidFill>

--- a/matome/9-phrases/9-phrases-matome.pptx
+++ b/matome/9-phrases/9-phrases-matome.pptx
@@ -503,16 +503,40 @@
           <a:ln/>
         </p:spPr>
       </p:sp>
-      <p:sp>
-        <p:nvSpPr>
-          <p:cNvPr id="3" name=""/>
-          <p:cNvSpPr txBox="1"/>
-          <p:nvPr/>
-        </p:nvSpPr>
-        <p:spPr>
-          <a:xfrm>
-            <a:off x="838200" y="1571625"/>
-            <a:ext cx="1771650" cy="276225"/>
+      <p:pic>
+        <p:nvPicPr>
+          <p:cNvPr id="3" name="Image 0" descr="手を振るキャラクター">    </p:cNvPr>
+          <p:cNvPicPr>
+            <a:picLocks noChangeAspect="1"/>
+          </p:cNvPicPr>
+          <p:nvPr/>
+        </p:nvPicPr>
+        <p:blipFill>
+          <a:blip r:embed="rId1"/>
+          <a:stretch>
+            <a:fillRect/>
+          </a:stretch>
+        </p:blipFill>
+        <p:spPr>
+          <a:xfrm>
+            <a:off x="7820025" y="1524000"/>
+            <a:ext cx="3990975" cy="5334000"/>
+          </a:xfrm>
+          <a:prstGeom prst="rect">
+            <a:avLst/>
+          </a:prstGeom>
+        </p:spPr>
+      </p:pic>
+      <p:sp>
+        <p:nvSpPr>
+          <p:cNvPr id="4" name=""/>
+          <p:cNvSpPr txBox="1"/>
+          <p:nvPr/>
+        </p:nvSpPr>
+        <p:spPr>
+          <a:xfrm>
+            <a:off x="838200" y="695325"/>
+            <a:ext cx="2000250" cy="276225"/>
           </a:xfrm>
           <a:prstGeom prst="rect">
             <a:avLst/>
@@ -540,28 +564,28 @@
       </p:sp>
       <p:sp>
         <p:nvSpPr>
-          <p:cNvPr id="4" name=""/>
-          <p:cNvSpPr txBox="1"/>
-          <p:nvPr/>
-        </p:nvSpPr>
-        <p:spPr>
-          <a:xfrm>
-            <a:off x="838200" y="1952625"/>
-            <a:ext cx="6781800" cy="942975"/>
-          </a:xfrm>
-          <a:prstGeom prst="rect">
-            <a:avLst/>
-          </a:prstGeom>
-          <a:noFill/>
-          <a:ln/>
-        </p:spPr>
-        <p:txBody>
-          <a:bodyPr wrap="square" lIns="0" tIns="0" rIns="0" bIns="0" anchor="ctr"/>
-          <a:lstStyle/>
-          <a:p>
-            <a:pPr/>
-            <a:r>
-              <a:rPr sz="5100" b="1">
+          <p:cNvPr id="5" name=""/>
+          <p:cNvSpPr txBox="1"/>
+          <p:nvPr/>
+        </p:nvSpPr>
+        <p:spPr>
+          <a:xfrm>
+            <a:off x="838200" y="1019175"/>
+            <a:ext cx="6619875" cy="876300"/>
+          </a:xfrm>
+          <a:prstGeom prst="rect">
+            <a:avLst/>
+          </a:prstGeom>
+          <a:noFill/>
+          <a:ln/>
+        </p:spPr>
+        <p:txBody>
+          <a:bodyPr wrap="square" lIns="0" tIns="0" rIns="0" bIns="0" anchor="ctr"/>
+          <a:lstStyle/>
+          <a:p>
+            <a:pPr/>
+            <a:r>
+              <a:rPr sz="4800" b="1">
                 <a:solidFill>
                   <a:srgbClr val="1E1A1C"/>
                 </a:solidFill>
@@ -575,28 +599,28 @@
       </p:sp>
       <p:sp>
         <p:nvSpPr>
-          <p:cNvPr id="5" name=""/>
-          <p:cNvSpPr txBox="1"/>
-          <p:nvPr/>
-        </p:nvSpPr>
-        <p:spPr>
-          <a:xfrm>
-            <a:off x="838200" y="2762250"/>
-            <a:ext cx="1562100" cy="1276350"/>
-          </a:xfrm>
-          <a:prstGeom prst="rect">
-            <a:avLst/>
-          </a:prstGeom>
-          <a:noFill/>
-          <a:ln/>
-        </p:spPr>
-        <p:txBody>
-          <a:bodyPr wrap="square" lIns="0" tIns="0" rIns="0" bIns="0" anchor="ctr"/>
-          <a:lstStyle/>
-          <a:p>
-            <a:pPr/>
-            <a:r>
-              <a:rPr sz="9000" b="1">
+          <p:cNvPr id="6" name=""/>
+          <p:cNvSpPr txBox="1"/>
+          <p:nvPr/>
+        </p:nvSpPr>
+        <p:spPr>
+          <a:xfrm>
+            <a:off x="838200" y="1771650"/>
+            <a:ext cx="1685925" cy="1190625"/>
+          </a:xfrm>
+          <a:prstGeom prst="rect">
+            <a:avLst/>
+          </a:prstGeom>
+          <a:noFill/>
+          <a:ln/>
+        </p:spPr>
+        <p:txBody>
+          <a:bodyPr wrap="square" lIns="0" tIns="0" rIns="0" bIns="0" anchor="ctr"/>
+          <a:lstStyle/>
+          <a:p>
+            <a:pPr/>
+            <a:r>
+              <a:rPr sz="8400" b="1">
                 <a:solidFill>
                   <a:srgbClr val="1E1A1C"/>
                 </a:solidFill>
@@ -607,7 +631,7 @@
             </a:r>
             <a:pPr/>
             <a:r>
-              <a:rPr sz="5100" b="1">
+              <a:rPr sz="4800" b="1">
                 <a:solidFill>
                   <a:srgbClr val="1E1A1C"/>
                 </a:solidFill>
@@ -621,28 +645,28 @@
       </p:sp>
       <p:sp>
         <p:nvSpPr>
-          <p:cNvPr id="6" name=""/>
-          <p:cNvSpPr txBox="1"/>
-          <p:nvPr/>
-        </p:nvSpPr>
-        <p:spPr>
-          <a:xfrm>
-            <a:off x="2247900" y="3048000"/>
-            <a:ext cx="2352675" cy="942975"/>
-          </a:xfrm>
-          <a:prstGeom prst="rect">
-            <a:avLst/>
-          </a:prstGeom>
-          <a:noFill/>
-          <a:ln/>
-        </p:spPr>
-        <p:txBody>
-          <a:bodyPr wrap="square" lIns="0" tIns="0" rIns="0" bIns="0" anchor="ctr"/>
-          <a:lstStyle/>
-          <a:p>
-            <a:pPr/>
-            <a:r>
-              <a:rPr sz="5100" b="1">
+          <p:cNvPr id="7" name=""/>
+          <p:cNvSpPr txBox="1"/>
+          <p:nvPr/>
+        </p:nvSpPr>
+        <p:spPr>
+          <a:xfrm>
+            <a:off x="2162175" y="2028825"/>
+            <a:ext cx="2447925" cy="876300"/>
+          </a:xfrm>
+          <a:prstGeom prst="rect">
+            <a:avLst/>
+          </a:prstGeom>
+          <a:noFill/>
+          <a:ln/>
+        </p:spPr>
+        <p:txBody>
+          <a:bodyPr wrap="square" lIns="0" tIns="0" rIns="0" bIns="0" anchor="ctr"/>
+          <a:lstStyle/>
+          <a:p>
+            <a:pPr/>
+            <a:r>
+              <a:rPr sz="4800" b="1">
                 <a:solidFill>
                   <a:srgbClr val="1E1A1C"/>
                 </a:solidFill>
@@ -659,13 +683,13 @@
       </p:sp>
       <p:sp>
         <p:nvSpPr>
-          <p:cNvPr id="7" name=""/>
+          <p:cNvPr id="8" name=""/>
           <p:cNvSpPr/>
           <p:nvPr/>
         </p:nvSpPr>
         <p:spPr>
           <a:xfrm>
-            <a:off x="838200" y="4257675"/>
+            <a:off x="838200" y="3133725"/>
             <a:ext cx="3429000" cy="57150"/>
           </a:xfrm>
           <a:prstGeom prst="roundRect">
@@ -681,28 +705,28 @@
       </p:sp>
       <p:sp>
         <p:nvSpPr>
-          <p:cNvPr id="8" name=""/>
-          <p:cNvSpPr txBox="1"/>
-          <p:nvPr/>
-        </p:nvSpPr>
-        <p:spPr>
-          <a:xfrm>
-            <a:off x="838200" y="4610100"/>
-            <a:ext cx="3552825" cy="285750"/>
-          </a:xfrm>
-          <a:prstGeom prst="rect">
-            <a:avLst/>
-          </a:prstGeom>
-          <a:noFill/>
-          <a:ln/>
-        </p:spPr>
-        <p:txBody>
-          <a:bodyPr wrap="square" lIns="0" tIns="0" rIns="0" bIns="0" anchor="ctr"/>
-          <a:lstStyle/>
-          <a:p>
-            <a:pPr/>
-            <a:r>
-              <a:rPr sz="1600" b="1">
+          <p:cNvPr id="9" name=""/>
+          <p:cNvSpPr txBox="1"/>
+          <p:nvPr/>
+        </p:nvSpPr>
+        <p:spPr>
+          <a:xfrm>
+            <a:off x="838200" y="3419475"/>
+            <a:ext cx="3619500" cy="276225"/>
+          </a:xfrm>
+          <a:prstGeom prst="rect">
+            <a:avLst/>
+          </a:prstGeom>
+          <a:noFill/>
+          <a:ln/>
+        </p:spPr>
+        <p:txBody>
+          <a:bodyPr wrap="square" lIns="0" tIns="0" rIns="0" bIns="0" anchor="ctr"/>
+          <a:lstStyle/>
+          <a:p>
+            <a:pPr/>
+            <a:r>
+              <a:rPr sz="1500" b="1">
                 <a:solidFill>
                   <a:srgbClr val="574D52"/>
                 </a:solidFill>
@@ -716,28 +740,28 @@
       </p:sp>
       <p:sp>
         <p:nvSpPr>
-          <p:cNvPr id="9" name=""/>
-          <p:cNvSpPr txBox="1"/>
-          <p:nvPr/>
-        </p:nvSpPr>
-        <p:spPr>
-          <a:xfrm>
-            <a:off x="838200" y="4962525"/>
-            <a:ext cx="4029075" cy="285750"/>
-          </a:xfrm>
-          <a:prstGeom prst="rect">
-            <a:avLst/>
-          </a:prstGeom>
-          <a:noFill/>
-          <a:ln/>
-        </p:spPr>
-        <p:txBody>
-          <a:bodyPr wrap="square" lIns="0" tIns="0" rIns="0" bIns="0" anchor="ctr"/>
-          <a:lstStyle/>
-          <a:p>
-            <a:pPr/>
-            <a:r>
-              <a:rPr sz="1600" b="1">
+          <p:cNvPr id="10" name=""/>
+          <p:cNvSpPr txBox="1"/>
+          <p:nvPr/>
+        </p:nvSpPr>
+        <p:spPr>
+          <a:xfrm>
+            <a:off x="838200" y="3743325"/>
+            <a:ext cx="4067175" cy="276225"/>
+          </a:xfrm>
+          <a:prstGeom prst="rect">
+            <a:avLst/>
+          </a:prstGeom>
+          <a:noFill/>
+          <a:ln/>
+        </p:spPr>
+        <p:txBody>
+          <a:bodyPr wrap="square" lIns="0" tIns="0" rIns="0" bIns="0" anchor="ctr"/>
+          <a:lstStyle/>
+          <a:p>
+            <a:pPr/>
+            <a:r>
+              <a:rPr sz="1500" b="1">
                 <a:solidFill>
                   <a:srgbClr val="574D52"/>
                 </a:solidFill>
@@ -751,28 +775,28 @@
       </p:sp>
       <p:sp>
         <p:nvSpPr>
-          <p:cNvPr id="10" name=""/>
-          <p:cNvSpPr txBox="1"/>
-          <p:nvPr/>
-        </p:nvSpPr>
-        <p:spPr>
-          <a:xfrm>
-            <a:off x="7715250" y="990600"/>
-            <a:ext cx="1285875" cy="161925"/>
-          </a:xfrm>
-          <a:prstGeom prst="rect">
-            <a:avLst/>
-          </a:prstGeom>
-          <a:noFill/>
-          <a:ln/>
-        </p:spPr>
-        <p:txBody>
-          <a:bodyPr wrap="square" lIns="0" tIns="0" rIns="0" bIns="0" anchor="ctr"/>
-          <a:lstStyle/>
-          <a:p>
-            <a:pPr/>
-            <a:r>
-              <a:rPr sz="1150" b="1">
+          <p:cNvPr id="11" name=""/>
+          <p:cNvSpPr txBox="1"/>
+          <p:nvPr/>
+        </p:nvSpPr>
+        <p:spPr>
+          <a:xfrm>
+            <a:off x="838200" y="4333875"/>
+            <a:ext cx="1428750" cy="152400"/>
+          </a:xfrm>
+          <a:prstGeom prst="rect">
+            <a:avLst/>
+          </a:prstGeom>
+          <a:noFill/>
+          <a:ln/>
+        </p:spPr>
+        <p:txBody>
+          <a:bodyPr wrap="square" lIns="0" tIns="0" rIns="0" bIns="0" anchor="ctr"/>
+          <a:lstStyle/>
+          <a:p>
+            <a:pPr/>
+            <a:r>
+              <a:rPr sz="1050" b="1">
                 <a:solidFill>
                   <a:srgbClr val="9C9196"/>
                 </a:solidFill>
@@ -786,89 +810,23 @@
       </p:sp>
       <p:sp>
         <p:nvSpPr>
-          <p:cNvPr id="11" name=""/>
-          <p:cNvSpPr txBox="1"/>
-          <p:nvPr/>
-        </p:nvSpPr>
-        <p:spPr>
-          <a:xfrm>
-            <a:off x="8058150" y="1352550"/>
-            <a:ext cx="1666875" cy="238125"/>
-          </a:xfrm>
-          <a:prstGeom prst="rect">
-            <a:avLst/>
-          </a:prstGeom>
-          <a:noFill/>
-          <a:ln/>
-        </p:spPr>
-        <p:txBody>
-          <a:bodyPr wrap="square" lIns="0" tIns="0" rIns="0" bIns="0" anchor="ctr"/>
-          <a:lstStyle/>
-          <a:p>
-            <a:pPr/>
-            <a:r>
-              <a:rPr sz="1650" b="1">
-                <a:solidFill>
-                  <a:srgbClr val="1E1A1C"/>
-                </a:solidFill>
-                <a:latin typeface="Arial"/>
-                <a:ea typeface="Arial"/>
-              </a:rPr>
-              <a:t>I feel like ~ing</a:t>
-            </a:r>
-          </a:p>
-        </p:txBody>
-      </p:sp>
-      <p:sp>
-        <p:nvSpPr>
           <p:cNvPr id="12" name=""/>
-          <p:cNvSpPr txBox="1"/>
-          <p:nvPr/>
-        </p:nvSpPr>
-        <p:spPr>
-          <a:xfrm>
-            <a:off x="7715250" y="1352550"/>
-            <a:ext cx="247650" cy="238125"/>
-          </a:xfrm>
-          <a:prstGeom prst="rect">
-            <a:avLst/>
-          </a:prstGeom>
-          <a:noFill/>
-          <a:ln/>
-        </p:spPr>
-        <p:txBody>
-          <a:bodyPr wrap="square" lIns="0" tIns="0" rIns="0" bIns="0" anchor="ctr"/>
-          <a:lstStyle/>
-          <a:p>
-            <a:pPr/>
-            <a:r>
-              <a:rPr sz="1650" b="1">
-                <a:solidFill>
-                  <a:srgbClr val="C8417F"/>
-                </a:solidFill>
-                <a:latin typeface="Arial"/>
-                <a:ea typeface="Arial"/>
-              </a:rPr>
-              <a:t>1</a:t>
-            </a:r>
-          </a:p>
-        </p:txBody>
-      </p:sp>
-      <p:sp>
-        <p:nvSpPr>
-          <p:cNvPr id="13" name=""/>
           <p:cNvSpPr/>
           <p:nvPr/>
         </p:nvSpPr>
         <p:spPr>
           <a:xfrm>
-            <a:off x="7715250" y="1714500"/>
-            <a:ext cx="3638550" cy="0"/>
-          </a:xfrm>
-          <a:prstGeom prst="line">
-            <a:avLst/>
-          </a:prstGeom>
-          <a:noFill/>
+            <a:off x="838200" y="4581525"/>
+            <a:ext cx="2200275" cy="361950"/>
+          </a:xfrm>
+          <a:prstGeom prst="roundRect">
+            <a:avLst>
+              <a:gd name="adj" fmla="val 26316"/>
+            </a:avLst>
+          </a:prstGeom>
+          <a:solidFill>
+            <a:srgbClr val="FFFFFF"/>
+          </a:solidFill>
           <a:ln w="19050">
             <a:solidFill>
               <a:srgbClr val="F2D5E1"/>
@@ -879,35 +837,70 @@
       </p:sp>
       <p:sp>
         <p:nvSpPr>
+          <p:cNvPr id="13" name=""/>
+          <p:cNvSpPr txBox="1"/>
+          <p:nvPr/>
+        </p:nvSpPr>
+        <p:spPr>
+          <a:xfrm>
+            <a:off x="1152525" y="4676775"/>
+            <a:ext cx="1457325" cy="161925"/>
+          </a:xfrm>
+          <a:prstGeom prst="rect">
+            <a:avLst/>
+          </a:prstGeom>
+          <a:noFill/>
+          <a:ln/>
+        </p:spPr>
+        <p:txBody>
+          <a:bodyPr wrap="square" lIns="0" tIns="0" rIns="0" bIns="0" anchor="ctr"/>
+          <a:lstStyle/>
+          <a:p>
+            <a:pPr/>
+            <a:r>
+              <a:rPr sz="1200" b="1">
+                <a:solidFill>
+                  <a:srgbClr val="1E1A1C"/>
+                </a:solidFill>
+                <a:latin typeface="Arial"/>
+                <a:ea typeface="Arial"/>
+              </a:rPr>
+              <a:t>I feel like ~ing</a:t>
+            </a:r>
+          </a:p>
+        </p:txBody>
+      </p:sp>
+      <p:sp>
+        <p:nvSpPr>
           <p:cNvPr id="14" name=""/>
           <p:cNvSpPr txBox="1"/>
           <p:nvPr/>
         </p:nvSpPr>
         <p:spPr>
           <a:xfrm>
-            <a:off x="8058150" y="1828800"/>
-            <a:ext cx="1285875" cy="238125"/>
-          </a:xfrm>
-          <a:prstGeom prst="rect">
-            <a:avLst/>
-          </a:prstGeom>
-          <a:noFill/>
-          <a:ln/>
-        </p:spPr>
-        <p:txBody>
-          <a:bodyPr wrap="square" lIns="0" tIns="0" rIns="0" bIns="0" anchor="ctr"/>
-          <a:lstStyle/>
-          <a:p>
-            <a:pPr/>
-            <a:r>
-              <a:rPr sz="1650" b="1">
-                <a:solidFill>
-                  <a:srgbClr val="1E1A1C"/>
-                </a:solidFill>
-                <a:latin typeface="Arial"/>
-                <a:ea typeface="Arial"/>
-              </a:rPr>
-              <a:t>I used to ~</a:t>
+            <a:off x="971550" y="4676775"/>
+            <a:ext cx="438150" cy="161925"/>
+          </a:xfrm>
+          <a:prstGeom prst="rect">
+            <a:avLst/>
+          </a:prstGeom>
+          <a:noFill/>
+          <a:ln/>
+        </p:spPr>
+        <p:txBody>
+          <a:bodyPr wrap="square" lIns="0" tIns="0" rIns="0" bIns="0" anchor="ctr"/>
+          <a:lstStyle/>
+          <a:p>
+            <a:pPr/>
+            <a:r>
+              <a:rPr sz="1200" b="1">
+                <a:solidFill>
+                  <a:srgbClr val="C8417F"/>
+                </a:solidFill>
+                <a:latin typeface="Arial"/>
+                <a:ea typeface="Arial"/>
+              </a:rPr>
+              <a:t>1</a:t>
             </a:r>
           </a:p>
         </p:txBody>
@@ -915,53 +908,22 @@
       <p:sp>
         <p:nvSpPr>
           <p:cNvPr id="15" name=""/>
-          <p:cNvSpPr txBox="1"/>
-          <p:nvPr/>
-        </p:nvSpPr>
-        <p:spPr>
-          <a:xfrm>
-            <a:off x="7715250" y="1828800"/>
-            <a:ext cx="247650" cy="238125"/>
-          </a:xfrm>
-          <a:prstGeom prst="rect">
-            <a:avLst/>
-          </a:prstGeom>
-          <a:noFill/>
-          <a:ln/>
-        </p:spPr>
-        <p:txBody>
-          <a:bodyPr wrap="square" lIns="0" tIns="0" rIns="0" bIns="0" anchor="ctr"/>
-          <a:lstStyle/>
-          <a:p>
-            <a:pPr/>
-            <a:r>
-              <a:rPr sz="1650" b="1">
-                <a:solidFill>
-                  <a:srgbClr val="C8417F"/>
-                </a:solidFill>
-                <a:latin typeface="Arial"/>
-                <a:ea typeface="Arial"/>
-              </a:rPr>
-              <a:t>2</a:t>
-            </a:r>
-          </a:p>
-        </p:txBody>
-      </p:sp>
-      <p:sp>
-        <p:nvSpPr>
-          <p:cNvPr id="16" name=""/>
           <p:cNvSpPr/>
           <p:nvPr/>
         </p:nvSpPr>
         <p:spPr>
           <a:xfrm>
-            <a:off x="7715250" y="2190750"/>
-            <a:ext cx="3638550" cy="0"/>
-          </a:xfrm>
-          <a:prstGeom prst="line">
-            <a:avLst/>
-          </a:prstGeom>
-          <a:noFill/>
+            <a:off x="3133725" y="4581525"/>
+            <a:ext cx="2200275" cy="361950"/>
+          </a:xfrm>
+          <a:prstGeom prst="roundRect">
+            <a:avLst>
+              <a:gd name="adj" fmla="val 26316"/>
+            </a:avLst>
+          </a:prstGeom>
+          <a:solidFill>
+            <a:srgbClr val="FFFFFF"/>
+          </a:solidFill>
           <a:ln w="19050">
             <a:solidFill>
               <a:srgbClr val="F2D5E1"/>
@@ -972,35 +934,70 @@
       </p:sp>
       <p:sp>
         <p:nvSpPr>
+          <p:cNvPr id="16" name=""/>
+          <p:cNvSpPr txBox="1"/>
+          <p:nvPr/>
+        </p:nvSpPr>
+        <p:spPr>
+          <a:xfrm>
+            <a:off x="3448050" y="4676775"/>
+            <a:ext cx="1200150" cy="161925"/>
+          </a:xfrm>
+          <a:prstGeom prst="rect">
+            <a:avLst/>
+          </a:prstGeom>
+          <a:noFill/>
+          <a:ln/>
+        </p:spPr>
+        <p:txBody>
+          <a:bodyPr wrap="square" lIns="0" tIns="0" rIns="0" bIns="0" anchor="ctr"/>
+          <a:lstStyle/>
+          <a:p>
+            <a:pPr/>
+            <a:r>
+              <a:rPr sz="1200" b="1">
+                <a:solidFill>
+                  <a:srgbClr val="1E1A1C"/>
+                </a:solidFill>
+                <a:latin typeface="Arial"/>
+                <a:ea typeface="Arial"/>
+              </a:rPr>
+              <a:t>I used to ~</a:t>
+            </a:r>
+          </a:p>
+        </p:txBody>
+      </p:sp>
+      <p:sp>
+        <p:nvSpPr>
           <p:cNvPr id="17" name=""/>
           <p:cNvSpPr txBox="1"/>
           <p:nvPr/>
         </p:nvSpPr>
         <p:spPr>
           <a:xfrm>
-            <a:off x="8058150" y="2305050"/>
-            <a:ext cx="1819275" cy="238125"/>
-          </a:xfrm>
-          <a:prstGeom prst="rect">
-            <a:avLst/>
-          </a:prstGeom>
-          <a:noFill/>
-          <a:ln/>
-        </p:spPr>
-        <p:txBody>
-          <a:bodyPr wrap="square" lIns="0" tIns="0" rIns="0" bIns="0" anchor="ctr"/>
-          <a:lstStyle/>
-          <a:p>
-            <a:pPr/>
-            <a:r>
-              <a:rPr sz="1650" b="1">
-                <a:solidFill>
-                  <a:srgbClr val="1E1A1C"/>
-                </a:solidFill>
-                <a:latin typeface="Arial"/>
-                <a:ea typeface="Arial"/>
-              </a:rPr>
-              <a:t>I should have ~</a:t>
+            <a:off x="3267075" y="4676775"/>
+            <a:ext cx="438150" cy="161925"/>
+          </a:xfrm>
+          <a:prstGeom prst="rect">
+            <a:avLst/>
+          </a:prstGeom>
+          <a:noFill/>
+          <a:ln/>
+        </p:spPr>
+        <p:txBody>
+          <a:bodyPr wrap="square" lIns="0" tIns="0" rIns="0" bIns="0" anchor="ctr"/>
+          <a:lstStyle/>
+          <a:p>
+            <a:pPr/>
+            <a:r>
+              <a:rPr sz="1200" b="1">
+                <a:solidFill>
+                  <a:srgbClr val="C8417F"/>
+                </a:solidFill>
+                <a:latin typeface="Arial"/>
+                <a:ea typeface="Arial"/>
+              </a:rPr>
+              <a:t>2</a:t>
             </a:r>
           </a:p>
         </p:txBody>
@@ -1008,53 +1005,22 @@
       <p:sp>
         <p:nvSpPr>
           <p:cNvPr id="18" name=""/>
-          <p:cNvSpPr txBox="1"/>
-          <p:nvPr/>
-        </p:nvSpPr>
-        <p:spPr>
-          <a:xfrm>
-            <a:off x="7715250" y="2305050"/>
-            <a:ext cx="247650" cy="238125"/>
-          </a:xfrm>
-          <a:prstGeom prst="rect">
-            <a:avLst/>
-          </a:prstGeom>
-          <a:noFill/>
-          <a:ln/>
-        </p:spPr>
-        <p:txBody>
-          <a:bodyPr wrap="square" lIns="0" tIns="0" rIns="0" bIns="0" anchor="ctr"/>
-          <a:lstStyle/>
-          <a:p>
-            <a:pPr/>
-            <a:r>
-              <a:rPr sz="1650" b="1">
-                <a:solidFill>
-                  <a:srgbClr val="C8417F"/>
-                </a:solidFill>
-                <a:latin typeface="Arial"/>
-                <a:ea typeface="Arial"/>
-              </a:rPr>
-              <a:t>3</a:t>
-            </a:r>
-          </a:p>
-        </p:txBody>
-      </p:sp>
-      <p:sp>
-        <p:nvSpPr>
-          <p:cNvPr id="19" name=""/>
           <p:cNvSpPr/>
           <p:nvPr/>
         </p:nvSpPr>
         <p:spPr>
           <a:xfrm>
-            <a:off x="7715250" y="2667000"/>
-            <a:ext cx="3638550" cy="0"/>
-          </a:xfrm>
-          <a:prstGeom prst="line">
-            <a:avLst/>
-          </a:prstGeom>
-          <a:noFill/>
+            <a:off x="5419725" y="4581525"/>
+            <a:ext cx="2200275" cy="361950"/>
+          </a:xfrm>
+          <a:prstGeom prst="roundRect">
+            <a:avLst>
+              <a:gd name="adj" fmla="val 26316"/>
+            </a:avLst>
+          </a:prstGeom>
+          <a:solidFill>
+            <a:srgbClr val="FFFFFF"/>
+          </a:solidFill>
           <a:ln w="19050">
             <a:solidFill>
               <a:srgbClr val="F2D5E1"/>
@@ -1065,35 +1031,70 @@
       </p:sp>
       <p:sp>
         <p:nvSpPr>
+          <p:cNvPr id="19" name=""/>
+          <p:cNvSpPr txBox="1"/>
+          <p:nvPr/>
+        </p:nvSpPr>
+        <p:spPr>
+          <a:xfrm>
+            <a:off x="5734050" y="4676775"/>
+            <a:ext cx="1600200" cy="161925"/>
+          </a:xfrm>
+          <a:prstGeom prst="rect">
+            <a:avLst/>
+          </a:prstGeom>
+          <a:noFill/>
+          <a:ln/>
+        </p:spPr>
+        <p:txBody>
+          <a:bodyPr wrap="square" lIns="0" tIns="0" rIns="0" bIns="0" anchor="ctr"/>
+          <a:lstStyle/>
+          <a:p>
+            <a:pPr/>
+            <a:r>
+              <a:rPr sz="1200" b="1">
+                <a:solidFill>
+                  <a:srgbClr val="1E1A1C"/>
+                </a:solidFill>
+                <a:latin typeface="Arial"/>
+                <a:ea typeface="Arial"/>
+              </a:rPr>
+              <a:t>I should have ~</a:t>
+            </a:r>
+          </a:p>
+        </p:txBody>
+      </p:sp>
+      <p:sp>
+        <p:nvSpPr>
           <p:cNvPr id="20" name=""/>
           <p:cNvSpPr txBox="1"/>
           <p:nvPr/>
         </p:nvSpPr>
         <p:spPr>
           <a:xfrm>
-            <a:off x="8058150" y="2781300"/>
-            <a:ext cx="2066925" cy="238125"/>
-          </a:xfrm>
-          <a:prstGeom prst="rect">
-            <a:avLst/>
-          </a:prstGeom>
-          <a:noFill/>
-          <a:ln/>
-        </p:spPr>
-        <p:txBody>
-          <a:bodyPr wrap="square" lIns="0" tIns="0" rIns="0" bIns="0" anchor="ctr"/>
-          <a:lstStyle/>
-          <a:p>
-            <a:pPr/>
-            <a:r>
-              <a:rPr sz="1650" b="1">
-                <a:solidFill>
-                  <a:srgbClr val="1E1A1C"/>
-                </a:solidFill>
-                <a:latin typeface="Arial"/>
-                <a:ea typeface="Arial"/>
-              </a:rPr>
-              <a:t>Do you wanna ~?</a:t>
+            <a:off x="5553075" y="4676775"/>
+            <a:ext cx="438150" cy="161925"/>
+          </a:xfrm>
+          <a:prstGeom prst="rect">
+            <a:avLst/>
+          </a:prstGeom>
+          <a:noFill/>
+          <a:ln/>
+        </p:spPr>
+        <p:txBody>
+          <a:bodyPr wrap="square" lIns="0" tIns="0" rIns="0" bIns="0" anchor="ctr"/>
+          <a:lstStyle/>
+          <a:p>
+            <a:pPr/>
+            <a:r>
+              <a:rPr sz="1200" b="1">
+                <a:solidFill>
+                  <a:srgbClr val="C8417F"/>
+                </a:solidFill>
+                <a:latin typeface="Arial"/>
+                <a:ea typeface="Arial"/>
+              </a:rPr>
+              <a:t>3</a:t>
             </a:r>
           </a:p>
         </p:txBody>
@@ -1101,53 +1102,22 @@
       <p:sp>
         <p:nvSpPr>
           <p:cNvPr id="21" name=""/>
-          <p:cNvSpPr txBox="1"/>
-          <p:nvPr/>
-        </p:nvSpPr>
-        <p:spPr>
-          <a:xfrm>
-            <a:off x="7715250" y="2781300"/>
-            <a:ext cx="247650" cy="238125"/>
-          </a:xfrm>
-          <a:prstGeom prst="rect">
-            <a:avLst/>
-          </a:prstGeom>
-          <a:noFill/>
-          <a:ln/>
-        </p:spPr>
-        <p:txBody>
-          <a:bodyPr wrap="square" lIns="0" tIns="0" rIns="0" bIns="0" anchor="ctr"/>
-          <a:lstStyle/>
-          <a:p>
-            <a:pPr/>
-            <a:r>
-              <a:rPr sz="1650" b="1">
-                <a:solidFill>
-                  <a:srgbClr val="C8417F"/>
-                </a:solidFill>
-                <a:latin typeface="Arial"/>
-                <a:ea typeface="Arial"/>
-              </a:rPr>
-              <a:t>4</a:t>
-            </a:r>
-          </a:p>
-        </p:txBody>
-      </p:sp>
-      <p:sp>
-        <p:nvSpPr>
-          <p:cNvPr id="22" name=""/>
           <p:cNvSpPr/>
           <p:nvPr/>
         </p:nvSpPr>
         <p:spPr>
           <a:xfrm>
-            <a:off x="7715250" y="3143250"/>
-            <a:ext cx="3638550" cy="0"/>
-          </a:xfrm>
-          <a:prstGeom prst="line">
-            <a:avLst/>
-          </a:prstGeom>
-          <a:noFill/>
+            <a:off x="838200" y="5019675"/>
+            <a:ext cx="2200275" cy="361950"/>
+          </a:xfrm>
+          <a:prstGeom prst="roundRect">
+            <a:avLst>
+              <a:gd name="adj" fmla="val 26316"/>
+            </a:avLst>
+          </a:prstGeom>
+          <a:solidFill>
+            <a:srgbClr val="FFFFFF"/>
+          </a:solidFill>
           <a:ln w="19050">
             <a:solidFill>
               <a:srgbClr val="F2D5E1"/>
@@ -1158,35 +1128,70 @@
       </p:sp>
       <p:sp>
         <p:nvSpPr>
+          <p:cNvPr id="22" name=""/>
+          <p:cNvSpPr txBox="1"/>
+          <p:nvPr/>
+        </p:nvSpPr>
+        <p:spPr>
+          <a:xfrm>
+            <a:off x="1152525" y="5114925"/>
+            <a:ext cx="1790700" cy="161925"/>
+          </a:xfrm>
+          <a:prstGeom prst="rect">
+            <a:avLst/>
+          </a:prstGeom>
+          <a:noFill/>
+          <a:ln/>
+        </p:spPr>
+        <p:txBody>
+          <a:bodyPr wrap="square" lIns="0" tIns="0" rIns="0" bIns="0" anchor="ctr"/>
+          <a:lstStyle/>
+          <a:p>
+            <a:pPr/>
+            <a:r>
+              <a:rPr sz="1200" b="1">
+                <a:solidFill>
+                  <a:srgbClr val="1E1A1C"/>
+                </a:solidFill>
+                <a:latin typeface="Arial"/>
+                <a:ea typeface="Arial"/>
+              </a:rPr>
+              <a:t>Do you wanna ~?</a:t>
+            </a:r>
+          </a:p>
+        </p:txBody>
+      </p:sp>
+      <p:sp>
+        <p:nvSpPr>
           <p:cNvPr id="23" name=""/>
           <p:cNvSpPr txBox="1"/>
           <p:nvPr/>
         </p:nvSpPr>
         <p:spPr>
           <a:xfrm>
-            <a:off x="8058150" y="3257550"/>
-            <a:ext cx="1943100" cy="238125"/>
-          </a:xfrm>
-          <a:prstGeom prst="rect">
-            <a:avLst/>
-          </a:prstGeom>
-          <a:noFill/>
-          <a:ln/>
-        </p:spPr>
-        <p:txBody>
-          <a:bodyPr wrap="square" lIns="0" tIns="0" rIns="0" bIns="0" anchor="ctr"/>
-          <a:lstStyle/>
-          <a:p>
-            <a:pPr/>
-            <a:r>
-              <a:rPr sz="1650" b="1">
-                <a:solidFill>
-                  <a:srgbClr val="1E1A1C"/>
-                </a:solidFill>
-                <a:latin typeface="Arial"/>
-                <a:ea typeface="Arial"/>
-              </a:rPr>
-              <a:t>I'm looking for ~</a:t>
+            <a:off x="971550" y="5114925"/>
+            <a:ext cx="438150" cy="161925"/>
+          </a:xfrm>
+          <a:prstGeom prst="rect">
+            <a:avLst/>
+          </a:prstGeom>
+          <a:noFill/>
+          <a:ln/>
+        </p:spPr>
+        <p:txBody>
+          <a:bodyPr wrap="square" lIns="0" tIns="0" rIns="0" bIns="0" anchor="ctr"/>
+          <a:lstStyle/>
+          <a:p>
+            <a:pPr/>
+            <a:r>
+              <a:rPr sz="1200" b="1">
+                <a:solidFill>
+                  <a:srgbClr val="C8417F"/>
+                </a:solidFill>
+                <a:latin typeface="Arial"/>
+                <a:ea typeface="Arial"/>
+              </a:rPr>
+              <a:t>4</a:t>
             </a:r>
           </a:p>
         </p:txBody>
@@ -1194,53 +1199,22 @@
       <p:sp>
         <p:nvSpPr>
           <p:cNvPr id="24" name=""/>
-          <p:cNvSpPr txBox="1"/>
-          <p:nvPr/>
-        </p:nvSpPr>
-        <p:spPr>
-          <a:xfrm>
-            <a:off x="7715250" y="3257550"/>
-            <a:ext cx="247650" cy="238125"/>
-          </a:xfrm>
-          <a:prstGeom prst="rect">
-            <a:avLst/>
-          </a:prstGeom>
-          <a:noFill/>
-          <a:ln/>
-        </p:spPr>
-        <p:txBody>
-          <a:bodyPr wrap="square" lIns="0" tIns="0" rIns="0" bIns="0" anchor="ctr"/>
-          <a:lstStyle/>
-          <a:p>
-            <a:pPr/>
-            <a:r>
-              <a:rPr sz="1650" b="1">
-                <a:solidFill>
-                  <a:srgbClr val="C8417F"/>
-                </a:solidFill>
-                <a:latin typeface="Arial"/>
-                <a:ea typeface="Arial"/>
-              </a:rPr>
-              <a:t>5</a:t>
-            </a:r>
-          </a:p>
-        </p:txBody>
-      </p:sp>
-      <p:sp>
-        <p:nvSpPr>
-          <p:cNvPr id="25" name=""/>
           <p:cNvSpPr/>
           <p:nvPr/>
         </p:nvSpPr>
         <p:spPr>
           <a:xfrm>
-            <a:off x="7715250" y="3619500"/>
-            <a:ext cx="3638550" cy="0"/>
-          </a:xfrm>
-          <a:prstGeom prst="line">
-            <a:avLst/>
-          </a:prstGeom>
-          <a:noFill/>
+            <a:off x="3133725" y="5019675"/>
+            <a:ext cx="2200275" cy="361950"/>
+          </a:xfrm>
+          <a:prstGeom prst="roundRect">
+            <a:avLst>
+              <a:gd name="adj" fmla="val 26316"/>
+            </a:avLst>
+          </a:prstGeom>
+          <a:solidFill>
+            <a:srgbClr val="FFFFFF"/>
+          </a:solidFill>
           <a:ln w="19050">
             <a:solidFill>
               <a:srgbClr val="F2D5E1"/>
@@ -1251,35 +1225,70 @@
       </p:sp>
       <p:sp>
         <p:nvSpPr>
+          <p:cNvPr id="25" name=""/>
+          <p:cNvSpPr txBox="1"/>
+          <p:nvPr/>
+        </p:nvSpPr>
+        <p:spPr>
+          <a:xfrm>
+            <a:off x="3448050" y="5114925"/>
+            <a:ext cx="1666875" cy="161925"/>
+          </a:xfrm>
+          <a:prstGeom prst="rect">
+            <a:avLst/>
+          </a:prstGeom>
+          <a:noFill/>
+          <a:ln/>
+        </p:spPr>
+        <p:txBody>
+          <a:bodyPr wrap="square" lIns="0" tIns="0" rIns="0" bIns="0" anchor="ctr"/>
+          <a:lstStyle/>
+          <a:p>
+            <a:pPr/>
+            <a:r>
+              <a:rPr sz="1200" b="1">
+                <a:solidFill>
+                  <a:srgbClr val="1E1A1C"/>
+                </a:solidFill>
+                <a:latin typeface="Arial"/>
+                <a:ea typeface="Arial"/>
+              </a:rPr>
+              <a:t>I'm looking for ~</a:t>
+            </a:r>
+          </a:p>
+        </p:txBody>
+      </p:sp>
+      <p:sp>
+        <p:nvSpPr>
           <p:cNvPr id="26" name=""/>
           <p:cNvSpPr txBox="1"/>
           <p:nvPr/>
         </p:nvSpPr>
         <p:spPr>
           <a:xfrm>
-            <a:off x="8058150" y="3733800"/>
-            <a:ext cx="1104900" cy="238125"/>
-          </a:xfrm>
-          <a:prstGeom prst="rect">
-            <a:avLst/>
-          </a:prstGeom>
-          <a:noFill/>
-          <a:ln/>
-        </p:spPr>
-        <p:txBody>
-          <a:bodyPr wrap="square" lIns="0" tIns="0" rIns="0" bIns="0" anchor="ctr"/>
-          <a:lstStyle/>
-          <a:p>
-            <a:pPr/>
-            <a:r>
-              <a:rPr sz="1650" b="1">
-                <a:solidFill>
-                  <a:srgbClr val="1E1A1C"/>
-                </a:solidFill>
-                <a:latin typeface="Arial"/>
-                <a:ea typeface="Arial"/>
-              </a:rPr>
-              <a:t>I might ~</a:t>
+            <a:off x="3267075" y="5114925"/>
+            <a:ext cx="438150" cy="161925"/>
+          </a:xfrm>
+          <a:prstGeom prst="rect">
+            <a:avLst/>
+          </a:prstGeom>
+          <a:noFill/>
+          <a:ln/>
+        </p:spPr>
+        <p:txBody>
+          <a:bodyPr wrap="square" lIns="0" tIns="0" rIns="0" bIns="0" anchor="ctr"/>
+          <a:lstStyle/>
+          <a:p>
+            <a:pPr/>
+            <a:r>
+              <a:rPr sz="1200" b="1">
+                <a:solidFill>
+                  <a:srgbClr val="C8417F"/>
+                </a:solidFill>
+                <a:latin typeface="Arial"/>
+                <a:ea typeface="Arial"/>
+              </a:rPr>
+              <a:t>5</a:t>
             </a:r>
           </a:p>
         </p:txBody>
@@ -1287,53 +1296,22 @@
       <p:sp>
         <p:nvSpPr>
           <p:cNvPr id="27" name=""/>
-          <p:cNvSpPr txBox="1"/>
-          <p:nvPr/>
-        </p:nvSpPr>
-        <p:spPr>
-          <a:xfrm>
-            <a:off x="7715250" y="3733800"/>
-            <a:ext cx="247650" cy="238125"/>
-          </a:xfrm>
-          <a:prstGeom prst="rect">
-            <a:avLst/>
-          </a:prstGeom>
-          <a:noFill/>
-          <a:ln/>
-        </p:spPr>
-        <p:txBody>
-          <a:bodyPr wrap="square" lIns="0" tIns="0" rIns="0" bIns="0" anchor="ctr"/>
-          <a:lstStyle/>
-          <a:p>
-            <a:pPr/>
-            <a:r>
-              <a:rPr sz="1650" b="1">
-                <a:solidFill>
-                  <a:srgbClr val="C8417F"/>
-                </a:solidFill>
-                <a:latin typeface="Arial"/>
-                <a:ea typeface="Arial"/>
-              </a:rPr>
-              <a:t>6</a:t>
-            </a:r>
-          </a:p>
-        </p:txBody>
-      </p:sp>
-      <p:sp>
-        <p:nvSpPr>
-          <p:cNvPr id="28" name=""/>
           <p:cNvSpPr/>
           <p:nvPr/>
         </p:nvSpPr>
         <p:spPr>
           <a:xfrm>
-            <a:off x="7715250" y="4095750"/>
-            <a:ext cx="3638550" cy="0"/>
-          </a:xfrm>
-          <a:prstGeom prst="line">
-            <a:avLst/>
-          </a:prstGeom>
-          <a:noFill/>
+            <a:off x="5419725" y="5019675"/>
+            <a:ext cx="2200275" cy="361950"/>
+          </a:xfrm>
+          <a:prstGeom prst="roundRect">
+            <a:avLst>
+              <a:gd name="adj" fmla="val 26316"/>
+            </a:avLst>
+          </a:prstGeom>
+          <a:solidFill>
+            <a:srgbClr val="FFFFFF"/>
+          </a:solidFill>
           <a:ln w="19050">
             <a:solidFill>
               <a:srgbClr val="F2D5E1"/>
@@ -1344,35 +1322,70 @@
       </p:sp>
       <p:sp>
         <p:nvSpPr>
+          <p:cNvPr id="28" name=""/>
+          <p:cNvSpPr txBox="1"/>
+          <p:nvPr/>
+        </p:nvSpPr>
+        <p:spPr>
+          <a:xfrm>
+            <a:off x="5734050" y="5114925"/>
+            <a:ext cx="1047750" cy="161925"/>
+          </a:xfrm>
+          <a:prstGeom prst="rect">
+            <a:avLst/>
+          </a:prstGeom>
+          <a:noFill/>
+          <a:ln/>
+        </p:spPr>
+        <p:txBody>
+          <a:bodyPr wrap="square" lIns="0" tIns="0" rIns="0" bIns="0" anchor="ctr"/>
+          <a:lstStyle/>
+          <a:p>
+            <a:pPr/>
+            <a:r>
+              <a:rPr sz="1200" b="1">
+                <a:solidFill>
+                  <a:srgbClr val="1E1A1C"/>
+                </a:solidFill>
+                <a:latin typeface="Arial"/>
+                <a:ea typeface="Arial"/>
+              </a:rPr>
+              <a:t>I might ~</a:t>
+            </a:r>
+          </a:p>
+        </p:txBody>
+      </p:sp>
+      <p:sp>
+        <p:nvSpPr>
           <p:cNvPr id="29" name=""/>
           <p:cNvSpPr txBox="1"/>
           <p:nvPr/>
         </p:nvSpPr>
         <p:spPr>
           <a:xfrm>
-            <a:off x="8058150" y="4210050"/>
-            <a:ext cx="2238375" cy="238125"/>
-          </a:xfrm>
-          <a:prstGeom prst="rect">
-            <a:avLst/>
-          </a:prstGeom>
-          <a:noFill/>
-          <a:ln/>
-        </p:spPr>
-        <p:txBody>
-          <a:bodyPr wrap="square" lIns="0" tIns="0" rIns="0" bIns="0" anchor="ctr"/>
-          <a:lstStyle/>
-          <a:p>
-            <a:pPr/>
-            <a:r>
-              <a:rPr sz="1650" b="1">
-                <a:solidFill>
-                  <a:srgbClr val="1E1A1C"/>
-                </a:solidFill>
-                <a:latin typeface="Arial"/>
-                <a:ea typeface="Arial"/>
-              </a:rPr>
-              <a:t>Do you mind if I ~?</a:t>
+            <a:off x="5553075" y="5114925"/>
+            <a:ext cx="438150" cy="161925"/>
+          </a:xfrm>
+          <a:prstGeom prst="rect">
+            <a:avLst/>
+          </a:prstGeom>
+          <a:noFill/>
+          <a:ln/>
+        </p:spPr>
+        <p:txBody>
+          <a:bodyPr wrap="square" lIns="0" tIns="0" rIns="0" bIns="0" anchor="ctr"/>
+          <a:lstStyle/>
+          <a:p>
+            <a:pPr/>
+            <a:r>
+              <a:rPr sz="1200" b="1">
+                <a:solidFill>
+                  <a:srgbClr val="C8417F"/>
+                </a:solidFill>
+                <a:latin typeface="Arial"/>
+                <a:ea typeface="Arial"/>
+              </a:rPr>
+              <a:t>6</a:t>
             </a:r>
           </a:p>
         </p:txBody>
@@ -1380,53 +1393,22 @@
       <p:sp>
         <p:nvSpPr>
           <p:cNvPr id="30" name=""/>
-          <p:cNvSpPr txBox="1"/>
-          <p:nvPr/>
-        </p:nvSpPr>
-        <p:spPr>
-          <a:xfrm>
-            <a:off x="7715250" y="4210050"/>
-            <a:ext cx="247650" cy="238125"/>
-          </a:xfrm>
-          <a:prstGeom prst="rect">
-            <a:avLst/>
-          </a:prstGeom>
-          <a:noFill/>
-          <a:ln/>
-        </p:spPr>
-        <p:txBody>
-          <a:bodyPr wrap="square" lIns="0" tIns="0" rIns="0" bIns="0" anchor="ctr"/>
-          <a:lstStyle/>
-          <a:p>
-            <a:pPr/>
-            <a:r>
-              <a:rPr sz="1650" b="1">
-                <a:solidFill>
-                  <a:srgbClr val="C8417F"/>
-                </a:solidFill>
-                <a:latin typeface="Arial"/>
-                <a:ea typeface="Arial"/>
-              </a:rPr>
-              <a:t>7</a:t>
-            </a:r>
-          </a:p>
-        </p:txBody>
-      </p:sp>
-      <p:sp>
-        <p:nvSpPr>
-          <p:cNvPr id="31" name=""/>
           <p:cNvSpPr/>
           <p:nvPr/>
         </p:nvSpPr>
         <p:spPr>
           <a:xfrm>
-            <a:off x="7715250" y="4572000"/>
-            <a:ext cx="3638550" cy="0"/>
-          </a:xfrm>
-          <a:prstGeom prst="line">
-            <a:avLst/>
-          </a:prstGeom>
-          <a:noFill/>
+            <a:off x="838200" y="5457825"/>
+            <a:ext cx="2200275" cy="361950"/>
+          </a:xfrm>
+          <a:prstGeom prst="roundRect">
+            <a:avLst>
+              <a:gd name="adj" fmla="val 26316"/>
+            </a:avLst>
+          </a:prstGeom>
+          <a:solidFill>
+            <a:srgbClr val="FFFFFF"/>
+          </a:solidFill>
           <a:ln w="19050">
             <a:solidFill>
               <a:srgbClr val="F2D5E1"/>
@@ -1437,35 +1419,70 @@
       </p:sp>
       <p:sp>
         <p:nvSpPr>
+          <p:cNvPr id="31" name=""/>
+          <p:cNvSpPr txBox="1"/>
+          <p:nvPr/>
+        </p:nvSpPr>
+        <p:spPr>
+          <a:xfrm>
+            <a:off x="1152525" y="5553075"/>
+            <a:ext cx="1885950" cy="161925"/>
+          </a:xfrm>
+          <a:prstGeom prst="rect">
+            <a:avLst/>
+          </a:prstGeom>
+          <a:noFill/>
+          <a:ln/>
+        </p:spPr>
+        <p:txBody>
+          <a:bodyPr wrap="square" lIns="0" tIns="0" rIns="0" bIns="0" anchor="ctr"/>
+          <a:lstStyle/>
+          <a:p>
+            <a:pPr/>
+            <a:r>
+              <a:rPr sz="1200" b="1">
+                <a:solidFill>
+                  <a:srgbClr val="1E1A1C"/>
+                </a:solidFill>
+                <a:latin typeface="Arial"/>
+                <a:ea typeface="Arial"/>
+              </a:rPr>
+              <a:t>Do you mind if I ~?</a:t>
+            </a:r>
+          </a:p>
+        </p:txBody>
+      </p:sp>
+      <p:sp>
+        <p:nvSpPr>
           <p:cNvPr id="32" name=""/>
           <p:cNvSpPr txBox="1"/>
           <p:nvPr/>
         </p:nvSpPr>
         <p:spPr>
           <a:xfrm>
-            <a:off x="8058150" y="4686300"/>
-            <a:ext cx="800100" cy="238125"/>
-          </a:xfrm>
-          <a:prstGeom prst="rect">
-            <a:avLst/>
-          </a:prstGeom>
-          <a:noFill/>
-          <a:ln/>
-        </p:spPr>
-        <p:txBody>
-          <a:bodyPr wrap="square" lIns="0" tIns="0" rIns="0" bIns="0" anchor="ctr"/>
-          <a:lstStyle/>
-          <a:p>
-            <a:pPr/>
-            <a:r>
-              <a:rPr sz="1650" b="1">
-                <a:solidFill>
-                  <a:srgbClr val="1E1A1C"/>
-                </a:solidFill>
-                <a:latin typeface="Arial"/>
-                <a:ea typeface="Arial"/>
-              </a:rPr>
-              <a:t>I bet ~</a:t>
+            <a:off x="971550" y="5553075"/>
+            <a:ext cx="438150" cy="161925"/>
+          </a:xfrm>
+          <a:prstGeom prst="rect">
+            <a:avLst/>
+          </a:prstGeom>
+          <a:noFill/>
+          <a:ln/>
+        </p:spPr>
+        <p:txBody>
+          <a:bodyPr wrap="square" lIns="0" tIns="0" rIns="0" bIns="0" anchor="ctr"/>
+          <a:lstStyle/>
+          <a:p>
+            <a:pPr/>
+            <a:r>
+              <a:rPr sz="1200" b="1">
+                <a:solidFill>
+                  <a:srgbClr val="C8417F"/>
+                </a:solidFill>
+                <a:latin typeface="Arial"/>
+                <a:ea typeface="Arial"/>
+              </a:rPr>
+              <a:t>7</a:t>
             </a:r>
           </a:p>
         </p:txBody>
@@ -1473,53 +1490,22 @@
       <p:sp>
         <p:nvSpPr>
           <p:cNvPr id="33" name=""/>
-          <p:cNvSpPr txBox="1"/>
-          <p:nvPr/>
-        </p:nvSpPr>
-        <p:spPr>
-          <a:xfrm>
-            <a:off x="7715250" y="4686300"/>
-            <a:ext cx="247650" cy="238125"/>
-          </a:xfrm>
-          <a:prstGeom prst="rect">
-            <a:avLst/>
-          </a:prstGeom>
-          <a:noFill/>
-          <a:ln/>
-        </p:spPr>
-        <p:txBody>
-          <a:bodyPr wrap="square" lIns="0" tIns="0" rIns="0" bIns="0" anchor="ctr"/>
-          <a:lstStyle/>
-          <a:p>
-            <a:pPr/>
-            <a:r>
-              <a:rPr sz="1650" b="1">
-                <a:solidFill>
-                  <a:srgbClr val="C8417F"/>
-                </a:solidFill>
-                <a:latin typeface="Arial"/>
-                <a:ea typeface="Arial"/>
-              </a:rPr>
-              <a:t>8</a:t>
-            </a:r>
-          </a:p>
-        </p:txBody>
-      </p:sp>
-      <p:sp>
-        <p:nvSpPr>
-          <p:cNvPr id="34" name=""/>
           <p:cNvSpPr/>
           <p:nvPr/>
         </p:nvSpPr>
         <p:spPr>
           <a:xfrm>
-            <a:off x="7715250" y="5048250"/>
-            <a:ext cx="3638550" cy="0"/>
-          </a:xfrm>
-          <a:prstGeom prst="line">
-            <a:avLst/>
-          </a:prstGeom>
-          <a:noFill/>
+            <a:off x="3133725" y="5457825"/>
+            <a:ext cx="2200275" cy="361950"/>
+          </a:xfrm>
+          <a:prstGeom prst="roundRect">
+            <a:avLst>
+              <a:gd name="adj" fmla="val 26316"/>
+            </a:avLst>
+          </a:prstGeom>
+          <a:solidFill>
+            <a:srgbClr val="FFFFFF"/>
+          </a:solidFill>
           <a:ln w="19050">
             <a:solidFill>
               <a:srgbClr val="F2D5E1"/>
@@ -1530,28 +1516,125 @@
       </p:sp>
       <p:sp>
         <p:nvSpPr>
+          <p:cNvPr id="34" name=""/>
+          <p:cNvSpPr txBox="1"/>
+          <p:nvPr/>
+        </p:nvSpPr>
+        <p:spPr>
+          <a:xfrm>
+            <a:off x="3448050" y="5553075"/>
+            <a:ext cx="838200" cy="161925"/>
+          </a:xfrm>
+          <a:prstGeom prst="rect">
+            <a:avLst/>
+          </a:prstGeom>
+          <a:noFill/>
+          <a:ln/>
+        </p:spPr>
+        <p:txBody>
+          <a:bodyPr wrap="square" lIns="0" tIns="0" rIns="0" bIns="0" anchor="ctr"/>
+          <a:lstStyle/>
+          <a:p>
+            <a:pPr/>
+            <a:r>
+              <a:rPr sz="1200" b="1">
+                <a:solidFill>
+                  <a:srgbClr val="1E1A1C"/>
+                </a:solidFill>
+                <a:latin typeface="Arial"/>
+                <a:ea typeface="Arial"/>
+              </a:rPr>
+              <a:t>I bet ~</a:t>
+            </a:r>
+          </a:p>
+        </p:txBody>
+      </p:sp>
+      <p:sp>
+        <p:nvSpPr>
           <p:cNvPr id="35" name=""/>
           <p:cNvSpPr txBox="1"/>
           <p:nvPr/>
         </p:nvSpPr>
         <p:spPr>
           <a:xfrm>
-            <a:off x="8058150" y="5162550"/>
-            <a:ext cx="1666875" cy="238125"/>
-          </a:xfrm>
-          <a:prstGeom prst="rect">
-            <a:avLst/>
-          </a:prstGeom>
-          <a:noFill/>
-          <a:ln/>
-        </p:spPr>
-        <p:txBody>
-          <a:bodyPr wrap="square" lIns="0" tIns="0" rIns="0" bIns="0" anchor="ctr"/>
-          <a:lstStyle/>
-          <a:p>
-            <a:pPr/>
-            <a:r>
-              <a:rPr sz="1650" b="1">
+            <a:off x="3267075" y="5553075"/>
+            <a:ext cx="438150" cy="161925"/>
+          </a:xfrm>
+          <a:prstGeom prst="rect">
+            <a:avLst/>
+          </a:prstGeom>
+          <a:noFill/>
+          <a:ln/>
+        </p:spPr>
+        <p:txBody>
+          <a:bodyPr wrap="square" lIns="0" tIns="0" rIns="0" bIns="0" anchor="ctr"/>
+          <a:lstStyle/>
+          <a:p>
+            <a:pPr/>
+            <a:r>
+              <a:rPr sz="1200" b="1">
+                <a:solidFill>
+                  <a:srgbClr val="C8417F"/>
+                </a:solidFill>
+                <a:latin typeface="Arial"/>
+                <a:ea typeface="Arial"/>
+              </a:rPr>
+              <a:t>8</a:t>
+            </a:r>
+          </a:p>
+        </p:txBody>
+      </p:sp>
+      <p:sp>
+        <p:nvSpPr>
+          <p:cNvPr id="36" name=""/>
+          <p:cNvSpPr/>
+          <p:nvPr/>
+        </p:nvSpPr>
+        <p:spPr>
+          <a:xfrm>
+            <a:off x="5419725" y="5457825"/>
+            <a:ext cx="2200275" cy="361950"/>
+          </a:xfrm>
+          <a:prstGeom prst="roundRect">
+            <a:avLst>
+              <a:gd name="adj" fmla="val 26316"/>
+            </a:avLst>
+          </a:prstGeom>
+          <a:solidFill>
+            <a:srgbClr val="FFFFFF"/>
+          </a:solidFill>
+          <a:ln w="19050">
+            <a:solidFill>
+              <a:srgbClr val="F2D5E1"/>
+            </a:solidFill>
+            <a:prstDash val="solid"/>
+          </a:ln>
+        </p:spPr>
+      </p:sp>
+      <p:sp>
+        <p:nvSpPr>
+          <p:cNvPr id="37" name=""/>
+          <p:cNvSpPr txBox="1"/>
+          <p:nvPr/>
+        </p:nvSpPr>
+        <p:spPr>
+          <a:xfrm>
+            <a:off x="5734050" y="5553075"/>
+            <a:ext cx="1457325" cy="161925"/>
+          </a:xfrm>
+          <a:prstGeom prst="rect">
+            <a:avLst/>
+          </a:prstGeom>
+          <a:noFill/>
+          <a:ln/>
+        </p:spPr>
+        <p:txBody>
+          <a:bodyPr wrap="square" lIns="0" tIns="0" rIns="0" bIns="0" anchor="ctr"/>
+          <a:lstStyle/>
+          <a:p>
+            <a:pPr/>
+            <a:r>
+              <a:rPr sz="1200" b="1">
                 <a:solidFill>
                   <a:srgbClr val="1E1A1C"/>
                 </a:solidFill>
@@ -1565,28 +1648,28 @@
       </p:sp>
       <p:sp>
         <p:nvSpPr>
-          <p:cNvPr id="36" name=""/>
-          <p:cNvSpPr txBox="1"/>
-          <p:nvPr/>
-        </p:nvSpPr>
-        <p:spPr>
-          <a:xfrm>
-            <a:off x="7715250" y="5162550"/>
-            <a:ext cx="247650" cy="238125"/>
-          </a:xfrm>
-          <a:prstGeom prst="rect">
-            <a:avLst/>
-          </a:prstGeom>
-          <a:noFill/>
-          <a:ln/>
-        </p:spPr>
-        <p:txBody>
-          <a:bodyPr wrap="square" lIns="0" tIns="0" rIns="0" bIns="0" anchor="ctr"/>
-          <a:lstStyle/>
-          <a:p>
-            <a:pPr/>
-            <a:r>
-              <a:rPr sz="1650" b="1">
+          <p:cNvPr id="38" name=""/>
+          <p:cNvSpPr txBox="1"/>
+          <p:nvPr/>
+        </p:nvSpPr>
+        <p:spPr>
+          <a:xfrm>
+            <a:off x="5553075" y="5553075"/>
+            <a:ext cx="438150" cy="161925"/>
+          </a:xfrm>
+          <a:prstGeom prst="rect">
+            <a:avLst/>
+          </a:prstGeom>
+          <a:noFill/>
+          <a:ln/>
+        </p:spPr>
+        <p:txBody>
+          <a:bodyPr wrap="square" lIns="0" tIns="0" rIns="0" bIns="0" anchor="ctr"/>
+          <a:lstStyle/>
+          <a:p>
+            <a:pPr/>
+            <a:r>
+              <a:rPr sz="1200" b="1">
                 <a:solidFill>
                   <a:srgbClr val="C8417F"/>
                 </a:solidFill>
@@ -1600,14 +1683,14 @@
       </p:sp>
       <p:sp>
         <p:nvSpPr>
-          <p:cNvPr id="37" name=""/>
-          <p:cNvSpPr txBox="1"/>
-          <p:nvPr/>
-        </p:nvSpPr>
-        <p:spPr>
-          <a:xfrm>
-            <a:off x="7715250" y="5648325"/>
-            <a:ext cx="2809875" cy="228600"/>
+          <p:cNvPr id="39" name=""/>
+          <p:cNvSpPr txBox="1"/>
+          <p:nvPr/>
+        </p:nvSpPr>
+        <p:spPr>
+          <a:xfrm>
+            <a:off x="838200" y="5934075"/>
+            <a:ext cx="3038475" cy="228600"/>
           </a:xfrm>
           <a:prstGeom prst="rect">
             <a:avLst/>
@@ -1719,7 +1802,7 @@
         <p:spPr>
           <a:xfrm>
             <a:off x="762000" y="314325"/>
-            <a:ext cx="419100" cy="552450"/>
+            <a:ext cx="647700" cy="552450"/>
           </a:xfrm>
           <a:prstGeom prst="rect">
             <a:avLst/>
@@ -1754,7 +1837,7 @@
         <p:spPr>
           <a:xfrm>
             <a:off x="762000" y="1038225"/>
-            <a:ext cx="4171950" cy="619125"/>
+            <a:ext cx="4400550" cy="619125"/>
           </a:xfrm>
           <a:prstGeom prst="rect">
             <a:avLst/>
@@ -1800,7 +1883,7 @@
         <p:spPr>
           <a:xfrm>
             <a:off x="762000" y="1771650"/>
-            <a:ext cx="3390900" cy="419100"/>
+            <a:ext cx="3619500" cy="419100"/>
           </a:xfrm>
           <a:prstGeom prst="rect">
             <a:avLst/>
@@ -1857,7 +1940,7 @@
         <p:spPr>
           <a:xfrm>
             <a:off x="3933825" y="1857375"/>
-            <a:ext cx="1228725" cy="238125"/>
+            <a:ext cx="1457325" cy="238125"/>
           </a:xfrm>
           <a:prstGeom prst="rect">
             <a:avLst/>
@@ -1914,7 +1997,7 @@
         <p:spPr>
           <a:xfrm>
             <a:off x="762000" y="3038475"/>
-            <a:ext cx="504825" cy="285750"/>
+            <a:ext cx="733425" cy="285750"/>
           </a:xfrm>
           <a:prstGeom prst="rect">
             <a:avLst/>
@@ -1949,7 +2032,7 @@
         <p:spPr>
           <a:xfrm>
             <a:off x="1600200" y="3000375"/>
-            <a:ext cx="4533900" cy="352425"/>
+            <a:ext cx="4762500" cy="352425"/>
           </a:xfrm>
           <a:prstGeom prst="rect">
             <a:avLst/>
@@ -2020,7 +2103,7 @@
         <p:spPr>
           <a:xfrm>
             <a:off x="7810500" y="3019425"/>
-            <a:ext cx="2752725" cy="304800"/>
+            <a:ext cx="2981325" cy="304800"/>
           </a:xfrm>
           <a:prstGeom prst="rect">
             <a:avLst/>
@@ -2078,7 +2161,7 @@
         <p:spPr>
           <a:xfrm>
             <a:off x="762000" y="4352925"/>
-            <a:ext cx="504825" cy="285750"/>
+            <a:ext cx="733425" cy="285750"/>
           </a:xfrm>
           <a:prstGeom prst="rect">
             <a:avLst/>
@@ -2113,7 +2196,7 @@
         <p:spPr>
           <a:xfrm>
             <a:off x="1600200" y="4324350"/>
-            <a:ext cx="4305300" cy="352425"/>
+            <a:ext cx="4533900" cy="352425"/>
           </a:xfrm>
           <a:prstGeom prst="rect">
             <a:avLst/>
@@ -2184,7 +2267,7 @@
         <p:spPr>
           <a:xfrm>
             <a:off x="7810500" y="4171950"/>
-            <a:ext cx="2514600" cy="304800"/>
+            <a:ext cx="2743200" cy="304800"/>
           </a:xfrm>
           <a:prstGeom prst="rect">
             <a:avLst/>
@@ -2246,7 +2329,7 @@
         <p:spPr>
           <a:xfrm>
             <a:off x="7924800" y="4572000"/>
-            <a:ext cx="1371600" cy="200025"/>
+            <a:ext cx="1600200" cy="200025"/>
           </a:xfrm>
           <a:prstGeom prst="rect">
             <a:avLst/>
@@ -2304,7 +2387,7 @@
         <p:spPr>
           <a:xfrm>
             <a:off x="762000" y="5676900"/>
-            <a:ext cx="504825" cy="285750"/>
+            <a:ext cx="733425" cy="285750"/>
           </a:xfrm>
           <a:prstGeom prst="rect">
             <a:avLst/>
@@ -2339,7 +2422,7 @@
         <p:spPr>
           <a:xfrm>
             <a:off x="1600200" y="5648325"/>
-            <a:ext cx="4257675" cy="352425"/>
+            <a:ext cx="4486275" cy="352425"/>
           </a:xfrm>
           <a:prstGeom prst="rect">
             <a:avLst/>
@@ -2410,7 +2493,7 @@
         <p:spPr>
           <a:xfrm>
             <a:off x="7810500" y="5667375"/>
-            <a:ext cx="3228975" cy="304800"/>
+            <a:ext cx="3457575" cy="304800"/>
           </a:xfrm>
           <a:prstGeom prst="rect">
             <a:avLst/>
@@ -2522,7 +2605,7 @@
         <p:spPr>
           <a:xfrm>
             <a:off x="762000" y="495300"/>
-            <a:ext cx="4400550" cy="552450"/>
+            <a:ext cx="4629150" cy="552450"/>
           </a:xfrm>
           <a:prstGeom prst="rect">
             <a:avLst/>
@@ -2557,7 +2640,7 @@
         <p:spPr>
           <a:xfrm>
             <a:off x="4657725" y="733425"/>
-            <a:ext cx="2457450" cy="247650"/>
+            <a:ext cx="2686050" cy="247650"/>
           </a:xfrm>
           <a:prstGeom prst="rect">
             <a:avLst/>
@@ -2641,7 +2724,7 @@
         <p:spPr>
           <a:xfrm>
             <a:off x="971550" y="1609725"/>
-            <a:ext cx="247650" cy="238125"/>
+            <a:ext cx="476250" cy="238125"/>
           </a:xfrm>
           <a:prstGeom prst="rect">
             <a:avLst/>
@@ -2676,7 +2759,7 @@
         <p:spPr>
           <a:xfrm>
             <a:off x="1200150" y="1600200"/>
-            <a:ext cx="1695450" cy="247650"/>
+            <a:ext cx="1924050" cy="247650"/>
           </a:xfrm>
           <a:prstGeom prst="rect">
             <a:avLst/>
@@ -2711,7 +2794,7 @@
         <p:spPr>
           <a:xfrm>
             <a:off x="971550" y="1895475"/>
-            <a:ext cx="1047750" cy="238125"/>
+            <a:ext cx="1276350" cy="238125"/>
           </a:xfrm>
           <a:prstGeom prst="rect">
             <a:avLst/>
@@ -2769,7 +2852,7 @@
         <p:spPr>
           <a:xfrm>
             <a:off x="971550" y="2552700"/>
-            <a:ext cx="2400300" cy="161925"/>
+            <a:ext cx="2628900" cy="161925"/>
           </a:xfrm>
           <a:prstGeom prst="rect">
             <a:avLst/>
@@ -2804,7 +2887,7 @@
         <p:spPr>
           <a:xfrm>
             <a:off x="971550" y="2733675"/>
-            <a:ext cx="1962150" cy="180975"/>
+            <a:ext cx="2190750" cy="180975"/>
           </a:xfrm>
           <a:prstGeom prst="rect">
             <a:avLst/>
@@ -2866,7 +2949,7 @@
         <p:spPr>
           <a:xfrm>
             <a:off x="4572000" y="1609725"/>
-            <a:ext cx="247650" cy="238125"/>
+            <a:ext cx="476250" cy="238125"/>
           </a:xfrm>
           <a:prstGeom prst="rect">
             <a:avLst/>
@@ -2901,7 +2984,7 @@
         <p:spPr>
           <a:xfrm>
             <a:off x="4800600" y="1600200"/>
-            <a:ext cx="1314450" cy="247650"/>
+            <a:ext cx="1543050" cy="247650"/>
           </a:xfrm>
           <a:prstGeom prst="rect">
             <a:avLst/>
@@ -2936,7 +3019,7 @@
         <p:spPr>
           <a:xfrm>
             <a:off x="4572000" y="1895475"/>
-            <a:ext cx="1409700" cy="238125"/>
+            <a:ext cx="1638300" cy="238125"/>
           </a:xfrm>
           <a:prstGeom prst="rect">
             <a:avLst/>
@@ -2994,7 +3077,7 @@
         <p:spPr>
           <a:xfrm>
             <a:off x="4572000" y="2552700"/>
-            <a:ext cx="2162175" cy="161925"/>
+            <a:ext cx="2390775" cy="161925"/>
           </a:xfrm>
           <a:prstGeom prst="rect">
             <a:avLst/>
@@ -3029,7 +3112,7 @@
         <p:spPr>
           <a:xfrm>
             <a:off x="4572000" y="2733675"/>
-            <a:ext cx="1381125" cy="180975"/>
+            <a:ext cx="1609725" cy="180975"/>
           </a:xfrm>
           <a:prstGeom prst="rect">
             <a:avLst/>
@@ -3091,7 +3174,7 @@
         <p:spPr>
           <a:xfrm>
             <a:off x="8172450" y="1609725"/>
-            <a:ext cx="247650" cy="238125"/>
+            <a:ext cx="476250" cy="238125"/>
           </a:xfrm>
           <a:prstGeom prst="rect">
             <a:avLst/>
@@ -3126,7 +3209,7 @@
         <p:spPr>
           <a:xfrm>
             <a:off x="8401050" y="1600200"/>
-            <a:ext cx="1876425" cy="247650"/>
+            <a:ext cx="2105025" cy="247650"/>
           </a:xfrm>
           <a:prstGeom prst="rect">
             <a:avLst/>
@@ -3161,7 +3244,7 @@
         <p:spPr>
           <a:xfrm>
             <a:off x="8172450" y="1895475"/>
-            <a:ext cx="1981200" cy="238125"/>
+            <a:ext cx="2209800" cy="238125"/>
           </a:xfrm>
           <a:prstGeom prst="rect">
             <a:avLst/>
@@ -3219,7 +3302,7 @@
         <p:spPr>
           <a:xfrm>
             <a:off x="8172450" y="2552700"/>
-            <a:ext cx="2114550" cy="161925"/>
+            <a:ext cx="2343150" cy="161925"/>
           </a:xfrm>
           <a:prstGeom prst="rect">
             <a:avLst/>
@@ -3254,7 +3337,7 @@
         <p:spPr>
           <a:xfrm>
             <a:off x="8172450" y="2733675"/>
-            <a:ext cx="2105025" cy="180975"/>
+            <a:ext cx="2333625" cy="180975"/>
           </a:xfrm>
           <a:prstGeom prst="rect">
             <a:avLst/>
@@ -3316,7 +3399,7 @@
         <p:spPr>
           <a:xfrm>
             <a:off x="971550" y="3324225"/>
-            <a:ext cx="247650" cy="238125"/>
+            <a:ext cx="476250" cy="238125"/>
           </a:xfrm>
           <a:prstGeom prst="rect">
             <a:avLst/>
@@ -3351,7 +3434,7 @@
         <p:spPr>
           <a:xfrm>
             <a:off x="1200150" y="3314700"/>
-            <a:ext cx="2133600" cy="247650"/>
+            <a:ext cx="2362200" cy="247650"/>
           </a:xfrm>
           <a:prstGeom prst="rect">
             <a:avLst/>
@@ -3386,7 +3469,7 @@
         <p:spPr>
           <a:xfrm>
             <a:off x="971550" y="3609975"/>
-            <a:ext cx="1228725" cy="238125"/>
+            <a:ext cx="1457325" cy="238125"/>
           </a:xfrm>
           <a:prstGeom prst="rect">
             <a:avLst/>
@@ -3444,7 +3527,7 @@
         <p:spPr>
           <a:xfrm>
             <a:off x="971550" y="4267200"/>
-            <a:ext cx="2543175" cy="161925"/>
+            <a:ext cx="2771775" cy="161925"/>
           </a:xfrm>
           <a:prstGeom prst="rect">
             <a:avLst/>
@@ -3479,7 +3562,7 @@
         <p:spPr>
           <a:xfrm>
             <a:off x="971550" y="4448175"/>
-            <a:ext cx="1381125" cy="180975"/>
+            <a:ext cx="1609725" cy="180975"/>
           </a:xfrm>
           <a:prstGeom prst="rect">
             <a:avLst/>
@@ -3541,7 +3624,7 @@
         <p:spPr>
           <a:xfrm>
             <a:off x="4572000" y="3324225"/>
-            <a:ext cx="247650" cy="238125"/>
+            <a:ext cx="476250" cy="238125"/>
           </a:xfrm>
           <a:prstGeom prst="rect">
             <a:avLst/>
@@ -3576,7 +3659,7 @@
         <p:spPr>
           <a:xfrm>
             <a:off x="4800600" y="3314700"/>
-            <a:ext cx="1962150" cy="247650"/>
+            <a:ext cx="2190750" cy="247650"/>
           </a:xfrm>
           <a:prstGeom prst="rect">
             <a:avLst/>
@@ -3611,7 +3694,7 @@
         <p:spPr>
           <a:xfrm>
             <a:off x="4572000" y="3609975"/>
-            <a:ext cx="1581150" cy="238125"/>
+            <a:ext cx="1809750" cy="238125"/>
           </a:xfrm>
           <a:prstGeom prst="rect">
             <a:avLst/>
@@ -3669,7 +3752,7 @@
         <p:spPr>
           <a:xfrm>
             <a:off x="4572000" y="4267200"/>
-            <a:ext cx="2257425" cy="161925"/>
+            <a:ext cx="2486025" cy="161925"/>
           </a:xfrm>
           <a:prstGeom prst="rect">
             <a:avLst/>
@@ -3704,7 +3787,7 @@
         <p:spPr>
           <a:xfrm>
             <a:off x="4572000" y="4448175"/>
-            <a:ext cx="1666875" cy="180975"/>
+            <a:ext cx="1895475" cy="180975"/>
           </a:xfrm>
           <a:prstGeom prst="rect">
             <a:avLst/>
@@ -3766,7 +3849,7 @@
         <p:spPr>
           <a:xfrm>
             <a:off x="8172450" y="3324225"/>
-            <a:ext cx="247650" cy="238125"/>
+            <a:ext cx="476250" cy="238125"/>
           </a:xfrm>
           <a:prstGeom prst="rect">
             <a:avLst/>
@@ -3801,7 +3884,7 @@
         <p:spPr>
           <a:xfrm>
             <a:off x="8401050" y="3314700"/>
-            <a:ext cx="1104900" cy="247650"/>
+            <a:ext cx="1333500" cy="247650"/>
           </a:xfrm>
           <a:prstGeom prst="rect">
             <a:avLst/>
@@ -3836,7 +3919,7 @@
         <p:spPr>
           <a:xfrm>
             <a:off x="8172450" y="3609975"/>
-            <a:ext cx="1981200" cy="238125"/>
+            <a:ext cx="2209800" cy="238125"/>
           </a:xfrm>
           <a:prstGeom prst="rect">
             <a:avLst/>
@@ -3894,7 +3977,7 @@
         <p:spPr>
           <a:xfrm>
             <a:off x="8172450" y="4267200"/>
-            <a:ext cx="1304925" cy="161925"/>
+            <a:ext cx="1533525" cy="161925"/>
           </a:xfrm>
           <a:prstGeom prst="rect">
             <a:avLst/>
@@ -3929,7 +4012,7 @@
         <p:spPr>
           <a:xfrm>
             <a:off x="8172450" y="4448175"/>
-            <a:ext cx="1400175" cy="180975"/>
+            <a:ext cx="1628775" cy="180975"/>
           </a:xfrm>
           <a:prstGeom prst="rect">
             <a:avLst/>
@@ -3991,7 +4074,7 @@
         <p:spPr>
           <a:xfrm>
             <a:off x="971550" y="5038725"/>
-            <a:ext cx="247650" cy="238125"/>
+            <a:ext cx="476250" cy="238125"/>
           </a:xfrm>
           <a:prstGeom prst="rect">
             <a:avLst/>
@@ -4026,7 +4109,7 @@
         <p:spPr>
           <a:xfrm>
             <a:off x="1200150" y="5029200"/>
-            <a:ext cx="2276475" cy="247650"/>
+            <a:ext cx="2505075" cy="247650"/>
           </a:xfrm>
           <a:prstGeom prst="rect">
             <a:avLst/>
@@ -4061,7 +4144,7 @@
         <p:spPr>
           <a:xfrm>
             <a:off x="971550" y="5324475"/>
-            <a:ext cx="2133600" cy="238125"/>
+            <a:ext cx="2362200" cy="238125"/>
           </a:xfrm>
           <a:prstGeom prst="rect">
             <a:avLst/>
@@ -4119,7 +4202,7 @@
         <p:spPr>
           <a:xfrm>
             <a:off x="971550" y="5981700"/>
-            <a:ext cx="2171700" cy="161925"/>
+            <a:ext cx="2400300" cy="161925"/>
           </a:xfrm>
           <a:prstGeom prst="rect">
             <a:avLst/>
@@ -4154,7 +4237,7 @@
         <p:spPr>
           <a:xfrm>
             <a:off x="971550" y="6162675"/>
-            <a:ext cx="1943100" cy="180975"/>
+            <a:ext cx="2171700" cy="180975"/>
           </a:xfrm>
           <a:prstGeom prst="rect">
             <a:avLst/>
@@ -4216,7 +4299,7 @@
         <p:spPr>
           <a:xfrm>
             <a:off x="4572000" y="5038725"/>
-            <a:ext cx="247650" cy="238125"/>
+            <a:ext cx="476250" cy="238125"/>
           </a:xfrm>
           <a:prstGeom prst="rect">
             <a:avLst/>
@@ -4251,7 +4334,7 @@
         <p:spPr>
           <a:xfrm>
             <a:off x="4800600" y="5029200"/>
-            <a:ext cx="809625" cy="247650"/>
+            <a:ext cx="1038225" cy="247650"/>
           </a:xfrm>
           <a:prstGeom prst="rect">
             <a:avLst/>
@@ -4286,7 +4369,7 @@
         <p:spPr>
           <a:xfrm>
             <a:off x="4572000" y="5324475"/>
-            <a:ext cx="1228725" cy="238125"/>
+            <a:ext cx="1457325" cy="238125"/>
           </a:xfrm>
           <a:prstGeom prst="rect">
             <a:avLst/>
@@ -4344,7 +4427,7 @@
         <p:spPr>
           <a:xfrm>
             <a:off x="4572000" y="5981700"/>
-            <a:ext cx="2295525" cy="161925"/>
+            <a:ext cx="2524125" cy="161925"/>
           </a:xfrm>
           <a:prstGeom prst="rect">
             <a:avLst/>
@@ -4379,7 +4462,7 @@
         <p:spPr>
           <a:xfrm>
             <a:off x="4572000" y="6162675"/>
-            <a:ext cx="1676400" cy="180975"/>
+            <a:ext cx="1905000" cy="180975"/>
           </a:xfrm>
           <a:prstGeom prst="rect">
             <a:avLst/>
@@ -4441,7 +4524,7 @@
         <p:spPr>
           <a:xfrm>
             <a:off x="8172450" y="5038725"/>
-            <a:ext cx="247650" cy="238125"/>
+            <a:ext cx="476250" cy="238125"/>
           </a:xfrm>
           <a:prstGeom prst="rect">
             <a:avLst/>
@@ -4476,7 +4559,7 @@
         <p:spPr>
           <a:xfrm>
             <a:off x="8401050" y="5029200"/>
-            <a:ext cx="1685925" cy="247650"/>
+            <a:ext cx="1914525" cy="247650"/>
           </a:xfrm>
           <a:prstGeom prst="rect">
             <a:avLst/>
@@ -4511,7 +4594,7 @@
         <p:spPr>
           <a:xfrm>
             <a:off x="8172450" y="5324475"/>
-            <a:ext cx="1962150" cy="238125"/>
+            <a:ext cx="2190750" cy="238125"/>
           </a:xfrm>
           <a:prstGeom prst="rect">
             <a:avLst/>
@@ -4569,7 +4652,7 @@
         <p:spPr>
           <a:xfrm>
             <a:off x="8172450" y="5981700"/>
-            <a:ext cx="2171700" cy="161925"/>
+            <a:ext cx="2400300" cy="161925"/>
           </a:xfrm>
           <a:prstGeom prst="rect">
             <a:avLst/>
@@ -4604,7 +4687,7 @@
         <p:spPr>
           <a:xfrm>
             <a:off x="8172450" y="6162675"/>
-            <a:ext cx="1543050" cy="180975"/>
+            <a:ext cx="1771650" cy="180975"/>
           </a:xfrm>
           <a:prstGeom prst="rect">
             <a:avLst/>
@@ -4716,7 +4799,7 @@
         <p:spPr>
           <a:xfrm>
             <a:off x="914400" y="1514475"/>
-            <a:ext cx="1514475" cy="190500"/>
+            <a:ext cx="1743075" cy="190500"/>
           </a:xfrm>
           <a:prstGeom prst="rect">
             <a:avLst/>
@@ -4751,7 +4834,7 @@
         <p:spPr>
           <a:xfrm>
             <a:off x="914400" y="1685925"/>
-            <a:ext cx="3971925" cy="1209675"/>
+            <a:ext cx="4200525" cy="1209675"/>
           </a:xfrm>
           <a:prstGeom prst="rect">
             <a:avLst/>
@@ -4808,7 +4891,7 @@
         <p:spPr>
           <a:xfrm>
             <a:off x="914400" y="3333750"/>
-            <a:ext cx="7239000" cy="333375"/>
+            <a:ext cx="7467600" cy="333375"/>
           </a:xfrm>
           <a:prstGeom prst="rect">
             <a:avLst/>
@@ -4862,8 +4945,8 @@
         </p:nvSpPr>
         <p:spPr>
           <a:xfrm>
-            <a:off x="981075" y="4029075"/>
-            <a:ext cx="238125" cy="200025"/>
+            <a:off x="866775" y="4029075"/>
+            <a:ext cx="466725" cy="200025"/>
           </a:xfrm>
           <a:prstGeom prst="rect">
             <a:avLst/>
@@ -4898,7 +4981,7 @@
         <p:spPr>
           <a:xfrm>
             <a:off x="1428750" y="3990975"/>
-            <a:ext cx="3762375" cy="285750"/>
+            <a:ext cx="3990975" cy="285750"/>
           </a:xfrm>
           <a:prstGeom prst="rect">
             <a:avLst/>
@@ -4952,8 +5035,8 @@
         </p:nvSpPr>
         <p:spPr>
           <a:xfrm>
-            <a:off x="981075" y="4524375"/>
-            <a:ext cx="238125" cy="200025"/>
+            <a:off x="866775" y="4524375"/>
+            <a:ext cx="466725" cy="200025"/>
           </a:xfrm>
           <a:prstGeom prst="rect">
             <a:avLst/>
@@ -4988,7 +5071,7 @@
         <p:spPr>
           <a:xfrm>
             <a:off x="1428750" y="4486275"/>
-            <a:ext cx="3771900" cy="285750"/>
+            <a:ext cx="4000500" cy="285750"/>
           </a:xfrm>
           <a:prstGeom prst="rect">
             <a:avLst/>
@@ -5042,8 +5125,8 @@
         </p:nvSpPr>
         <p:spPr>
           <a:xfrm>
-            <a:off x="981075" y="5019675"/>
-            <a:ext cx="238125" cy="200025"/>
+            <a:off x="866775" y="5019675"/>
+            <a:ext cx="466725" cy="200025"/>
           </a:xfrm>
           <a:prstGeom prst="rect">
             <a:avLst/>
@@ -5078,7 +5161,7 @@
         <p:spPr>
           <a:xfrm>
             <a:off x="1428750" y="4981575"/>
-            <a:ext cx="3790950" cy="285750"/>
+            <a:ext cx="4019550" cy="285750"/>
           </a:xfrm>
           <a:prstGeom prst="rect">
             <a:avLst/>
@@ -5190,7 +5273,7 @@
         <p:spPr>
           <a:xfrm>
             <a:off x="762000" y="314325"/>
-            <a:ext cx="419100" cy="552450"/>
+            <a:ext cx="647700" cy="552450"/>
           </a:xfrm>
           <a:prstGeom prst="rect">
             <a:avLst/>
@@ -5247,7 +5330,7 @@
         <p:spPr>
           <a:xfrm>
             <a:off x="1333500" y="466725"/>
-            <a:ext cx="857250" cy="238125"/>
+            <a:ext cx="1085850" cy="238125"/>
           </a:xfrm>
           <a:prstGeom prst="rect">
             <a:avLst/>
@@ -5282,7 +5365,7 @@
         <p:spPr>
           <a:xfrm>
             <a:off x="762000" y="971550"/>
-            <a:ext cx="2533650" cy="361950"/>
+            <a:ext cx="2762250" cy="361950"/>
           </a:xfrm>
           <a:prstGeom prst="rect">
             <a:avLst/>
@@ -5328,7 +5411,7 @@
         <p:spPr>
           <a:xfrm>
             <a:off x="3038475" y="1019175"/>
-            <a:ext cx="1323975" cy="304800"/>
+            <a:ext cx="1552575" cy="304800"/>
           </a:xfrm>
           <a:prstGeom prst="rect">
             <a:avLst/>
@@ -5385,7 +5468,7 @@
         <p:spPr>
           <a:xfrm>
             <a:off x="762000" y="1924050"/>
-            <a:ext cx="466725" cy="257175"/>
+            <a:ext cx="695325" cy="257175"/>
           </a:xfrm>
           <a:prstGeom prst="rect">
             <a:avLst/>
@@ -5420,7 +5503,7 @@
         <p:spPr>
           <a:xfrm>
             <a:off x="1600200" y="1866900"/>
-            <a:ext cx="3790950" cy="333375"/>
+            <a:ext cx="4019550" cy="333375"/>
           </a:xfrm>
           <a:prstGeom prst="rect">
             <a:avLst/>
@@ -5475,7 +5558,7 @@
         <p:spPr>
           <a:xfrm>
             <a:off x="762000" y="2867025"/>
-            <a:ext cx="466725" cy="257175"/>
+            <a:ext cx="695325" cy="257175"/>
           </a:xfrm>
           <a:prstGeom prst="rect">
             <a:avLst/>
@@ -5510,7 +5593,7 @@
         <p:spPr>
           <a:xfrm>
             <a:off x="1600200" y="2809875"/>
-            <a:ext cx="3790950" cy="333375"/>
+            <a:ext cx="4019550" cy="333375"/>
           </a:xfrm>
           <a:prstGeom prst="rect">
             <a:avLst/>
@@ -5565,7 +5648,7 @@
         <p:spPr>
           <a:xfrm>
             <a:off x="762000" y="3810000"/>
-            <a:ext cx="466725" cy="257175"/>
+            <a:ext cx="695325" cy="257175"/>
           </a:xfrm>
           <a:prstGeom prst="rect">
             <a:avLst/>
@@ -5600,7 +5683,7 @@
         <p:spPr>
           <a:xfrm>
             <a:off x="1600200" y="3752850"/>
-            <a:ext cx="3009900" cy="333375"/>
+            <a:ext cx="3238500" cy="333375"/>
           </a:xfrm>
           <a:prstGeom prst="rect">
             <a:avLst/>
@@ -5655,7 +5738,7 @@
         <p:spPr>
           <a:xfrm>
             <a:off x="762000" y="4752975"/>
-            <a:ext cx="466725" cy="257175"/>
+            <a:ext cx="695325" cy="257175"/>
           </a:xfrm>
           <a:prstGeom prst="rect">
             <a:avLst/>
@@ -5690,7 +5773,7 @@
         <p:spPr>
           <a:xfrm>
             <a:off x="1600200" y="4695825"/>
-            <a:ext cx="3267075" cy="333375"/>
+            <a:ext cx="3495675" cy="333375"/>
           </a:xfrm>
           <a:prstGeom prst="rect">
             <a:avLst/>
@@ -5745,7 +5828,7 @@
         <p:spPr>
           <a:xfrm>
             <a:off x="762000" y="5695950"/>
-            <a:ext cx="466725" cy="257175"/>
+            <a:ext cx="695325" cy="257175"/>
           </a:xfrm>
           <a:prstGeom prst="rect">
             <a:avLst/>
@@ -5780,7 +5863,7 @@
         <p:spPr>
           <a:xfrm>
             <a:off x="1600200" y="5638800"/>
-            <a:ext cx="2476500" cy="333375"/>
+            <a:ext cx="2705100" cy="333375"/>
           </a:xfrm>
           <a:prstGeom prst="rect">
             <a:avLst/>
@@ -5912,7 +5995,7 @@
         <p:spPr>
           <a:xfrm>
             <a:off x="762000" y="314325"/>
-            <a:ext cx="419100" cy="552450"/>
+            <a:ext cx="647700" cy="552450"/>
           </a:xfrm>
           <a:prstGeom prst="rect">
             <a:avLst/>
@@ -5969,7 +6052,7 @@
         <p:spPr>
           <a:xfrm>
             <a:off x="1333500" y="466725"/>
-            <a:ext cx="857250" cy="238125"/>
+            <a:ext cx="1085850" cy="238125"/>
           </a:xfrm>
           <a:prstGeom prst="rect">
             <a:avLst/>
@@ -6004,7 +6087,7 @@
         <p:spPr>
           <a:xfrm>
             <a:off x="762000" y="971550"/>
-            <a:ext cx="1952625" cy="361950"/>
+            <a:ext cx="2181225" cy="361950"/>
           </a:xfrm>
           <a:prstGeom prst="rect">
             <a:avLst/>
@@ -6050,7 +6133,7 @@
         <p:spPr>
           <a:xfrm>
             <a:off x="2533650" y="1019175"/>
-            <a:ext cx="1790700" cy="304800"/>
+            <a:ext cx="2019300" cy="304800"/>
           </a:xfrm>
           <a:prstGeom prst="rect">
             <a:avLst/>
@@ -6107,7 +6190,7 @@
         <p:spPr>
           <a:xfrm>
             <a:off x="762000" y="1924050"/>
-            <a:ext cx="466725" cy="257175"/>
+            <a:ext cx="695325" cy="257175"/>
           </a:xfrm>
           <a:prstGeom prst="rect">
             <a:avLst/>
@@ -6142,7 +6225,7 @@
         <p:spPr>
           <a:xfrm>
             <a:off x="1600200" y="1866900"/>
-            <a:ext cx="2971800" cy="333375"/>
+            <a:ext cx="3200400" cy="333375"/>
           </a:xfrm>
           <a:prstGeom prst="rect">
             <a:avLst/>
@@ -6197,7 +6280,7 @@
         <p:spPr>
           <a:xfrm>
             <a:off x="762000" y="2867025"/>
-            <a:ext cx="466725" cy="257175"/>
+            <a:ext cx="695325" cy="257175"/>
           </a:xfrm>
           <a:prstGeom prst="rect">
             <a:avLst/>
@@ -6232,7 +6315,7 @@
         <p:spPr>
           <a:xfrm>
             <a:off x="1600200" y="2809875"/>
-            <a:ext cx="2733675" cy="333375"/>
+            <a:ext cx="2962275" cy="333375"/>
           </a:xfrm>
           <a:prstGeom prst="rect">
             <a:avLst/>
@@ -6287,7 +6370,7 @@
         <p:spPr>
           <a:xfrm>
             <a:off x="762000" y="3810000"/>
-            <a:ext cx="466725" cy="257175"/>
+            <a:ext cx="695325" cy="257175"/>
           </a:xfrm>
           <a:prstGeom prst="rect">
             <a:avLst/>
@@ -6322,7 +6405,7 @@
         <p:spPr>
           <a:xfrm>
             <a:off x="1600200" y="3752850"/>
-            <a:ext cx="3257550" cy="333375"/>
+            <a:ext cx="3486150" cy="333375"/>
           </a:xfrm>
           <a:prstGeom prst="rect">
             <a:avLst/>
@@ -6377,7 +6460,7 @@
         <p:spPr>
           <a:xfrm>
             <a:off x="762000" y="4752975"/>
-            <a:ext cx="466725" cy="257175"/>
+            <a:ext cx="695325" cy="257175"/>
           </a:xfrm>
           <a:prstGeom prst="rect">
             <a:avLst/>
@@ -6412,7 +6495,7 @@
         <p:spPr>
           <a:xfrm>
             <a:off x="1600200" y="4695825"/>
-            <a:ext cx="2466975" cy="333375"/>
+            <a:ext cx="2695575" cy="333375"/>
           </a:xfrm>
           <a:prstGeom prst="rect">
             <a:avLst/>
@@ -6467,7 +6550,7 @@
         <p:spPr>
           <a:xfrm>
             <a:off x="762000" y="5695950"/>
-            <a:ext cx="466725" cy="257175"/>
+            <a:ext cx="695325" cy="257175"/>
           </a:xfrm>
           <a:prstGeom prst="rect">
             <a:avLst/>
@@ -6502,7 +6585,7 @@
         <p:spPr>
           <a:xfrm>
             <a:off x="1600200" y="5638800"/>
-            <a:ext cx="2466975" cy="333375"/>
+            <a:ext cx="2695575" cy="333375"/>
           </a:xfrm>
           <a:prstGeom prst="rect">
             <a:avLst/>
@@ -6634,7 +6717,7 @@
         <p:spPr>
           <a:xfrm>
             <a:off x="762000" y="314325"/>
-            <a:ext cx="419100" cy="552450"/>
+            <a:ext cx="647700" cy="552450"/>
           </a:xfrm>
           <a:prstGeom prst="rect">
             <a:avLst/>
@@ -6691,7 +6774,7 @@
         <p:spPr>
           <a:xfrm>
             <a:off x="1333500" y="466725"/>
-            <a:ext cx="857250" cy="238125"/>
+            <a:ext cx="1085850" cy="238125"/>
           </a:xfrm>
           <a:prstGeom prst="rect">
             <a:avLst/>
@@ -6726,7 +6809,7 @@
         <p:spPr>
           <a:xfrm>
             <a:off x="762000" y="971550"/>
-            <a:ext cx="2809875" cy="361950"/>
+            <a:ext cx="3038475" cy="361950"/>
           </a:xfrm>
           <a:prstGeom prst="rect">
             <a:avLst/>
@@ -6772,7 +6855,7 @@
         <p:spPr>
           <a:xfrm>
             <a:off x="3276600" y="1019175"/>
-            <a:ext cx="2524125" cy="304800"/>
+            <a:ext cx="2752725" cy="304800"/>
           </a:xfrm>
           <a:prstGeom prst="rect">
             <a:avLst/>
@@ -6829,7 +6912,7 @@
         <p:spPr>
           <a:xfrm>
             <a:off x="762000" y="1924050"/>
-            <a:ext cx="466725" cy="257175"/>
+            <a:ext cx="695325" cy="257175"/>
           </a:xfrm>
           <a:prstGeom prst="rect">
             <a:avLst/>
@@ -6864,7 +6947,7 @@
         <p:spPr>
           <a:xfrm>
             <a:off x="1600200" y="1866900"/>
-            <a:ext cx="3790950" cy="333375"/>
+            <a:ext cx="4019550" cy="333375"/>
           </a:xfrm>
           <a:prstGeom prst="rect">
             <a:avLst/>
@@ -6919,7 +7002,7 @@
         <p:spPr>
           <a:xfrm>
             <a:off x="762000" y="2867025"/>
-            <a:ext cx="466725" cy="257175"/>
+            <a:ext cx="695325" cy="257175"/>
           </a:xfrm>
           <a:prstGeom prst="rect">
             <a:avLst/>
@@ -6954,7 +7037,7 @@
         <p:spPr>
           <a:xfrm>
             <a:off x="1600200" y="2809875"/>
-            <a:ext cx="4324350" cy="333375"/>
+            <a:ext cx="4552950" cy="333375"/>
           </a:xfrm>
           <a:prstGeom prst="rect">
             <a:avLst/>
@@ -7011,7 +7094,7 @@
         <p:spPr>
           <a:xfrm>
             <a:off x="5505450" y="2886075"/>
-            <a:ext cx="2867025" cy="200025"/>
+            <a:ext cx="3095625" cy="200025"/>
           </a:xfrm>
           <a:prstGeom prst="rect">
             <a:avLst/>
@@ -7066,7 +7149,7 @@
         <p:spPr>
           <a:xfrm>
             <a:off x="762000" y="3810000"/>
-            <a:ext cx="466725" cy="257175"/>
+            <a:ext cx="695325" cy="257175"/>
           </a:xfrm>
           <a:prstGeom prst="rect">
             <a:avLst/>
@@ -7101,7 +7184,7 @@
         <p:spPr>
           <a:xfrm>
             <a:off x="1600200" y="3752850"/>
-            <a:ext cx="3790950" cy="333375"/>
+            <a:ext cx="4019550" cy="333375"/>
           </a:xfrm>
           <a:prstGeom prst="rect">
             <a:avLst/>
@@ -7158,7 +7241,7 @@
         <p:spPr>
           <a:xfrm>
             <a:off x="5048250" y="3829050"/>
-            <a:ext cx="1600200" cy="200025"/>
+            <a:ext cx="1828800" cy="200025"/>
           </a:xfrm>
           <a:prstGeom prst="rect">
             <a:avLst/>
@@ -7213,7 +7296,7 @@
         <p:spPr>
           <a:xfrm>
             <a:off x="762000" y="4752975"/>
-            <a:ext cx="466725" cy="257175"/>
+            <a:ext cx="695325" cy="257175"/>
           </a:xfrm>
           <a:prstGeom prst="rect">
             <a:avLst/>
@@ -7248,7 +7331,7 @@
         <p:spPr>
           <a:xfrm>
             <a:off x="1600200" y="4695825"/>
-            <a:ext cx="3514725" cy="333375"/>
+            <a:ext cx="3743325" cy="333375"/>
           </a:xfrm>
           <a:prstGeom prst="rect">
             <a:avLst/>
@@ -7305,7 +7388,7 @@
         <p:spPr>
           <a:xfrm>
             <a:off x="4800600" y="4772025"/>
-            <a:ext cx="2114550" cy="200025"/>
+            <a:ext cx="2343150" cy="200025"/>
           </a:xfrm>
           <a:prstGeom prst="rect">
             <a:avLst/>
@@ -7360,7 +7443,7 @@
         <p:spPr>
           <a:xfrm>
             <a:off x="762000" y="5695950"/>
-            <a:ext cx="466725" cy="257175"/>
+            <a:ext cx="695325" cy="257175"/>
           </a:xfrm>
           <a:prstGeom prst="rect">
             <a:avLst/>
@@ -7395,7 +7478,7 @@
         <p:spPr>
           <a:xfrm>
             <a:off x="1600200" y="5638800"/>
-            <a:ext cx="4057650" cy="333375"/>
+            <a:ext cx="4286250" cy="333375"/>
           </a:xfrm>
           <a:prstGeom prst="rect">
             <a:avLst/>
@@ -7452,7 +7535,7 @@
         <p:spPr>
           <a:xfrm>
             <a:off x="5276850" y="5715000"/>
-            <a:ext cx="1952625" cy="200025"/>
+            <a:ext cx="2181225" cy="200025"/>
           </a:xfrm>
           <a:prstGeom prst="rect">
             <a:avLst/>
@@ -7584,7 +7667,7 @@
         <p:spPr>
           <a:xfrm>
             <a:off x="762000" y="314325"/>
-            <a:ext cx="419100" cy="552450"/>
+            <a:ext cx="647700" cy="552450"/>
           </a:xfrm>
           <a:prstGeom prst="rect">
             <a:avLst/>
@@ -7641,7 +7724,7 @@
         <p:spPr>
           <a:xfrm>
             <a:off x="1333500" y="466725"/>
-            <a:ext cx="857250" cy="238125"/>
+            <a:ext cx="1085850" cy="238125"/>
           </a:xfrm>
           <a:prstGeom prst="rect">
             <a:avLst/>
@@ -7676,7 +7759,7 @@
         <p:spPr>
           <a:xfrm>
             <a:off x="762000" y="971550"/>
-            <a:ext cx="3190875" cy="361950"/>
+            <a:ext cx="3419475" cy="361950"/>
           </a:xfrm>
           <a:prstGeom prst="rect">
             <a:avLst/>
@@ -7733,7 +7816,7 @@
         <p:spPr>
           <a:xfrm>
             <a:off x="3609975" y="1019175"/>
-            <a:ext cx="1562100" cy="304800"/>
+            <a:ext cx="1790700" cy="304800"/>
           </a:xfrm>
           <a:prstGeom prst="rect">
             <a:avLst/>
@@ -7790,7 +7873,7 @@
         <p:spPr>
           <a:xfrm>
             <a:off x="762000" y="1924050"/>
-            <a:ext cx="466725" cy="257175"/>
+            <a:ext cx="695325" cy="257175"/>
           </a:xfrm>
           <a:prstGeom prst="rect">
             <a:avLst/>
@@ -7825,7 +7908,7 @@
         <p:spPr>
           <a:xfrm>
             <a:off x="1600200" y="1866900"/>
-            <a:ext cx="2219325" cy="333375"/>
+            <a:ext cx="2447925" cy="333375"/>
           </a:xfrm>
           <a:prstGeom prst="rect">
             <a:avLst/>
@@ -7880,7 +7963,7 @@
         <p:spPr>
           <a:xfrm>
             <a:off x="762000" y="2867025"/>
-            <a:ext cx="466725" cy="257175"/>
+            <a:ext cx="695325" cy="257175"/>
           </a:xfrm>
           <a:prstGeom prst="rect">
             <a:avLst/>
@@ -7915,7 +7998,7 @@
         <p:spPr>
           <a:xfrm>
             <a:off x="1600200" y="2809875"/>
-            <a:ext cx="3267075" cy="333375"/>
+            <a:ext cx="3495675" cy="333375"/>
           </a:xfrm>
           <a:prstGeom prst="rect">
             <a:avLst/>
@@ -7970,7 +8053,7 @@
         <p:spPr>
           <a:xfrm>
             <a:off x="762000" y="3810000"/>
-            <a:ext cx="466725" cy="257175"/>
+            <a:ext cx="695325" cy="257175"/>
           </a:xfrm>
           <a:prstGeom prst="rect">
             <a:avLst/>
@@ -8005,7 +8088,7 @@
         <p:spPr>
           <a:xfrm>
             <a:off x="1600200" y="3752850"/>
-            <a:ext cx="1428750" cy="333375"/>
+            <a:ext cx="1657350" cy="333375"/>
           </a:xfrm>
           <a:prstGeom prst="rect">
             <a:avLst/>
@@ -8060,7 +8143,7 @@
         <p:spPr>
           <a:xfrm>
             <a:off x="762000" y="4752975"/>
-            <a:ext cx="466725" cy="257175"/>
+            <a:ext cx="695325" cy="257175"/>
           </a:xfrm>
           <a:prstGeom prst="rect">
             <a:avLst/>
@@ -8095,7 +8178,7 @@
         <p:spPr>
           <a:xfrm>
             <a:off x="1600200" y="4695825"/>
-            <a:ext cx="3009900" cy="333375"/>
+            <a:ext cx="3238500" cy="333375"/>
           </a:xfrm>
           <a:prstGeom prst="rect">
             <a:avLst/>
@@ -8150,7 +8233,7 @@
         <p:spPr>
           <a:xfrm>
             <a:off x="762000" y="5695950"/>
-            <a:ext cx="466725" cy="257175"/>
+            <a:ext cx="695325" cy="257175"/>
           </a:xfrm>
           <a:prstGeom prst="rect">
             <a:avLst/>
@@ -8185,7 +8268,7 @@
         <p:spPr>
           <a:xfrm>
             <a:off x="1600200" y="5638800"/>
-            <a:ext cx="1952625" cy="333375"/>
+            <a:ext cx="2181225" cy="333375"/>
           </a:xfrm>
           <a:prstGeom prst="rect">
             <a:avLst/>
@@ -8242,7 +8325,7 @@
         <p:spPr>
           <a:xfrm>
             <a:off x="3448050" y="5715000"/>
-            <a:ext cx="1990725" cy="200025"/>
+            <a:ext cx="2219325" cy="200025"/>
           </a:xfrm>
           <a:prstGeom prst="rect">
             <a:avLst/>
@@ -8374,7 +8457,7 @@
         <p:spPr>
           <a:xfrm>
             <a:off x="762000" y="314325"/>
-            <a:ext cx="419100" cy="552450"/>
+            <a:ext cx="647700" cy="552450"/>
           </a:xfrm>
           <a:prstGeom prst="rect">
             <a:avLst/>
@@ -8431,7 +8514,7 @@
         <p:spPr>
           <a:xfrm>
             <a:off x="1333500" y="466725"/>
-            <a:ext cx="857250" cy="238125"/>
+            <a:ext cx="1085850" cy="238125"/>
           </a:xfrm>
           <a:prstGeom prst="rect">
             <a:avLst/>
@@ -8466,7 +8549,7 @@
         <p:spPr>
           <a:xfrm>
             <a:off x="762000" y="971550"/>
-            <a:ext cx="2962275" cy="361950"/>
+            <a:ext cx="3190875" cy="361950"/>
           </a:xfrm>
           <a:prstGeom prst="rect">
             <a:avLst/>
@@ -8512,7 +8595,7 @@
         <p:spPr>
           <a:xfrm>
             <a:off x="3409950" y="1019175"/>
-            <a:ext cx="2019300" cy="304800"/>
+            <a:ext cx="2247900" cy="304800"/>
           </a:xfrm>
           <a:prstGeom prst="rect">
             <a:avLst/>
@@ -8569,7 +8652,7 @@
         <p:spPr>
           <a:xfrm>
             <a:off x="762000" y="1924050"/>
-            <a:ext cx="466725" cy="257175"/>
+            <a:ext cx="695325" cy="257175"/>
           </a:xfrm>
           <a:prstGeom prst="rect">
             <a:avLst/>
@@ -8604,7 +8687,7 @@
         <p:spPr>
           <a:xfrm>
             <a:off x="1600200" y="1866900"/>
-            <a:ext cx="2171700" cy="333375"/>
+            <a:ext cx="2400300" cy="333375"/>
           </a:xfrm>
           <a:prstGeom prst="rect">
             <a:avLst/>
@@ -8659,7 +8742,7 @@
         <p:spPr>
           <a:xfrm>
             <a:off x="762000" y="2867025"/>
-            <a:ext cx="466725" cy="257175"/>
+            <a:ext cx="695325" cy="257175"/>
           </a:xfrm>
           <a:prstGeom prst="rect">
             <a:avLst/>
@@ -8694,7 +8777,7 @@
         <p:spPr>
           <a:xfrm>
             <a:off x="1600200" y="2809875"/>
-            <a:ext cx="6638925" cy="333375"/>
+            <a:ext cx="6867525" cy="333375"/>
           </a:xfrm>
           <a:prstGeom prst="rect">
             <a:avLst/>
@@ -8749,7 +8832,7 @@
         <p:spPr>
           <a:xfrm>
             <a:off x="762000" y="3810000"/>
-            <a:ext cx="466725" cy="257175"/>
+            <a:ext cx="695325" cy="257175"/>
           </a:xfrm>
           <a:prstGeom prst="rect">
             <a:avLst/>
@@ -8784,7 +8867,7 @@
         <p:spPr>
           <a:xfrm>
             <a:off x="1600200" y="3752850"/>
-            <a:ext cx="4552950" cy="333375"/>
+            <a:ext cx="4781550" cy="333375"/>
           </a:xfrm>
           <a:prstGeom prst="rect">
             <a:avLst/>
@@ -8839,7 +8922,7 @@
         <p:spPr>
           <a:xfrm>
             <a:off x="762000" y="4752975"/>
-            <a:ext cx="466725" cy="257175"/>
+            <a:ext cx="695325" cy="257175"/>
           </a:xfrm>
           <a:prstGeom prst="rect">
             <a:avLst/>
@@ -8874,7 +8957,7 @@
         <p:spPr>
           <a:xfrm>
             <a:off x="1600200" y="4695825"/>
-            <a:ext cx="4276725" cy="333375"/>
+            <a:ext cx="4505325" cy="333375"/>
           </a:xfrm>
           <a:prstGeom prst="rect">
             <a:avLst/>
@@ -8929,7 +9012,7 @@
         <p:spPr>
           <a:xfrm>
             <a:off x="762000" y="5695950"/>
-            <a:ext cx="466725" cy="257175"/>
+            <a:ext cx="695325" cy="257175"/>
           </a:xfrm>
           <a:prstGeom prst="rect">
             <a:avLst/>
@@ -8964,7 +9047,7 @@
         <p:spPr>
           <a:xfrm>
             <a:off x="1600200" y="5638800"/>
-            <a:ext cx="3495675" cy="333375"/>
+            <a:ext cx="3724275" cy="333375"/>
           </a:xfrm>
           <a:prstGeom prst="rect">
             <a:avLst/>
@@ -9096,7 +9179,7 @@
         <p:spPr>
           <a:xfrm>
             <a:off x="762000" y="314325"/>
-            <a:ext cx="419100" cy="552450"/>
+            <a:ext cx="647700" cy="552450"/>
           </a:xfrm>
           <a:prstGeom prst="rect">
             <a:avLst/>
@@ -9153,7 +9236,7 @@
         <p:spPr>
           <a:xfrm>
             <a:off x="1333500" y="466725"/>
-            <a:ext cx="857250" cy="238125"/>
+            <a:ext cx="1085850" cy="238125"/>
           </a:xfrm>
           <a:prstGeom prst="rect">
             <a:avLst/>
@@ -9188,7 +9271,7 @@
         <p:spPr>
           <a:xfrm>
             <a:off x="762000" y="971550"/>
-            <a:ext cx="1638300" cy="361950"/>
+            <a:ext cx="1866900" cy="361950"/>
           </a:xfrm>
           <a:prstGeom prst="rect">
             <a:avLst/>
@@ -9234,7 +9317,7 @@
         <p:spPr>
           <a:xfrm>
             <a:off x="2257425" y="1019175"/>
-            <a:ext cx="2524125" cy="304800"/>
+            <a:ext cx="2752725" cy="304800"/>
           </a:xfrm>
           <a:prstGeom prst="rect">
             <a:avLst/>
@@ -9291,7 +9374,7 @@
         <p:spPr>
           <a:xfrm>
             <a:off x="762000" y="1924050"/>
-            <a:ext cx="466725" cy="257175"/>
+            <a:ext cx="695325" cy="257175"/>
           </a:xfrm>
           <a:prstGeom prst="rect">
             <a:avLst/>
@@ -9326,7 +9409,7 @@
         <p:spPr>
           <a:xfrm>
             <a:off x="1600200" y="1866900"/>
-            <a:ext cx="2733675" cy="333375"/>
+            <a:ext cx="2962275" cy="333375"/>
           </a:xfrm>
           <a:prstGeom prst="rect">
             <a:avLst/>
@@ -9381,7 +9464,7 @@
         <p:spPr>
           <a:xfrm>
             <a:off x="762000" y="2867025"/>
-            <a:ext cx="466725" cy="257175"/>
+            <a:ext cx="695325" cy="257175"/>
           </a:xfrm>
           <a:prstGeom prst="rect">
             <a:avLst/>
@@ -9416,7 +9499,7 @@
         <p:spPr>
           <a:xfrm>
             <a:off x="1600200" y="2809875"/>
-            <a:ext cx="2743200" cy="333375"/>
+            <a:ext cx="2971800" cy="333375"/>
           </a:xfrm>
           <a:prstGeom prst="rect">
             <a:avLst/>
@@ -9471,7 +9554,7 @@
         <p:spPr>
           <a:xfrm>
             <a:off x="762000" y="3810000"/>
-            <a:ext cx="466725" cy="257175"/>
+            <a:ext cx="695325" cy="257175"/>
           </a:xfrm>
           <a:prstGeom prst="rect">
             <a:avLst/>
@@ -9506,7 +9589,7 @@
         <p:spPr>
           <a:xfrm>
             <a:off x="1600200" y="3752850"/>
-            <a:ext cx="1952625" cy="333375"/>
+            <a:ext cx="2181225" cy="333375"/>
           </a:xfrm>
           <a:prstGeom prst="rect">
             <a:avLst/>
@@ -9561,7 +9644,7 @@
         <p:spPr>
           <a:xfrm>
             <a:off x="762000" y="4752975"/>
-            <a:ext cx="466725" cy="257175"/>
+            <a:ext cx="695325" cy="257175"/>
           </a:xfrm>
           <a:prstGeom prst="rect">
             <a:avLst/>
@@ -9596,7 +9679,7 @@
         <p:spPr>
           <a:xfrm>
             <a:off x="1600200" y="4695825"/>
-            <a:ext cx="2476500" cy="333375"/>
+            <a:ext cx="2705100" cy="333375"/>
           </a:xfrm>
           <a:prstGeom prst="rect">
             <a:avLst/>
@@ -9651,7 +9734,7 @@
         <p:spPr>
           <a:xfrm>
             <a:off x="762000" y="5695950"/>
-            <a:ext cx="466725" cy="257175"/>
+            <a:ext cx="695325" cy="257175"/>
           </a:xfrm>
           <a:prstGeom prst="rect">
             <a:avLst/>
@@ -9686,7 +9769,7 @@
         <p:spPr>
           <a:xfrm>
             <a:off x="1600200" y="5638800"/>
-            <a:ext cx="2743200" cy="333375"/>
+            <a:ext cx="2971800" cy="333375"/>
           </a:xfrm>
           <a:prstGeom prst="rect">
             <a:avLst/>
@@ -9818,7 +9901,7 @@
         <p:spPr>
           <a:xfrm>
             <a:off x="762000" y="314325"/>
-            <a:ext cx="419100" cy="552450"/>
+            <a:ext cx="647700" cy="552450"/>
           </a:xfrm>
           <a:prstGeom prst="rect">
             <a:avLst/>
@@ -9875,7 +9958,7 @@
         <p:spPr>
           <a:xfrm>
             <a:off x="1333500" y="466725"/>
-            <a:ext cx="857250" cy="238125"/>
+            <a:ext cx="1085850" cy="238125"/>
           </a:xfrm>
           <a:prstGeom prst="rect">
             <a:avLst/>
@@ -9910,7 +9993,7 @@
         <p:spPr>
           <a:xfrm>
             <a:off x="762000" y="971550"/>
-            <a:ext cx="3429000" cy="361950"/>
+            <a:ext cx="3657600" cy="361950"/>
           </a:xfrm>
           <a:prstGeom prst="rect">
             <a:avLst/>
@@ -9967,7 +10050,7 @@
         <p:spPr>
           <a:xfrm>
             <a:off x="3819525" y="1019175"/>
-            <a:ext cx="2733675" cy="304800"/>
+            <a:ext cx="2962275" cy="304800"/>
           </a:xfrm>
           <a:prstGeom prst="rect">
             <a:avLst/>
@@ -10024,7 +10107,7 @@
         <p:spPr>
           <a:xfrm>
             <a:off x="762000" y="1876425"/>
-            <a:ext cx="466725" cy="257175"/>
+            <a:ext cx="695325" cy="257175"/>
           </a:xfrm>
           <a:prstGeom prst="rect">
             <a:avLst/>
@@ -10059,7 +10142,7 @@
         <p:spPr>
           <a:xfrm>
             <a:off x="1600200" y="1819275"/>
-            <a:ext cx="3514725" cy="333375"/>
+            <a:ext cx="3743325" cy="333375"/>
           </a:xfrm>
           <a:prstGeom prst="rect">
             <a:avLst/>
@@ -10114,7 +10197,7 @@
         <p:spPr>
           <a:xfrm>
             <a:off x="762000" y="2714625"/>
-            <a:ext cx="466725" cy="257175"/>
+            <a:ext cx="695325" cy="257175"/>
           </a:xfrm>
           <a:prstGeom prst="rect">
             <a:avLst/>
@@ -10149,7 +10232,7 @@
         <p:spPr>
           <a:xfrm>
             <a:off x="1600200" y="2657475"/>
-            <a:ext cx="3762375" cy="333375"/>
+            <a:ext cx="3990975" cy="333375"/>
           </a:xfrm>
           <a:prstGeom prst="rect">
             <a:avLst/>
@@ -10204,7 +10287,7 @@
         <p:spPr>
           <a:xfrm>
             <a:off x="762000" y="3562350"/>
-            <a:ext cx="466725" cy="257175"/>
+            <a:ext cx="695325" cy="257175"/>
           </a:xfrm>
           <a:prstGeom prst="rect">
             <a:avLst/>
@@ -10239,7 +10322,7 @@
         <p:spPr>
           <a:xfrm>
             <a:off x="1600200" y="3505200"/>
-            <a:ext cx="3495675" cy="333375"/>
+            <a:ext cx="3724275" cy="333375"/>
           </a:xfrm>
           <a:prstGeom prst="rect">
             <a:avLst/>
@@ -10294,7 +10377,7 @@
         <p:spPr>
           <a:xfrm>
             <a:off x="762000" y="4400550"/>
-            <a:ext cx="466725" cy="257175"/>
+            <a:ext cx="695325" cy="257175"/>
           </a:xfrm>
           <a:prstGeom prst="rect">
             <a:avLst/>
@@ -10329,7 +10412,7 @@
         <p:spPr>
           <a:xfrm>
             <a:off x="1600200" y="4343400"/>
-            <a:ext cx="3771900" cy="333375"/>
+            <a:ext cx="4000500" cy="333375"/>
           </a:xfrm>
           <a:prstGeom prst="rect">
             <a:avLst/>
@@ -10384,7 +10467,7 @@
         <p:spPr>
           <a:xfrm>
             <a:off x="762000" y="5191125"/>
-            <a:ext cx="466725" cy="257175"/>
+            <a:ext cx="695325" cy="257175"/>
           </a:xfrm>
           <a:prstGeom prst="rect">
             <a:avLst/>
@@ -10419,7 +10502,7 @@
         <p:spPr>
           <a:xfrm>
             <a:off x="1600200" y="5133975"/>
-            <a:ext cx="6343650" cy="333375"/>
+            <a:ext cx="6572250" cy="333375"/>
           </a:xfrm>
           <a:prstGeom prst="rect">
             <a:avLst/>
@@ -10476,7 +10559,7 @@
         <p:spPr>
           <a:xfrm>
             <a:off x="7267575" y="5210175"/>
-            <a:ext cx="3409950" cy="200025"/>
+            <a:ext cx="3638550" cy="200025"/>
           </a:xfrm>
           <a:prstGeom prst="rect">
             <a:avLst/>
@@ -10511,7 +10594,7 @@
         <p:spPr>
           <a:xfrm>
             <a:off x="1600200" y="5753100"/>
-            <a:ext cx="342900" cy="209550"/>
+            <a:ext cx="571500" cy="209550"/>
           </a:xfrm>
           <a:prstGeom prst="rect">
             <a:avLst/>
@@ -10566,7 +10649,7 @@
         <p:spPr>
           <a:xfrm>
             <a:off x="1600200" y="6257925"/>
-            <a:ext cx="342900" cy="209550"/>
+            <a:ext cx="571500" cy="209550"/>
           </a:xfrm>
           <a:prstGeom prst="rect">
             <a:avLst/>
@@ -10698,7 +10781,7 @@
         <p:spPr>
           <a:xfrm>
             <a:off x="762000" y="314325"/>
-            <a:ext cx="419100" cy="552450"/>
+            <a:ext cx="647700" cy="552450"/>
           </a:xfrm>
           <a:prstGeom prst="rect">
             <a:avLst/>
@@ -10733,7 +10816,7 @@
         <p:spPr>
           <a:xfrm>
             <a:off x="762000" y="1038225"/>
-            <a:ext cx="4181475" cy="619125"/>
+            <a:ext cx="4410075" cy="619125"/>
           </a:xfrm>
           <a:prstGeom prst="rect">
             <a:avLst/>
@@ -10779,7 +10862,7 @@
         <p:spPr>
           <a:xfrm>
             <a:off x="762000" y="1771650"/>
-            <a:ext cx="1762125" cy="419100"/>
+            <a:ext cx="1990725" cy="419100"/>
           </a:xfrm>
           <a:prstGeom prst="rect">
             <a:avLst/>
@@ -10836,7 +10919,7 @@
         <p:spPr>
           <a:xfrm>
             <a:off x="2514600" y="1857375"/>
-            <a:ext cx="1333500" cy="238125"/>
+            <a:ext cx="1562100" cy="238125"/>
           </a:xfrm>
           <a:prstGeom prst="rect">
             <a:avLst/>
@@ -10893,7 +10976,7 @@
         <p:spPr>
           <a:xfrm>
             <a:off x="866775" y="2343150"/>
-            <a:ext cx="419100" cy="190500"/>
+            <a:ext cx="647700" cy="190500"/>
           </a:xfrm>
           <a:prstGeom prst="rect">
             <a:avLst/>
@@ -10928,7 +11011,7 @@
         <p:spPr>
           <a:xfrm>
             <a:off x="1371600" y="2305050"/>
-            <a:ext cx="2647950" cy="266700"/>
+            <a:ext cx="2876550" cy="266700"/>
           </a:xfrm>
           <a:prstGeom prst="rect">
             <a:avLst/>
@@ -10963,7 +11046,7 @@
         <p:spPr>
           <a:xfrm>
             <a:off x="3705225" y="2305050"/>
-            <a:ext cx="3838575" cy="276225"/>
+            <a:ext cx="4067175" cy="276225"/>
           </a:xfrm>
           <a:prstGeom prst="rect">
             <a:avLst/>
@@ -11020,7 +11103,7 @@
         <p:spPr>
           <a:xfrm>
             <a:off x="762000" y="3362325"/>
-            <a:ext cx="504825" cy="285750"/>
+            <a:ext cx="733425" cy="285750"/>
           </a:xfrm>
           <a:prstGeom prst="rect">
             <a:avLst/>
@@ -11055,7 +11138,7 @@
         <p:spPr>
           <a:xfrm>
             <a:off x="1600200" y="3324225"/>
-            <a:ext cx="4810125" cy="352425"/>
+            <a:ext cx="5038725" cy="352425"/>
           </a:xfrm>
           <a:prstGeom prst="rect">
             <a:avLst/>
@@ -11126,7 +11209,7 @@
         <p:spPr>
           <a:xfrm>
             <a:off x="7810500" y="3343275"/>
-            <a:ext cx="3248025" cy="304800"/>
+            <a:ext cx="3476625" cy="304800"/>
           </a:xfrm>
           <a:prstGeom prst="rect">
             <a:avLst/>
@@ -11184,7 +11267,7 @@
         <p:spPr>
           <a:xfrm>
             <a:off x="762000" y="4552950"/>
-            <a:ext cx="504825" cy="285750"/>
+            <a:ext cx="733425" cy="285750"/>
           </a:xfrm>
           <a:prstGeom prst="rect">
             <a:avLst/>
@@ -11219,7 +11302,7 @@
         <p:spPr>
           <a:xfrm>
             <a:off x="1600200" y="4514850"/>
-            <a:ext cx="5362575" cy="352425"/>
+            <a:ext cx="5591175" cy="352425"/>
           </a:xfrm>
           <a:prstGeom prst="rect">
             <a:avLst/>
@@ -11290,7 +11373,7 @@
         <p:spPr>
           <a:xfrm>
             <a:off x="7810500" y="4533900"/>
-            <a:ext cx="2762250" cy="304800"/>
+            <a:ext cx="2990850" cy="304800"/>
           </a:xfrm>
           <a:prstGeom prst="rect">
             <a:avLst/>
@@ -11348,7 +11431,7 @@
         <p:spPr>
           <a:xfrm>
             <a:off x="762000" y="5743575"/>
-            <a:ext cx="504825" cy="285750"/>
+            <a:ext cx="733425" cy="285750"/>
           </a:xfrm>
           <a:prstGeom prst="rect">
             <a:avLst/>
@@ -11383,7 +11466,7 @@
         <p:spPr>
           <a:xfrm>
             <a:off x="1600200" y="5705475"/>
-            <a:ext cx="3838575" cy="352425"/>
+            <a:ext cx="4067175" cy="352425"/>
           </a:xfrm>
           <a:prstGeom prst="rect">
             <a:avLst/>
@@ -11454,7 +11537,7 @@
         <p:spPr>
           <a:xfrm>
             <a:off x="7810500" y="5734050"/>
-            <a:ext cx="3009900" cy="304800"/>
+            <a:ext cx="3238500" cy="304800"/>
           </a:xfrm>
           <a:prstGeom prst="rect">
             <a:avLst/>
@@ -11566,7 +11649,7 @@
         <p:spPr>
           <a:xfrm>
             <a:off x="762000" y="314325"/>
-            <a:ext cx="419100" cy="552450"/>
+            <a:ext cx="647700" cy="552450"/>
           </a:xfrm>
           <a:prstGeom prst="rect">
             <a:avLst/>
@@ -11623,7 +11706,7 @@
         <p:spPr>
           <a:xfrm>
             <a:off x="1333500" y="466725"/>
-            <a:ext cx="857250" cy="238125"/>
+            <a:ext cx="1085850" cy="238125"/>
           </a:xfrm>
           <a:prstGeom prst="rect">
             <a:avLst/>
@@ -11658,7 +11741,7 @@
         <p:spPr>
           <a:xfrm>
             <a:off x="762000" y="971550"/>
-            <a:ext cx="1190625" cy="361950"/>
+            <a:ext cx="1419225" cy="361950"/>
           </a:xfrm>
           <a:prstGeom prst="rect">
             <a:avLst/>
@@ -11704,7 +11787,7 @@
         <p:spPr>
           <a:xfrm>
             <a:off x="1866900" y="1019175"/>
-            <a:ext cx="1562100" cy="304800"/>
+            <a:ext cx="1790700" cy="304800"/>
           </a:xfrm>
           <a:prstGeom prst="rect">
             <a:avLst/>
@@ -11761,7 +11844,7 @@
         <p:spPr>
           <a:xfrm>
             <a:off x="762000" y="1924050"/>
-            <a:ext cx="466725" cy="257175"/>
+            <a:ext cx="695325" cy="257175"/>
           </a:xfrm>
           <a:prstGeom prst="rect">
             <a:avLst/>
@@ -11796,7 +11879,7 @@
         <p:spPr>
           <a:xfrm>
             <a:off x="1600200" y="1866900"/>
-            <a:ext cx="2990850" cy="333375"/>
+            <a:ext cx="3219450" cy="333375"/>
           </a:xfrm>
           <a:prstGeom prst="rect">
             <a:avLst/>
@@ -11851,7 +11934,7 @@
         <p:spPr>
           <a:xfrm>
             <a:off x="762000" y="2867025"/>
-            <a:ext cx="466725" cy="257175"/>
+            <a:ext cx="695325" cy="257175"/>
           </a:xfrm>
           <a:prstGeom prst="rect">
             <a:avLst/>
@@ -11886,7 +11969,7 @@
         <p:spPr>
           <a:xfrm>
             <a:off x="1600200" y="2809875"/>
-            <a:ext cx="2733675" cy="333375"/>
+            <a:ext cx="2962275" cy="333375"/>
           </a:xfrm>
           <a:prstGeom prst="rect">
             <a:avLst/>
@@ -11941,7 +12024,7 @@
         <p:spPr>
           <a:xfrm>
             <a:off x="762000" y="3810000"/>
-            <a:ext cx="466725" cy="257175"/>
+            <a:ext cx="695325" cy="257175"/>
           </a:xfrm>
           <a:prstGeom prst="rect">
             <a:avLst/>
@@ -11976,7 +12059,7 @@
         <p:spPr>
           <a:xfrm>
             <a:off x="1600200" y="3752850"/>
-            <a:ext cx="2466975" cy="333375"/>
+            <a:ext cx="2695575" cy="333375"/>
           </a:xfrm>
           <a:prstGeom prst="rect">
             <a:avLst/>
@@ -12031,7 +12114,7 @@
         <p:spPr>
           <a:xfrm>
             <a:off x="762000" y="4752975"/>
-            <a:ext cx="466725" cy="257175"/>
+            <a:ext cx="695325" cy="257175"/>
           </a:xfrm>
           <a:prstGeom prst="rect">
             <a:avLst/>
@@ -12066,7 +12149,7 @@
         <p:spPr>
           <a:xfrm>
             <a:off x="1600200" y="4695825"/>
-            <a:ext cx="2733675" cy="333375"/>
+            <a:ext cx="2962275" cy="333375"/>
           </a:xfrm>
           <a:prstGeom prst="rect">
             <a:avLst/>
@@ -12121,7 +12204,7 @@
         <p:spPr>
           <a:xfrm>
             <a:off x="762000" y="5695950"/>
-            <a:ext cx="466725" cy="257175"/>
+            <a:ext cx="695325" cy="257175"/>
           </a:xfrm>
           <a:prstGeom prst="rect">
             <a:avLst/>
@@ -12156,7 +12239,7 @@
         <p:spPr>
           <a:xfrm>
             <a:off x="1600200" y="5638800"/>
-            <a:ext cx="3524250" cy="333375"/>
+            <a:ext cx="3752850" cy="333375"/>
           </a:xfrm>
           <a:prstGeom prst="rect">
             <a:avLst/>
@@ -12213,7 +12296,7 @@
         <p:spPr>
           <a:xfrm>
             <a:off x="4810125" y="5715000"/>
-            <a:ext cx="2305050" cy="200025"/>
+            <a:ext cx="2533650" cy="200025"/>
           </a:xfrm>
           <a:prstGeom prst="rect">
             <a:avLst/>
@@ -12345,7 +12428,7 @@
         <p:spPr>
           <a:xfrm>
             <a:off x="762000" y="314325"/>
-            <a:ext cx="419100" cy="552450"/>
+            <a:ext cx="647700" cy="552450"/>
           </a:xfrm>
           <a:prstGeom prst="rect">
             <a:avLst/>
@@ -12402,7 +12485,7 @@
         <p:spPr>
           <a:xfrm>
             <a:off x="1333500" y="466725"/>
-            <a:ext cx="857250" cy="238125"/>
+            <a:ext cx="1085850" cy="238125"/>
           </a:xfrm>
           <a:prstGeom prst="rect">
             <a:avLst/>
@@ -12437,7 +12520,7 @@
         <p:spPr>
           <a:xfrm>
             <a:off x="762000" y="971550"/>
-            <a:ext cx="2524125" cy="361950"/>
+            <a:ext cx="2752725" cy="361950"/>
           </a:xfrm>
           <a:prstGeom prst="rect">
             <a:avLst/>
@@ -12483,7 +12566,7 @@
         <p:spPr>
           <a:xfrm>
             <a:off x="3028950" y="1019175"/>
-            <a:ext cx="2514600" cy="304800"/>
+            <a:ext cx="2743200" cy="304800"/>
           </a:xfrm>
           <a:prstGeom prst="rect">
             <a:avLst/>
@@ -12540,7 +12623,7 @@
         <p:spPr>
           <a:xfrm>
             <a:off x="762000" y="1924050"/>
-            <a:ext cx="466725" cy="257175"/>
+            <a:ext cx="695325" cy="257175"/>
           </a:xfrm>
           <a:prstGeom prst="rect">
             <a:avLst/>
@@ -12575,7 +12658,7 @@
         <p:spPr>
           <a:xfrm>
             <a:off x="1600200" y="1866900"/>
-            <a:ext cx="2466975" cy="333375"/>
+            <a:ext cx="2695575" cy="333375"/>
           </a:xfrm>
           <a:prstGeom prst="rect">
             <a:avLst/>
@@ -12632,7 +12715,7 @@
         <p:spPr>
           <a:xfrm>
             <a:off x="3895725" y="1943100"/>
-            <a:ext cx="2362200" cy="200025"/>
+            <a:ext cx="2590800" cy="200025"/>
           </a:xfrm>
           <a:prstGeom prst="rect">
             <a:avLst/>
@@ -12687,7 +12770,7 @@
         <p:spPr>
           <a:xfrm>
             <a:off x="762000" y="2867025"/>
-            <a:ext cx="466725" cy="257175"/>
+            <a:ext cx="695325" cy="257175"/>
           </a:xfrm>
           <a:prstGeom prst="rect">
             <a:avLst/>
@@ -12722,7 +12805,7 @@
         <p:spPr>
           <a:xfrm>
             <a:off x="1600200" y="2809875"/>
-            <a:ext cx="3257550" cy="333375"/>
+            <a:ext cx="3486150" cy="333375"/>
           </a:xfrm>
           <a:prstGeom prst="rect">
             <a:avLst/>
@@ -12777,7 +12860,7 @@
         <p:spPr>
           <a:xfrm>
             <a:off x="762000" y="3810000"/>
-            <a:ext cx="466725" cy="257175"/>
+            <a:ext cx="695325" cy="257175"/>
           </a:xfrm>
           <a:prstGeom prst="rect">
             <a:avLst/>
@@ -12812,7 +12895,7 @@
         <p:spPr>
           <a:xfrm>
             <a:off x="1600200" y="3752850"/>
-            <a:ext cx="2990850" cy="333375"/>
+            <a:ext cx="3219450" cy="333375"/>
           </a:xfrm>
           <a:prstGeom prst="rect">
             <a:avLst/>
@@ -12867,7 +12950,7 @@
         <p:spPr>
           <a:xfrm>
             <a:off x="762000" y="4752975"/>
-            <a:ext cx="466725" cy="257175"/>
+            <a:ext cx="695325" cy="257175"/>
           </a:xfrm>
           <a:prstGeom prst="rect">
             <a:avLst/>
@@ -12902,7 +12985,7 @@
         <p:spPr>
           <a:xfrm>
             <a:off x="1600200" y="4695825"/>
-            <a:ext cx="3524250" cy="333375"/>
+            <a:ext cx="3752850" cy="333375"/>
           </a:xfrm>
           <a:prstGeom prst="rect">
             <a:avLst/>
@@ -12957,7 +13040,7 @@
         <p:spPr>
           <a:xfrm>
             <a:off x="762000" y="5695950"/>
-            <a:ext cx="466725" cy="257175"/>
+            <a:ext cx="695325" cy="257175"/>
           </a:xfrm>
           <a:prstGeom prst="rect">
             <a:avLst/>
@@ -12992,7 +13075,7 @@
         <p:spPr>
           <a:xfrm>
             <a:off x="1600200" y="5638800"/>
-            <a:ext cx="3781425" cy="333375"/>
+            <a:ext cx="4010025" cy="333375"/>
           </a:xfrm>
           <a:prstGeom prst="rect">
             <a:avLst/>
@@ -13049,7 +13132,7 @@
         <p:spPr>
           <a:xfrm>
             <a:off x="5038725" y="5715000"/>
-            <a:ext cx="2028825" cy="200025"/>
+            <a:ext cx="2257425" cy="200025"/>
           </a:xfrm>
           <a:prstGeom prst="rect">
             <a:avLst/>
@@ -13181,7 +13264,7 @@
         <p:spPr>
           <a:xfrm>
             <a:off x="762000" y="228600"/>
-            <a:ext cx="1228725" cy="714375"/>
+            <a:ext cx="1457325" cy="714375"/>
           </a:xfrm>
           <a:prstGeom prst="rect">
             <a:avLst/>
@@ -13216,7 +13299,7 @@
         <p:spPr>
           <a:xfrm>
             <a:off x="1905000" y="476250"/>
-            <a:ext cx="704850" cy="285750"/>
+            <a:ext cx="933450" cy="285750"/>
           </a:xfrm>
           <a:prstGeom prst="rect">
             <a:avLst/>
@@ -13295,7 +13378,7 @@
         <p:spPr>
           <a:xfrm>
             <a:off x="762000" y="1219200"/>
-            <a:ext cx="247650" cy="238125"/>
+            <a:ext cx="476250" cy="238125"/>
           </a:xfrm>
           <a:prstGeom prst="rect">
             <a:avLst/>
@@ -13330,7 +13413,7 @@
         <p:spPr>
           <a:xfrm>
             <a:off x="990600" y="1219200"/>
-            <a:ext cx="1666875" cy="238125"/>
+            <a:ext cx="1895475" cy="238125"/>
           </a:xfrm>
           <a:prstGeom prst="rect">
             <a:avLst/>
@@ -13376,7 +13459,7 @@
         <p:spPr>
           <a:xfrm>
             <a:off x="2457450" y="1219200"/>
-            <a:ext cx="1047750" cy="238125"/>
+            <a:ext cx="1276350" cy="238125"/>
           </a:xfrm>
           <a:prstGeom prst="rect">
             <a:avLst/>
@@ -13411,7 +13494,7 @@
         <p:spPr>
           <a:xfrm>
             <a:off x="762000" y="1562100"/>
-            <a:ext cx="342900" cy="161925"/>
+            <a:ext cx="571500" cy="161925"/>
           </a:xfrm>
           <a:prstGeom prst="rect">
             <a:avLst/>
@@ -13446,7 +13529,7 @@
         <p:spPr>
           <a:xfrm>
             <a:off x="1181100" y="1543050"/>
-            <a:ext cx="2933700" cy="190500"/>
+            <a:ext cx="3162300" cy="190500"/>
           </a:xfrm>
           <a:prstGeom prst="rect">
             <a:avLst/>
@@ -13495,7 +13578,7 @@
         <p:spPr>
           <a:xfrm>
             <a:off x="762000" y="1800225"/>
-            <a:ext cx="342900" cy="161925"/>
+            <a:ext cx="571500" cy="161925"/>
           </a:xfrm>
           <a:prstGeom prst="rect">
             <a:avLst/>
@@ -13530,7 +13613,7 @@
         <p:spPr>
           <a:xfrm>
             <a:off x="1181100" y="1781175"/>
-            <a:ext cx="2905125" cy="190500"/>
+            <a:ext cx="3133725" cy="190500"/>
           </a:xfrm>
           <a:prstGeom prst="rect">
             <a:avLst/>
@@ -13579,7 +13662,7 @@
         <p:spPr>
           <a:xfrm>
             <a:off x="762000" y="2038350"/>
-            <a:ext cx="342900" cy="161925"/>
+            <a:ext cx="571500" cy="161925"/>
           </a:xfrm>
           <a:prstGeom prst="rect">
             <a:avLst/>
@@ -13614,7 +13697,7 @@
         <p:spPr>
           <a:xfrm>
             <a:off x="1181100" y="2019300"/>
-            <a:ext cx="2533650" cy="190500"/>
+            <a:ext cx="2762250" cy="190500"/>
           </a:xfrm>
           <a:prstGeom prst="rect">
             <a:avLst/>
@@ -13663,7 +13746,7 @@
         <p:spPr>
           <a:xfrm>
             <a:off x="762000" y="2286000"/>
-            <a:ext cx="342900" cy="161925"/>
+            <a:ext cx="571500" cy="161925"/>
           </a:xfrm>
           <a:prstGeom prst="rect">
             <a:avLst/>
@@ -13698,7 +13781,7 @@
         <p:spPr>
           <a:xfrm>
             <a:off x="1181100" y="2266950"/>
-            <a:ext cx="3924300" cy="190500"/>
+            <a:ext cx="4152900" cy="190500"/>
           </a:xfrm>
           <a:prstGeom prst="rect">
             <a:avLst/>
@@ -13747,7 +13830,7 @@
         <p:spPr>
           <a:xfrm>
             <a:off x="762000" y="2524125"/>
-            <a:ext cx="342900" cy="161925"/>
+            <a:ext cx="571500" cy="161925"/>
           </a:xfrm>
           <a:prstGeom prst="rect">
             <a:avLst/>
@@ -13782,7 +13865,7 @@
         <p:spPr>
           <a:xfrm>
             <a:off x="1181100" y="2505075"/>
-            <a:ext cx="2695575" cy="190500"/>
+            <a:ext cx="2924175" cy="190500"/>
           </a:xfrm>
           <a:prstGeom prst="rect">
             <a:avLst/>
@@ -13854,7 +13937,7 @@
         <p:spPr>
           <a:xfrm>
             <a:off x="762000" y="3095625"/>
-            <a:ext cx="247650" cy="238125"/>
+            <a:ext cx="476250" cy="238125"/>
           </a:xfrm>
           <a:prstGeom prst="rect">
             <a:avLst/>
@@ -13889,7 +13972,7 @@
         <p:spPr>
           <a:xfrm>
             <a:off x="990600" y="3095625"/>
-            <a:ext cx="1285875" cy="238125"/>
+            <a:ext cx="1514475" cy="238125"/>
           </a:xfrm>
           <a:prstGeom prst="rect">
             <a:avLst/>
@@ -13935,7 +14018,7 @@
         <p:spPr>
           <a:xfrm>
             <a:off x="2124075" y="3095625"/>
-            <a:ext cx="1409700" cy="238125"/>
+            <a:ext cx="1638300" cy="238125"/>
           </a:xfrm>
           <a:prstGeom prst="rect">
             <a:avLst/>
@@ -13970,7 +14053,7 @@
         <p:spPr>
           <a:xfrm>
             <a:off x="762000" y="3438525"/>
-            <a:ext cx="342900" cy="161925"/>
+            <a:ext cx="571500" cy="161925"/>
           </a:xfrm>
           <a:prstGeom prst="rect">
             <a:avLst/>
@@ -14005,7 +14088,7 @@
         <p:spPr>
           <a:xfrm>
             <a:off x="1181100" y="3419475"/>
-            <a:ext cx="2362200" cy="190500"/>
+            <a:ext cx="2590800" cy="190500"/>
           </a:xfrm>
           <a:prstGeom prst="rect">
             <a:avLst/>
@@ -14054,7 +14137,7 @@
         <p:spPr>
           <a:xfrm>
             <a:off x="762000" y="3676650"/>
-            <a:ext cx="342900" cy="161925"/>
+            <a:ext cx="571500" cy="161925"/>
           </a:xfrm>
           <a:prstGeom prst="rect">
             <a:avLst/>
@@ -14089,7 +14172,7 @@
         <p:spPr>
           <a:xfrm>
             <a:off x="1181100" y="3657600"/>
-            <a:ext cx="2238375" cy="190500"/>
+            <a:ext cx="2466975" cy="190500"/>
           </a:xfrm>
           <a:prstGeom prst="rect">
             <a:avLst/>
@@ -14138,7 +14221,7 @@
         <p:spPr>
           <a:xfrm>
             <a:off x="762000" y="3914775"/>
-            <a:ext cx="342900" cy="161925"/>
+            <a:ext cx="571500" cy="161925"/>
           </a:xfrm>
           <a:prstGeom prst="rect">
             <a:avLst/>
@@ -14173,7 +14256,7 @@
         <p:spPr>
           <a:xfrm>
             <a:off x="1181100" y="3895725"/>
-            <a:ext cx="2152650" cy="190500"/>
+            <a:ext cx="2381250" cy="190500"/>
           </a:xfrm>
           <a:prstGeom prst="rect">
             <a:avLst/>
@@ -14222,7 +14305,7 @@
         <p:spPr>
           <a:xfrm>
             <a:off x="762000" y="4162425"/>
-            <a:ext cx="342900" cy="161925"/>
+            <a:ext cx="571500" cy="161925"/>
           </a:xfrm>
           <a:prstGeom prst="rect">
             <a:avLst/>
@@ -14257,7 +14340,7 @@
         <p:spPr>
           <a:xfrm>
             <a:off x="1181100" y="4143375"/>
-            <a:ext cx="2762250" cy="190500"/>
+            <a:ext cx="2990850" cy="190500"/>
           </a:xfrm>
           <a:prstGeom prst="rect">
             <a:avLst/>
@@ -14306,7 +14389,7 @@
         <p:spPr>
           <a:xfrm>
             <a:off x="762000" y="4400550"/>
-            <a:ext cx="342900" cy="161925"/>
+            <a:ext cx="571500" cy="161925"/>
           </a:xfrm>
           <a:prstGeom prst="rect">
             <a:avLst/>
@@ -14341,7 +14424,7 @@
         <p:spPr>
           <a:xfrm>
             <a:off x="1181100" y="4381500"/>
-            <a:ext cx="2066925" cy="190500"/>
+            <a:ext cx="2295525" cy="190500"/>
           </a:xfrm>
           <a:prstGeom prst="rect">
             <a:avLst/>
@@ -14413,7 +14496,7 @@
         <p:spPr>
           <a:xfrm>
             <a:off x="762000" y="4972050"/>
-            <a:ext cx="247650" cy="238125"/>
+            <a:ext cx="476250" cy="238125"/>
           </a:xfrm>
           <a:prstGeom prst="rect">
             <a:avLst/>
@@ -14448,7 +14531,7 @@
         <p:spPr>
           <a:xfrm>
             <a:off x="990600" y="4972050"/>
-            <a:ext cx="1819275" cy="238125"/>
+            <a:ext cx="2047875" cy="238125"/>
           </a:xfrm>
           <a:prstGeom prst="rect">
             <a:avLst/>
@@ -14494,7 +14577,7 @@
         <p:spPr>
           <a:xfrm>
             <a:off x="2590800" y="4972050"/>
-            <a:ext cx="1981200" cy="238125"/>
+            <a:ext cx="2209800" cy="238125"/>
           </a:xfrm>
           <a:prstGeom prst="rect">
             <a:avLst/>
@@ -14529,7 +14612,7 @@
         <p:spPr>
           <a:xfrm>
             <a:off x="762000" y="5314950"/>
-            <a:ext cx="342900" cy="161925"/>
+            <a:ext cx="571500" cy="161925"/>
           </a:xfrm>
           <a:prstGeom prst="rect">
             <a:avLst/>
@@ -14564,7 +14647,7 @@
         <p:spPr>
           <a:xfrm>
             <a:off x="1181100" y="5295900"/>
-            <a:ext cx="2724150" cy="190500"/>
+            <a:ext cx="2952750" cy="190500"/>
           </a:xfrm>
           <a:prstGeom prst="rect">
             <a:avLst/>
@@ -14613,7 +14696,7 @@
         <p:spPr>
           <a:xfrm>
             <a:off x="762000" y="5553075"/>
-            <a:ext cx="342900" cy="161925"/>
+            <a:ext cx="571500" cy="161925"/>
           </a:xfrm>
           <a:prstGeom prst="rect">
             <a:avLst/>
@@ -14648,7 +14731,7 @@
         <p:spPr>
           <a:xfrm>
             <a:off x="1181100" y="5534025"/>
-            <a:ext cx="3962400" cy="190500"/>
+            <a:ext cx="4191000" cy="190500"/>
           </a:xfrm>
           <a:prstGeom prst="rect">
             <a:avLst/>
@@ -14697,7 +14780,7 @@
         <p:spPr>
           <a:xfrm>
             <a:off x="762000" y="5791200"/>
-            <a:ext cx="342900" cy="161925"/>
+            <a:ext cx="571500" cy="161925"/>
           </a:xfrm>
           <a:prstGeom prst="rect">
             <a:avLst/>
@@ -14732,7 +14815,7 @@
         <p:spPr>
           <a:xfrm>
             <a:off x="1181100" y="5772150"/>
-            <a:ext cx="3238500" cy="190500"/>
+            <a:ext cx="3467100" cy="190500"/>
           </a:xfrm>
           <a:prstGeom prst="rect">
             <a:avLst/>
@@ -14781,7 +14864,7 @@
         <p:spPr>
           <a:xfrm>
             <a:off x="762000" y="6038850"/>
-            <a:ext cx="342900" cy="161925"/>
+            <a:ext cx="571500" cy="161925"/>
           </a:xfrm>
           <a:prstGeom prst="rect">
             <a:avLst/>
@@ -14816,7 +14899,7 @@
         <p:spPr>
           <a:xfrm>
             <a:off x="1181100" y="6019800"/>
-            <a:ext cx="3390900" cy="190500"/>
+            <a:ext cx="3619500" cy="190500"/>
           </a:xfrm>
           <a:prstGeom prst="rect">
             <a:avLst/>
@@ -14865,7 +14948,7 @@
         <p:spPr>
           <a:xfrm>
             <a:off x="762000" y="6276975"/>
-            <a:ext cx="342900" cy="161925"/>
+            <a:ext cx="571500" cy="161925"/>
           </a:xfrm>
           <a:prstGeom prst="rect">
             <a:avLst/>
@@ -14900,7 +14983,7 @@
         <p:spPr>
           <a:xfrm>
             <a:off x="1181100" y="6257925"/>
-            <a:ext cx="3124200" cy="190500"/>
+            <a:ext cx="3352800" cy="190500"/>
           </a:xfrm>
           <a:prstGeom prst="rect">
             <a:avLst/>
@@ -15026,7 +15109,7 @@
         <p:spPr>
           <a:xfrm>
             <a:off x="762000" y="228600"/>
-            <a:ext cx="1228725" cy="714375"/>
+            <a:ext cx="1457325" cy="714375"/>
           </a:xfrm>
           <a:prstGeom prst="rect">
             <a:avLst/>
@@ -15061,7 +15144,7 @@
         <p:spPr>
           <a:xfrm>
             <a:off x="1905000" y="476250"/>
-            <a:ext cx="704850" cy="285750"/>
+            <a:ext cx="933450" cy="285750"/>
           </a:xfrm>
           <a:prstGeom prst="rect">
             <a:avLst/>
@@ -15140,7 +15223,7 @@
         <p:spPr>
           <a:xfrm>
             <a:off x="762000" y="1219200"/>
-            <a:ext cx="247650" cy="238125"/>
+            <a:ext cx="476250" cy="238125"/>
           </a:xfrm>
           <a:prstGeom prst="rect">
             <a:avLst/>
@@ -15175,7 +15258,7 @@
         <p:spPr>
           <a:xfrm>
             <a:off x="990600" y="1219200"/>
-            <a:ext cx="2066925" cy="238125"/>
+            <a:ext cx="2295525" cy="238125"/>
           </a:xfrm>
           <a:prstGeom prst="rect">
             <a:avLst/>
@@ -15232,7 +15315,7 @@
         <p:spPr>
           <a:xfrm>
             <a:off x="2800350" y="1219200"/>
-            <a:ext cx="1228725" cy="238125"/>
+            <a:ext cx="1457325" cy="238125"/>
           </a:xfrm>
           <a:prstGeom prst="rect">
             <a:avLst/>
@@ -15267,7 +15350,7 @@
         <p:spPr>
           <a:xfrm>
             <a:off x="762000" y="1562100"/>
-            <a:ext cx="342900" cy="161925"/>
+            <a:ext cx="571500" cy="161925"/>
           </a:xfrm>
           <a:prstGeom prst="rect">
             <a:avLst/>
@@ -15302,7 +15385,7 @@
         <p:spPr>
           <a:xfrm>
             <a:off x="1181100" y="1543050"/>
-            <a:ext cx="3086100" cy="190500"/>
+            <a:ext cx="3314700" cy="190500"/>
           </a:xfrm>
           <a:prstGeom prst="rect">
             <a:avLst/>
@@ -15351,7 +15434,7 @@
         <p:spPr>
           <a:xfrm>
             <a:off x="762000" y="1800225"/>
-            <a:ext cx="342900" cy="161925"/>
+            <a:ext cx="571500" cy="161925"/>
           </a:xfrm>
           <a:prstGeom prst="rect">
             <a:avLst/>
@@ -15386,7 +15469,7 @@
         <p:spPr>
           <a:xfrm>
             <a:off x="1181100" y="1781175"/>
-            <a:ext cx="2552700" cy="190500"/>
+            <a:ext cx="2781300" cy="190500"/>
           </a:xfrm>
           <a:prstGeom prst="rect">
             <a:avLst/>
@@ -15435,7 +15518,7 @@
         <p:spPr>
           <a:xfrm>
             <a:off x="762000" y="2038350"/>
-            <a:ext cx="342900" cy="161925"/>
+            <a:ext cx="571500" cy="161925"/>
           </a:xfrm>
           <a:prstGeom prst="rect">
             <a:avLst/>
@@ -15470,7 +15553,7 @@
         <p:spPr>
           <a:xfrm>
             <a:off x="1181100" y="2019300"/>
-            <a:ext cx="2971800" cy="190500"/>
+            <a:ext cx="3200400" cy="190500"/>
           </a:xfrm>
           <a:prstGeom prst="rect">
             <a:avLst/>
@@ -15519,7 +15602,7 @@
         <p:spPr>
           <a:xfrm>
             <a:off x="762000" y="2286000"/>
-            <a:ext cx="342900" cy="161925"/>
+            <a:ext cx="571500" cy="161925"/>
           </a:xfrm>
           <a:prstGeom prst="rect">
             <a:avLst/>
@@ -15554,7 +15637,7 @@
         <p:spPr>
           <a:xfrm>
             <a:off x="1181100" y="2266950"/>
-            <a:ext cx="3495675" cy="190500"/>
+            <a:ext cx="3724275" cy="190500"/>
           </a:xfrm>
           <a:prstGeom prst="rect">
             <a:avLst/>
@@ -15603,7 +15686,7 @@
         <p:spPr>
           <a:xfrm>
             <a:off x="762000" y="2524125"/>
-            <a:ext cx="342900" cy="161925"/>
+            <a:ext cx="571500" cy="161925"/>
           </a:xfrm>
           <a:prstGeom prst="rect">
             <a:avLst/>
@@ -15638,7 +15721,7 @@
         <p:spPr>
           <a:xfrm>
             <a:off x="1181100" y="2505075"/>
-            <a:ext cx="3419475" cy="190500"/>
+            <a:ext cx="3648075" cy="190500"/>
           </a:xfrm>
           <a:prstGeom prst="rect">
             <a:avLst/>
@@ -15710,7 +15793,7 @@
         <p:spPr>
           <a:xfrm>
             <a:off x="762000" y="3095625"/>
-            <a:ext cx="247650" cy="238125"/>
+            <a:ext cx="476250" cy="238125"/>
           </a:xfrm>
           <a:prstGeom prst="rect">
             <a:avLst/>
@@ -15745,7 +15828,7 @@
         <p:spPr>
           <a:xfrm>
             <a:off x="990600" y="3095625"/>
-            <a:ext cx="1943100" cy="238125"/>
+            <a:ext cx="2171700" cy="238125"/>
           </a:xfrm>
           <a:prstGeom prst="rect">
             <a:avLst/>
@@ -15791,7 +15874,7 @@
         <p:spPr>
           <a:xfrm>
             <a:off x="2695575" y="3095625"/>
-            <a:ext cx="1581150" cy="238125"/>
+            <a:ext cx="1809750" cy="238125"/>
           </a:xfrm>
           <a:prstGeom prst="rect">
             <a:avLst/>
@@ -15826,7 +15909,7 @@
         <p:spPr>
           <a:xfrm>
             <a:off x="762000" y="3438525"/>
-            <a:ext cx="342900" cy="161925"/>
+            <a:ext cx="571500" cy="161925"/>
           </a:xfrm>
           <a:prstGeom prst="rect">
             <a:avLst/>
@@ -15861,7 +15944,7 @@
         <p:spPr>
           <a:xfrm>
             <a:off x="1181100" y="3419475"/>
-            <a:ext cx="2352675" cy="190500"/>
+            <a:ext cx="2581275" cy="190500"/>
           </a:xfrm>
           <a:prstGeom prst="rect">
             <a:avLst/>
@@ -15910,7 +15993,7 @@
         <p:spPr>
           <a:xfrm>
             <a:off x="3257550" y="3419475"/>
-            <a:ext cx="1457325" cy="190500"/>
+            <a:ext cx="1685925" cy="190500"/>
           </a:xfrm>
           <a:prstGeom prst="rect">
             <a:avLst/>
@@ -15945,7 +16028,7 @@
         <p:spPr>
           <a:xfrm>
             <a:off x="762000" y="3676650"/>
-            <a:ext cx="342900" cy="161925"/>
+            <a:ext cx="571500" cy="161925"/>
           </a:xfrm>
           <a:prstGeom prst="rect">
             <a:avLst/>
@@ -15980,7 +16063,7 @@
         <p:spPr>
           <a:xfrm>
             <a:off x="1181100" y="3657600"/>
-            <a:ext cx="3467100" cy="190500"/>
+            <a:ext cx="3695700" cy="190500"/>
           </a:xfrm>
           <a:prstGeom prst="rect">
             <a:avLst/>
@@ -16029,7 +16112,7 @@
         <p:spPr>
           <a:xfrm>
             <a:off x="4229100" y="3657600"/>
-            <a:ext cx="1343025" cy="190500"/>
+            <a:ext cx="1571625" cy="190500"/>
           </a:xfrm>
           <a:prstGeom prst="rect">
             <a:avLst/>
@@ -16064,7 +16147,7 @@
         <p:spPr>
           <a:xfrm>
             <a:off x="762000" y="3914775"/>
-            <a:ext cx="342900" cy="161925"/>
+            <a:ext cx="571500" cy="161925"/>
           </a:xfrm>
           <a:prstGeom prst="rect">
             <a:avLst/>
@@ -16099,7 +16182,7 @@
         <p:spPr>
           <a:xfrm>
             <a:off x="1181100" y="3895725"/>
-            <a:ext cx="3019425" cy="190500"/>
+            <a:ext cx="3248025" cy="190500"/>
           </a:xfrm>
           <a:prstGeom prst="rect">
             <a:avLst/>
@@ -16148,7 +16231,7 @@
         <p:spPr>
           <a:xfrm>
             <a:off x="3838575" y="3895725"/>
-            <a:ext cx="1352550" cy="190500"/>
+            <a:ext cx="1581150" cy="190500"/>
           </a:xfrm>
           <a:prstGeom prst="rect">
             <a:avLst/>
@@ -16183,7 +16266,7 @@
         <p:spPr>
           <a:xfrm>
             <a:off x="762000" y="4162425"/>
-            <a:ext cx="342900" cy="161925"/>
+            <a:ext cx="571500" cy="161925"/>
           </a:xfrm>
           <a:prstGeom prst="rect">
             <a:avLst/>
@@ -16218,7 +16301,7 @@
         <p:spPr>
           <a:xfrm>
             <a:off x="1181100" y="4143375"/>
-            <a:ext cx="3305175" cy="190500"/>
+            <a:ext cx="3533775" cy="190500"/>
           </a:xfrm>
           <a:prstGeom prst="rect">
             <a:avLst/>
@@ -16267,7 +16350,7 @@
         <p:spPr>
           <a:xfrm>
             <a:off x="762000" y="4400550"/>
-            <a:ext cx="342900" cy="161925"/>
+            <a:ext cx="571500" cy="161925"/>
           </a:xfrm>
           <a:prstGeom prst="rect">
             <a:avLst/>
@@ -16302,7 +16385,7 @@
         <p:spPr>
           <a:xfrm>
             <a:off x="1181100" y="4381500"/>
-            <a:ext cx="2257425" cy="190500"/>
+            <a:ext cx="2486025" cy="190500"/>
           </a:xfrm>
           <a:prstGeom prst="rect">
             <a:avLst/>
@@ -16351,7 +16434,7 @@
         <p:spPr>
           <a:xfrm>
             <a:off x="3181350" y="4381500"/>
-            <a:ext cx="1352550" cy="190500"/>
+            <a:ext cx="1581150" cy="190500"/>
           </a:xfrm>
           <a:prstGeom prst="rect">
             <a:avLst/>
@@ -16409,7 +16492,7 @@
         <p:spPr>
           <a:xfrm>
             <a:off x="762000" y="4972050"/>
-            <a:ext cx="247650" cy="238125"/>
+            <a:ext cx="476250" cy="238125"/>
           </a:xfrm>
           <a:prstGeom prst="rect">
             <a:avLst/>
@@ -16444,7 +16527,7 @@
         <p:spPr>
           <a:xfrm>
             <a:off x="990600" y="4972050"/>
-            <a:ext cx="1104900" cy="238125"/>
+            <a:ext cx="1333500" cy="238125"/>
           </a:xfrm>
           <a:prstGeom prst="rect">
             <a:avLst/>
@@ -16490,7 +16573,7 @@
         <p:spPr>
           <a:xfrm>
             <a:off x="1962150" y="4972050"/>
-            <a:ext cx="1981200" cy="238125"/>
+            <a:ext cx="2209800" cy="238125"/>
           </a:xfrm>
           <a:prstGeom prst="rect">
             <a:avLst/>
@@ -16525,7 +16608,7 @@
         <p:spPr>
           <a:xfrm>
             <a:off x="762000" y="5314950"/>
-            <a:ext cx="342900" cy="161925"/>
+            <a:ext cx="571500" cy="161925"/>
           </a:xfrm>
           <a:prstGeom prst="rect">
             <a:avLst/>
@@ -16560,7 +16643,7 @@
         <p:spPr>
           <a:xfrm>
             <a:off x="1181100" y="5295900"/>
-            <a:ext cx="2228850" cy="190500"/>
+            <a:ext cx="2457450" cy="190500"/>
           </a:xfrm>
           <a:prstGeom prst="rect">
             <a:avLst/>
@@ -16609,7 +16692,7 @@
         <p:spPr>
           <a:xfrm>
             <a:off x="762000" y="5553075"/>
-            <a:ext cx="342900" cy="161925"/>
+            <a:ext cx="571500" cy="161925"/>
           </a:xfrm>
           <a:prstGeom prst="rect">
             <a:avLst/>
@@ -16644,7 +16727,7 @@
         <p:spPr>
           <a:xfrm>
             <a:off x="1181100" y="5534025"/>
-            <a:ext cx="2466975" cy="190500"/>
+            <a:ext cx="2695575" cy="190500"/>
           </a:xfrm>
           <a:prstGeom prst="rect">
             <a:avLst/>
@@ -16693,7 +16776,7 @@
         <p:spPr>
           <a:xfrm>
             <a:off x="762000" y="5791200"/>
-            <a:ext cx="342900" cy="161925"/>
+            <a:ext cx="571500" cy="161925"/>
           </a:xfrm>
           <a:prstGeom prst="rect">
             <a:avLst/>
@@ -16728,7 +16811,7 @@
         <p:spPr>
           <a:xfrm>
             <a:off x="1181100" y="5772150"/>
-            <a:ext cx="2143125" cy="190500"/>
+            <a:ext cx="2371725" cy="190500"/>
           </a:xfrm>
           <a:prstGeom prst="rect">
             <a:avLst/>
@@ -16777,7 +16860,7 @@
         <p:spPr>
           <a:xfrm>
             <a:off x="762000" y="6038850"/>
-            <a:ext cx="342900" cy="161925"/>
+            <a:ext cx="571500" cy="161925"/>
           </a:xfrm>
           <a:prstGeom prst="rect">
             <a:avLst/>
@@ -16812,7 +16895,7 @@
         <p:spPr>
           <a:xfrm>
             <a:off x="1181100" y="6019800"/>
-            <a:ext cx="2324100" cy="190500"/>
+            <a:ext cx="2552700" cy="190500"/>
           </a:xfrm>
           <a:prstGeom prst="rect">
             <a:avLst/>
@@ -16861,7 +16944,7 @@
         <p:spPr>
           <a:xfrm>
             <a:off x="762000" y="6276975"/>
-            <a:ext cx="342900" cy="161925"/>
+            <a:ext cx="571500" cy="161925"/>
           </a:xfrm>
           <a:prstGeom prst="rect">
             <a:avLst/>
@@ -16896,7 +16979,7 @@
         <p:spPr>
           <a:xfrm>
             <a:off x="1181100" y="6257925"/>
-            <a:ext cx="3133725" cy="190500"/>
+            <a:ext cx="3362325" cy="190500"/>
           </a:xfrm>
           <a:prstGeom prst="rect">
             <a:avLst/>
@@ -17022,7 +17105,7 @@
         <p:spPr>
           <a:xfrm>
             <a:off x="762000" y="228600"/>
-            <a:ext cx="1228725" cy="714375"/>
+            <a:ext cx="1457325" cy="714375"/>
           </a:xfrm>
           <a:prstGeom prst="rect">
             <a:avLst/>
@@ -17057,7 +17140,7 @@
         <p:spPr>
           <a:xfrm>
             <a:off x="1905000" y="476250"/>
-            <a:ext cx="704850" cy="285750"/>
+            <a:ext cx="933450" cy="285750"/>
           </a:xfrm>
           <a:prstGeom prst="rect">
             <a:avLst/>
@@ -17136,7 +17219,7 @@
         <p:spPr>
           <a:xfrm>
             <a:off x="762000" y="1219200"/>
-            <a:ext cx="247650" cy="238125"/>
+            <a:ext cx="476250" cy="238125"/>
           </a:xfrm>
           <a:prstGeom prst="rect">
             <a:avLst/>
@@ -17171,7 +17254,7 @@
         <p:spPr>
           <a:xfrm>
             <a:off x="990600" y="1219200"/>
-            <a:ext cx="2238375" cy="238125"/>
+            <a:ext cx="2466975" cy="238125"/>
           </a:xfrm>
           <a:prstGeom prst="rect">
             <a:avLst/>
@@ -17228,7 +17311,7 @@
         <p:spPr>
           <a:xfrm>
             <a:off x="2952750" y="1219200"/>
-            <a:ext cx="2133600" cy="238125"/>
+            <a:ext cx="2362200" cy="238125"/>
           </a:xfrm>
           <a:prstGeom prst="rect">
             <a:avLst/>
@@ -17263,7 +17346,7 @@
         <p:spPr>
           <a:xfrm>
             <a:off x="762000" y="1562100"/>
-            <a:ext cx="342900" cy="161925"/>
+            <a:ext cx="571500" cy="161925"/>
           </a:xfrm>
           <a:prstGeom prst="rect">
             <a:avLst/>
@@ -17298,7 +17381,7 @@
         <p:spPr>
           <a:xfrm>
             <a:off x="1181100" y="1543050"/>
-            <a:ext cx="3114675" cy="190500"/>
+            <a:ext cx="3343275" cy="190500"/>
           </a:xfrm>
           <a:prstGeom prst="rect">
             <a:avLst/>
@@ -17347,7 +17430,7 @@
         <p:spPr>
           <a:xfrm>
             <a:off x="762000" y="1800225"/>
-            <a:ext cx="342900" cy="161925"/>
+            <a:ext cx="571500" cy="161925"/>
           </a:xfrm>
           <a:prstGeom prst="rect">
             <a:avLst/>
@@ -17382,7 +17465,7 @@
         <p:spPr>
           <a:xfrm>
             <a:off x="1181100" y="1781175"/>
-            <a:ext cx="2914650" cy="190500"/>
+            <a:ext cx="3143250" cy="190500"/>
           </a:xfrm>
           <a:prstGeom prst="rect">
             <a:avLst/>
@@ -17431,7 +17514,7 @@
         <p:spPr>
           <a:xfrm>
             <a:off x="762000" y="2038350"/>
-            <a:ext cx="342900" cy="161925"/>
+            <a:ext cx="571500" cy="161925"/>
           </a:xfrm>
           <a:prstGeom prst="rect">
             <a:avLst/>
@@ -17466,7 +17549,7 @@
         <p:spPr>
           <a:xfrm>
             <a:off x="1181100" y="2019300"/>
-            <a:ext cx="3038475" cy="190500"/>
+            <a:ext cx="3267075" cy="190500"/>
           </a:xfrm>
           <a:prstGeom prst="rect">
             <a:avLst/>
@@ -17515,7 +17598,7 @@
         <p:spPr>
           <a:xfrm>
             <a:off x="762000" y="2286000"/>
-            <a:ext cx="342900" cy="161925"/>
+            <a:ext cx="571500" cy="161925"/>
           </a:xfrm>
           <a:prstGeom prst="rect">
             <a:avLst/>
@@ -17550,7 +17633,7 @@
         <p:spPr>
           <a:xfrm>
             <a:off x="1181100" y="2266950"/>
-            <a:ext cx="3552825" cy="190500"/>
+            <a:ext cx="3781425" cy="190500"/>
           </a:xfrm>
           <a:prstGeom prst="rect">
             <a:avLst/>
@@ -17599,7 +17682,7 @@
         <p:spPr>
           <a:xfrm>
             <a:off x="4305300" y="2266950"/>
-            <a:ext cx="2571750" cy="190500"/>
+            <a:ext cx="2800350" cy="190500"/>
           </a:xfrm>
           <a:prstGeom prst="rect">
             <a:avLst/>
@@ -17634,7 +17717,7 @@
         <p:spPr>
           <a:xfrm>
             <a:off x="762000" y="2524125"/>
-            <a:ext cx="342900" cy="161925"/>
+            <a:ext cx="571500" cy="161925"/>
           </a:xfrm>
           <a:prstGeom prst="rect">
             <a:avLst/>
@@ -17669,7 +17752,7 @@
         <p:spPr>
           <a:xfrm>
             <a:off x="1181100" y="2505075"/>
-            <a:ext cx="6800850" cy="190500"/>
+            <a:ext cx="7029450" cy="190500"/>
           </a:xfrm>
           <a:prstGeom prst="rect">
             <a:avLst/>
@@ -17752,7 +17835,7 @@
         <p:spPr>
           <a:xfrm>
             <a:off x="762000" y="3095625"/>
-            <a:ext cx="247650" cy="238125"/>
+            <a:ext cx="476250" cy="238125"/>
           </a:xfrm>
           <a:prstGeom prst="rect">
             <a:avLst/>
@@ -17787,7 +17870,7 @@
         <p:spPr>
           <a:xfrm>
             <a:off x="990600" y="3095625"/>
-            <a:ext cx="800100" cy="238125"/>
+            <a:ext cx="1028700" cy="238125"/>
           </a:xfrm>
           <a:prstGeom prst="rect">
             <a:avLst/>
@@ -17833,7 +17916,7 @@
         <p:spPr>
           <a:xfrm>
             <a:off x="1704975" y="3095625"/>
-            <a:ext cx="1228725" cy="238125"/>
+            <a:ext cx="1457325" cy="238125"/>
           </a:xfrm>
           <a:prstGeom prst="rect">
             <a:avLst/>
@@ -17868,7 +17951,7 @@
         <p:spPr>
           <a:xfrm>
             <a:off x="762000" y="3438525"/>
-            <a:ext cx="342900" cy="161925"/>
+            <a:ext cx="571500" cy="161925"/>
           </a:xfrm>
           <a:prstGeom prst="rect">
             <a:avLst/>
@@ -17903,7 +17986,7 @@
         <p:spPr>
           <a:xfrm>
             <a:off x="1181100" y="3419475"/>
-            <a:ext cx="2524125" cy="190500"/>
+            <a:ext cx="2752725" cy="190500"/>
           </a:xfrm>
           <a:prstGeom prst="rect">
             <a:avLst/>
@@ -17952,7 +18035,7 @@
         <p:spPr>
           <a:xfrm>
             <a:off x="762000" y="3676650"/>
-            <a:ext cx="342900" cy="161925"/>
+            <a:ext cx="571500" cy="161925"/>
           </a:xfrm>
           <a:prstGeom prst="rect">
             <a:avLst/>
@@ -17987,7 +18070,7 @@
         <p:spPr>
           <a:xfrm>
             <a:off x="1181100" y="3657600"/>
-            <a:ext cx="1743075" cy="190500"/>
+            <a:ext cx="1971675" cy="190500"/>
           </a:xfrm>
           <a:prstGeom prst="rect">
             <a:avLst/>
@@ -18036,7 +18119,7 @@
         <p:spPr>
           <a:xfrm>
             <a:off x="762000" y="3914775"/>
-            <a:ext cx="342900" cy="161925"/>
+            <a:ext cx="571500" cy="161925"/>
           </a:xfrm>
           <a:prstGeom prst="rect">
             <a:avLst/>
@@ -18071,7 +18154,7 @@
         <p:spPr>
           <a:xfrm>
             <a:off x="1181100" y="3895725"/>
-            <a:ext cx="1695450" cy="190500"/>
+            <a:ext cx="1924050" cy="190500"/>
           </a:xfrm>
           <a:prstGeom prst="rect">
             <a:avLst/>
@@ -18120,7 +18203,7 @@
         <p:spPr>
           <a:xfrm>
             <a:off x="762000" y="4162425"/>
-            <a:ext cx="342900" cy="161925"/>
+            <a:ext cx="571500" cy="161925"/>
           </a:xfrm>
           <a:prstGeom prst="rect">
             <a:avLst/>
@@ -18155,7 +18238,7 @@
         <p:spPr>
           <a:xfrm>
             <a:off x="1181100" y="4143375"/>
-            <a:ext cx="3609975" cy="190500"/>
+            <a:ext cx="3838575" cy="190500"/>
           </a:xfrm>
           <a:prstGeom prst="rect">
             <a:avLst/>
@@ -18204,7 +18287,7 @@
         <p:spPr>
           <a:xfrm>
             <a:off x="762000" y="4400550"/>
-            <a:ext cx="342900" cy="161925"/>
+            <a:ext cx="571500" cy="161925"/>
           </a:xfrm>
           <a:prstGeom prst="rect">
             <a:avLst/>
@@ -18239,7 +18322,7 @@
         <p:spPr>
           <a:xfrm>
             <a:off x="1181100" y="4381500"/>
-            <a:ext cx="3095625" cy="190500"/>
+            <a:ext cx="3324225" cy="190500"/>
           </a:xfrm>
           <a:prstGeom prst="rect">
             <a:avLst/>
@@ -18311,7 +18394,7 @@
         <p:spPr>
           <a:xfrm>
             <a:off x="762000" y="4972050"/>
-            <a:ext cx="247650" cy="238125"/>
+            <a:ext cx="476250" cy="238125"/>
           </a:xfrm>
           <a:prstGeom prst="rect">
             <a:avLst/>
@@ -18346,7 +18429,7 @@
         <p:spPr>
           <a:xfrm>
             <a:off x="990600" y="4972050"/>
-            <a:ext cx="1666875" cy="238125"/>
+            <a:ext cx="1895475" cy="238125"/>
           </a:xfrm>
           <a:prstGeom prst="rect">
             <a:avLst/>
@@ -18392,7 +18475,7 @@
         <p:spPr>
           <a:xfrm>
             <a:off x="2457450" y="4972050"/>
-            <a:ext cx="1962150" cy="238125"/>
+            <a:ext cx="2190750" cy="238125"/>
           </a:xfrm>
           <a:prstGeom prst="rect">
             <a:avLst/>
@@ -18427,7 +18510,7 @@
         <p:spPr>
           <a:xfrm>
             <a:off x="762000" y="5314950"/>
-            <a:ext cx="342900" cy="161925"/>
+            <a:ext cx="571500" cy="161925"/>
           </a:xfrm>
           <a:prstGeom prst="rect">
             <a:avLst/>
@@ -18462,7 +18545,7 @@
         <p:spPr>
           <a:xfrm>
             <a:off x="1181100" y="5295900"/>
-            <a:ext cx="2419350" cy="190500"/>
+            <a:ext cx="2647950" cy="190500"/>
           </a:xfrm>
           <a:prstGeom prst="rect">
             <a:avLst/>
@@ -18511,7 +18594,7 @@
         <p:spPr>
           <a:xfrm>
             <a:off x="762000" y="5553075"/>
-            <a:ext cx="342900" cy="161925"/>
+            <a:ext cx="571500" cy="161925"/>
           </a:xfrm>
           <a:prstGeom prst="rect">
             <a:avLst/>
@@ -18546,7 +18629,7 @@
         <p:spPr>
           <a:xfrm>
             <a:off x="1181100" y="5534025"/>
-            <a:ext cx="1847850" cy="190500"/>
+            <a:ext cx="2076450" cy="190500"/>
           </a:xfrm>
           <a:prstGeom prst="rect">
             <a:avLst/>
@@ -18595,7 +18678,7 @@
         <p:spPr>
           <a:xfrm>
             <a:off x="762000" y="5791200"/>
-            <a:ext cx="342900" cy="161925"/>
+            <a:ext cx="571500" cy="161925"/>
           </a:xfrm>
           <a:prstGeom prst="rect">
             <a:avLst/>
@@ -18630,7 +18713,7 @@
         <p:spPr>
           <a:xfrm>
             <a:off x="1181100" y="5772150"/>
-            <a:ext cx="2619375" cy="190500"/>
+            <a:ext cx="2847975" cy="190500"/>
           </a:xfrm>
           <a:prstGeom prst="rect">
             <a:avLst/>
@@ -18679,7 +18762,7 @@
         <p:spPr>
           <a:xfrm>
             <a:off x="762000" y="6038850"/>
-            <a:ext cx="342900" cy="161925"/>
+            <a:ext cx="571500" cy="161925"/>
           </a:xfrm>
           <a:prstGeom prst="rect">
             <a:avLst/>
@@ -18714,7 +18797,7 @@
         <p:spPr>
           <a:xfrm>
             <a:off x="1181100" y="6019800"/>
-            <a:ext cx="3619500" cy="190500"/>
+            <a:ext cx="3848100" cy="190500"/>
           </a:xfrm>
           <a:prstGeom prst="rect">
             <a:avLst/>
@@ -18763,7 +18846,7 @@
         <p:spPr>
           <a:xfrm>
             <a:off x="762000" y="6276975"/>
-            <a:ext cx="342900" cy="161925"/>
+            <a:ext cx="571500" cy="161925"/>
           </a:xfrm>
           <a:prstGeom prst="rect">
             <a:avLst/>
@@ -18798,7 +18881,7 @@
         <p:spPr>
           <a:xfrm>
             <a:off x="1181100" y="6257925"/>
-            <a:ext cx="1866900" cy="190500"/>
+            <a:ext cx="2095500" cy="190500"/>
           </a:xfrm>
           <a:prstGeom prst="rect">
             <a:avLst/>
@@ -18924,7 +19007,7 @@
         <p:spPr>
           <a:xfrm>
             <a:off x="762000" y="314325"/>
-            <a:ext cx="419100" cy="552450"/>
+            <a:ext cx="647700" cy="552450"/>
           </a:xfrm>
           <a:prstGeom prst="rect">
             <a:avLst/>
@@ -18959,7 +19042,7 @@
         <p:spPr>
           <a:xfrm>
             <a:off x="762000" y="1038225"/>
-            <a:ext cx="3190875" cy="619125"/>
+            <a:ext cx="3419475" cy="619125"/>
           </a:xfrm>
           <a:prstGeom prst="rect">
             <a:avLst/>
@@ -19005,7 +19088,7 @@
         <p:spPr>
           <a:xfrm>
             <a:off x="762000" y="1771650"/>
-            <a:ext cx="2400300" cy="419100"/>
+            <a:ext cx="2628900" cy="419100"/>
           </a:xfrm>
           <a:prstGeom prst="rect">
             <a:avLst/>
@@ -19062,7 +19145,7 @@
         <p:spPr>
           <a:xfrm>
             <a:off x="3076575" y="1857375"/>
-            <a:ext cx="1228725" cy="238125"/>
+            <a:ext cx="1457325" cy="238125"/>
           </a:xfrm>
           <a:prstGeom prst="rect">
             <a:avLst/>
@@ -19119,7 +19202,7 @@
         <p:spPr>
           <a:xfrm>
             <a:off x="762000" y="3038475"/>
-            <a:ext cx="504825" cy="285750"/>
+            <a:ext cx="733425" cy="285750"/>
           </a:xfrm>
           <a:prstGeom prst="rect">
             <a:avLst/>
@@ -19154,7 +19237,7 @@
         <p:spPr>
           <a:xfrm>
             <a:off x="1600200" y="3000375"/>
-            <a:ext cx="4276725" cy="352425"/>
+            <a:ext cx="4505325" cy="352425"/>
           </a:xfrm>
           <a:prstGeom prst="rect">
             <a:avLst/>
@@ -19225,7 +19308,7 @@
         <p:spPr>
           <a:xfrm>
             <a:off x="7810500" y="3019425"/>
-            <a:ext cx="2276475" cy="304800"/>
+            <a:ext cx="2505075" cy="304800"/>
           </a:xfrm>
           <a:prstGeom prst="rect">
             <a:avLst/>
@@ -19283,7 +19366,7 @@
         <p:spPr>
           <a:xfrm>
             <a:off x="762000" y="4352925"/>
-            <a:ext cx="504825" cy="285750"/>
+            <a:ext cx="733425" cy="285750"/>
           </a:xfrm>
           <a:prstGeom prst="rect">
             <a:avLst/>
@@ -19318,7 +19401,7 @@
         <p:spPr>
           <a:xfrm>
             <a:off x="1600200" y="4324350"/>
-            <a:ext cx="2876550" cy="352425"/>
+            <a:ext cx="3105150" cy="352425"/>
           </a:xfrm>
           <a:prstGeom prst="rect">
             <a:avLst/>
@@ -19389,7 +19472,7 @@
         <p:spPr>
           <a:xfrm>
             <a:off x="7810500" y="4343400"/>
-            <a:ext cx="2276475" cy="304800"/>
+            <a:ext cx="2505075" cy="304800"/>
           </a:xfrm>
           <a:prstGeom prst="rect">
             <a:avLst/>
@@ -19447,7 +19530,7 @@
         <p:spPr>
           <a:xfrm>
             <a:off x="762000" y="5676900"/>
-            <a:ext cx="504825" cy="285750"/>
+            <a:ext cx="733425" cy="285750"/>
           </a:xfrm>
           <a:prstGeom prst="rect">
             <a:avLst/>
@@ -19482,7 +19565,7 @@
         <p:spPr>
           <a:xfrm>
             <a:off x="1600200" y="5648325"/>
-            <a:ext cx="4486275" cy="352425"/>
+            <a:ext cx="4714875" cy="352425"/>
           </a:xfrm>
           <a:prstGeom prst="rect">
             <a:avLst/>
@@ -19575,7 +19658,7 @@
         <p:spPr>
           <a:xfrm>
             <a:off x="7810500" y="5667375"/>
-            <a:ext cx="2276475" cy="304800"/>
+            <a:ext cx="2505075" cy="304800"/>
           </a:xfrm>
           <a:prstGeom prst="rect">
             <a:avLst/>
@@ -19687,7 +19770,7 @@
         <p:spPr>
           <a:xfrm>
             <a:off x="762000" y="314325"/>
-            <a:ext cx="419100" cy="552450"/>
+            <a:ext cx="647700" cy="552450"/>
           </a:xfrm>
           <a:prstGeom prst="rect">
             <a:avLst/>
@@ -19722,7 +19805,7 @@
         <p:spPr>
           <a:xfrm>
             <a:off x="762000" y="1038225"/>
-            <a:ext cx="4600575" cy="619125"/>
+            <a:ext cx="4829175" cy="619125"/>
           </a:xfrm>
           <a:prstGeom prst="rect">
             <a:avLst/>
@@ -19768,7 +19851,7 @@
         <p:spPr>
           <a:xfrm>
             <a:off x="762000" y="1771650"/>
-            <a:ext cx="3400425" cy="419100"/>
+            <a:ext cx="3629025" cy="419100"/>
           </a:xfrm>
           <a:prstGeom prst="rect">
             <a:avLst/>
@@ -19825,7 +19908,7 @@
         <p:spPr>
           <a:xfrm>
             <a:off x="3943350" y="1857375"/>
-            <a:ext cx="1047750" cy="238125"/>
+            <a:ext cx="1276350" cy="238125"/>
           </a:xfrm>
           <a:prstGeom prst="rect">
             <a:avLst/>
@@ -19882,7 +19965,7 @@
         <p:spPr>
           <a:xfrm>
             <a:off x="866775" y="2343150"/>
-            <a:ext cx="419100" cy="190500"/>
+            <a:ext cx="647700" cy="190500"/>
           </a:xfrm>
           <a:prstGeom prst="rect">
             <a:avLst/>
@@ -19917,7 +20000,7 @@
         <p:spPr>
           <a:xfrm>
             <a:off x="1371600" y="2305050"/>
-            <a:ext cx="2419350" cy="266700"/>
+            <a:ext cx="2647950" cy="266700"/>
           </a:xfrm>
           <a:prstGeom prst="rect">
             <a:avLst/>
@@ -19952,7 +20035,7 @@
         <p:spPr>
           <a:xfrm>
             <a:off x="3505200" y="2305050"/>
-            <a:ext cx="2524125" cy="276225"/>
+            <a:ext cx="2752725" cy="276225"/>
           </a:xfrm>
           <a:prstGeom prst="rect">
             <a:avLst/>
@@ -20009,7 +20092,7 @@
         <p:spPr>
           <a:xfrm>
             <a:off x="762000" y="3362325"/>
-            <a:ext cx="504825" cy="285750"/>
+            <a:ext cx="733425" cy="285750"/>
           </a:xfrm>
           <a:prstGeom prst="rect">
             <a:avLst/>
@@ -20044,7 +20127,7 @@
         <p:spPr>
           <a:xfrm>
             <a:off x="1600200" y="3181350"/>
-            <a:ext cx="3762375" cy="304800"/>
+            <a:ext cx="3990975" cy="304800"/>
           </a:xfrm>
           <a:prstGeom prst="rect">
             <a:avLst/>
@@ -20115,7 +20198,7 @@
         <p:spPr>
           <a:xfrm>
             <a:off x="1600200" y="3552825"/>
-            <a:ext cx="3181350" cy="276225"/>
+            <a:ext cx="3409950" cy="276225"/>
           </a:xfrm>
           <a:prstGeom prst="rect">
             <a:avLst/>
@@ -20173,7 +20256,7 @@
         <p:spPr>
           <a:xfrm>
             <a:off x="762000" y="4552950"/>
-            <a:ext cx="504825" cy="285750"/>
+            <a:ext cx="733425" cy="285750"/>
           </a:xfrm>
           <a:prstGeom prst="rect">
             <a:avLst/>
@@ -20208,7 +20291,7 @@
         <p:spPr>
           <a:xfrm>
             <a:off x="1600200" y="4371975"/>
-            <a:ext cx="4048125" cy="304800"/>
+            <a:ext cx="4276725" cy="304800"/>
           </a:xfrm>
           <a:prstGeom prst="rect">
             <a:avLst/>
@@ -20279,7 +20362,7 @@
         <p:spPr>
           <a:xfrm>
             <a:off x="1600200" y="4743450"/>
-            <a:ext cx="2524125" cy="276225"/>
+            <a:ext cx="2752725" cy="276225"/>
           </a:xfrm>
           <a:prstGeom prst="rect">
             <a:avLst/>
@@ -20337,7 +20420,7 @@
         <p:spPr>
           <a:xfrm>
             <a:off x="762000" y="5743575"/>
-            <a:ext cx="504825" cy="285750"/>
+            <a:ext cx="733425" cy="285750"/>
           </a:xfrm>
           <a:prstGeom prst="rect">
             <a:avLst/>
@@ -20372,7 +20455,7 @@
         <p:spPr>
           <a:xfrm>
             <a:off x="1600200" y="5562600"/>
-            <a:ext cx="3962400" cy="304800"/>
+            <a:ext cx="4191000" cy="304800"/>
           </a:xfrm>
           <a:prstGeom prst="rect">
             <a:avLst/>
@@ -20443,7 +20526,7 @@
         <p:spPr>
           <a:xfrm>
             <a:off x="1600200" y="5934075"/>
-            <a:ext cx="2962275" cy="276225"/>
+            <a:ext cx="3190875" cy="276225"/>
           </a:xfrm>
           <a:prstGeom prst="rect">
             <a:avLst/>
@@ -20505,7 +20588,7 @@
         <p:spPr>
           <a:xfrm>
             <a:off x="8096250" y="3362325"/>
-            <a:ext cx="2400300" cy="285750"/>
+            <a:ext cx="2628900" cy="285750"/>
           </a:xfrm>
           <a:prstGeom prst="rect">
             <a:avLst/>
@@ -20562,7 +20645,7 @@
         <p:spPr>
           <a:xfrm>
             <a:off x="7629525" y="3400425"/>
-            <a:ext cx="419100" cy="190500"/>
+            <a:ext cx="647700" cy="190500"/>
           </a:xfrm>
           <a:prstGeom prst="rect">
             <a:avLst/>
@@ -20597,7 +20680,7 @@
         <p:spPr>
           <a:xfrm>
             <a:off x="7524750" y="3781425"/>
-            <a:ext cx="3371850" cy="238125"/>
+            <a:ext cx="3600450" cy="238125"/>
           </a:xfrm>
           <a:prstGeom prst="rect">
             <a:avLst/>
@@ -20657,7 +20740,7 @@
         <p:spPr>
           <a:xfrm>
             <a:off x="7524750" y="4057650"/>
-            <a:ext cx="2695575" cy="238125"/>
+            <a:ext cx="2924175" cy="238125"/>
           </a:xfrm>
           <a:prstGeom prst="rect">
             <a:avLst/>
@@ -20692,7 +20775,7 @@
         <p:spPr>
           <a:xfrm>
             <a:off x="7524750" y="4410075"/>
-            <a:ext cx="3638550" cy="238125"/>
+            <a:ext cx="3867150" cy="238125"/>
           </a:xfrm>
           <a:prstGeom prst="rect">
             <a:avLst/>
@@ -20752,7 +20835,7 @@
         <p:spPr>
           <a:xfrm>
             <a:off x="7524750" y="4686300"/>
-            <a:ext cx="2724150" cy="238125"/>
+            <a:ext cx="2952750" cy="238125"/>
           </a:xfrm>
           <a:prstGeom prst="rect">
             <a:avLst/>
@@ -20810,7 +20893,7 @@
         <p:spPr>
           <a:xfrm>
             <a:off x="8096250" y="5210175"/>
-            <a:ext cx="2400300" cy="285750"/>
+            <a:ext cx="2628900" cy="285750"/>
           </a:xfrm>
           <a:prstGeom prst="rect">
             <a:avLst/>
@@ -20867,7 +20950,7 @@
         <p:spPr>
           <a:xfrm>
             <a:off x="7629525" y="5248275"/>
-            <a:ext cx="419100" cy="190500"/>
+            <a:ext cx="647700" cy="190500"/>
           </a:xfrm>
           <a:prstGeom prst="rect">
             <a:avLst/>
@@ -20924,7 +21007,7 @@
         <p:spPr>
           <a:xfrm>
             <a:off x="7734300" y="5743575"/>
-            <a:ext cx="1876425" cy="285750"/>
+            <a:ext cx="2105025" cy="285750"/>
           </a:xfrm>
           <a:prstGeom prst="rect">
             <a:avLst/>
@@ -20959,7 +21042,7 @@
         <p:spPr>
           <a:xfrm>
             <a:off x="9382125" y="5753100"/>
-            <a:ext cx="381000" cy="257175"/>
+            <a:ext cx="609600" cy="257175"/>
           </a:xfrm>
           <a:prstGeom prst="rect">
             <a:avLst/>
@@ -20994,7 +21077,7 @@
         <p:spPr>
           <a:xfrm>
             <a:off x="9725025" y="5743575"/>
-            <a:ext cx="1504950" cy="285750"/>
+            <a:ext cx="1733550" cy="285750"/>
           </a:xfrm>
           <a:prstGeom prst="rect">
             <a:avLst/>
@@ -21106,7 +21189,7 @@
         <p:spPr>
           <a:xfrm>
             <a:off x="762000" y="314325"/>
-            <a:ext cx="419100" cy="552450"/>
+            <a:ext cx="647700" cy="552450"/>
           </a:xfrm>
           <a:prstGeom prst="rect">
             <a:avLst/>
@@ -21141,7 +21224,7 @@
         <p:spPr>
           <a:xfrm>
             <a:off x="762000" y="1038225"/>
-            <a:ext cx="5238750" cy="619125"/>
+            <a:ext cx="5467350" cy="619125"/>
           </a:xfrm>
           <a:prstGeom prst="rect">
             <a:avLst/>
@@ -21198,7 +21281,7 @@
         <p:spPr>
           <a:xfrm>
             <a:off x="762000" y="1771650"/>
-            <a:ext cx="2085975" cy="419100"/>
+            <a:ext cx="2314575" cy="419100"/>
           </a:xfrm>
           <a:prstGeom prst="rect">
             <a:avLst/>
@@ -21255,7 +21338,7 @@
         <p:spPr>
           <a:xfrm>
             <a:off x="2800350" y="1857375"/>
-            <a:ext cx="1228725" cy="238125"/>
+            <a:ext cx="1457325" cy="238125"/>
           </a:xfrm>
           <a:prstGeom prst="rect">
             <a:avLst/>
@@ -21312,7 +21395,7 @@
         <p:spPr>
           <a:xfrm>
             <a:off x="866775" y="2343150"/>
-            <a:ext cx="723900" cy="190500"/>
+            <a:ext cx="952500" cy="190500"/>
           </a:xfrm>
           <a:prstGeom prst="rect">
             <a:avLst/>
@@ -21347,7 +21430,7 @@
         <p:spPr>
           <a:xfrm>
             <a:off x="1638300" y="2305050"/>
-            <a:ext cx="2219325" cy="266700"/>
+            <a:ext cx="2447925" cy="266700"/>
           </a:xfrm>
           <a:prstGeom prst="rect">
             <a:avLst/>
@@ -21382,7 +21465,7 @@
         <p:spPr>
           <a:xfrm>
             <a:off x="3600450" y="2305050"/>
-            <a:ext cx="2743200" cy="276225"/>
+            <a:ext cx="2971800" cy="276225"/>
           </a:xfrm>
           <a:prstGeom prst="rect">
             <a:avLst/>
@@ -21439,7 +21522,7 @@
         <p:spPr>
           <a:xfrm>
             <a:off x="762000" y="3362325"/>
-            <a:ext cx="504825" cy="285750"/>
+            <a:ext cx="733425" cy="285750"/>
           </a:xfrm>
           <a:prstGeom prst="rect">
             <a:avLst/>
@@ -21474,7 +21557,7 @@
         <p:spPr>
           <a:xfrm>
             <a:off x="1600200" y="3324225"/>
-            <a:ext cx="5029200" cy="352425"/>
+            <a:ext cx="5257800" cy="352425"/>
           </a:xfrm>
           <a:prstGeom prst="rect">
             <a:avLst/>
@@ -21545,7 +21628,7 @@
         <p:spPr>
           <a:xfrm>
             <a:off x="7810500" y="3343275"/>
-            <a:ext cx="2257425" cy="304800"/>
+            <a:ext cx="2486025" cy="304800"/>
           </a:xfrm>
           <a:prstGeom prst="rect">
             <a:avLst/>
@@ -21603,7 +21686,7 @@
         <p:spPr>
           <a:xfrm>
             <a:off x="762000" y="4552950"/>
-            <a:ext cx="504825" cy="285750"/>
+            <a:ext cx="733425" cy="285750"/>
           </a:xfrm>
           <a:prstGeom prst="rect">
             <a:avLst/>
@@ -21638,7 +21721,7 @@
         <p:spPr>
           <a:xfrm>
             <a:off x="1600200" y="4514850"/>
-            <a:ext cx="5772150" cy="352425"/>
+            <a:ext cx="6000750" cy="352425"/>
           </a:xfrm>
           <a:prstGeom prst="rect">
             <a:avLst/>
@@ -21709,7 +21792,7 @@
         <p:spPr>
           <a:xfrm>
             <a:off x="7810500" y="4533900"/>
-            <a:ext cx="2276475" cy="304800"/>
+            <a:ext cx="2505075" cy="304800"/>
           </a:xfrm>
           <a:prstGeom prst="rect">
             <a:avLst/>
@@ -21767,7 +21850,7 @@
         <p:spPr>
           <a:xfrm>
             <a:off x="762000" y="5743575"/>
-            <a:ext cx="504825" cy="285750"/>
+            <a:ext cx="733425" cy="285750"/>
           </a:xfrm>
           <a:prstGeom prst="rect">
             <a:avLst/>
@@ -21802,7 +21885,7 @@
         <p:spPr>
           <a:xfrm>
             <a:off x="1600200" y="5705475"/>
-            <a:ext cx="5057775" cy="352425"/>
+            <a:ext cx="5286375" cy="352425"/>
           </a:xfrm>
           <a:prstGeom prst="rect">
             <a:avLst/>
@@ -21873,7 +21956,7 @@
         <p:spPr>
           <a:xfrm>
             <a:off x="7810500" y="5734050"/>
-            <a:ext cx="2971800" cy="304800"/>
+            <a:ext cx="3200400" cy="304800"/>
           </a:xfrm>
           <a:prstGeom prst="rect">
             <a:avLst/>
@@ -21985,7 +22068,7 @@
         <p:spPr>
           <a:xfrm>
             <a:off x="762000" y="314325"/>
-            <a:ext cx="419100" cy="552450"/>
+            <a:ext cx="647700" cy="552450"/>
           </a:xfrm>
           <a:prstGeom prst="rect">
             <a:avLst/>
@@ -22020,7 +22103,7 @@
         <p:spPr>
           <a:xfrm>
             <a:off x="762000" y="1038225"/>
-            <a:ext cx="4895850" cy="619125"/>
+            <a:ext cx="5124450" cy="619125"/>
           </a:xfrm>
           <a:prstGeom prst="rect">
             <a:avLst/>
@@ -22066,7 +22149,7 @@
         <p:spPr>
           <a:xfrm>
             <a:off x="762000" y="1771650"/>
-            <a:ext cx="2724150" cy="419100"/>
+            <a:ext cx="2952750" cy="419100"/>
           </a:xfrm>
           <a:prstGeom prst="rect">
             <a:avLst/>
@@ -22123,7 +22206,7 @@
         <p:spPr>
           <a:xfrm>
             <a:off x="3352800" y="1857375"/>
-            <a:ext cx="676275" cy="238125"/>
+            <a:ext cx="904875" cy="238125"/>
           </a:xfrm>
           <a:prstGeom prst="rect">
             <a:avLst/>
@@ -22180,7 +22263,7 @@
         <p:spPr>
           <a:xfrm>
             <a:off x="762000" y="3038475"/>
-            <a:ext cx="504825" cy="285750"/>
+            <a:ext cx="733425" cy="285750"/>
           </a:xfrm>
           <a:prstGeom prst="rect">
             <a:avLst/>
@@ -22215,7 +22298,7 @@
         <p:spPr>
           <a:xfrm>
             <a:off x="1600200" y="2857500"/>
-            <a:ext cx="4162425" cy="304800"/>
+            <a:ext cx="4391025" cy="304800"/>
           </a:xfrm>
           <a:prstGeom prst="rect">
             <a:avLst/>
@@ -22286,7 +22369,7 @@
         <p:spPr>
           <a:xfrm>
             <a:off x="1600200" y="3228975"/>
-            <a:ext cx="4029075" cy="276225"/>
+            <a:ext cx="4257675" cy="276225"/>
           </a:xfrm>
           <a:prstGeom prst="rect">
             <a:avLst/>
@@ -22344,7 +22427,7 @@
         <p:spPr>
           <a:xfrm>
             <a:off x="762000" y="4352925"/>
-            <a:ext cx="504825" cy="285750"/>
+            <a:ext cx="733425" cy="285750"/>
           </a:xfrm>
           <a:prstGeom prst="rect">
             <a:avLst/>
@@ -22379,7 +22462,7 @@
         <p:spPr>
           <a:xfrm>
             <a:off x="1600200" y="4181475"/>
-            <a:ext cx="4038600" cy="304800"/>
+            <a:ext cx="4267200" cy="304800"/>
           </a:xfrm>
           <a:prstGeom prst="rect">
             <a:avLst/>
@@ -22450,7 +22533,7 @@
         <p:spPr>
           <a:xfrm>
             <a:off x="1600200" y="4552950"/>
-            <a:ext cx="2505075" cy="276225"/>
+            <a:ext cx="2733675" cy="276225"/>
           </a:xfrm>
           <a:prstGeom prst="rect">
             <a:avLst/>
@@ -22508,7 +22591,7 @@
         <p:spPr>
           <a:xfrm>
             <a:off x="762000" y="5676900"/>
-            <a:ext cx="504825" cy="285750"/>
+            <a:ext cx="733425" cy="285750"/>
           </a:xfrm>
           <a:prstGeom prst="rect">
             <a:avLst/>
@@ -22543,7 +22626,7 @@
         <p:spPr>
           <a:xfrm>
             <a:off x="1600200" y="5505450"/>
-            <a:ext cx="3933825" cy="304800"/>
+            <a:ext cx="4162425" cy="304800"/>
           </a:xfrm>
           <a:prstGeom prst="rect">
             <a:avLst/>
@@ -22614,7 +22697,7 @@
         <p:spPr>
           <a:xfrm>
             <a:off x="1600200" y="5876925"/>
-            <a:ext cx="2286000" cy="276225"/>
+            <a:ext cx="2514600" cy="276225"/>
           </a:xfrm>
           <a:prstGeom prst="rect">
             <a:avLst/>
@@ -22676,7 +22759,7 @@
         <p:spPr>
           <a:xfrm>
             <a:off x="8096250" y="2971800"/>
-            <a:ext cx="2247900" cy="285750"/>
+            <a:ext cx="2476500" cy="285750"/>
           </a:xfrm>
           <a:prstGeom prst="rect">
             <a:avLst/>
@@ -22733,7 +22816,7 @@
         <p:spPr>
           <a:xfrm>
             <a:off x="7629525" y="3009900"/>
-            <a:ext cx="419100" cy="190500"/>
+            <a:ext cx="647700" cy="190500"/>
           </a:xfrm>
           <a:prstGeom prst="rect">
             <a:avLst/>
@@ -22789,8 +22872,8 @@
         </p:nvSpPr>
         <p:spPr>
           <a:xfrm>
-            <a:off x="7600950" y="3590925"/>
-            <a:ext cx="571500" cy="295275"/>
+            <a:off x="7486650" y="3590925"/>
+            <a:ext cx="800100" cy="295275"/>
           </a:xfrm>
           <a:prstGeom prst="rect">
             <a:avLst/>
@@ -22825,7 +22908,7 @@
         <p:spPr>
           <a:xfrm>
             <a:off x="8401050" y="3457575"/>
-            <a:ext cx="1209675" cy="276225"/>
+            <a:ext cx="1438275" cy="276225"/>
           </a:xfrm>
           <a:prstGeom prst="rect">
             <a:avLst/>
@@ -22860,7 +22943,7 @@
         <p:spPr>
           <a:xfrm>
             <a:off x="8401050" y="3810000"/>
-            <a:ext cx="2886075" cy="209550"/>
+            <a:ext cx="3114675" cy="209550"/>
           </a:xfrm>
           <a:prstGeom prst="rect">
             <a:avLst/>
@@ -22938,8 +23021,8 @@
         </p:nvSpPr>
         <p:spPr>
           <a:xfrm>
-            <a:off x="7743825" y="4391025"/>
-            <a:ext cx="285750" cy="295275"/>
+            <a:off x="7629525" y="4391025"/>
+            <a:ext cx="514350" cy="295275"/>
           </a:xfrm>
           <a:prstGeom prst="rect">
             <a:avLst/>
@@ -22974,7 +23057,7 @@
         <p:spPr>
           <a:xfrm>
             <a:off x="8401050" y="4257675"/>
-            <a:ext cx="1428750" cy="276225"/>
+            <a:ext cx="1657350" cy="276225"/>
           </a:xfrm>
           <a:prstGeom prst="rect">
             <a:avLst/>
@@ -23009,7 +23092,7 @@
         <p:spPr>
           <a:xfrm>
             <a:off x="8401050" y="4610100"/>
-            <a:ext cx="2962275" cy="209550"/>
+            <a:ext cx="3190875" cy="209550"/>
           </a:xfrm>
           <a:prstGeom prst="rect">
             <a:avLst/>
@@ -23089,7 +23172,7 @@
         <p:spPr>
           <a:xfrm>
             <a:off x="7524750" y="5229225"/>
-            <a:ext cx="3676650" cy="247650"/>
+            <a:ext cx="3905250" cy="247650"/>
           </a:xfrm>
           <a:prstGeom prst="rect">
             <a:avLst/>
@@ -23135,7 +23218,7 @@
         <p:spPr>
           <a:xfrm>
             <a:off x="7524750" y="5619750"/>
-            <a:ext cx="4124325" cy="219075"/>
+            <a:ext cx="4352925" cy="219075"/>
           </a:xfrm>
           <a:prstGeom prst="rect">
             <a:avLst/>
@@ -23302,7 +23385,7 @@
         <p:spPr>
           <a:xfrm>
             <a:off x="762000" y="314325"/>
-            <a:ext cx="419100" cy="552450"/>
+            <a:ext cx="647700" cy="552450"/>
           </a:xfrm>
           <a:prstGeom prst="rect">
             <a:avLst/>
@@ -23337,7 +23420,7 @@
         <p:spPr>
           <a:xfrm>
             <a:off x="762000" y="1038225"/>
-            <a:ext cx="2686050" cy="619125"/>
+            <a:ext cx="2914650" cy="619125"/>
           </a:xfrm>
           <a:prstGeom prst="rect">
             <a:avLst/>
@@ -23383,7 +23466,7 @@
         <p:spPr>
           <a:xfrm>
             <a:off x="762000" y="1771650"/>
-            <a:ext cx="3400425" cy="419100"/>
+            <a:ext cx="3629025" cy="419100"/>
           </a:xfrm>
           <a:prstGeom prst="rect">
             <a:avLst/>
@@ -23440,7 +23523,7 @@
         <p:spPr>
           <a:xfrm>
             <a:off x="3943350" y="1857375"/>
-            <a:ext cx="1228725" cy="238125"/>
+            <a:ext cx="1457325" cy="238125"/>
           </a:xfrm>
           <a:prstGeom prst="rect">
             <a:avLst/>
@@ -23497,7 +23580,7 @@
         <p:spPr>
           <a:xfrm>
             <a:off x="866775" y="2343150"/>
-            <a:ext cx="419100" cy="190500"/>
+            <a:ext cx="647700" cy="190500"/>
           </a:xfrm>
           <a:prstGeom prst="rect">
             <a:avLst/>
@@ -23532,7 +23615,7 @@
         <p:spPr>
           <a:xfrm>
             <a:off x="1371600" y="2305050"/>
-            <a:ext cx="1733550" cy="266700"/>
+            <a:ext cx="1962150" cy="266700"/>
           </a:xfrm>
           <a:prstGeom prst="rect">
             <a:avLst/>
@@ -23567,7 +23650,7 @@
         <p:spPr>
           <a:xfrm>
             <a:off x="2914650" y="2305050"/>
-            <a:ext cx="1647825" cy="276225"/>
+            <a:ext cx="1876425" cy="276225"/>
           </a:xfrm>
           <a:prstGeom prst="rect">
             <a:avLst/>
@@ -23624,7 +23707,7 @@
         <p:spPr>
           <a:xfrm>
             <a:off x="762000" y="3362325"/>
-            <a:ext cx="504825" cy="285750"/>
+            <a:ext cx="733425" cy="285750"/>
           </a:xfrm>
           <a:prstGeom prst="rect">
             <a:avLst/>
@@ -23659,7 +23742,7 @@
         <p:spPr>
           <a:xfrm>
             <a:off x="1600200" y="3324225"/>
-            <a:ext cx="3771900" cy="352425"/>
+            <a:ext cx="4000500" cy="352425"/>
           </a:xfrm>
           <a:prstGeom prst="rect">
             <a:avLst/>
@@ -23730,7 +23813,7 @@
         <p:spPr>
           <a:xfrm>
             <a:off x="7810500" y="3343275"/>
-            <a:ext cx="2762250" cy="304800"/>
+            <a:ext cx="2990850" cy="304800"/>
           </a:xfrm>
           <a:prstGeom prst="rect">
             <a:avLst/>
@@ -23788,7 +23871,7 @@
         <p:spPr>
           <a:xfrm>
             <a:off x="762000" y="4552950"/>
-            <a:ext cx="504825" cy="285750"/>
+            <a:ext cx="733425" cy="285750"/>
           </a:xfrm>
           <a:prstGeom prst="rect">
             <a:avLst/>
@@ -23823,7 +23906,7 @@
         <p:spPr>
           <a:xfrm>
             <a:off x="1600200" y="4514850"/>
-            <a:ext cx="2581275" cy="352425"/>
+            <a:ext cx="2809875" cy="352425"/>
           </a:xfrm>
           <a:prstGeom prst="rect">
             <a:avLst/>
@@ -23894,7 +23977,7 @@
         <p:spPr>
           <a:xfrm>
             <a:off x="7810500" y="4362450"/>
-            <a:ext cx="2286000" cy="304800"/>
+            <a:ext cx="2514600" cy="304800"/>
           </a:xfrm>
           <a:prstGeom prst="rect">
             <a:avLst/>
@@ -23956,7 +24039,7 @@
         <p:spPr>
           <a:xfrm>
             <a:off x="7924800" y="4772025"/>
-            <a:ext cx="1981200" cy="200025"/>
+            <a:ext cx="2209800" cy="200025"/>
           </a:xfrm>
           <a:prstGeom prst="rect">
             <a:avLst/>
@@ -24014,7 +24097,7 @@
         <p:spPr>
           <a:xfrm>
             <a:off x="762000" y="5743575"/>
-            <a:ext cx="504825" cy="285750"/>
+            <a:ext cx="733425" cy="285750"/>
           </a:xfrm>
           <a:prstGeom prst="rect">
             <a:avLst/>
@@ -24049,7 +24132,7 @@
         <p:spPr>
           <a:xfrm>
             <a:off x="1600200" y="5705475"/>
-            <a:ext cx="3562350" cy="352425"/>
+            <a:ext cx="3790950" cy="352425"/>
           </a:xfrm>
           <a:prstGeom prst="rect">
             <a:avLst/>
@@ -24120,7 +24203,7 @@
         <p:spPr>
           <a:xfrm>
             <a:off x="7810500" y="5734050"/>
-            <a:ext cx="2286000" cy="304800"/>
+            <a:ext cx="2514600" cy="304800"/>
           </a:xfrm>
           <a:prstGeom prst="rect">
             <a:avLst/>
@@ -24232,7 +24315,7 @@
         <p:spPr>
           <a:xfrm>
             <a:off x="762000" y="314325"/>
-            <a:ext cx="419100" cy="552450"/>
+            <a:ext cx="647700" cy="552450"/>
           </a:xfrm>
           <a:prstGeom prst="rect">
             <a:avLst/>
@@ -24267,7 +24350,7 @@
         <p:spPr>
           <a:xfrm>
             <a:off x="762000" y="1038225"/>
-            <a:ext cx="5676900" cy="619125"/>
+            <a:ext cx="5905500" cy="619125"/>
           </a:xfrm>
           <a:prstGeom prst="rect">
             <a:avLst/>
@@ -24324,7 +24407,7 @@
         <p:spPr>
           <a:xfrm>
             <a:off x="762000" y="1771650"/>
-            <a:ext cx="7924800" cy="419100"/>
+            <a:ext cx="8153400" cy="419100"/>
           </a:xfrm>
           <a:prstGeom prst="rect">
             <a:avLst/>
@@ -24381,7 +24464,7 @@
         <p:spPr>
           <a:xfrm>
             <a:off x="762000" y="3038475"/>
-            <a:ext cx="504825" cy="285750"/>
+            <a:ext cx="733425" cy="285750"/>
           </a:xfrm>
           <a:prstGeom prst="rect">
             <a:avLst/>
@@ -24416,7 +24499,7 @@
         <p:spPr>
           <a:xfrm>
             <a:off x="1600200" y="2857500"/>
-            <a:ext cx="3867150" cy="304800"/>
+            <a:ext cx="4095750" cy="304800"/>
           </a:xfrm>
           <a:prstGeom prst="rect">
             <a:avLst/>
@@ -24487,7 +24570,7 @@
         <p:spPr>
           <a:xfrm>
             <a:off x="1600200" y="3228975"/>
-            <a:ext cx="2933700" cy="276225"/>
+            <a:ext cx="3162300" cy="276225"/>
           </a:xfrm>
           <a:prstGeom prst="rect">
             <a:avLst/>
@@ -24545,7 +24628,7 @@
         <p:spPr>
           <a:xfrm>
             <a:off x="762000" y="4352925"/>
-            <a:ext cx="504825" cy="285750"/>
+            <a:ext cx="733425" cy="285750"/>
           </a:xfrm>
           <a:prstGeom prst="rect">
             <a:avLst/>
@@ -24580,7 +24663,7 @@
         <p:spPr>
           <a:xfrm>
             <a:off x="1600200" y="4181475"/>
-            <a:ext cx="5334000" cy="304800"/>
+            <a:ext cx="5562600" cy="304800"/>
           </a:xfrm>
           <a:prstGeom prst="rect">
             <a:avLst/>
@@ -24651,7 +24734,7 @@
         <p:spPr>
           <a:xfrm>
             <a:off x="1600200" y="4552950"/>
-            <a:ext cx="2943225" cy="276225"/>
+            <a:ext cx="3171825" cy="276225"/>
           </a:xfrm>
           <a:prstGeom prst="rect">
             <a:avLst/>
@@ -24709,7 +24792,7 @@
         <p:spPr>
           <a:xfrm>
             <a:off x="762000" y="5676900"/>
-            <a:ext cx="504825" cy="285750"/>
+            <a:ext cx="733425" cy="285750"/>
           </a:xfrm>
           <a:prstGeom prst="rect">
             <a:avLst/>
@@ -24744,7 +24827,7 @@
         <p:spPr>
           <a:xfrm>
             <a:off x="1600200" y="5505450"/>
-            <a:ext cx="4943475" cy="304800"/>
+            <a:ext cx="5172075" cy="304800"/>
           </a:xfrm>
           <a:prstGeom prst="rect">
             <a:avLst/>
@@ -24815,7 +24898,7 @@
         <p:spPr>
           <a:xfrm>
             <a:off x="1600200" y="5876925"/>
-            <a:ext cx="2495550" cy="276225"/>
+            <a:ext cx="2724150" cy="276225"/>
           </a:xfrm>
           <a:prstGeom prst="rect">
             <a:avLst/>
@@ -24877,7 +24960,7 @@
         <p:spPr>
           <a:xfrm>
             <a:off x="8229600" y="2971800"/>
-            <a:ext cx="2419350" cy="285750"/>
+            <a:ext cx="2647950" cy="285750"/>
           </a:xfrm>
           <a:prstGeom prst="rect">
             <a:avLst/>
@@ -24934,7 +25017,7 @@
         <p:spPr>
           <a:xfrm>
             <a:off x="7629525" y="3009900"/>
-            <a:ext cx="571500" cy="190500"/>
+            <a:ext cx="800100" cy="190500"/>
           </a:xfrm>
           <a:prstGeom prst="rect">
             <a:avLst/>
@@ -25010,8 +25093,8 @@
         </p:nvSpPr>
         <p:spPr>
           <a:xfrm>
-            <a:off x="7791450" y="3800475"/>
-            <a:ext cx="390525" cy="180975"/>
+            <a:off x="7677150" y="3800475"/>
+            <a:ext cx="619125" cy="180975"/>
           </a:xfrm>
           <a:prstGeom prst="rect">
             <a:avLst/>
@@ -25046,7 +25129,7 @@
         <p:spPr>
           <a:xfrm>
             <a:off x="8382000" y="3657600"/>
-            <a:ext cx="2943225" cy="257175"/>
+            <a:ext cx="3171825" cy="257175"/>
           </a:xfrm>
           <a:prstGeom prst="rect">
             <a:avLst/>
@@ -25103,7 +25186,7 @@
         <p:spPr>
           <a:xfrm>
             <a:off x="8382000" y="3962400"/>
-            <a:ext cx="1962150" cy="238125"/>
+            <a:ext cx="2190750" cy="238125"/>
           </a:xfrm>
           <a:prstGeom prst="rect">
             <a:avLst/>
@@ -25179,8 +25262,8 @@
         </p:nvSpPr>
         <p:spPr>
           <a:xfrm>
-            <a:off x="7791450" y="4886325"/>
-            <a:ext cx="390525" cy="180975"/>
+            <a:off x="7677150" y="4886325"/>
+            <a:ext cx="619125" cy="180975"/>
           </a:xfrm>
           <a:prstGeom prst="rect">
             <a:avLst/>
@@ -25215,7 +25298,7 @@
         <p:spPr>
           <a:xfrm>
             <a:off x="8382000" y="4714875"/>
-            <a:ext cx="1990725" cy="257175"/>
+            <a:ext cx="2219325" cy="257175"/>
           </a:xfrm>
           <a:prstGeom prst="rect">
             <a:avLst/>
@@ -25250,7 +25333,7 @@
         <p:spPr>
           <a:xfrm>
             <a:off x="8382000" y="5010150"/>
-            <a:ext cx="3086100" cy="238125"/>
+            <a:ext cx="3314700" cy="238125"/>
           </a:xfrm>
           <a:prstGeom prst="rect">
             <a:avLst/>
@@ -25308,7 +25391,7 @@
         <p:spPr>
           <a:xfrm>
             <a:off x="7524750" y="5791200"/>
-            <a:ext cx="2838450" cy="247650"/>
+            <a:ext cx="3067050" cy="247650"/>
           </a:xfrm>
           <a:prstGeom prst="rect">
             <a:avLst/>
@@ -25354,7 +25437,7 @@
         <p:spPr>
           <a:xfrm>
             <a:off x="7524750" y="6067425"/>
-            <a:ext cx="3829050" cy="247650"/>
+            <a:ext cx="4057650" cy="247650"/>
           </a:xfrm>
           <a:prstGeom prst="rect">
             <a:avLst/>
@@ -25477,7 +25560,7 @@
         <p:spPr>
           <a:xfrm>
             <a:off x="762000" y="314325"/>
-            <a:ext cx="419100" cy="552450"/>
+            <a:ext cx="647700" cy="552450"/>
           </a:xfrm>
           <a:prstGeom prst="rect">
             <a:avLst/>
@@ -25512,7 +25595,7 @@
         <p:spPr>
           <a:xfrm>
             <a:off x="762000" y="1038225"/>
-            <a:ext cx="1914525" cy="619125"/>
+            <a:ext cx="2143125" cy="619125"/>
           </a:xfrm>
           <a:prstGeom prst="rect">
             <a:avLst/>
@@ -25558,7 +25641,7 @@
         <p:spPr>
           <a:xfrm>
             <a:off x="762000" y="1771650"/>
-            <a:ext cx="2085975" cy="419100"/>
+            <a:ext cx="2314575" cy="419100"/>
           </a:xfrm>
           <a:prstGeom prst="rect">
             <a:avLst/>
@@ -25615,7 +25698,7 @@
         <p:spPr>
           <a:xfrm>
             <a:off x="2800350" y="1857375"/>
-            <a:ext cx="1790700" cy="238125"/>
+            <a:ext cx="2019300" cy="238125"/>
           </a:xfrm>
           <a:prstGeom prst="rect">
             <a:avLst/>
@@ -25672,7 +25755,7 @@
         <p:spPr>
           <a:xfrm>
             <a:off x="762000" y="3038475"/>
-            <a:ext cx="504825" cy="285750"/>
+            <a:ext cx="733425" cy="285750"/>
           </a:xfrm>
           <a:prstGeom prst="rect">
             <a:avLst/>
@@ -25707,7 +25790,7 @@
         <p:spPr>
           <a:xfrm>
             <a:off x="1600200" y="3000375"/>
-            <a:ext cx="3762375" cy="352425"/>
+            <a:ext cx="3990975" cy="352425"/>
           </a:xfrm>
           <a:prstGeom prst="rect">
             <a:avLst/>
@@ -25756,7 +25839,7 @@
         <p:spPr>
           <a:xfrm>
             <a:off x="7810500" y="3019425"/>
-            <a:ext cx="2038350" cy="304800"/>
+            <a:ext cx="2266950" cy="304800"/>
           </a:xfrm>
           <a:prstGeom prst="rect">
             <a:avLst/>
@@ -25814,7 +25897,7 @@
         <p:spPr>
           <a:xfrm>
             <a:off x="762000" y="4352925"/>
-            <a:ext cx="504825" cy="285750"/>
+            <a:ext cx="733425" cy="285750"/>
           </a:xfrm>
           <a:prstGeom prst="rect">
             <a:avLst/>
@@ -25849,7 +25932,7 @@
         <p:spPr>
           <a:xfrm>
             <a:off x="1600200" y="4324350"/>
-            <a:ext cx="4572000" cy="352425"/>
+            <a:ext cx="4800600" cy="352425"/>
           </a:xfrm>
           <a:prstGeom prst="rect">
             <a:avLst/>
@@ -25898,7 +25981,7 @@
         <p:spPr>
           <a:xfrm>
             <a:off x="7810500" y="4343400"/>
-            <a:ext cx="2762250" cy="304800"/>
+            <a:ext cx="2990850" cy="304800"/>
           </a:xfrm>
           <a:prstGeom prst="rect">
             <a:avLst/>
@@ -25956,7 +26039,7 @@
         <p:spPr>
           <a:xfrm>
             <a:off x="762000" y="5676900"/>
-            <a:ext cx="504825" cy="285750"/>
+            <a:ext cx="733425" cy="285750"/>
           </a:xfrm>
           <a:prstGeom prst="rect">
             <a:avLst/>
@@ -25991,7 +26074,7 @@
         <p:spPr>
           <a:xfrm>
             <a:off x="1600200" y="5648325"/>
-            <a:ext cx="2771775" cy="352425"/>
+            <a:ext cx="3000375" cy="352425"/>
           </a:xfrm>
           <a:prstGeom prst="rect">
             <a:avLst/>
@@ -26040,7 +26123,7 @@
         <p:spPr>
           <a:xfrm>
             <a:off x="7810500" y="5667375"/>
-            <a:ext cx="2524125" cy="304800"/>
+            <a:ext cx="2752725" cy="304800"/>
           </a:xfrm>
           <a:prstGeom prst="rect">
             <a:avLst/>

--- a/matome/9-phrases/9-phrases-matome.pptx
+++ b/matome/9-phrases/9-phrases-matome.pptx
@@ -519,8 +519,8 @@
         </p:blipFill>
         <p:spPr>
           <a:xfrm>
-            <a:off x="7820025" y="1524000"/>
-            <a:ext cx="3990975" cy="5334000"/>
+            <a:off x="10563225" y="5143500"/>
+            <a:ext cx="1285875" cy="1714500"/>
           </a:xfrm>
           <a:prstGeom prst="rect">
             <a:avLst/>
@@ -535,7 +535,7 @@
         </p:nvSpPr>
         <p:spPr>
           <a:xfrm>
-            <a:off x="838200" y="695325"/>
+            <a:off x="838200" y="1571625"/>
             <a:ext cx="2000250" cy="276225"/>
           </a:xfrm>
           <a:prstGeom prst="rect">
@@ -570,22 +570,22 @@
         </p:nvSpPr>
         <p:spPr>
           <a:xfrm>
-            <a:off x="838200" y="1019175"/>
-            <a:ext cx="6619875" cy="876300"/>
-          </a:xfrm>
-          <a:prstGeom prst="rect">
-            <a:avLst/>
-          </a:prstGeom>
-          <a:noFill/>
-          <a:ln/>
-        </p:spPr>
-        <p:txBody>
-          <a:bodyPr wrap="square" lIns="0" tIns="0" rIns="0" bIns="0" anchor="ctr"/>
-          <a:lstStyle/>
-          <a:p>
-            <a:pPr/>
-            <a:r>
-              <a:rPr sz="4800" b="1">
+            <a:off x="838200" y="1952625"/>
+            <a:ext cx="7010400" cy="942975"/>
+          </a:xfrm>
+          <a:prstGeom prst="rect">
+            <a:avLst/>
+          </a:prstGeom>
+          <a:noFill/>
+          <a:ln/>
+        </p:spPr>
+        <p:txBody>
+          <a:bodyPr wrap="square" lIns="0" tIns="0" rIns="0" bIns="0" anchor="ctr"/>
+          <a:lstStyle/>
+          <a:p>
+            <a:pPr/>
+            <a:r>
+              <a:rPr sz="5100" b="1">
                 <a:solidFill>
                   <a:srgbClr val="1E1A1C"/>
                 </a:solidFill>
@@ -605,22 +605,22 @@
         </p:nvSpPr>
         <p:spPr>
           <a:xfrm>
-            <a:off x="838200" y="1771650"/>
-            <a:ext cx="1685925" cy="1190625"/>
-          </a:xfrm>
-          <a:prstGeom prst="rect">
-            <a:avLst/>
-          </a:prstGeom>
-          <a:noFill/>
-          <a:ln/>
-        </p:spPr>
-        <p:txBody>
-          <a:bodyPr wrap="square" lIns="0" tIns="0" rIns="0" bIns="0" anchor="ctr"/>
-          <a:lstStyle/>
-          <a:p>
-            <a:pPr/>
-            <a:r>
-              <a:rPr sz="8400" b="1">
+            <a:off x="838200" y="2762250"/>
+            <a:ext cx="1790700" cy="1276350"/>
+          </a:xfrm>
+          <a:prstGeom prst="rect">
+            <a:avLst/>
+          </a:prstGeom>
+          <a:noFill/>
+          <a:ln/>
+        </p:spPr>
+        <p:txBody>
+          <a:bodyPr wrap="square" lIns="0" tIns="0" rIns="0" bIns="0" anchor="ctr"/>
+          <a:lstStyle/>
+          <a:p>
+            <a:pPr/>
+            <a:r>
+              <a:rPr sz="9000" b="1">
                 <a:solidFill>
                   <a:srgbClr val="1E1A1C"/>
                 </a:solidFill>
@@ -631,7 +631,7 @@
             </a:r>
             <a:pPr/>
             <a:r>
-              <a:rPr sz="4800" b="1">
+              <a:rPr sz="5100" b="1">
                 <a:solidFill>
                   <a:srgbClr val="1E1A1C"/>
                 </a:solidFill>
@@ -651,22 +651,22 @@
         </p:nvSpPr>
         <p:spPr>
           <a:xfrm>
-            <a:off x="2162175" y="2028825"/>
-            <a:ext cx="2447925" cy="876300"/>
-          </a:xfrm>
-          <a:prstGeom prst="rect">
-            <a:avLst/>
-          </a:prstGeom>
-          <a:noFill/>
-          <a:ln/>
-        </p:spPr>
-        <p:txBody>
-          <a:bodyPr wrap="square" lIns="0" tIns="0" rIns="0" bIns="0" anchor="ctr"/>
-          <a:lstStyle/>
-          <a:p>
-            <a:pPr/>
-            <a:r>
-              <a:rPr sz="4800" b="1">
+            <a:off x="2247900" y="3048000"/>
+            <a:ext cx="2581275" cy="942975"/>
+          </a:xfrm>
+          <a:prstGeom prst="rect">
+            <a:avLst/>
+          </a:prstGeom>
+          <a:noFill/>
+          <a:ln/>
+        </p:spPr>
+        <p:txBody>
+          <a:bodyPr wrap="square" lIns="0" tIns="0" rIns="0" bIns="0" anchor="ctr"/>
+          <a:lstStyle/>
+          <a:p>
+            <a:pPr/>
+            <a:r>
+              <a:rPr sz="5100" b="1">
                 <a:solidFill>
                   <a:srgbClr val="1E1A1C"/>
                 </a:solidFill>
@@ -689,7 +689,7 @@
         </p:nvSpPr>
         <p:spPr>
           <a:xfrm>
-            <a:off x="838200" y="3133725"/>
+            <a:off x="838200" y="4257675"/>
             <a:ext cx="3429000" cy="57150"/>
           </a:xfrm>
           <a:prstGeom prst="roundRect">
@@ -711,22 +711,22 @@
         </p:nvSpPr>
         <p:spPr>
           <a:xfrm>
-            <a:off x="838200" y="3419475"/>
-            <a:ext cx="3619500" cy="276225"/>
-          </a:xfrm>
-          <a:prstGeom prst="rect">
-            <a:avLst/>
-          </a:prstGeom>
-          <a:noFill/>
-          <a:ln/>
-        </p:spPr>
-        <p:txBody>
-          <a:bodyPr wrap="square" lIns="0" tIns="0" rIns="0" bIns="0" anchor="ctr"/>
-          <a:lstStyle/>
-          <a:p>
-            <a:pPr/>
-            <a:r>
-              <a:rPr sz="1500" b="1">
+            <a:off x="838200" y="4610100"/>
+            <a:ext cx="3781425" cy="285750"/>
+          </a:xfrm>
+          <a:prstGeom prst="rect">
+            <a:avLst/>
+          </a:prstGeom>
+          <a:noFill/>
+          <a:ln/>
+        </p:spPr>
+        <p:txBody>
+          <a:bodyPr wrap="square" lIns="0" tIns="0" rIns="0" bIns="0" anchor="ctr"/>
+          <a:lstStyle/>
+          <a:p>
+            <a:pPr/>
+            <a:r>
+              <a:rPr sz="1600" b="1">
                 <a:solidFill>
                   <a:srgbClr val="574D52"/>
                 </a:solidFill>
@@ -746,22 +746,22 @@
         </p:nvSpPr>
         <p:spPr>
           <a:xfrm>
-            <a:off x="838200" y="3743325"/>
-            <a:ext cx="4067175" cy="276225"/>
-          </a:xfrm>
-          <a:prstGeom prst="rect">
-            <a:avLst/>
-          </a:prstGeom>
-          <a:noFill/>
-          <a:ln/>
-        </p:spPr>
-        <p:txBody>
-          <a:bodyPr wrap="square" lIns="0" tIns="0" rIns="0" bIns="0" anchor="ctr"/>
-          <a:lstStyle/>
-          <a:p>
-            <a:pPr/>
-            <a:r>
-              <a:rPr sz="1500" b="1">
+            <a:off x="838200" y="4962525"/>
+            <a:ext cx="4257675" cy="285750"/>
+          </a:xfrm>
+          <a:prstGeom prst="rect">
+            <a:avLst/>
+          </a:prstGeom>
+          <a:noFill/>
+          <a:ln/>
+        </p:spPr>
+        <p:txBody>
+          <a:bodyPr wrap="square" lIns="0" tIns="0" rIns="0" bIns="0" anchor="ctr"/>
+          <a:lstStyle/>
+          <a:p>
+            <a:pPr/>
+            <a:r>
+              <a:rPr sz="1600" b="1">
                 <a:solidFill>
                   <a:srgbClr val="574D52"/>
                 </a:solidFill>
@@ -781,22 +781,22 @@
         </p:nvSpPr>
         <p:spPr>
           <a:xfrm>
-            <a:off x="838200" y="4333875"/>
-            <a:ext cx="1428750" cy="152400"/>
-          </a:xfrm>
-          <a:prstGeom prst="rect">
-            <a:avLst/>
-          </a:prstGeom>
-          <a:noFill/>
-          <a:ln/>
-        </p:spPr>
-        <p:txBody>
-          <a:bodyPr wrap="square" lIns="0" tIns="0" rIns="0" bIns="0" anchor="ctr"/>
-          <a:lstStyle/>
-          <a:p>
-            <a:pPr/>
-            <a:r>
-              <a:rPr sz="1050" b="1">
+            <a:off x="7715250" y="552450"/>
+            <a:ext cx="1514475" cy="161925"/>
+          </a:xfrm>
+          <a:prstGeom prst="rect">
+            <a:avLst/>
+          </a:prstGeom>
+          <a:noFill/>
+          <a:ln/>
+        </p:spPr>
+        <p:txBody>
+          <a:bodyPr wrap="square" lIns="0" tIns="0" rIns="0" bIns="0" anchor="ctr"/>
+          <a:lstStyle/>
+          <a:p>
+            <a:pPr/>
+            <a:r>
+              <a:rPr sz="1150" b="1">
                 <a:solidFill>
                   <a:srgbClr val="9C9196"/>
                 </a:solidFill>
@@ -811,22 +811,88 @@
       <p:sp>
         <p:nvSpPr>
           <p:cNvPr id="12" name=""/>
+          <p:cNvSpPr txBox="1"/>
+          <p:nvPr/>
+        </p:nvSpPr>
+        <p:spPr>
+          <a:xfrm>
+            <a:off x="8058150" y="876300"/>
+            <a:ext cx="1885950" cy="219075"/>
+          </a:xfrm>
+          <a:prstGeom prst="rect">
+            <a:avLst/>
+          </a:prstGeom>
+          <a:noFill/>
+          <a:ln/>
+        </p:spPr>
+        <p:txBody>
+          <a:bodyPr wrap="square" lIns="0" tIns="0" rIns="0" bIns="0" anchor="ctr"/>
+          <a:lstStyle/>
+          <a:p>
+            <a:pPr/>
+            <a:r>
+              <a:rPr sz="1600" b="1">
+                <a:solidFill>
+                  <a:srgbClr val="1E1A1C"/>
+                </a:solidFill>
+                <a:latin typeface="Arial"/>
+                <a:ea typeface="Arial"/>
+              </a:rPr>
+              <a:t>I feel like ~ing</a:t>
+            </a:r>
+          </a:p>
+        </p:txBody>
+      </p:sp>
+      <p:sp>
+        <p:nvSpPr>
+          <p:cNvPr id="13" name=""/>
+          <p:cNvSpPr txBox="1"/>
+          <p:nvPr/>
+        </p:nvSpPr>
+        <p:spPr>
+          <a:xfrm>
+            <a:off x="7715250" y="876300"/>
+            <a:ext cx="476250" cy="219075"/>
+          </a:xfrm>
+          <a:prstGeom prst="rect">
+            <a:avLst/>
+          </a:prstGeom>
+          <a:noFill/>
+          <a:ln/>
+        </p:spPr>
+        <p:txBody>
+          <a:bodyPr wrap="square" lIns="0" tIns="0" rIns="0" bIns="0" anchor="ctr"/>
+          <a:lstStyle/>
+          <a:p>
+            <a:pPr/>
+            <a:r>
+              <a:rPr sz="1600" b="1">
+                <a:solidFill>
+                  <a:srgbClr val="C8417F"/>
+                </a:solidFill>
+                <a:latin typeface="Arial"/>
+                <a:ea typeface="Arial"/>
+              </a:rPr>
+              <a:t>1</a:t>
+            </a:r>
+          </a:p>
+        </p:txBody>
+      </p:sp>
+      <p:sp>
+        <p:nvSpPr>
+          <p:cNvPr id="14" name=""/>
           <p:cNvSpPr/>
           <p:nvPr/>
         </p:nvSpPr>
         <p:spPr>
           <a:xfrm>
-            <a:off x="838200" y="4581525"/>
-            <a:ext cx="2200275" cy="361950"/>
-          </a:xfrm>
-          <a:prstGeom prst="roundRect">
-            <a:avLst>
-              <a:gd name="adj" fmla="val 26316"/>
-            </a:avLst>
-          </a:prstGeom>
-          <a:solidFill>
-            <a:srgbClr val="FFFFFF"/>
-          </a:solidFill>
+            <a:off x="7715250" y="1200150"/>
+            <a:ext cx="3638550" cy="0"/>
+          </a:xfrm>
+          <a:prstGeom prst="line">
+            <a:avLst/>
+          </a:prstGeom>
+          <a:noFill/>
           <a:ln w="19050">
             <a:solidFill>
               <a:srgbClr val="F2D5E1"/>
@@ -837,93 +903,89 @@
       </p:sp>
       <p:sp>
         <p:nvSpPr>
-          <p:cNvPr id="13" name=""/>
-          <p:cNvSpPr txBox="1"/>
-          <p:nvPr/>
-        </p:nvSpPr>
-        <p:spPr>
-          <a:xfrm>
-            <a:off x="1152525" y="4676775"/>
-            <a:ext cx="1457325" cy="161925"/>
-          </a:xfrm>
-          <a:prstGeom prst="rect">
-            <a:avLst/>
-          </a:prstGeom>
-          <a:noFill/>
-          <a:ln/>
-        </p:spPr>
-        <p:txBody>
-          <a:bodyPr wrap="square" lIns="0" tIns="0" rIns="0" bIns="0" anchor="ctr"/>
-          <a:lstStyle/>
-          <a:p>
-            <a:pPr/>
-            <a:r>
-              <a:rPr sz="1200" b="1">
-                <a:solidFill>
-                  <a:srgbClr val="1E1A1C"/>
-                </a:solidFill>
-                <a:latin typeface="Arial"/>
-                <a:ea typeface="Arial"/>
-              </a:rPr>
-              <a:t>I feel like ~ing</a:t>
-            </a:r>
-          </a:p>
-        </p:txBody>
-      </p:sp>
-      <p:sp>
-        <p:nvSpPr>
-          <p:cNvPr id="14" name=""/>
-          <p:cNvSpPr txBox="1"/>
-          <p:nvPr/>
-        </p:nvSpPr>
-        <p:spPr>
-          <a:xfrm>
-            <a:off x="971550" y="4676775"/>
-            <a:ext cx="438150" cy="161925"/>
-          </a:xfrm>
-          <a:prstGeom prst="rect">
-            <a:avLst/>
-          </a:prstGeom>
-          <a:noFill/>
-          <a:ln/>
-        </p:spPr>
-        <p:txBody>
-          <a:bodyPr wrap="square" lIns="0" tIns="0" rIns="0" bIns="0" anchor="ctr"/>
-          <a:lstStyle/>
-          <a:p>
-            <a:pPr/>
-            <a:r>
-              <a:rPr sz="1200" b="1">
+          <p:cNvPr id="15" name=""/>
+          <p:cNvSpPr txBox="1"/>
+          <p:nvPr/>
+        </p:nvSpPr>
+        <p:spPr>
+          <a:xfrm>
+            <a:off x="8058150" y="1295400"/>
+            <a:ext cx="1504950" cy="219075"/>
+          </a:xfrm>
+          <a:prstGeom prst="rect">
+            <a:avLst/>
+          </a:prstGeom>
+          <a:noFill/>
+          <a:ln/>
+        </p:spPr>
+        <p:txBody>
+          <a:bodyPr wrap="square" lIns="0" tIns="0" rIns="0" bIns="0" anchor="ctr"/>
+          <a:lstStyle/>
+          <a:p>
+            <a:pPr/>
+            <a:r>
+              <a:rPr sz="1600" b="1">
+                <a:solidFill>
+                  <a:srgbClr val="1E1A1C"/>
+                </a:solidFill>
+                <a:latin typeface="Arial"/>
+                <a:ea typeface="Arial"/>
+              </a:rPr>
+              <a:t>I used to ~</a:t>
+            </a:r>
+          </a:p>
+        </p:txBody>
+      </p:sp>
+      <p:sp>
+        <p:nvSpPr>
+          <p:cNvPr id="16" name=""/>
+          <p:cNvSpPr txBox="1"/>
+          <p:nvPr/>
+        </p:nvSpPr>
+        <p:spPr>
+          <a:xfrm>
+            <a:off x="7715250" y="1295400"/>
+            <a:ext cx="476250" cy="219075"/>
+          </a:xfrm>
+          <a:prstGeom prst="rect">
+            <a:avLst/>
+          </a:prstGeom>
+          <a:noFill/>
+          <a:ln/>
+        </p:spPr>
+        <p:txBody>
+          <a:bodyPr wrap="square" lIns="0" tIns="0" rIns="0" bIns="0" anchor="ctr"/>
+          <a:lstStyle/>
+          <a:p>
+            <a:pPr/>
+            <a:r>
+              <a:rPr sz="1600" b="1">
                 <a:solidFill>
                   <a:srgbClr val="C8417F"/>
                 </a:solidFill>
                 <a:latin typeface="Arial"/>
                 <a:ea typeface="Arial"/>
               </a:rPr>
-              <a:t>1</a:t>
-            </a:r>
-          </a:p>
-        </p:txBody>
-      </p:sp>
-      <p:sp>
-        <p:nvSpPr>
-          <p:cNvPr id="15" name=""/>
+              <a:t>2</a:t>
+            </a:r>
+          </a:p>
+        </p:txBody>
+      </p:sp>
+      <p:sp>
+        <p:nvSpPr>
+          <p:cNvPr id="17" name=""/>
           <p:cNvSpPr/>
           <p:nvPr/>
         </p:nvSpPr>
         <p:spPr>
           <a:xfrm>
-            <a:off x="3133725" y="4581525"/>
-            <a:ext cx="2200275" cy="361950"/>
-          </a:xfrm>
-          <a:prstGeom prst="roundRect">
-            <a:avLst>
-              <a:gd name="adj" fmla="val 26316"/>
-            </a:avLst>
-          </a:prstGeom>
-          <a:solidFill>
-            <a:srgbClr val="FFFFFF"/>
-          </a:solidFill>
+            <a:off x="7715250" y="1619250"/>
+            <a:ext cx="3638550" cy="0"/>
+          </a:xfrm>
+          <a:prstGeom prst="line">
+            <a:avLst/>
+          </a:prstGeom>
+          <a:noFill/>
           <a:ln w="19050">
             <a:solidFill>
               <a:srgbClr val="F2D5E1"/>
@@ -934,93 +996,89 @@
       </p:sp>
       <p:sp>
         <p:nvSpPr>
-          <p:cNvPr id="16" name=""/>
-          <p:cNvSpPr txBox="1"/>
-          <p:nvPr/>
-        </p:nvSpPr>
-        <p:spPr>
-          <a:xfrm>
-            <a:off x="3448050" y="4676775"/>
-            <a:ext cx="1200150" cy="161925"/>
-          </a:xfrm>
-          <a:prstGeom prst="rect">
-            <a:avLst/>
-          </a:prstGeom>
-          <a:noFill/>
-          <a:ln/>
-        </p:spPr>
-        <p:txBody>
-          <a:bodyPr wrap="square" lIns="0" tIns="0" rIns="0" bIns="0" anchor="ctr"/>
-          <a:lstStyle/>
-          <a:p>
-            <a:pPr/>
-            <a:r>
-              <a:rPr sz="1200" b="1">
-                <a:solidFill>
-                  <a:srgbClr val="1E1A1C"/>
-                </a:solidFill>
-                <a:latin typeface="Arial"/>
-                <a:ea typeface="Arial"/>
-              </a:rPr>
-              <a:t>I used to ~</a:t>
-            </a:r>
-          </a:p>
-        </p:txBody>
-      </p:sp>
-      <p:sp>
-        <p:nvSpPr>
-          <p:cNvPr id="17" name=""/>
-          <p:cNvSpPr txBox="1"/>
-          <p:nvPr/>
-        </p:nvSpPr>
-        <p:spPr>
-          <a:xfrm>
-            <a:off x="3267075" y="4676775"/>
-            <a:ext cx="438150" cy="161925"/>
-          </a:xfrm>
-          <a:prstGeom prst="rect">
-            <a:avLst/>
-          </a:prstGeom>
-          <a:noFill/>
-          <a:ln/>
-        </p:spPr>
-        <p:txBody>
-          <a:bodyPr wrap="square" lIns="0" tIns="0" rIns="0" bIns="0" anchor="ctr"/>
-          <a:lstStyle/>
-          <a:p>
-            <a:pPr/>
-            <a:r>
-              <a:rPr sz="1200" b="1">
+          <p:cNvPr id="18" name=""/>
+          <p:cNvSpPr txBox="1"/>
+          <p:nvPr/>
+        </p:nvSpPr>
+        <p:spPr>
+          <a:xfrm>
+            <a:off x="8058150" y="1714500"/>
+            <a:ext cx="2038350" cy="219075"/>
+          </a:xfrm>
+          <a:prstGeom prst="rect">
+            <a:avLst/>
+          </a:prstGeom>
+          <a:noFill/>
+          <a:ln/>
+        </p:spPr>
+        <p:txBody>
+          <a:bodyPr wrap="square" lIns="0" tIns="0" rIns="0" bIns="0" anchor="ctr"/>
+          <a:lstStyle/>
+          <a:p>
+            <a:pPr/>
+            <a:r>
+              <a:rPr sz="1600" b="1">
+                <a:solidFill>
+                  <a:srgbClr val="1E1A1C"/>
+                </a:solidFill>
+                <a:latin typeface="Arial"/>
+                <a:ea typeface="Arial"/>
+              </a:rPr>
+              <a:t>I should have ~</a:t>
+            </a:r>
+          </a:p>
+        </p:txBody>
+      </p:sp>
+      <p:sp>
+        <p:nvSpPr>
+          <p:cNvPr id="19" name=""/>
+          <p:cNvSpPr txBox="1"/>
+          <p:nvPr/>
+        </p:nvSpPr>
+        <p:spPr>
+          <a:xfrm>
+            <a:off x="7715250" y="1714500"/>
+            <a:ext cx="476250" cy="219075"/>
+          </a:xfrm>
+          <a:prstGeom prst="rect">
+            <a:avLst/>
+          </a:prstGeom>
+          <a:noFill/>
+          <a:ln/>
+        </p:spPr>
+        <p:txBody>
+          <a:bodyPr wrap="square" lIns="0" tIns="0" rIns="0" bIns="0" anchor="ctr"/>
+          <a:lstStyle/>
+          <a:p>
+            <a:pPr/>
+            <a:r>
+              <a:rPr sz="1600" b="1">
                 <a:solidFill>
                   <a:srgbClr val="C8417F"/>
                 </a:solidFill>
                 <a:latin typeface="Arial"/>
                 <a:ea typeface="Arial"/>
               </a:rPr>
-              <a:t>2</a:t>
-            </a:r>
-          </a:p>
-        </p:txBody>
-      </p:sp>
-      <p:sp>
-        <p:nvSpPr>
-          <p:cNvPr id="18" name=""/>
+              <a:t>3</a:t>
+            </a:r>
+          </a:p>
+        </p:txBody>
+      </p:sp>
+      <p:sp>
+        <p:nvSpPr>
+          <p:cNvPr id="20" name=""/>
           <p:cNvSpPr/>
           <p:nvPr/>
         </p:nvSpPr>
         <p:spPr>
           <a:xfrm>
-            <a:off x="5419725" y="4581525"/>
-            <a:ext cx="2200275" cy="361950"/>
-          </a:xfrm>
-          <a:prstGeom prst="roundRect">
-            <a:avLst>
-              <a:gd name="adj" fmla="val 26316"/>
-            </a:avLst>
-          </a:prstGeom>
-          <a:solidFill>
-            <a:srgbClr val="FFFFFF"/>
-          </a:solidFill>
+            <a:off x="7715250" y="2038350"/>
+            <a:ext cx="3638550" cy="0"/>
+          </a:xfrm>
+          <a:prstGeom prst="line">
+            <a:avLst/>
+          </a:prstGeom>
+          <a:noFill/>
           <a:ln w="19050">
             <a:solidFill>
               <a:srgbClr val="F2D5E1"/>
@@ -1031,93 +1089,89 @@
       </p:sp>
       <p:sp>
         <p:nvSpPr>
-          <p:cNvPr id="19" name=""/>
-          <p:cNvSpPr txBox="1"/>
-          <p:nvPr/>
-        </p:nvSpPr>
-        <p:spPr>
-          <a:xfrm>
-            <a:off x="5734050" y="4676775"/>
-            <a:ext cx="1600200" cy="161925"/>
-          </a:xfrm>
-          <a:prstGeom prst="rect">
-            <a:avLst/>
-          </a:prstGeom>
-          <a:noFill/>
-          <a:ln/>
-        </p:spPr>
-        <p:txBody>
-          <a:bodyPr wrap="square" lIns="0" tIns="0" rIns="0" bIns="0" anchor="ctr"/>
-          <a:lstStyle/>
-          <a:p>
-            <a:pPr/>
-            <a:r>
-              <a:rPr sz="1200" b="1">
-                <a:solidFill>
-                  <a:srgbClr val="1E1A1C"/>
-                </a:solidFill>
-                <a:latin typeface="Arial"/>
-                <a:ea typeface="Arial"/>
-              </a:rPr>
-              <a:t>I should have ~</a:t>
-            </a:r>
-          </a:p>
-        </p:txBody>
-      </p:sp>
-      <p:sp>
-        <p:nvSpPr>
-          <p:cNvPr id="20" name=""/>
-          <p:cNvSpPr txBox="1"/>
-          <p:nvPr/>
-        </p:nvSpPr>
-        <p:spPr>
-          <a:xfrm>
-            <a:off x="5553075" y="4676775"/>
-            <a:ext cx="438150" cy="161925"/>
-          </a:xfrm>
-          <a:prstGeom prst="rect">
-            <a:avLst/>
-          </a:prstGeom>
-          <a:noFill/>
-          <a:ln/>
-        </p:spPr>
-        <p:txBody>
-          <a:bodyPr wrap="square" lIns="0" tIns="0" rIns="0" bIns="0" anchor="ctr"/>
-          <a:lstStyle/>
-          <a:p>
-            <a:pPr/>
-            <a:r>
-              <a:rPr sz="1200" b="1">
+          <p:cNvPr id="21" name=""/>
+          <p:cNvSpPr txBox="1"/>
+          <p:nvPr/>
+        </p:nvSpPr>
+        <p:spPr>
+          <a:xfrm>
+            <a:off x="8058150" y="2133600"/>
+            <a:ext cx="2257425" cy="219075"/>
+          </a:xfrm>
+          <a:prstGeom prst="rect">
+            <a:avLst/>
+          </a:prstGeom>
+          <a:noFill/>
+          <a:ln/>
+        </p:spPr>
+        <p:txBody>
+          <a:bodyPr wrap="square" lIns="0" tIns="0" rIns="0" bIns="0" anchor="ctr"/>
+          <a:lstStyle/>
+          <a:p>
+            <a:pPr/>
+            <a:r>
+              <a:rPr sz="1600" b="1">
+                <a:solidFill>
+                  <a:srgbClr val="1E1A1C"/>
+                </a:solidFill>
+                <a:latin typeface="Arial"/>
+                <a:ea typeface="Arial"/>
+              </a:rPr>
+              <a:t>Do you wanna ~?</a:t>
+            </a:r>
+          </a:p>
+        </p:txBody>
+      </p:sp>
+      <p:sp>
+        <p:nvSpPr>
+          <p:cNvPr id="22" name=""/>
+          <p:cNvSpPr txBox="1"/>
+          <p:nvPr/>
+        </p:nvSpPr>
+        <p:spPr>
+          <a:xfrm>
+            <a:off x="7715250" y="2133600"/>
+            <a:ext cx="476250" cy="219075"/>
+          </a:xfrm>
+          <a:prstGeom prst="rect">
+            <a:avLst/>
+          </a:prstGeom>
+          <a:noFill/>
+          <a:ln/>
+        </p:spPr>
+        <p:txBody>
+          <a:bodyPr wrap="square" lIns="0" tIns="0" rIns="0" bIns="0" anchor="ctr"/>
+          <a:lstStyle/>
+          <a:p>
+            <a:pPr/>
+            <a:r>
+              <a:rPr sz="1600" b="1">
                 <a:solidFill>
                   <a:srgbClr val="C8417F"/>
                 </a:solidFill>
                 <a:latin typeface="Arial"/>
                 <a:ea typeface="Arial"/>
               </a:rPr>
-              <a:t>3</a:t>
-            </a:r>
-          </a:p>
-        </p:txBody>
-      </p:sp>
-      <p:sp>
-        <p:nvSpPr>
-          <p:cNvPr id="21" name=""/>
+              <a:t>4</a:t>
+            </a:r>
+          </a:p>
+        </p:txBody>
+      </p:sp>
+      <p:sp>
+        <p:nvSpPr>
+          <p:cNvPr id="23" name=""/>
           <p:cNvSpPr/>
           <p:nvPr/>
         </p:nvSpPr>
         <p:spPr>
           <a:xfrm>
-            <a:off x="838200" y="5019675"/>
-            <a:ext cx="2200275" cy="361950"/>
-          </a:xfrm>
-          <a:prstGeom prst="roundRect">
-            <a:avLst>
-              <a:gd name="adj" fmla="val 26316"/>
-            </a:avLst>
-          </a:prstGeom>
-          <a:solidFill>
-            <a:srgbClr val="FFFFFF"/>
-          </a:solidFill>
+            <a:off x="7715250" y="2457450"/>
+            <a:ext cx="3638550" cy="0"/>
+          </a:xfrm>
+          <a:prstGeom prst="line">
+            <a:avLst/>
+          </a:prstGeom>
+          <a:noFill/>
           <a:ln w="19050">
             <a:solidFill>
               <a:srgbClr val="F2D5E1"/>
@@ -1128,93 +1182,89 @@
       </p:sp>
       <p:sp>
         <p:nvSpPr>
-          <p:cNvPr id="22" name=""/>
-          <p:cNvSpPr txBox="1"/>
-          <p:nvPr/>
-        </p:nvSpPr>
-        <p:spPr>
-          <a:xfrm>
-            <a:off x="1152525" y="5114925"/>
-            <a:ext cx="1790700" cy="161925"/>
-          </a:xfrm>
-          <a:prstGeom prst="rect">
-            <a:avLst/>
-          </a:prstGeom>
-          <a:noFill/>
-          <a:ln/>
-        </p:spPr>
-        <p:txBody>
-          <a:bodyPr wrap="square" lIns="0" tIns="0" rIns="0" bIns="0" anchor="ctr"/>
-          <a:lstStyle/>
-          <a:p>
-            <a:pPr/>
-            <a:r>
-              <a:rPr sz="1200" b="1">
-                <a:solidFill>
-                  <a:srgbClr val="1E1A1C"/>
-                </a:solidFill>
-                <a:latin typeface="Arial"/>
-                <a:ea typeface="Arial"/>
-              </a:rPr>
-              <a:t>Do you wanna ~?</a:t>
-            </a:r>
-          </a:p>
-        </p:txBody>
-      </p:sp>
-      <p:sp>
-        <p:nvSpPr>
-          <p:cNvPr id="23" name=""/>
-          <p:cNvSpPr txBox="1"/>
-          <p:nvPr/>
-        </p:nvSpPr>
-        <p:spPr>
-          <a:xfrm>
-            <a:off x="971550" y="5114925"/>
-            <a:ext cx="438150" cy="161925"/>
-          </a:xfrm>
-          <a:prstGeom prst="rect">
-            <a:avLst/>
-          </a:prstGeom>
-          <a:noFill/>
-          <a:ln/>
-        </p:spPr>
-        <p:txBody>
-          <a:bodyPr wrap="square" lIns="0" tIns="0" rIns="0" bIns="0" anchor="ctr"/>
-          <a:lstStyle/>
-          <a:p>
-            <a:pPr/>
-            <a:r>
-              <a:rPr sz="1200" b="1">
+          <p:cNvPr id="24" name=""/>
+          <p:cNvSpPr txBox="1"/>
+          <p:nvPr/>
+        </p:nvSpPr>
+        <p:spPr>
+          <a:xfrm>
+            <a:off x="8058150" y="2552700"/>
+            <a:ext cx="2143125" cy="219075"/>
+          </a:xfrm>
+          <a:prstGeom prst="rect">
+            <a:avLst/>
+          </a:prstGeom>
+          <a:noFill/>
+          <a:ln/>
+        </p:spPr>
+        <p:txBody>
+          <a:bodyPr wrap="square" lIns="0" tIns="0" rIns="0" bIns="0" anchor="ctr"/>
+          <a:lstStyle/>
+          <a:p>
+            <a:pPr/>
+            <a:r>
+              <a:rPr sz="1600" b="1">
+                <a:solidFill>
+                  <a:srgbClr val="1E1A1C"/>
+                </a:solidFill>
+                <a:latin typeface="Arial"/>
+                <a:ea typeface="Arial"/>
+              </a:rPr>
+              <a:t>I'm looking for ~</a:t>
+            </a:r>
+          </a:p>
+        </p:txBody>
+      </p:sp>
+      <p:sp>
+        <p:nvSpPr>
+          <p:cNvPr id="25" name=""/>
+          <p:cNvSpPr txBox="1"/>
+          <p:nvPr/>
+        </p:nvSpPr>
+        <p:spPr>
+          <a:xfrm>
+            <a:off x="7715250" y="2552700"/>
+            <a:ext cx="476250" cy="219075"/>
+          </a:xfrm>
+          <a:prstGeom prst="rect">
+            <a:avLst/>
+          </a:prstGeom>
+          <a:noFill/>
+          <a:ln/>
+        </p:spPr>
+        <p:txBody>
+          <a:bodyPr wrap="square" lIns="0" tIns="0" rIns="0" bIns="0" anchor="ctr"/>
+          <a:lstStyle/>
+          <a:p>
+            <a:pPr/>
+            <a:r>
+              <a:rPr sz="1600" b="1">
                 <a:solidFill>
                   <a:srgbClr val="C8417F"/>
                 </a:solidFill>
                 <a:latin typeface="Arial"/>
                 <a:ea typeface="Arial"/>
               </a:rPr>
-              <a:t>4</a:t>
-            </a:r>
-          </a:p>
-        </p:txBody>
-      </p:sp>
-      <p:sp>
-        <p:nvSpPr>
-          <p:cNvPr id="24" name=""/>
+              <a:t>5</a:t>
+            </a:r>
+          </a:p>
+        </p:txBody>
+      </p:sp>
+      <p:sp>
+        <p:nvSpPr>
+          <p:cNvPr id="26" name=""/>
           <p:cNvSpPr/>
           <p:nvPr/>
         </p:nvSpPr>
         <p:spPr>
           <a:xfrm>
-            <a:off x="3133725" y="5019675"/>
-            <a:ext cx="2200275" cy="361950"/>
-          </a:xfrm>
-          <a:prstGeom prst="roundRect">
-            <a:avLst>
-              <a:gd name="adj" fmla="val 26316"/>
-            </a:avLst>
-          </a:prstGeom>
-          <a:solidFill>
-            <a:srgbClr val="FFFFFF"/>
-          </a:solidFill>
+            <a:off x="7715250" y="2876550"/>
+            <a:ext cx="3638550" cy="0"/>
+          </a:xfrm>
+          <a:prstGeom prst="line">
+            <a:avLst/>
+          </a:prstGeom>
+          <a:noFill/>
           <a:ln w="19050">
             <a:solidFill>
               <a:srgbClr val="F2D5E1"/>
@@ -1225,93 +1275,89 @@
       </p:sp>
       <p:sp>
         <p:nvSpPr>
-          <p:cNvPr id="25" name=""/>
-          <p:cNvSpPr txBox="1"/>
-          <p:nvPr/>
-        </p:nvSpPr>
-        <p:spPr>
-          <a:xfrm>
-            <a:off x="3448050" y="5114925"/>
-            <a:ext cx="1666875" cy="161925"/>
-          </a:xfrm>
-          <a:prstGeom prst="rect">
-            <a:avLst/>
-          </a:prstGeom>
-          <a:noFill/>
-          <a:ln/>
-        </p:spPr>
-        <p:txBody>
-          <a:bodyPr wrap="square" lIns="0" tIns="0" rIns="0" bIns="0" anchor="ctr"/>
-          <a:lstStyle/>
-          <a:p>
-            <a:pPr/>
-            <a:r>
-              <a:rPr sz="1200" b="1">
-                <a:solidFill>
-                  <a:srgbClr val="1E1A1C"/>
-                </a:solidFill>
-                <a:latin typeface="Arial"/>
-                <a:ea typeface="Arial"/>
-              </a:rPr>
-              <a:t>I'm looking for ~</a:t>
-            </a:r>
-          </a:p>
-        </p:txBody>
-      </p:sp>
-      <p:sp>
-        <p:nvSpPr>
-          <p:cNvPr id="26" name=""/>
-          <p:cNvSpPr txBox="1"/>
-          <p:nvPr/>
-        </p:nvSpPr>
-        <p:spPr>
-          <a:xfrm>
-            <a:off x="3267075" y="5114925"/>
-            <a:ext cx="438150" cy="161925"/>
-          </a:xfrm>
-          <a:prstGeom prst="rect">
-            <a:avLst/>
-          </a:prstGeom>
-          <a:noFill/>
-          <a:ln/>
-        </p:spPr>
-        <p:txBody>
-          <a:bodyPr wrap="square" lIns="0" tIns="0" rIns="0" bIns="0" anchor="ctr"/>
-          <a:lstStyle/>
-          <a:p>
-            <a:pPr/>
-            <a:r>
-              <a:rPr sz="1200" b="1">
+          <p:cNvPr id="27" name=""/>
+          <p:cNvSpPr txBox="1"/>
+          <p:nvPr/>
+        </p:nvSpPr>
+        <p:spPr>
+          <a:xfrm>
+            <a:off x="8058150" y="2971800"/>
+            <a:ext cx="1304925" cy="219075"/>
+          </a:xfrm>
+          <a:prstGeom prst="rect">
+            <a:avLst/>
+          </a:prstGeom>
+          <a:noFill/>
+          <a:ln/>
+        </p:spPr>
+        <p:txBody>
+          <a:bodyPr wrap="square" lIns="0" tIns="0" rIns="0" bIns="0" anchor="ctr"/>
+          <a:lstStyle/>
+          <a:p>
+            <a:pPr/>
+            <a:r>
+              <a:rPr sz="1600" b="1">
+                <a:solidFill>
+                  <a:srgbClr val="1E1A1C"/>
+                </a:solidFill>
+                <a:latin typeface="Arial"/>
+                <a:ea typeface="Arial"/>
+              </a:rPr>
+              <a:t>I might ~</a:t>
+            </a:r>
+          </a:p>
+        </p:txBody>
+      </p:sp>
+      <p:sp>
+        <p:nvSpPr>
+          <p:cNvPr id="28" name=""/>
+          <p:cNvSpPr txBox="1"/>
+          <p:nvPr/>
+        </p:nvSpPr>
+        <p:spPr>
+          <a:xfrm>
+            <a:off x="7715250" y="2971800"/>
+            <a:ext cx="476250" cy="219075"/>
+          </a:xfrm>
+          <a:prstGeom prst="rect">
+            <a:avLst/>
+          </a:prstGeom>
+          <a:noFill/>
+          <a:ln/>
+        </p:spPr>
+        <p:txBody>
+          <a:bodyPr wrap="square" lIns="0" tIns="0" rIns="0" bIns="0" anchor="ctr"/>
+          <a:lstStyle/>
+          <a:p>
+            <a:pPr/>
+            <a:r>
+              <a:rPr sz="1600" b="1">
                 <a:solidFill>
                   <a:srgbClr val="C8417F"/>
                 </a:solidFill>
                 <a:latin typeface="Arial"/>
                 <a:ea typeface="Arial"/>
               </a:rPr>
-              <a:t>5</a:t>
-            </a:r>
-          </a:p>
-        </p:txBody>
-      </p:sp>
-      <p:sp>
-        <p:nvSpPr>
-          <p:cNvPr id="27" name=""/>
+              <a:t>6</a:t>
+            </a:r>
+          </a:p>
+        </p:txBody>
+      </p:sp>
+      <p:sp>
+        <p:nvSpPr>
+          <p:cNvPr id="29" name=""/>
           <p:cNvSpPr/>
           <p:nvPr/>
         </p:nvSpPr>
         <p:spPr>
           <a:xfrm>
-            <a:off x="5419725" y="5019675"/>
-            <a:ext cx="2200275" cy="361950"/>
-          </a:xfrm>
-          <a:prstGeom prst="roundRect">
-            <a:avLst>
-              <a:gd name="adj" fmla="val 26316"/>
-            </a:avLst>
-          </a:prstGeom>
-          <a:solidFill>
-            <a:srgbClr val="FFFFFF"/>
-          </a:solidFill>
+            <a:off x="7715250" y="3295650"/>
+            <a:ext cx="3638550" cy="0"/>
+          </a:xfrm>
+          <a:prstGeom prst="line">
+            <a:avLst/>
+          </a:prstGeom>
+          <a:noFill/>
           <a:ln w="19050">
             <a:solidFill>
               <a:srgbClr val="F2D5E1"/>
@@ -1322,93 +1368,89 @@
       </p:sp>
       <p:sp>
         <p:nvSpPr>
-          <p:cNvPr id="28" name=""/>
-          <p:cNvSpPr txBox="1"/>
-          <p:nvPr/>
-        </p:nvSpPr>
-        <p:spPr>
-          <a:xfrm>
-            <a:off x="5734050" y="5114925"/>
-            <a:ext cx="1047750" cy="161925"/>
-          </a:xfrm>
-          <a:prstGeom prst="rect">
-            <a:avLst/>
-          </a:prstGeom>
-          <a:noFill/>
-          <a:ln/>
-        </p:spPr>
-        <p:txBody>
-          <a:bodyPr wrap="square" lIns="0" tIns="0" rIns="0" bIns="0" anchor="ctr"/>
-          <a:lstStyle/>
-          <a:p>
-            <a:pPr/>
-            <a:r>
-              <a:rPr sz="1200" b="1">
-                <a:solidFill>
-                  <a:srgbClr val="1E1A1C"/>
-                </a:solidFill>
-                <a:latin typeface="Arial"/>
-                <a:ea typeface="Arial"/>
-              </a:rPr>
-              <a:t>I might ~</a:t>
-            </a:r>
-          </a:p>
-        </p:txBody>
-      </p:sp>
-      <p:sp>
-        <p:nvSpPr>
-          <p:cNvPr id="29" name=""/>
-          <p:cNvSpPr txBox="1"/>
-          <p:nvPr/>
-        </p:nvSpPr>
-        <p:spPr>
-          <a:xfrm>
-            <a:off x="5553075" y="5114925"/>
-            <a:ext cx="438150" cy="161925"/>
-          </a:xfrm>
-          <a:prstGeom prst="rect">
-            <a:avLst/>
-          </a:prstGeom>
-          <a:noFill/>
-          <a:ln/>
-        </p:spPr>
-        <p:txBody>
-          <a:bodyPr wrap="square" lIns="0" tIns="0" rIns="0" bIns="0" anchor="ctr"/>
-          <a:lstStyle/>
-          <a:p>
-            <a:pPr/>
-            <a:r>
-              <a:rPr sz="1200" b="1">
+          <p:cNvPr id="30" name=""/>
+          <p:cNvSpPr txBox="1"/>
+          <p:nvPr/>
+        </p:nvSpPr>
+        <p:spPr>
+          <a:xfrm>
+            <a:off x="8058150" y="3390900"/>
+            <a:ext cx="2438400" cy="219075"/>
+          </a:xfrm>
+          <a:prstGeom prst="rect">
+            <a:avLst/>
+          </a:prstGeom>
+          <a:noFill/>
+          <a:ln/>
+        </p:spPr>
+        <p:txBody>
+          <a:bodyPr wrap="square" lIns="0" tIns="0" rIns="0" bIns="0" anchor="ctr"/>
+          <a:lstStyle/>
+          <a:p>
+            <a:pPr/>
+            <a:r>
+              <a:rPr sz="1600" b="1">
+                <a:solidFill>
+                  <a:srgbClr val="1E1A1C"/>
+                </a:solidFill>
+                <a:latin typeface="Arial"/>
+                <a:ea typeface="Arial"/>
+              </a:rPr>
+              <a:t>Do you mind if I ~?</a:t>
+            </a:r>
+          </a:p>
+        </p:txBody>
+      </p:sp>
+      <p:sp>
+        <p:nvSpPr>
+          <p:cNvPr id="31" name=""/>
+          <p:cNvSpPr txBox="1"/>
+          <p:nvPr/>
+        </p:nvSpPr>
+        <p:spPr>
+          <a:xfrm>
+            <a:off x="7715250" y="3390900"/>
+            <a:ext cx="476250" cy="219075"/>
+          </a:xfrm>
+          <a:prstGeom prst="rect">
+            <a:avLst/>
+          </a:prstGeom>
+          <a:noFill/>
+          <a:ln/>
+        </p:spPr>
+        <p:txBody>
+          <a:bodyPr wrap="square" lIns="0" tIns="0" rIns="0" bIns="0" anchor="ctr"/>
+          <a:lstStyle/>
+          <a:p>
+            <a:pPr/>
+            <a:r>
+              <a:rPr sz="1600" b="1">
                 <a:solidFill>
                   <a:srgbClr val="C8417F"/>
                 </a:solidFill>
                 <a:latin typeface="Arial"/>
                 <a:ea typeface="Arial"/>
               </a:rPr>
-              <a:t>6</a:t>
-            </a:r>
-          </a:p>
-        </p:txBody>
-      </p:sp>
-      <p:sp>
-        <p:nvSpPr>
-          <p:cNvPr id="30" name=""/>
+              <a:t>7</a:t>
+            </a:r>
+          </a:p>
+        </p:txBody>
+      </p:sp>
+      <p:sp>
+        <p:nvSpPr>
+          <p:cNvPr id="32" name=""/>
           <p:cNvSpPr/>
           <p:nvPr/>
         </p:nvSpPr>
         <p:spPr>
           <a:xfrm>
-            <a:off x="838200" y="5457825"/>
-            <a:ext cx="2200275" cy="361950"/>
-          </a:xfrm>
-          <a:prstGeom prst="roundRect">
-            <a:avLst>
-              <a:gd name="adj" fmla="val 26316"/>
-            </a:avLst>
-          </a:prstGeom>
-          <a:solidFill>
-            <a:srgbClr val="FFFFFF"/>
-          </a:solidFill>
+            <a:off x="7715250" y="3714750"/>
+            <a:ext cx="3638550" cy="0"/>
+          </a:xfrm>
+          <a:prstGeom prst="line">
+            <a:avLst/>
+          </a:prstGeom>
+          <a:noFill/>
           <a:ln w="19050">
             <a:solidFill>
               <a:srgbClr val="F2D5E1"/>
@@ -1419,93 +1461,89 @@
       </p:sp>
       <p:sp>
         <p:nvSpPr>
-          <p:cNvPr id="31" name=""/>
-          <p:cNvSpPr txBox="1"/>
-          <p:nvPr/>
-        </p:nvSpPr>
-        <p:spPr>
-          <a:xfrm>
-            <a:off x="1152525" y="5553075"/>
-            <a:ext cx="1885950" cy="161925"/>
-          </a:xfrm>
-          <a:prstGeom prst="rect">
-            <a:avLst/>
-          </a:prstGeom>
-          <a:noFill/>
-          <a:ln/>
-        </p:spPr>
-        <p:txBody>
-          <a:bodyPr wrap="square" lIns="0" tIns="0" rIns="0" bIns="0" anchor="ctr"/>
-          <a:lstStyle/>
-          <a:p>
-            <a:pPr/>
-            <a:r>
-              <a:rPr sz="1200" b="1">
-                <a:solidFill>
-                  <a:srgbClr val="1E1A1C"/>
-                </a:solidFill>
-                <a:latin typeface="Arial"/>
-                <a:ea typeface="Arial"/>
-              </a:rPr>
-              <a:t>Do you mind if I ~?</a:t>
-            </a:r>
-          </a:p>
-        </p:txBody>
-      </p:sp>
-      <p:sp>
-        <p:nvSpPr>
-          <p:cNvPr id="32" name=""/>
-          <p:cNvSpPr txBox="1"/>
-          <p:nvPr/>
-        </p:nvSpPr>
-        <p:spPr>
-          <a:xfrm>
-            <a:off x="971550" y="5553075"/>
-            <a:ext cx="438150" cy="161925"/>
-          </a:xfrm>
-          <a:prstGeom prst="rect">
-            <a:avLst/>
-          </a:prstGeom>
-          <a:noFill/>
-          <a:ln/>
-        </p:spPr>
-        <p:txBody>
-          <a:bodyPr wrap="square" lIns="0" tIns="0" rIns="0" bIns="0" anchor="ctr"/>
-          <a:lstStyle/>
-          <a:p>
-            <a:pPr/>
-            <a:r>
-              <a:rPr sz="1200" b="1">
+          <p:cNvPr id="33" name=""/>
+          <p:cNvSpPr txBox="1"/>
+          <p:nvPr/>
+        </p:nvSpPr>
+        <p:spPr>
+          <a:xfrm>
+            <a:off x="8058150" y="3810000"/>
+            <a:ext cx="1019175" cy="219075"/>
+          </a:xfrm>
+          <a:prstGeom prst="rect">
+            <a:avLst/>
+          </a:prstGeom>
+          <a:noFill/>
+          <a:ln/>
+        </p:spPr>
+        <p:txBody>
+          <a:bodyPr wrap="square" lIns="0" tIns="0" rIns="0" bIns="0" anchor="ctr"/>
+          <a:lstStyle/>
+          <a:p>
+            <a:pPr/>
+            <a:r>
+              <a:rPr sz="1600" b="1">
+                <a:solidFill>
+                  <a:srgbClr val="1E1A1C"/>
+                </a:solidFill>
+                <a:latin typeface="Arial"/>
+                <a:ea typeface="Arial"/>
+              </a:rPr>
+              <a:t>I bet ~</a:t>
+            </a:r>
+          </a:p>
+        </p:txBody>
+      </p:sp>
+      <p:sp>
+        <p:nvSpPr>
+          <p:cNvPr id="34" name=""/>
+          <p:cNvSpPr txBox="1"/>
+          <p:nvPr/>
+        </p:nvSpPr>
+        <p:spPr>
+          <a:xfrm>
+            <a:off x="7715250" y="3810000"/>
+            <a:ext cx="476250" cy="219075"/>
+          </a:xfrm>
+          <a:prstGeom prst="rect">
+            <a:avLst/>
+          </a:prstGeom>
+          <a:noFill/>
+          <a:ln/>
+        </p:spPr>
+        <p:txBody>
+          <a:bodyPr wrap="square" lIns="0" tIns="0" rIns="0" bIns="0" anchor="ctr"/>
+          <a:lstStyle/>
+          <a:p>
+            <a:pPr/>
+            <a:r>
+              <a:rPr sz="1600" b="1">
                 <a:solidFill>
                   <a:srgbClr val="C8417F"/>
                 </a:solidFill>
                 <a:latin typeface="Arial"/>
                 <a:ea typeface="Arial"/>
               </a:rPr>
-              <a:t>7</a:t>
-            </a:r>
-          </a:p>
-        </p:txBody>
-      </p:sp>
-      <p:sp>
-        <p:nvSpPr>
-          <p:cNvPr id="33" name=""/>
+              <a:t>8</a:t>
+            </a:r>
+          </a:p>
+        </p:txBody>
+      </p:sp>
+      <p:sp>
+        <p:nvSpPr>
+          <p:cNvPr id="35" name=""/>
           <p:cNvSpPr/>
           <p:nvPr/>
         </p:nvSpPr>
         <p:spPr>
           <a:xfrm>
-            <a:off x="3133725" y="5457825"/>
-            <a:ext cx="2200275" cy="361950"/>
-          </a:xfrm>
-          <a:prstGeom prst="roundRect">
-            <a:avLst>
-              <a:gd name="adj" fmla="val 26316"/>
-            </a:avLst>
-          </a:prstGeom>
-          <a:solidFill>
-            <a:srgbClr val="FFFFFF"/>
-          </a:solidFill>
+            <a:off x="7715250" y="4133850"/>
+            <a:ext cx="3638550" cy="0"/>
+          </a:xfrm>
+          <a:prstGeom prst="line">
+            <a:avLst/>
+          </a:prstGeom>
+          <a:noFill/>
           <a:ln w="19050">
             <a:solidFill>
               <a:srgbClr val="F2D5E1"/>
@@ -1516,132 +1554,70 @@
       </p:sp>
       <p:sp>
         <p:nvSpPr>
-          <p:cNvPr id="34" name=""/>
-          <p:cNvSpPr txBox="1"/>
-          <p:nvPr/>
-        </p:nvSpPr>
-        <p:spPr>
-          <a:xfrm>
-            <a:off x="3448050" y="5553075"/>
-            <a:ext cx="838200" cy="161925"/>
-          </a:xfrm>
-          <a:prstGeom prst="rect">
-            <a:avLst/>
-          </a:prstGeom>
-          <a:noFill/>
-          <a:ln/>
-        </p:spPr>
-        <p:txBody>
-          <a:bodyPr wrap="square" lIns="0" tIns="0" rIns="0" bIns="0" anchor="ctr"/>
-          <a:lstStyle/>
-          <a:p>
-            <a:pPr/>
-            <a:r>
-              <a:rPr sz="1200" b="1">
-                <a:solidFill>
-                  <a:srgbClr val="1E1A1C"/>
-                </a:solidFill>
-                <a:latin typeface="Arial"/>
-                <a:ea typeface="Arial"/>
-              </a:rPr>
-              <a:t>I bet ~</a:t>
-            </a:r>
-          </a:p>
-        </p:txBody>
-      </p:sp>
-      <p:sp>
-        <p:nvSpPr>
-          <p:cNvPr id="35" name=""/>
-          <p:cNvSpPr txBox="1"/>
-          <p:nvPr/>
-        </p:nvSpPr>
-        <p:spPr>
-          <a:xfrm>
-            <a:off x="3267075" y="5553075"/>
-            <a:ext cx="438150" cy="161925"/>
-          </a:xfrm>
-          <a:prstGeom prst="rect">
-            <a:avLst/>
-          </a:prstGeom>
-          <a:noFill/>
-          <a:ln/>
-        </p:spPr>
-        <p:txBody>
-          <a:bodyPr wrap="square" lIns="0" tIns="0" rIns="0" bIns="0" anchor="ctr"/>
-          <a:lstStyle/>
-          <a:p>
-            <a:pPr/>
-            <a:r>
-              <a:rPr sz="1200" b="1">
+          <p:cNvPr id="36" name=""/>
+          <p:cNvSpPr txBox="1"/>
+          <p:nvPr/>
+        </p:nvSpPr>
+        <p:spPr>
+          <a:xfrm>
+            <a:off x="8058150" y="4229100"/>
+            <a:ext cx="1866900" cy="219075"/>
+          </a:xfrm>
+          <a:prstGeom prst="rect">
+            <a:avLst/>
+          </a:prstGeom>
+          <a:noFill/>
+          <a:ln/>
+        </p:spPr>
+        <p:txBody>
+          <a:bodyPr wrap="square" lIns="0" tIns="0" rIns="0" bIns="0" anchor="ctr"/>
+          <a:lstStyle/>
+          <a:p>
+            <a:pPr/>
+            <a:r>
+              <a:rPr sz="1600" b="1">
+                <a:solidFill>
+                  <a:srgbClr val="1E1A1C"/>
+                </a:solidFill>
+                <a:latin typeface="Arial"/>
+                <a:ea typeface="Arial"/>
+              </a:rPr>
+              <a:t>I'm trying to ~</a:t>
+            </a:r>
+          </a:p>
+        </p:txBody>
+      </p:sp>
+      <p:sp>
+        <p:nvSpPr>
+          <p:cNvPr id="37" name=""/>
+          <p:cNvSpPr txBox="1"/>
+          <p:nvPr/>
+        </p:nvSpPr>
+        <p:spPr>
+          <a:xfrm>
+            <a:off x="7715250" y="4229100"/>
+            <a:ext cx="476250" cy="219075"/>
+          </a:xfrm>
+          <a:prstGeom prst="rect">
+            <a:avLst/>
+          </a:prstGeom>
+          <a:noFill/>
+          <a:ln/>
+        </p:spPr>
+        <p:txBody>
+          <a:bodyPr wrap="square" lIns="0" tIns="0" rIns="0" bIns="0" anchor="ctr"/>
+          <a:lstStyle/>
+          <a:p>
+            <a:pPr/>
+            <a:r>
+              <a:rPr sz="1600" b="1">
                 <a:solidFill>
                   <a:srgbClr val="C8417F"/>
                 </a:solidFill>
                 <a:latin typeface="Arial"/>
                 <a:ea typeface="Arial"/>
               </a:rPr>
-              <a:t>8</a:t>
-            </a:r>
-          </a:p>
-        </p:txBody>
-      </p:sp>
-      <p:sp>
-        <p:nvSpPr>
-          <p:cNvPr id="36" name=""/>
-          <p:cNvSpPr/>
-          <p:nvPr/>
-        </p:nvSpPr>
-        <p:spPr>
-          <a:xfrm>
-            <a:off x="5419725" y="5457825"/>
-            <a:ext cx="2200275" cy="361950"/>
-          </a:xfrm>
-          <a:prstGeom prst="roundRect">
-            <a:avLst>
-              <a:gd name="adj" fmla="val 26316"/>
-            </a:avLst>
-          </a:prstGeom>
-          <a:solidFill>
-            <a:srgbClr val="FFFFFF"/>
-          </a:solidFill>
-          <a:ln w="19050">
-            <a:solidFill>
-              <a:srgbClr val="F2D5E1"/>
-            </a:solidFill>
-            <a:prstDash val="solid"/>
-          </a:ln>
-        </p:spPr>
-      </p:sp>
-      <p:sp>
-        <p:nvSpPr>
-          <p:cNvPr id="37" name=""/>
-          <p:cNvSpPr txBox="1"/>
-          <p:nvPr/>
-        </p:nvSpPr>
-        <p:spPr>
-          <a:xfrm>
-            <a:off x="5734050" y="5553075"/>
-            <a:ext cx="1457325" cy="161925"/>
-          </a:xfrm>
-          <a:prstGeom prst="rect">
-            <a:avLst/>
-          </a:prstGeom>
-          <a:noFill/>
-          <a:ln/>
-        </p:spPr>
-        <p:txBody>
-          <a:bodyPr wrap="square" lIns="0" tIns="0" rIns="0" bIns="0" anchor="ctr"/>
-          <a:lstStyle/>
-          <a:p>
-            <a:pPr/>
-            <a:r>
-              <a:rPr sz="1200" b="1">
-                <a:solidFill>
-                  <a:srgbClr val="1E1A1C"/>
-                </a:solidFill>
-                <a:latin typeface="Arial"/>
-                <a:ea typeface="Arial"/>
-              </a:rPr>
-              <a:t>I'm trying to ~</a:t>
+              <a:t>9</a:t>
             </a:r>
           </a:p>
         </p:txBody>
@@ -1654,42 +1630,7 @@
         </p:nvSpPr>
         <p:spPr>
           <a:xfrm>
-            <a:off x="5553075" y="5553075"/>
-            <a:ext cx="438150" cy="161925"/>
-          </a:xfrm>
-          <a:prstGeom prst="rect">
-            <a:avLst/>
-          </a:prstGeom>
-          <a:noFill/>
-          <a:ln/>
-        </p:spPr>
-        <p:txBody>
-          <a:bodyPr wrap="square" lIns="0" tIns="0" rIns="0" bIns="0" anchor="ctr"/>
-          <a:lstStyle/>
-          <a:p>
-            <a:pPr/>
-            <a:r>
-              <a:rPr sz="1200" b="1">
-                <a:solidFill>
-                  <a:srgbClr val="C8417F"/>
-                </a:solidFill>
-                <a:latin typeface="Arial"/>
-                <a:ea typeface="Arial"/>
-              </a:rPr>
-              <a:t>9</a:t>
-            </a:r>
-          </a:p>
-        </p:txBody>
-      </p:sp>
-      <p:sp>
-        <p:nvSpPr>
-          <p:cNvPr id="39" name=""/>
-          <p:cNvSpPr txBox="1"/>
-          <p:nvPr/>
-        </p:nvSpPr>
-        <p:spPr>
-          <a:xfrm>
-            <a:off x="838200" y="5934075"/>
+            <a:off x="7715250" y="4657725"/>
             <a:ext cx="3038475" cy="228600"/>
           </a:xfrm>
           <a:prstGeom prst="rect">
@@ -4790,9 +4731,33 @@
           <a:ln/>
         </p:spPr>
       </p:sp>
-      <p:sp>
-        <p:nvSpPr>
-          <p:cNvPr id="3" name=""/>
+      <p:pic>
+        <p:nvPicPr>
+          <p:cNvPr id="3" name="Image 0" descr="手を振るキャラクター">    </p:cNvPr>
+          <p:cNvPicPr>
+            <a:picLocks noChangeAspect="1"/>
+          </p:cNvPicPr>
+          <p:nvPr/>
+        </p:nvPicPr>
+        <p:blipFill>
+          <a:blip r:embed="rId1"/>
+          <a:stretch>
+            <a:fillRect/>
+          </a:stretch>
+        </p:blipFill>
+        <p:spPr>
+          <a:xfrm>
+            <a:off x="10563225" y="5143500"/>
+            <a:ext cx="1285875" cy="1714500"/>
+          </a:xfrm>
+          <a:prstGeom prst="rect">
+            <a:avLst/>
+          </a:prstGeom>
+        </p:spPr>
+      </p:pic>
+      <p:sp>
+        <p:nvSpPr>
+          <p:cNvPr id="4" name=""/>
           <p:cNvSpPr txBox="1"/>
           <p:nvPr/>
         </p:nvSpPr>
@@ -4827,7 +4792,7 @@
       </p:sp>
       <p:sp>
         <p:nvSpPr>
-          <p:cNvPr id="4" name=""/>
+          <p:cNvPr id="5" name=""/>
           <p:cNvSpPr txBox="1"/>
           <p:nvPr/>
         </p:nvSpPr>
@@ -4862,7 +4827,7 @@
       </p:sp>
       <p:sp>
         <p:nvSpPr>
-          <p:cNvPr id="5" name=""/>
+          <p:cNvPr id="6" name=""/>
           <p:cNvSpPr/>
           <p:nvPr/>
         </p:nvSpPr>
@@ -4884,7 +4849,7 @@
       </p:sp>
       <p:sp>
         <p:nvSpPr>
-          <p:cNvPr id="6" name=""/>
+          <p:cNvPr id="7" name=""/>
           <p:cNvSpPr txBox="1"/>
           <p:nvPr/>
         </p:nvSpPr>
@@ -4919,7 +4884,7 @@
       </p:sp>
       <p:sp>
         <p:nvSpPr>
-          <p:cNvPr id="7" name=""/>
+          <p:cNvPr id="8" name=""/>
           <p:cNvSpPr/>
           <p:nvPr/>
         </p:nvSpPr>
@@ -4939,7 +4904,7 @@
       </p:sp>
       <p:sp>
         <p:nvSpPr>
-          <p:cNvPr id="8" name=""/>
+          <p:cNvPr id="9" name=""/>
           <p:cNvSpPr txBox="1"/>
           <p:nvPr/>
         </p:nvSpPr>
@@ -4974,7 +4939,7 @@
       </p:sp>
       <p:sp>
         <p:nvSpPr>
-          <p:cNvPr id="9" name=""/>
+          <p:cNvPr id="10" name=""/>
           <p:cNvSpPr txBox="1"/>
           <p:nvPr/>
         </p:nvSpPr>
@@ -5009,7 +4974,7 @@
       </p:sp>
       <p:sp>
         <p:nvSpPr>
-          <p:cNvPr id="10" name=""/>
+          <p:cNvPr id="11" name=""/>
           <p:cNvSpPr/>
           <p:nvPr/>
         </p:nvSpPr>
@@ -5029,7 +4994,7 @@
       </p:sp>
       <p:sp>
         <p:nvSpPr>
-          <p:cNvPr id="11" name=""/>
+          <p:cNvPr id="12" name=""/>
           <p:cNvSpPr txBox="1"/>
           <p:nvPr/>
         </p:nvSpPr>
@@ -5064,7 +5029,7 @@
       </p:sp>
       <p:sp>
         <p:nvSpPr>
-          <p:cNvPr id="12" name=""/>
+          <p:cNvPr id="13" name=""/>
           <p:cNvSpPr txBox="1"/>
           <p:nvPr/>
         </p:nvSpPr>
@@ -5099,7 +5064,7 @@
       </p:sp>
       <p:sp>
         <p:nvSpPr>
-          <p:cNvPr id="13" name=""/>
+          <p:cNvPr id="14" name=""/>
           <p:cNvSpPr/>
           <p:nvPr/>
         </p:nvSpPr>
@@ -5119,7 +5084,7 @@
       </p:sp>
       <p:sp>
         <p:nvSpPr>
-          <p:cNvPr id="14" name=""/>
+          <p:cNvPr id="15" name=""/>
           <p:cNvSpPr txBox="1"/>
           <p:nvPr/>
         </p:nvSpPr>
@@ -5154,7 +5119,7 @@
       </p:sp>
       <p:sp>
         <p:nvSpPr>
-          <p:cNvPr id="15" name=""/>
+          <p:cNvPr id="16" name=""/>
           <p:cNvSpPr txBox="1"/>
           <p:nvPr/>
         </p:nvSpPr>
@@ -13255,9 +13220,33 @@
           <a:ln/>
         </p:spPr>
       </p:sp>
-      <p:sp>
-        <p:nvSpPr>
-          <p:cNvPr id="3" name=""/>
+      <p:pic>
+        <p:nvPicPr>
+          <p:cNvPr id="3" name="Image 0" descr="手を振るキャラクター">    </p:cNvPr>
+          <p:cNvPicPr>
+            <a:picLocks noChangeAspect="1"/>
+          </p:cNvPicPr>
+          <p:nvPr/>
+        </p:nvPicPr>
+        <p:blipFill>
+          <a:blip r:embed="rId1"/>
+          <a:stretch>
+            <a:fillRect/>
+          </a:stretch>
+        </p:blipFill>
+        <p:spPr>
+          <a:xfrm>
+            <a:off x="10563225" y="5143500"/>
+            <a:ext cx="1285875" cy="1714500"/>
+          </a:xfrm>
+          <a:prstGeom prst="rect">
+            <a:avLst/>
+          </a:prstGeom>
+        </p:spPr>
+      </p:pic>
+      <p:sp>
+        <p:nvSpPr>
+          <p:cNvPr id="4" name=""/>
           <p:cNvSpPr txBox="1"/>
           <p:nvPr/>
         </p:nvSpPr>
@@ -13292,7 +13281,7 @@
       </p:sp>
       <p:sp>
         <p:nvSpPr>
-          <p:cNvPr id="4" name=""/>
+          <p:cNvPr id="5" name=""/>
           <p:cNvSpPr txBox="1"/>
           <p:nvPr/>
         </p:nvSpPr>
@@ -13349,7 +13338,7 @@
       </p:sp>
       <p:sp>
         <p:nvSpPr>
-          <p:cNvPr id="5" name=""/>
+          <p:cNvPr id="6" name=""/>
           <p:cNvSpPr/>
           <p:nvPr/>
         </p:nvSpPr>
@@ -13371,7 +13360,7 @@
       </p:sp>
       <p:sp>
         <p:nvSpPr>
-          <p:cNvPr id="6" name=""/>
+          <p:cNvPr id="7" name=""/>
           <p:cNvSpPr txBox="1"/>
           <p:nvPr/>
         </p:nvSpPr>
@@ -13406,7 +13395,7 @@
       </p:sp>
       <p:sp>
         <p:nvSpPr>
-          <p:cNvPr id="7" name=""/>
+          <p:cNvPr id="8" name=""/>
           <p:cNvSpPr txBox="1"/>
           <p:nvPr/>
         </p:nvSpPr>
@@ -13452,7 +13441,7 @@
       </p:sp>
       <p:sp>
         <p:nvSpPr>
-          <p:cNvPr id="8" name=""/>
+          <p:cNvPr id="9" name=""/>
           <p:cNvSpPr txBox="1"/>
           <p:nvPr/>
         </p:nvSpPr>
@@ -13487,7 +13476,7 @@
       </p:sp>
       <p:sp>
         <p:nvSpPr>
-          <p:cNvPr id="9" name=""/>
+          <p:cNvPr id="10" name=""/>
           <p:cNvSpPr txBox="1"/>
           <p:nvPr/>
         </p:nvSpPr>
@@ -13522,7 +13511,7 @@
       </p:sp>
       <p:sp>
         <p:nvSpPr>
-          <p:cNvPr id="10" name=""/>
+          <p:cNvPr id="11" name=""/>
           <p:cNvSpPr txBox="1"/>
           <p:nvPr/>
         </p:nvSpPr>
@@ -13571,7 +13560,7 @@
       </p:sp>
       <p:sp>
         <p:nvSpPr>
-          <p:cNvPr id="11" name=""/>
+          <p:cNvPr id="12" name=""/>
           <p:cNvSpPr txBox="1"/>
           <p:nvPr/>
         </p:nvSpPr>
@@ -13606,7 +13595,7 @@
       </p:sp>
       <p:sp>
         <p:nvSpPr>
-          <p:cNvPr id="12" name=""/>
+          <p:cNvPr id="13" name=""/>
           <p:cNvSpPr txBox="1"/>
           <p:nvPr/>
         </p:nvSpPr>
@@ -13655,7 +13644,7 @@
       </p:sp>
       <p:sp>
         <p:nvSpPr>
-          <p:cNvPr id="13" name=""/>
+          <p:cNvPr id="14" name=""/>
           <p:cNvSpPr txBox="1"/>
           <p:nvPr/>
         </p:nvSpPr>
@@ -13690,7 +13679,7 @@
       </p:sp>
       <p:sp>
         <p:nvSpPr>
-          <p:cNvPr id="14" name=""/>
+          <p:cNvPr id="15" name=""/>
           <p:cNvSpPr txBox="1"/>
           <p:nvPr/>
         </p:nvSpPr>
@@ -13739,7 +13728,7 @@
       </p:sp>
       <p:sp>
         <p:nvSpPr>
-          <p:cNvPr id="15" name=""/>
+          <p:cNvPr id="16" name=""/>
           <p:cNvSpPr txBox="1"/>
           <p:nvPr/>
         </p:nvSpPr>
@@ -13774,7 +13763,7 @@
       </p:sp>
       <p:sp>
         <p:nvSpPr>
-          <p:cNvPr id="16" name=""/>
+          <p:cNvPr id="17" name=""/>
           <p:cNvSpPr txBox="1"/>
           <p:nvPr/>
         </p:nvSpPr>
@@ -13823,7 +13812,7 @@
       </p:sp>
       <p:sp>
         <p:nvSpPr>
-          <p:cNvPr id="17" name=""/>
+          <p:cNvPr id="18" name=""/>
           <p:cNvSpPr txBox="1"/>
           <p:nvPr/>
         </p:nvSpPr>
@@ -13858,7 +13847,7 @@
       </p:sp>
       <p:sp>
         <p:nvSpPr>
-          <p:cNvPr id="18" name=""/>
+          <p:cNvPr id="19" name=""/>
           <p:cNvSpPr txBox="1"/>
           <p:nvPr/>
         </p:nvSpPr>
@@ -13907,7 +13896,7 @@
       </p:sp>
       <p:sp>
         <p:nvSpPr>
-          <p:cNvPr id="19" name=""/>
+          <p:cNvPr id="20" name=""/>
           <p:cNvSpPr/>
           <p:nvPr/>
         </p:nvSpPr>
@@ -13930,7 +13919,7 @@
       </p:sp>
       <p:sp>
         <p:nvSpPr>
-          <p:cNvPr id="20" name=""/>
+          <p:cNvPr id="21" name=""/>
           <p:cNvSpPr txBox="1"/>
           <p:nvPr/>
         </p:nvSpPr>
@@ -13965,7 +13954,7 @@
       </p:sp>
       <p:sp>
         <p:nvSpPr>
-          <p:cNvPr id="21" name=""/>
+          <p:cNvPr id="22" name=""/>
           <p:cNvSpPr txBox="1"/>
           <p:nvPr/>
         </p:nvSpPr>
@@ -14011,7 +14000,7 @@
       </p:sp>
       <p:sp>
         <p:nvSpPr>
-          <p:cNvPr id="22" name=""/>
+          <p:cNvPr id="23" name=""/>
           <p:cNvSpPr txBox="1"/>
           <p:nvPr/>
         </p:nvSpPr>
@@ -14046,7 +14035,7 @@
       </p:sp>
       <p:sp>
         <p:nvSpPr>
-          <p:cNvPr id="23" name=""/>
+          <p:cNvPr id="24" name=""/>
           <p:cNvSpPr txBox="1"/>
           <p:nvPr/>
         </p:nvSpPr>
@@ -14081,7 +14070,7 @@
       </p:sp>
       <p:sp>
         <p:nvSpPr>
-          <p:cNvPr id="24" name=""/>
+          <p:cNvPr id="25" name=""/>
           <p:cNvSpPr txBox="1"/>
           <p:nvPr/>
         </p:nvSpPr>
@@ -14130,7 +14119,7 @@
       </p:sp>
       <p:sp>
         <p:nvSpPr>
-          <p:cNvPr id="25" name=""/>
+          <p:cNvPr id="26" name=""/>
           <p:cNvSpPr txBox="1"/>
           <p:nvPr/>
         </p:nvSpPr>
@@ -14165,7 +14154,7 @@
       </p:sp>
       <p:sp>
         <p:nvSpPr>
-          <p:cNvPr id="26" name=""/>
+          <p:cNvPr id="27" name=""/>
           <p:cNvSpPr txBox="1"/>
           <p:nvPr/>
         </p:nvSpPr>
@@ -14214,7 +14203,7 @@
       </p:sp>
       <p:sp>
         <p:nvSpPr>
-          <p:cNvPr id="27" name=""/>
+          <p:cNvPr id="28" name=""/>
           <p:cNvSpPr txBox="1"/>
           <p:nvPr/>
         </p:nvSpPr>
@@ -14249,7 +14238,7 @@
       </p:sp>
       <p:sp>
         <p:nvSpPr>
-          <p:cNvPr id="28" name=""/>
+          <p:cNvPr id="29" name=""/>
           <p:cNvSpPr txBox="1"/>
           <p:nvPr/>
         </p:nvSpPr>
@@ -14298,7 +14287,7 @@
       </p:sp>
       <p:sp>
         <p:nvSpPr>
-          <p:cNvPr id="29" name=""/>
+          <p:cNvPr id="30" name=""/>
           <p:cNvSpPr txBox="1"/>
           <p:nvPr/>
         </p:nvSpPr>
@@ -14333,7 +14322,7 @@
       </p:sp>
       <p:sp>
         <p:nvSpPr>
-          <p:cNvPr id="30" name=""/>
+          <p:cNvPr id="31" name=""/>
           <p:cNvSpPr txBox="1"/>
           <p:nvPr/>
         </p:nvSpPr>
@@ -14382,7 +14371,7 @@
       </p:sp>
       <p:sp>
         <p:nvSpPr>
-          <p:cNvPr id="31" name=""/>
+          <p:cNvPr id="32" name=""/>
           <p:cNvSpPr txBox="1"/>
           <p:nvPr/>
         </p:nvSpPr>
@@ -14417,7 +14406,7 @@
       </p:sp>
       <p:sp>
         <p:nvSpPr>
-          <p:cNvPr id="32" name=""/>
+          <p:cNvPr id="33" name=""/>
           <p:cNvSpPr txBox="1"/>
           <p:nvPr/>
         </p:nvSpPr>
@@ -14466,7 +14455,7 @@
       </p:sp>
       <p:sp>
         <p:nvSpPr>
-          <p:cNvPr id="33" name=""/>
+          <p:cNvPr id="34" name=""/>
           <p:cNvSpPr/>
           <p:nvPr/>
         </p:nvSpPr>
@@ -14489,7 +14478,7 @@
       </p:sp>
       <p:sp>
         <p:nvSpPr>
-          <p:cNvPr id="34" name=""/>
+          <p:cNvPr id="35" name=""/>
           <p:cNvSpPr txBox="1"/>
           <p:nvPr/>
         </p:nvSpPr>
@@ -14524,7 +14513,7 @@
       </p:sp>
       <p:sp>
         <p:nvSpPr>
-          <p:cNvPr id="35" name=""/>
+          <p:cNvPr id="36" name=""/>
           <p:cNvSpPr txBox="1"/>
           <p:nvPr/>
         </p:nvSpPr>
@@ -14570,7 +14559,7 @@
       </p:sp>
       <p:sp>
         <p:nvSpPr>
-          <p:cNvPr id="36" name=""/>
+          <p:cNvPr id="37" name=""/>
           <p:cNvSpPr txBox="1"/>
           <p:nvPr/>
         </p:nvSpPr>
@@ -14605,7 +14594,7 @@
       </p:sp>
       <p:sp>
         <p:nvSpPr>
-          <p:cNvPr id="37" name=""/>
+          <p:cNvPr id="38" name=""/>
           <p:cNvSpPr txBox="1"/>
           <p:nvPr/>
         </p:nvSpPr>
@@ -14640,7 +14629,7 @@
       </p:sp>
       <p:sp>
         <p:nvSpPr>
-          <p:cNvPr id="38" name=""/>
+          <p:cNvPr id="39" name=""/>
           <p:cNvSpPr txBox="1"/>
           <p:nvPr/>
         </p:nvSpPr>
@@ -14689,7 +14678,7 @@
       </p:sp>
       <p:sp>
         <p:nvSpPr>
-          <p:cNvPr id="39" name=""/>
+          <p:cNvPr id="40" name=""/>
           <p:cNvSpPr txBox="1"/>
           <p:nvPr/>
         </p:nvSpPr>
@@ -14724,7 +14713,7 @@
       </p:sp>
       <p:sp>
         <p:nvSpPr>
-          <p:cNvPr id="40" name=""/>
+          <p:cNvPr id="41" name=""/>
           <p:cNvSpPr txBox="1"/>
           <p:nvPr/>
         </p:nvSpPr>
@@ -14773,7 +14762,7 @@
       </p:sp>
       <p:sp>
         <p:nvSpPr>
-          <p:cNvPr id="41" name=""/>
+          <p:cNvPr id="42" name=""/>
           <p:cNvSpPr txBox="1"/>
           <p:nvPr/>
         </p:nvSpPr>
@@ -14808,7 +14797,7 @@
       </p:sp>
       <p:sp>
         <p:nvSpPr>
-          <p:cNvPr id="42" name=""/>
+          <p:cNvPr id="43" name=""/>
           <p:cNvSpPr txBox="1"/>
           <p:nvPr/>
         </p:nvSpPr>
@@ -14857,7 +14846,7 @@
       </p:sp>
       <p:sp>
         <p:nvSpPr>
-          <p:cNvPr id="43" name=""/>
+          <p:cNvPr id="44" name=""/>
           <p:cNvSpPr txBox="1"/>
           <p:nvPr/>
         </p:nvSpPr>
@@ -14892,7 +14881,7 @@
       </p:sp>
       <p:sp>
         <p:nvSpPr>
-          <p:cNvPr id="44" name=""/>
+          <p:cNvPr id="45" name=""/>
           <p:cNvSpPr txBox="1"/>
           <p:nvPr/>
         </p:nvSpPr>
@@ -14941,7 +14930,7 @@
       </p:sp>
       <p:sp>
         <p:nvSpPr>
-          <p:cNvPr id="45" name=""/>
+          <p:cNvPr id="46" name=""/>
           <p:cNvSpPr txBox="1"/>
           <p:nvPr/>
         </p:nvSpPr>
@@ -14976,7 +14965,7 @@
       </p:sp>
       <p:sp>
         <p:nvSpPr>
-          <p:cNvPr id="46" name=""/>
+          <p:cNvPr id="47" name=""/>
           <p:cNvSpPr txBox="1"/>
           <p:nvPr/>
         </p:nvSpPr>
@@ -15100,9 +15089,33 @@
           <a:ln/>
         </p:spPr>
       </p:sp>
-      <p:sp>
-        <p:nvSpPr>
-          <p:cNvPr id="3" name=""/>
+      <p:pic>
+        <p:nvPicPr>
+          <p:cNvPr id="3" name="Image 0" descr="手を振るキャラクター">    </p:cNvPr>
+          <p:cNvPicPr>
+            <a:picLocks noChangeAspect="1"/>
+          </p:cNvPicPr>
+          <p:nvPr/>
+        </p:nvPicPr>
+        <p:blipFill>
+          <a:blip r:embed="rId1"/>
+          <a:stretch>
+            <a:fillRect/>
+          </a:stretch>
+        </p:blipFill>
+        <p:spPr>
+          <a:xfrm>
+            <a:off x="10563225" y="5143500"/>
+            <a:ext cx="1285875" cy="1714500"/>
+          </a:xfrm>
+          <a:prstGeom prst="rect">
+            <a:avLst/>
+          </a:prstGeom>
+        </p:spPr>
+      </p:pic>
+      <p:sp>
+        <p:nvSpPr>
+          <p:cNvPr id="4" name=""/>
           <p:cNvSpPr txBox="1"/>
           <p:nvPr/>
         </p:nvSpPr>
@@ -15137,7 +15150,7 @@
       </p:sp>
       <p:sp>
         <p:nvSpPr>
-          <p:cNvPr id="4" name=""/>
+          <p:cNvPr id="5" name=""/>
           <p:cNvSpPr txBox="1"/>
           <p:nvPr/>
         </p:nvSpPr>
@@ -15194,7 +15207,7 @@
       </p:sp>
       <p:sp>
         <p:nvSpPr>
-          <p:cNvPr id="5" name=""/>
+          <p:cNvPr id="6" name=""/>
           <p:cNvSpPr/>
           <p:nvPr/>
         </p:nvSpPr>
@@ -15216,7 +15229,7 @@
       </p:sp>
       <p:sp>
         <p:nvSpPr>
-          <p:cNvPr id="6" name=""/>
+          <p:cNvPr id="7" name=""/>
           <p:cNvSpPr txBox="1"/>
           <p:nvPr/>
         </p:nvSpPr>
@@ -15251,7 +15264,7 @@
       </p:sp>
       <p:sp>
         <p:nvSpPr>
-          <p:cNvPr id="7" name=""/>
+          <p:cNvPr id="8" name=""/>
           <p:cNvSpPr txBox="1"/>
           <p:nvPr/>
         </p:nvSpPr>
@@ -15308,7 +15321,7 @@
       </p:sp>
       <p:sp>
         <p:nvSpPr>
-          <p:cNvPr id="8" name=""/>
+          <p:cNvPr id="9" name=""/>
           <p:cNvSpPr txBox="1"/>
           <p:nvPr/>
         </p:nvSpPr>
@@ -15343,7 +15356,7 @@
       </p:sp>
       <p:sp>
         <p:nvSpPr>
-          <p:cNvPr id="9" name=""/>
+          <p:cNvPr id="10" name=""/>
           <p:cNvSpPr txBox="1"/>
           <p:nvPr/>
         </p:nvSpPr>
@@ -15378,7 +15391,7 @@
       </p:sp>
       <p:sp>
         <p:nvSpPr>
-          <p:cNvPr id="10" name=""/>
+          <p:cNvPr id="11" name=""/>
           <p:cNvSpPr txBox="1"/>
           <p:nvPr/>
         </p:nvSpPr>
@@ -15427,7 +15440,7 @@
       </p:sp>
       <p:sp>
         <p:nvSpPr>
-          <p:cNvPr id="11" name=""/>
+          <p:cNvPr id="12" name=""/>
           <p:cNvSpPr txBox="1"/>
           <p:nvPr/>
         </p:nvSpPr>
@@ -15462,7 +15475,7 @@
       </p:sp>
       <p:sp>
         <p:nvSpPr>
-          <p:cNvPr id="12" name=""/>
+          <p:cNvPr id="13" name=""/>
           <p:cNvSpPr txBox="1"/>
           <p:nvPr/>
         </p:nvSpPr>
@@ -15511,7 +15524,7 @@
       </p:sp>
       <p:sp>
         <p:nvSpPr>
-          <p:cNvPr id="13" name=""/>
+          <p:cNvPr id="14" name=""/>
           <p:cNvSpPr txBox="1"/>
           <p:nvPr/>
         </p:nvSpPr>
@@ -15546,7 +15559,7 @@
       </p:sp>
       <p:sp>
         <p:nvSpPr>
-          <p:cNvPr id="14" name=""/>
+          <p:cNvPr id="15" name=""/>
           <p:cNvSpPr txBox="1"/>
           <p:nvPr/>
         </p:nvSpPr>
@@ -15595,7 +15608,7 @@
       </p:sp>
       <p:sp>
         <p:nvSpPr>
-          <p:cNvPr id="15" name=""/>
+          <p:cNvPr id="16" name=""/>
           <p:cNvSpPr txBox="1"/>
           <p:nvPr/>
         </p:nvSpPr>
@@ -15630,7 +15643,7 @@
       </p:sp>
       <p:sp>
         <p:nvSpPr>
-          <p:cNvPr id="16" name=""/>
+          <p:cNvPr id="17" name=""/>
           <p:cNvSpPr txBox="1"/>
           <p:nvPr/>
         </p:nvSpPr>
@@ -15679,7 +15692,7 @@
       </p:sp>
       <p:sp>
         <p:nvSpPr>
-          <p:cNvPr id="17" name=""/>
+          <p:cNvPr id="18" name=""/>
           <p:cNvSpPr txBox="1"/>
           <p:nvPr/>
         </p:nvSpPr>
@@ -15714,7 +15727,7 @@
       </p:sp>
       <p:sp>
         <p:nvSpPr>
-          <p:cNvPr id="18" name=""/>
+          <p:cNvPr id="19" name=""/>
           <p:cNvSpPr txBox="1"/>
           <p:nvPr/>
         </p:nvSpPr>
@@ -15763,7 +15776,7 @@
       </p:sp>
       <p:sp>
         <p:nvSpPr>
-          <p:cNvPr id="19" name=""/>
+          <p:cNvPr id="20" name=""/>
           <p:cNvSpPr/>
           <p:nvPr/>
         </p:nvSpPr>
@@ -15786,7 +15799,7 @@
       </p:sp>
       <p:sp>
         <p:nvSpPr>
-          <p:cNvPr id="20" name=""/>
+          <p:cNvPr id="21" name=""/>
           <p:cNvSpPr txBox="1"/>
           <p:nvPr/>
         </p:nvSpPr>
@@ -15821,7 +15834,7 @@
       </p:sp>
       <p:sp>
         <p:nvSpPr>
-          <p:cNvPr id="21" name=""/>
+          <p:cNvPr id="22" name=""/>
           <p:cNvSpPr txBox="1"/>
           <p:nvPr/>
         </p:nvSpPr>
@@ -15867,7 +15880,7 @@
       </p:sp>
       <p:sp>
         <p:nvSpPr>
-          <p:cNvPr id="22" name=""/>
+          <p:cNvPr id="23" name=""/>
           <p:cNvSpPr txBox="1"/>
           <p:nvPr/>
         </p:nvSpPr>
@@ -15902,7 +15915,7 @@
       </p:sp>
       <p:sp>
         <p:nvSpPr>
-          <p:cNvPr id="23" name=""/>
+          <p:cNvPr id="24" name=""/>
           <p:cNvSpPr txBox="1"/>
           <p:nvPr/>
         </p:nvSpPr>
@@ -15937,7 +15950,7 @@
       </p:sp>
       <p:sp>
         <p:nvSpPr>
-          <p:cNvPr id="24" name=""/>
+          <p:cNvPr id="25" name=""/>
           <p:cNvSpPr txBox="1"/>
           <p:nvPr/>
         </p:nvSpPr>
@@ -15986,7 +15999,7 @@
       </p:sp>
       <p:sp>
         <p:nvSpPr>
-          <p:cNvPr id="25" name=""/>
+          <p:cNvPr id="26" name=""/>
           <p:cNvSpPr txBox="1"/>
           <p:nvPr/>
         </p:nvSpPr>
@@ -16021,7 +16034,7 @@
       </p:sp>
       <p:sp>
         <p:nvSpPr>
-          <p:cNvPr id="26" name=""/>
+          <p:cNvPr id="27" name=""/>
           <p:cNvSpPr txBox="1"/>
           <p:nvPr/>
         </p:nvSpPr>
@@ -16056,7 +16069,7 @@
       </p:sp>
       <p:sp>
         <p:nvSpPr>
-          <p:cNvPr id="27" name=""/>
+          <p:cNvPr id="28" name=""/>
           <p:cNvSpPr txBox="1"/>
           <p:nvPr/>
         </p:nvSpPr>
@@ -16105,7 +16118,7 @@
       </p:sp>
       <p:sp>
         <p:nvSpPr>
-          <p:cNvPr id="28" name=""/>
+          <p:cNvPr id="29" name=""/>
           <p:cNvSpPr txBox="1"/>
           <p:nvPr/>
         </p:nvSpPr>
@@ -16140,7 +16153,7 @@
       </p:sp>
       <p:sp>
         <p:nvSpPr>
-          <p:cNvPr id="29" name=""/>
+          <p:cNvPr id="30" name=""/>
           <p:cNvSpPr txBox="1"/>
           <p:nvPr/>
         </p:nvSpPr>
@@ -16175,7 +16188,7 @@
       </p:sp>
       <p:sp>
         <p:nvSpPr>
-          <p:cNvPr id="30" name=""/>
+          <p:cNvPr id="31" name=""/>
           <p:cNvSpPr txBox="1"/>
           <p:nvPr/>
         </p:nvSpPr>
@@ -16224,7 +16237,7 @@
       </p:sp>
       <p:sp>
         <p:nvSpPr>
-          <p:cNvPr id="31" name=""/>
+          <p:cNvPr id="32" name=""/>
           <p:cNvSpPr txBox="1"/>
           <p:nvPr/>
         </p:nvSpPr>
@@ -16259,7 +16272,7 @@
       </p:sp>
       <p:sp>
         <p:nvSpPr>
-          <p:cNvPr id="32" name=""/>
+          <p:cNvPr id="33" name=""/>
           <p:cNvSpPr txBox="1"/>
           <p:nvPr/>
         </p:nvSpPr>
@@ -16294,7 +16307,7 @@
       </p:sp>
       <p:sp>
         <p:nvSpPr>
-          <p:cNvPr id="33" name=""/>
+          <p:cNvPr id="34" name=""/>
           <p:cNvSpPr txBox="1"/>
           <p:nvPr/>
         </p:nvSpPr>
@@ -16343,7 +16356,7 @@
       </p:sp>
       <p:sp>
         <p:nvSpPr>
-          <p:cNvPr id="34" name=""/>
+          <p:cNvPr id="35" name=""/>
           <p:cNvSpPr txBox="1"/>
           <p:nvPr/>
         </p:nvSpPr>
@@ -16378,7 +16391,7 @@
       </p:sp>
       <p:sp>
         <p:nvSpPr>
-          <p:cNvPr id="35" name=""/>
+          <p:cNvPr id="36" name=""/>
           <p:cNvSpPr txBox="1"/>
           <p:nvPr/>
         </p:nvSpPr>
@@ -16427,7 +16440,7 @@
       </p:sp>
       <p:sp>
         <p:nvSpPr>
-          <p:cNvPr id="36" name=""/>
+          <p:cNvPr id="37" name=""/>
           <p:cNvSpPr txBox="1"/>
           <p:nvPr/>
         </p:nvSpPr>
@@ -16462,7 +16475,7 @@
       </p:sp>
       <p:sp>
         <p:nvSpPr>
-          <p:cNvPr id="37" name=""/>
+          <p:cNvPr id="38" name=""/>
           <p:cNvSpPr/>
           <p:nvPr/>
         </p:nvSpPr>
@@ -16485,7 +16498,7 @@
       </p:sp>
       <p:sp>
         <p:nvSpPr>
-          <p:cNvPr id="38" name=""/>
+          <p:cNvPr id="39" name=""/>
           <p:cNvSpPr txBox="1"/>
           <p:nvPr/>
         </p:nvSpPr>
@@ -16520,7 +16533,7 @@
       </p:sp>
       <p:sp>
         <p:nvSpPr>
-          <p:cNvPr id="39" name=""/>
+          <p:cNvPr id="40" name=""/>
           <p:cNvSpPr txBox="1"/>
           <p:nvPr/>
         </p:nvSpPr>
@@ -16566,7 +16579,7 @@
       </p:sp>
       <p:sp>
         <p:nvSpPr>
-          <p:cNvPr id="40" name=""/>
+          <p:cNvPr id="41" name=""/>
           <p:cNvSpPr txBox="1"/>
           <p:nvPr/>
         </p:nvSpPr>
@@ -16601,7 +16614,7 @@
       </p:sp>
       <p:sp>
         <p:nvSpPr>
-          <p:cNvPr id="41" name=""/>
+          <p:cNvPr id="42" name=""/>
           <p:cNvSpPr txBox="1"/>
           <p:nvPr/>
         </p:nvSpPr>
@@ -16636,7 +16649,7 @@
       </p:sp>
       <p:sp>
         <p:nvSpPr>
-          <p:cNvPr id="42" name=""/>
+          <p:cNvPr id="43" name=""/>
           <p:cNvSpPr txBox="1"/>
           <p:nvPr/>
         </p:nvSpPr>
@@ -16685,7 +16698,7 @@
       </p:sp>
       <p:sp>
         <p:nvSpPr>
-          <p:cNvPr id="43" name=""/>
+          <p:cNvPr id="44" name=""/>
           <p:cNvSpPr txBox="1"/>
           <p:nvPr/>
         </p:nvSpPr>
@@ -16720,7 +16733,7 @@
       </p:sp>
       <p:sp>
         <p:nvSpPr>
-          <p:cNvPr id="44" name=""/>
+          <p:cNvPr id="45" name=""/>
           <p:cNvSpPr txBox="1"/>
           <p:nvPr/>
         </p:nvSpPr>
@@ -16769,7 +16782,7 @@
       </p:sp>
       <p:sp>
         <p:nvSpPr>
-          <p:cNvPr id="45" name=""/>
+          <p:cNvPr id="46" name=""/>
           <p:cNvSpPr txBox="1"/>
           <p:nvPr/>
         </p:nvSpPr>
@@ -16804,7 +16817,7 @@
       </p:sp>
       <p:sp>
         <p:nvSpPr>
-          <p:cNvPr id="46" name=""/>
+          <p:cNvPr id="47" name=""/>
           <p:cNvSpPr txBox="1"/>
           <p:nvPr/>
         </p:nvSpPr>
@@ -16853,7 +16866,7 @@
       </p:sp>
       <p:sp>
         <p:nvSpPr>
-          <p:cNvPr id="47" name=""/>
+          <p:cNvPr id="48" name=""/>
           <p:cNvSpPr txBox="1"/>
           <p:nvPr/>
         </p:nvSpPr>
@@ -16888,7 +16901,7 @@
       </p:sp>
       <p:sp>
         <p:nvSpPr>
-          <p:cNvPr id="48" name=""/>
+          <p:cNvPr id="49" name=""/>
           <p:cNvSpPr txBox="1"/>
           <p:nvPr/>
         </p:nvSpPr>
@@ -16937,7 +16950,7 @@
       </p:sp>
       <p:sp>
         <p:nvSpPr>
-          <p:cNvPr id="49" name=""/>
+          <p:cNvPr id="50" name=""/>
           <p:cNvSpPr txBox="1"/>
           <p:nvPr/>
         </p:nvSpPr>
@@ -16972,7 +16985,7 @@
       </p:sp>
       <p:sp>
         <p:nvSpPr>
-          <p:cNvPr id="50" name=""/>
+          <p:cNvPr id="51" name=""/>
           <p:cNvSpPr txBox="1"/>
           <p:nvPr/>
         </p:nvSpPr>
@@ -17096,9 +17109,33 @@
           <a:ln/>
         </p:spPr>
       </p:sp>
-      <p:sp>
-        <p:nvSpPr>
-          <p:cNvPr id="3" name=""/>
+      <p:pic>
+        <p:nvPicPr>
+          <p:cNvPr id="3" name="Image 0" descr="手を振るキャラクター">    </p:cNvPr>
+          <p:cNvPicPr>
+            <a:picLocks noChangeAspect="1"/>
+          </p:cNvPicPr>
+          <p:nvPr/>
+        </p:nvPicPr>
+        <p:blipFill>
+          <a:blip r:embed="rId1"/>
+          <a:stretch>
+            <a:fillRect/>
+          </a:stretch>
+        </p:blipFill>
+        <p:spPr>
+          <a:xfrm>
+            <a:off x="10563225" y="5143500"/>
+            <a:ext cx="1285875" cy="1714500"/>
+          </a:xfrm>
+          <a:prstGeom prst="rect">
+            <a:avLst/>
+          </a:prstGeom>
+        </p:spPr>
+      </p:pic>
+      <p:sp>
+        <p:nvSpPr>
+          <p:cNvPr id="4" name=""/>
           <p:cNvSpPr txBox="1"/>
           <p:nvPr/>
         </p:nvSpPr>
@@ -17133,7 +17170,7 @@
       </p:sp>
       <p:sp>
         <p:nvSpPr>
-          <p:cNvPr id="4" name=""/>
+          <p:cNvPr id="5" name=""/>
           <p:cNvSpPr txBox="1"/>
           <p:nvPr/>
         </p:nvSpPr>
@@ -17190,7 +17227,7 @@
       </p:sp>
       <p:sp>
         <p:nvSpPr>
-          <p:cNvPr id="5" name=""/>
+          <p:cNvPr id="6" name=""/>
           <p:cNvSpPr/>
           <p:nvPr/>
         </p:nvSpPr>
@@ -17212,7 +17249,7 @@
       </p:sp>
       <p:sp>
         <p:nvSpPr>
-          <p:cNvPr id="6" name=""/>
+          <p:cNvPr id="7" name=""/>
           <p:cNvSpPr txBox="1"/>
           <p:nvPr/>
         </p:nvSpPr>
@@ -17247,7 +17284,7 @@
       </p:sp>
       <p:sp>
         <p:nvSpPr>
-          <p:cNvPr id="7" name=""/>
+          <p:cNvPr id="8" name=""/>
           <p:cNvSpPr txBox="1"/>
           <p:nvPr/>
         </p:nvSpPr>
@@ -17304,7 +17341,7 @@
       </p:sp>
       <p:sp>
         <p:nvSpPr>
-          <p:cNvPr id="8" name=""/>
+          <p:cNvPr id="9" name=""/>
           <p:cNvSpPr txBox="1"/>
           <p:nvPr/>
         </p:nvSpPr>
@@ -17339,7 +17376,7 @@
       </p:sp>
       <p:sp>
         <p:nvSpPr>
-          <p:cNvPr id="9" name=""/>
+          <p:cNvPr id="10" name=""/>
           <p:cNvSpPr txBox="1"/>
           <p:nvPr/>
         </p:nvSpPr>
@@ -17374,7 +17411,7 @@
       </p:sp>
       <p:sp>
         <p:nvSpPr>
-          <p:cNvPr id="10" name=""/>
+          <p:cNvPr id="11" name=""/>
           <p:cNvSpPr txBox="1"/>
           <p:nvPr/>
         </p:nvSpPr>
@@ -17423,7 +17460,7 @@
       </p:sp>
       <p:sp>
         <p:nvSpPr>
-          <p:cNvPr id="11" name=""/>
+          <p:cNvPr id="12" name=""/>
           <p:cNvSpPr txBox="1"/>
           <p:nvPr/>
         </p:nvSpPr>
@@ -17458,7 +17495,7 @@
       </p:sp>
       <p:sp>
         <p:nvSpPr>
-          <p:cNvPr id="12" name=""/>
+          <p:cNvPr id="13" name=""/>
           <p:cNvSpPr txBox="1"/>
           <p:nvPr/>
         </p:nvSpPr>
@@ -17507,7 +17544,7 @@
       </p:sp>
       <p:sp>
         <p:nvSpPr>
-          <p:cNvPr id="13" name=""/>
+          <p:cNvPr id="14" name=""/>
           <p:cNvSpPr txBox="1"/>
           <p:nvPr/>
         </p:nvSpPr>
@@ -17542,7 +17579,7 @@
       </p:sp>
       <p:sp>
         <p:nvSpPr>
-          <p:cNvPr id="14" name=""/>
+          <p:cNvPr id="15" name=""/>
           <p:cNvSpPr txBox="1"/>
           <p:nvPr/>
         </p:nvSpPr>
@@ -17591,7 +17628,7 @@
       </p:sp>
       <p:sp>
         <p:nvSpPr>
-          <p:cNvPr id="15" name=""/>
+          <p:cNvPr id="16" name=""/>
           <p:cNvSpPr txBox="1"/>
           <p:nvPr/>
         </p:nvSpPr>
@@ -17626,7 +17663,7 @@
       </p:sp>
       <p:sp>
         <p:nvSpPr>
-          <p:cNvPr id="16" name=""/>
+          <p:cNvPr id="17" name=""/>
           <p:cNvSpPr txBox="1"/>
           <p:nvPr/>
         </p:nvSpPr>
@@ -17675,7 +17712,7 @@
       </p:sp>
       <p:sp>
         <p:nvSpPr>
-          <p:cNvPr id="17" name=""/>
+          <p:cNvPr id="18" name=""/>
           <p:cNvSpPr txBox="1"/>
           <p:nvPr/>
         </p:nvSpPr>
@@ -17710,7 +17747,7 @@
       </p:sp>
       <p:sp>
         <p:nvSpPr>
-          <p:cNvPr id="18" name=""/>
+          <p:cNvPr id="19" name=""/>
           <p:cNvSpPr txBox="1"/>
           <p:nvPr/>
         </p:nvSpPr>
@@ -17745,7 +17782,7 @@
       </p:sp>
       <p:sp>
         <p:nvSpPr>
-          <p:cNvPr id="19" name=""/>
+          <p:cNvPr id="20" name=""/>
           <p:cNvSpPr txBox="1"/>
           <p:nvPr/>
         </p:nvSpPr>
@@ -17805,7 +17842,7 @@
       </p:sp>
       <p:sp>
         <p:nvSpPr>
-          <p:cNvPr id="20" name=""/>
+          <p:cNvPr id="21" name=""/>
           <p:cNvSpPr/>
           <p:nvPr/>
         </p:nvSpPr>
@@ -17828,7 +17865,7 @@
       </p:sp>
       <p:sp>
         <p:nvSpPr>
-          <p:cNvPr id="21" name=""/>
+          <p:cNvPr id="22" name=""/>
           <p:cNvSpPr txBox="1"/>
           <p:nvPr/>
         </p:nvSpPr>
@@ -17863,7 +17900,7 @@
       </p:sp>
       <p:sp>
         <p:nvSpPr>
-          <p:cNvPr id="22" name=""/>
+          <p:cNvPr id="23" name=""/>
           <p:cNvSpPr txBox="1"/>
           <p:nvPr/>
         </p:nvSpPr>
@@ -17909,7 +17946,7 @@
       </p:sp>
       <p:sp>
         <p:nvSpPr>
-          <p:cNvPr id="23" name=""/>
+          <p:cNvPr id="24" name=""/>
           <p:cNvSpPr txBox="1"/>
           <p:nvPr/>
         </p:nvSpPr>
@@ -17944,7 +17981,7 @@
       </p:sp>
       <p:sp>
         <p:nvSpPr>
-          <p:cNvPr id="24" name=""/>
+          <p:cNvPr id="25" name=""/>
           <p:cNvSpPr txBox="1"/>
           <p:nvPr/>
         </p:nvSpPr>
@@ -17979,7 +18016,7 @@
       </p:sp>
       <p:sp>
         <p:nvSpPr>
-          <p:cNvPr id="25" name=""/>
+          <p:cNvPr id="26" name=""/>
           <p:cNvSpPr txBox="1"/>
           <p:nvPr/>
         </p:nvSpPr>
@@ -18028,7 +18065,7 @@
       </p:sp>
       <p:sp>
         <p:nvSpPr>
-          <p:cNvPr id="26" name=""/>
+          <p:cNvPr id="27" name=""/>
           <p:cNvSpPr txBox="1"/>
           <p:nvPr/>
         </p:nvSpPr>
@@ -18063,7 +18100,7 @@
       </p:sp>
       <p:sp>
         <p:nvSpPr>
-          <p:cNvPr id="27" name=""/>
+          <p:cNvPr id="28" name=""/>
           <p:cNvSpPr txBox="1"/>
           <p:nvPr/>
         </p:nvSpPr>
@@ -18112,7 +18149,7 @@
       </p:sp>
       <p:sp>
         <p:nvSpPr>
-          <p:cNvPr id="28" name=""/>
+          <p:cNvPr id="29" name=""/>
           <p:cNvSpPr txBox="1"/>
           <p:nvPr/>
         </p:nvSpPr>
@@ -18147,7 +18184,7 @@
       </p:sp>
       <p:sp>
         <p:nvSpPr>
-          <p:cNvPr id="29" name=""/>
+          <p:cNvPr id="30" name=""/>
           <p:cNvSpPr txBox="1"/>
           <p:nvPr/>
         </p:nvSpPr>
@@ -18196,7 +18233,7 @@
       </p:sp>
       <p:sp>
         <p:nvSpPr>
-          <p:cNvPr id="30" name=""/>
+          <p:cNvPr id="31" name=""/>
           <p:cNvSpPr txBox="1"/>
           <p:nvPr/>
         </p:nvSpPr>
@@ -18231,7 +18268,7 @@
       </p:sp>
       <p:sp>
         <p:nvSpPr>
-          <p:cNvPr id="31" name=""/>
+          <p:cNvPr id="32" name=""/>
           <p:cNvSpPr txBox="1"/>
           <p:nvPr/>
         </p:nvSpPr>
@@ -18280,7 +18317,7 @@
       </p:sp>
       <p:sp>
         <p:nvSpPr>
-          <p:cNvPr id="32" name=""/>
+          <p:cNvPr id="33" name=""/>
           <p:cNvSpPr txBox="1"/>
           <p:nvPr/>
         </p:nvSpPr>
@@ -18315,7 +18352,7 @@
       </p:sp>
       <p:sp>
         <p:nvSpPr>
-          <p:cNvPr id="33" name=""/>
+          <p:cNvPr id="34" name=""/>
           <p:cNvSpPr txBox="1"/>
           <p:nvPr/>
         </p:nvSpPr>
@@ -18364,7 +18401,7 @@
       </p:sp>
       <p:sp>
         <p:nvSpPr>
-          <p:cNvPr id="34" name=""/>
+          <p:cNvPr id="35" name=""/>
           <p:cNvSpPr/>
           <p:nvPr/>
         </p:nvSpPr>
@@ -18387,7 +18424,7 @@
       </p:sp>
       <p:sp>
         <p:nvSpPr>
-          <p:cNvPr id="35" name=""/>
+          <p:cNvPr id="36" name=""/>
           <p:cNvSpPr txBox="1"/>
           <p:nvPr/>
         </p:nvSpPr>
@@ -18422,7 +18459,7 @@
       </p:sp>
       <p:sp>
         <p:nvSpPr>
-          <p:cNvPr id="36" name=""/>
+          <p:cNvPr id="37" name=""/>
           <p:cNvSpPr txBox="1"/>
           <p:nvPr/>
         </p:nvSpPr>
@@ -18468,7 +18505,7 @@
       </p:sp>
       <p:sp>
         <p:nvSpPr>
-          <p:cNvPr id="37" name=""/>
+          <p:cNvPr id="38" name=""/>
           <p:cNvSpPr txBox="1"/>
           <p:nvPr/>
         </p:nvSpPr>
@@ -18503,7 +18540,7 @@
       </p:sp>
       <p:sp>
         <p:nvSpPr>
-          <p:cNvPr id="38" name=""/>
+          <p:cNvPr id="39" name=""/>
           <p:cNvSpPr txBox="1"/>
           <p:nvPr/>
         </p:nvSpPr>
@@ -18538,7 +18575,7 @@
       </p:sp>
       <p:sp>
         <p:nvSpPr>
-          <p:cNvPr id="39" name=""/>
+          <p:cNvPr id="40" name=""/>
           <p:cNvSpPr txBox="1"/>
           <p:nvPr/>
         </p:nvSpPr>
@@ -18587,7 +18624,7 @@
       </p:sp>
       <p:sp>
         <p:nvSpPr>
-          <p:cNvPr id="40" name=""/>
+          <p:cNvPr id="41" name=""/>
           <p:cNvSpPr txBox="1"/>
           <p:nvPr/>
         </p:nvSpPr>
@@ -18622,7 +18659,7 @@
       </p:sp>
       <p:sp>
         <p:nvSpPr>
-          <p:cNvPr id="41" name=""/>
+          <p:cNvPr id="42" name=""/>
           <p:cNvSpPr txBox="1"/>
           <p:nvPr/>
         </p:nvSpPr>
@@ -18671,7 +18708,7 @@
       </p:sp>
       <p:sp>
         <p:nvSpPr>
-          <p:cNvPr id="42" name=""/>
+          <p:cNvPr id="43" name=""/>
           <p:cNvSpPr txBox="1"/>
           <p:nvPr/>
         </p:nvSpPr>
@@ -18706,7 +18743,7 @@
       </p:sp>
       <p:sp>
         <p:nvSpPr>
-          <p:cNvPr id="43" name=""/>
+          <p:cNvPr id="44" name=""/>
           <p:cNvSpPr txBox="1"/>
           <p:nvPr/>
         </p:nvSpPr>
@@ -18755,7 +18792,7 @@
       </p:sp>
       <p:sp>
         <p:nvSpPr>
-          <p:cNvPr id="44" name=""/>
+          <p:cNvPr id="45" name=""/>
           <p:cNvSpPr txBox="1"/>
           <p:nvPr/>
         </p:nvSpPr>
@@ -18790,7 +18827,7 @@
       </p:sp>
       <p:sp>
         <p:nvSpPr>
-          <p:cNvPr id="45" name=""/>
+          <p:cNvPr id="46" name=""/>
           <p:cNvSpPr txBox="1"/>
           <p:nvPr/>
         </p:nvSpPr>
@@ -18839,7 +18876,7 @@
       </p:sp>
       <p:sp>
         <p:nvSpPr>
-          <p:cNvPr id="46" name=""/>
+          <p:cNvPr id="47" name=""/>
           <p:cNvSpPr txBox="1"/>
           <p:nvPr/>
         </p:nvSpPr>
@@ -18874,7 +18911,7 @@
       </p:sp>
       <p:sp>
         <p:nvSpPr>
-          <p:cNvPr id="47" name=""/>
+          <p:cNvPr id="48" name=""/>
           <p:cNvSpPr txBox="1"/>
           <p:nvPr/>
         </p:nvSpPr>
